--- a/entregables/BancoW_Priorizacion_Renovaciones_DavinsonArteaga.pptx
+++ b/entregables/BancoW_Priorizacion_Renovaciones_DavinsonArteaga.pptx
@@ -113,37 +113,37 @@
   <p:extLst>
     <p:ext uri="{521415D9-36F7-43E2-AB2F-B90AF26B5E84}">
       <p14:sectionLst xmlns:p14="http://schemas.microsoft.com/office/powerpoint/2010/main">
-        <p14:section name="Decisión" id="{560befcd-107f-dcec-2172-4e34d73f6ca8}">
+        <p14:section name="Decisión" id="{e4c02c71-ceda-7b49-74e9-8e2f8530038e}">
           <p14:sldIdLst>
             <p14:sldId id="256"/>
           </p14:sldIdLst>
         </p14:section>
-        <p14:section name="Datos" id="{a6f5467d-f737-e4b6-9323-aa6fad9f274a}">
+        <p14:section name="Datos" id="{ef1c5fd9-f216-731a-5277-e17ab4990be2}">
           <p14:sldIdLst>
             <p14:sldId id="257"/>
           </p14:sldIdLst>
         </p14:section>
-        <p14:section name="Alternativas" id="{2ec8b1d4-c524-4da4-8154-57194fde2e9b}">
+        <p14:section name="Alternativas" id="{7b7374ad-2f28-a385-5077-f8b384940cbb}">
           <p14:sldIdLst>
             <p14:sldId id="258"/>
           </p14:sldIdLst>
         </p14:section>
-        <p14:section name="Valor" id="{2f4cdfc6-85ea-ff4b-0b3c-8c638fdf3376}">
+        <p14:section name="Valor" id="{ed4a0ec5-9aef-63dc-471b-782daca6fce7}">
           <p14:sldIdLst>
             <p14:sldId id="259"/>
           </p14:sldIdLst>
         </p14:section>
-        <p14:section name="Piloto" id="{8fbf6ef6-046b-4503-306a-0806811a7198}">
+        <p14:section name="Piloto" id="{e79aa1ad-e39c-6136-15b1-1bb2090ba871}">
           <p14:sldIdLst>
             <p14:sldId id="260"/>
           </p14:sldIdLst>
         </p14:section>
-        <p14:section name="Recomendación" id="{7c86dc3b-b9f4-e205-0252-129f22db539a}">
+        <p14:section name="Recomendación" id="{4c358d63-ed23-00cf-4b28-344bf50c8a6d}">
           <p14:sldIdLst>
             <p14:sldId id="261"/>
           </p14:sldIdLst>
         </p14:section>
-        <p14:section name="Anexo" id="{8b87a50b-c33f-b6f8-6e27-f6ed11eace78}">
+        <p14:section name="Anexo" id="{97888735-91ed-4517-c918-b6d390b0572b}">
           <p14:sldIdLst>
             <p14:sldId id="262"/>
           </p14:sldIdLst>
@@ -254,7 +254,7 @@
                 <c:ptCount val="3"/>
                 <c:lvl>
                   <c:pt idx="0">
-                    <c:v>18 variables ex ante</c:v>
+                    <c:v>16 variables ex ante</c:v>
                   </c:pt>
                   <c:pt idx="1">
                     <c:v>+ resultado_gestion_30d</c:v>
@@ -276,7 +276,7 @@
                   <c:v>0.82</c:v>
                 </c:pt>
                 <c:pt idx="1">
-                  <c:v>0.95</c:v>
+                  <c:v>0.94</c:v>
                 </c:pt>
                 <c:pt idx="2">
                   <c:v>1</c:v>
@@ -533,22 +533,11 @@
               <a:effectLst/>
             </c:spPr>
           </c:dPt>
-          <c:dPt>
-            <c:idx val="4"/>
-            <c:invertIfNegative val="0"/>
-            <c:bubble3D val="0"/>
-            <c:spPr>
-              <a:solidFill>
-                <a:srgbClr val="D6E8E6"/>
-              </a:solidFill>
-              <a:effectLst/>
-            </c:spPr>
-          </c:dPt>
           <c:cat>
             <c:multiLvlStrRef>
-              <c:f>Sheet1!$A$2:$A$6</c:f>
+              <c:f>Sheet1!$A$2:$A$5</c:f>
               <c:multiLvlStrCache>
-                <c:ptCount val="5"/>
+                <c:ptCount val="4"/>
                 <c:lvl>
                   <c:pt idx="0">
                     <c:v>Actual</c:v>
@@ -562,19 +551,16 @@
                   <c:pt idx="3">
                     <c:v>D Uplift</c:v>
                   </c:pt>
-                  <c:pt idx="4">
-                    <c:v>C (fuga)</c:v>
-                  </c:pt>
                 </c:lvl>
               </c:multiLvlStrCache>
             </c:multiLvlStrRef>
           </c:cat>
           <c:val>
             <c:numRef>
-              <c:f>Sheet1!$B$2:$B$6</c:f>
+              <c:f>Sheet1!$B$2:$B$5</c:f>
               <c:numCache>
                 <c:formatCode>General</c:formatCode>
-                <c:ptCount val="5"/>
+                <c:ptCount val="4"/>
                 <c:pt idx="0">
                   <c:v>94.5</c:v>
                 </c:pt>
@@ -586,9 +572,6 @@
                 </c:pt>
                 <c:pt idx="3">
                   <c:v>207.4</c:v>
-                </c:pt>
-                <c:pt idx="4">
-                  <c:v>360.9</c:v>
                 </c:pt>
               </c:numCache>
             </c:numRef>
@@ -669,7 +652,7 @@
         <c:axId val="2094734552"/>
         <c:scaling>
           <c:orientation val="minMax"/>
-          <c:max val="400"/>
+          <c:max val="300"/>
         </c:scaling>
         <c:delete val="0"/>
         <c:axPos val="l"/>
@@ -1135,7 +1118,7 @@
           <a:p>
             <a:r>
               <a:rPr lang="en-US" dirty="0"/>
-              <a:t>Mensaje: la restricción es la capacidad, así que el problema es decidir a quién contactar, no predecir. KPI incremental neto de riesgo. 12 % sin denominador no es una meta. La pregunta única define si podemos medir causalidad con el histórico.</a:t>
+              <a:t>Mensaje: la restricción es la capacidad, así que el problema es decidir a quién contactar, no predecir. KPI incremental neto de riesgo; el proxy mensual (incrementales por 1.000 contactos) sirve mientras madura la mora. 12 % sin denominador no es una meta: 960 si es sobre 8.000, 3.000 si es sobre 25.000 (37,5 % por contacto). Guardrail de riesgo: la mora esperada de la lista (score y política de Riesgos) se verifica antes de ejecutar; el vintage de mora 30+ a 60 días por cohorte confirma (alarma y pausa). La pregunta única define si el histórico permite medir causalidad o solo describe la política vigente.</a:t>
             </a:r>
             <a:endParaRPr lang="en-US" dirty="0"/>
           </a:p>
@@ -1223,7 +1206,7 @@
           <a:p>
             <a:r>
               <a:rPr lang="en-US" dirty="0"/>
-              <a:t>La base sirve para rankear propensión con pocas variables, no para riesgo ni incrementalidad. Dos variables de fuga explican el AUC de C (ver slide 3). Partición temporal con gap; sin remuestreo.</a:t>
+              <a:t>Detalle de cada hallazgo en la guía P5 y P6. Fuga: 78 % de «Acepta» renueva; dias_hasta_renovacion es nulo exactamente en los 1.436 no renovados. Calidad: max_mora_6m = −4, ahorro −350.000, contacto fechado 2026-09-15 con corte agosto; score de buró 352–912 está dentro de la escala DataCrédito 150–950 (confirmar central, versión y vigencia). contactabilidad_score no predice el contacto (32 % de no contactados en todos los cuartiles). cuotas_pagadas_pct y monto_preaprobado quedan fuera del set limpio hasta certificar su timestamp: no cuesta señal (AUC 0,52–0,53). Accuracy trivial: 79,8 % en la base, 96,4 % en producción sin acertar un renovador.</a:t>
             </a:r>
             <a:endParaRPr lang="en-US" dirty="0"/>
           </a:p>
@@ -1311,7 +1294,7 @@
           <a:p>
             <a:r>
               <a:rPr lang="en-US" dirty="0"/>
-              <a:t>Repliqué con la base: el AUC de C solo se obtiene incluyendo el resultado de gestión. A supera el techo limpio y tiene la peor mora. B es coherente y calibrado. D es el único que mide incrementalidad pero su evidencia es incompleta.</a:t>
+              <a:t>Repliqué con la base: el AUC de C (0,94) solo se obtiene incluyendo el resultado de gestión; con dias_hasta_renovacion llega a 1,00. A: 0,86 supera lo que esta base permite replicar (0,82), pero la hoja viene de otra población, así que no es concluyente; su mora 7,2 % es la peor y, de ser real, lo convierte en la alternativa de menor valor; ambas cosas exigen auditoría variable por variable. B: coherente con la réplica, calibrado (pendiente 0,90), estable; pasa a piloto tras la misma ficha de fuga. D: la hoja reporta «+3,1 pp incremental» en la columna de mora y Qini en la de PR-AUC; no es comparable con A, B y C sin aclarar unidades. Las conversiones «top 8k» de la hoja y la conversión top 32 % de la réplica (≈ 45 %) no son comparables: otra población y otra regla de contacto.</a:t>
             </a:r>
             <a:endParaRPr lang="en-US" dirty="0"/>
           </a:p>
@@ -1399,7 +1382,7 @@
           <a:p>
             <a:r>
               <a:rPr lang="en-US" dirty="0"/>
-              <a:t>B gana por riesgo, no por conversión. El valor no es incremental: por eso el piloto. Capacidad: ranking global sobrecarga tres regionales; cuotas con transferencia por valor marginal.</a:t>
+              <a:t>B gana por riesgo, no por conversión: cada renovación de B vale 337.200 frente a 290.400 de A. Incertidumbre (supuesto 8.000 contactos por alternativa, 752 y 704 renovados): conversión z = 1,32 (p 0,19), mora z = 2,11 (p 0,03); en valor B es al menos equivalente dentro de la incertidumbre. El valor no es incremental: por eso el piloto. Capacidad: un ranking global sobrecarga Centro, Norte y Eje y deja ≈ 400 cupos ociosos en Suroccidente y Oriente; cuotas por regional con transferencia por valor marginal (tope a pactar con Comercial). La conversión en muestra con y sin cuotas es equivalente (43,2 % vs. 42,6 %, dentro del ruido). Sensibilidad a la pérdida por mora de 1,0 / 1,8 / 2,5 / 3,5 M: B 263 / 237 / 215 / 182 vs. A 262 / 218 / 181 / 126.</a:t>
             </a:r>
             <a:endParaRPr lang="en-US" dirty="0"/>
           </a:p>
@@ -1487,7 +1470,7 @@
           <a:p>
             <a:r>
               <a:rPr lang="en-US" dirty="0"/>
-              <a:t>Tres brazos: champion, challenger (B), holdout. Potencia calculada con 3,6 % base. Riesgo por política, no por piloto. Reglas pre-registradas y monitoreo con acciones.</a:t>
+              <a:t>Mecánica: el universo elegible del mes (filtrado por el mismo piso de riesgo: corte de buró y max_mora pactados con Riesgos) se parte al azar en dos pools por cliente, estratificando por regional y tercil de score. El champion elige sus 4.000 en su pool; el challenger rankea el suyo, toma su top 4.800, retiene 800 al azar como holdout sin contacto y contacta 4.000. Capacidad intacta: 8.000. Dos reglas separadas: calidad de lista (challenger vs. champion) y efecto del contacto (challenger contactado vs. holdout). Potencia del holdout (800 vs. 4.000): uplift +1,2 pp exige 2,4 meses; +1,7 pp, 1,3 meses; +2,2 pp, 0,9. Costo de oportunidad 3,2 / 4,6 / 5,9 / 7,3 M/mes, ≤ 2 % del VE de B. Limitación: sin holdout en el champion no comparamos la incrementalidad de las dos políticas; la opción de 400 de holdout en el champion cuesta ≈ 2,3 M/mes y deja ese brazo en 3.600. Probar mora 5,1 % vs. 7,2 % exigiría 2.053 renovados por brazo: el riesgo entra por política y se vigila por vintage. Duración: dos meses de asignación + 30 días de ventana + 30 a 60 de maduración; decisión a los 90 días. Jerga (SRM, CSI, Brier, CUPED) en el anexo y la guía. Condiciones completas de no liberación en la guía P16.</a:t>
             </a:r>
             <a:endParaRPr lang="en-US" dirty="0"/>
           </a:p>
@@ -1575,7 +1558,7 @@
           <a:p>
             <a:r>
               <a:rPr lang="en-US" dirty="0"/>
-              <a:t>Pedimos tres decisiones. Ruta 90 días. Gobierno: equidad medida por corte, documentación auditable, SHAP es correlación.</a:t>
+              <a:t>Pedimos tres decisiones. Ruta de 90 días con la ficha de fuga variable por variable para A y B en las semanas 3 a 4 (fuente, timestamp, disponibilidad al puntuar). Gobierno: sin cuotas, el modelo limpio selecciona 28 % en Oriente frente a 35 % en Centro (AIR ≈ 0,80, en el límite); con cuotas, la selección por regional la fija la capacidad, así que la equidad se vigila en conversión y calibración por grupo dentro de cada regional. El 79 % de la lista cae en el tercil alto de buró: ese piso lo fija la política de riesgo, no el algoritmo. SHAP es correlación: en la base, 37 % del tercil bajo de buró quedó sin contactar frente a 22 % del alto.</a:t>
             </a:r>
             <a:endParaRPr lang="en-US" dirty="0"/>
           </a:p>
@@ -1663,7 +1646,7 @@
           <a:p>
             <a:r>
               <a:rPr lang="en-US" dirty="0"/>
-              <a:t>Anexo de soporte para preguntas técnicas.</a:t>
+              <a:t>Anexo de soporte para preguntas técnicas. Detalle completo en la guía de sustentación (19 preguntas).</a:t>
             </a:r>
             <a:endParaRPr lang="en-US" dirty="0"/>
           </a:p>
@@ -2339,14 +2322,41 @@
       </p:sp>
       <p:sp>
         <p:nvSpPr>
-          <p:cNvPr id="3" name="Text 1"/>
+          <p:cNvPr id="3" name="CAPACIDAD"/>
+          <p:cNvSpPr/>
+          <p:nvPr/>
+        </p:nvSpPr>
+        <p:spPr>
+          <a:xfrm>
+            <a:off x="457200" y="1325880"/>
+            <a:ext cx="3611880" cy="1554480"/>
+          </a:xfrm>
+          <a:prstGeom prst="roundRect">
+            <a:avLst>
+              <a:gd name="adj" fmla="val 7059"/>
+            </a:avLst>
+          </a:prstGeom>
+          <a:solidFill>
+            <a:srgbClr val="9CE0D9"/>
+          </a:solidFill>
+          <a:ln w="12700">
+            <a:solidFill>
+              <a:srgbClr val="9CE0D9"/>
+            </a:solidFill>
+            <a:prstDash val="solid"/>
+          </a:ln>
+        </p:spPr>
+      </p:sp>
+      <p:sp>
+        <p:nvSpPr>
+          <p:cNvPr id="4" name="Text 2"/>
           <p:cNvSpPr txBox="1"/>
           <p:nvPr/>
         </p:nvSpPr>
         <p:spPr>
           <a:xfrm>
-            <a:off x="457200" y="1234440"/>
-            <a:ext cx="7315200" cy="274320"/>
+            <a:off x="621792" y="1453896"/>
+            <a:ext cx="3282696" cy="274320"/>
           </a:xfrm>
           <a:prstGeom prst="rect">
             <a:avLst/>
@@ -2362,46 +2372,19 @@
               <a:buNone/>
             </a:pPr>
             <a:r>
-              <a:rPr lang="en-US" sz="1100" b="1" spc="200" kern="0" dirty="0">
+              <a:rPr lang="en-US" sz="1100" b="1" spc="150" kern="0" dirty="0">
                 <a:solidFill>
-                  <a:srgbClr val="4A6A72"/>
+                  <a:srgbClr val="043F52"/>
                 </a:solidFill>
                 <a:latin typeface="Calibri" pitchFamily="34" charset="0"/>
                 <a:ea typeface="Calibri" pitchFamily="34" charset="-122"/>
                 <a:cs typeface="Calibri" pitchFamily="34" charset="-120"/>
               </a:rPr>
-              <a:t>EL PROBLEMA EN CIFRAS (ENUNCIADO Y ANEXO)</a:t>
+              <a:t>CAPACIDAD</a:t>
             </a:r>
             <a:endParaRPr lang="en-US" sz="1100" dirty="0"/>
           </a:p>
         </p:txBody>
-      </p:sp>
-      <p:sp>
-        <p:nvSpPr>
-          <p:cNvPr id="4" name="CAPACIDAD"/>
-          <p:cNvSpPr/>
-          <p:nvPr/>
-        </p:nvSpPr>
-        <p:spPr>
-          <a:xfrm>
-            <a:off x="457200" y="1554480"/>
-            <a:ext cx="2697480" cy="1600200"/>
-          </a:xfrm>
-          <a:prstGeom prst="roundRect">
-            <a:avLst>
-              <a:gd name="adj" fmla="val 6857"/>
-            </a:avLst>
-          </a:prstGeom>
-          <a:solidFill>
-            <a:srgbClr val="9CE0D9"/>
-          </a:solidFill>
-          <a:ln w="12700">
-            <a:solidFill>
-              <a:srgbClr val="9CE0D9"/>
-            </a:solidFill>
-            <a:prstDash val="solid"/>
-          </a:ln>
-        </p:spPr>
       </p:sp>
       <p:sp>
         <p:nvSpPr>
@@ -2411,8 +2394,8 @@
         </p:nvSpPr>
         <p:spPr>
           <a:xfrm>
-            <a:off x="621792" y="1682496"/>
-            <a:ext cx="2368296" cy="274320"/>
+            <a:off x="621792" y="1709928"/>
+            <a:ext cx="3282696" cy="548640"/>
           </a:xfrm>
           <a:prstGeom prst="rect">
             <a:avLst/>
@@ -2428,7 +2411,7 @@
               <a:buNone/>
             </a:pPr>
             <a:r>
-              <a:rPr lang="en-US" sz="1000" b="1" spc="150" kern="0" dirty="0">
+              <a:rPr lang="en-US" sz="2600" b="1" dirty="0">
                 <a:solidFill>
                   <a:srgbClr val="043F52"/>
                 </a:solidFill>
@@ -2436,9 +2419,9 @@
                 <a:ea typeface="Calibri" pitchFamily="34" charset="-122"/>
                 <a:cs typeface="Calibri" pitchFamily="34" charset="-120"/>
               </a:rPr>
-              <a:t>CAPACIDAD</a:t>
+              <a:t>8.000 de 25.000</a:t>
             </a:r>
-            <a:endParaRPr lang="en-US" sz="1000" dirty="0"/>
+            <a:endParaRPr lang="en-US" sz="2600" dirty="0"/>
           </a:p>
         </p:txBody>
       </p:sp>
@@ -2450,47 +2433,8 @@
         </p:nvSpPr>
         <p:spPr>
           <a:xfrm>
-            <a:off x="621792" y="1938528"/>
-            <a:ext cx="2368296" cy="548640"/>
-          </a:xfrm>
-          <a:prstGeom prst="rect">
-            <a:avLst/>
-          </a:prstGeom>
-          <a:noFill/>
-          <a:ln/>
-        </p:spPr>
-        <p:txBody>
-          <a:bodyPr wrap="square" lIns="0" tIns="0" rIns="0" bIns="0" rtlCol="0" anchor="ctr"/>
-          <a:lstStyle/>
-          <a:p>
-            <a:pPr indent="0" marL="0">
-              <a:buNone/>
-            </a:pPr>
-            <a:r>
-              <a:rPr lang="en-US" sz="2400" b="1" dirty="0">
-                <a:solidFill>
-                  <a:srgbClr val="043F52"/>
-                </a:solidFill>
-                <a:latin typeface="Calibri" pitchFamily="34" charset="0"/>
-                <a:ea typeface="Calibri" pitchFamily="34" charset="-122"/>
-                <a:cs typeface="Calibri" pitchFamily="34" charset="-120"/>
-              </a:rPr>
-              <a:t>8.000 de 25.000</a:t>
-            </a:r>
-            <a:endParaRPr lang="en-US" sz="2400" dirty="0"/>
-          </a:p>
-        </p:txBody>
-      </p:sp>
-      <p:sp>
-        <p:nvSpPr>
-          <p:cNvPr id="7" name="Text 5"/>
-          <p:cNvSpPr txBox="1"/>
-          <p:nvPr/>
-        </p:nvSpPr>
-        <p:spPr>
-          <a:xfrm>
-            <a:off x="621792" y="2514600"/>
-            <a:ext cx="2368296" cy="548640"/>
+            <a:off x="621792" y="2286000"/>
+            <a:ext cx="3282696" cy="502920"/>
           </a:xfrm>
           <a:prstGeom prst="rect">
             <a:avLst/>
@@ -2514,7 +2458,7 @@
                 <a:ea typeface="Calibri" pitchFamily="34" charset="-122"/>
                 <a:cs typeface="Calibri" pitchFamily="34" charset="-120"/>
               </a:rPr>
-              <a:t>Solo 32 % de los elegibles recibe gestión. La restricción es la capacidad, no la demanda.</a:t>
+              <a:t>La restricción es la capacidad, no la demanda.</a:t>
             </a:r>
             <a:endParaRPr lang="en-US" sz="1100" dirty="0"/>
           </a:p>
@@ -2522,18 +2466,18 @@
       </p:sp>
       <p:sp>
         <p:nvSpPr>
-          <p:cNvPr id="8" name="HOY"/>
+          <p:cNvPr id="7" name="HOY Y META"/>
           <p:cNvSpPr/>
           <p:nvPr/>
         </p:nvSpPr>
         <p:spPr>
           <a:xfrm>
-            <a:off x="3291840" y="1554480"/>
-            <a:ext cx="2697480" cy="1600200"/>
+            <a:off x="4288536" y="1325880"/>
+            <a:ext cx="3611880" cy="1554480"/>
           </a:xfrm>
           <a:prstGeom prst="roundRect">
             <a:avLst>
-              <a:gd name="adj" fmla="val 6857"/>
+              <a:gd name="adj" fmla="val 7059"/>
             </a:avLst>
           </a:prstGeom>
           <a:solidFill>
@@ -2549,14 +2493,14 @@
       </p:sp>
       <p:sp>
         <p:nvSpPr>
-          <p:cNvPr id="9" name="Text 7"/>
+          <p:cNvPr id="8" name="Text 6"/>
           <p:cNvSpPr txBox="1"/>
           <p:nvPr/>
         </p:nvSpPr>
         <p:spPr>
           <a:xfrm>
-            <a:off x="3456432" y="1682496"/>
-            <a:ext cx="2368296" cy="274320"/>
+            <a:off x="4453128" y="1453896"/>
+            <a:ext cx="3282696" cy="274320"/>
           </a:xfrm>
           <a:prstGeom prst="rect">
             <a:avLst/>
@@ -2572,7 +2516,7 @@
               <a:buNone/>
             </a:pPr>
             <a:r>
-              <a:rPr lang="en-US" sz="1000" b="1" spc="150" kern="0" dirty="0">
+              <a:rPr lang="en-US" sz="1100" b="1" spc="150" kern="0" dirty="0">
                 <a:solidFill>
                   <a:srgbClr val="043F52"/>
                 </a:solidFill>
@@ -2580,22 +2524,22 @@
                 <a:ea typeface="Calibri" pitchFamily="34" charset="-122"/>
                 <a:cs typeface="Calibri" pitchFamily="34" charset="-120"/>
               </a:rPr>
-              <a:t>HOY</a:t>
+              <a:t>HOY Y META</a:t>
             </a:r>
-            <a:endParaRPr lang="en-US" sz="1000" dirty="0"/>
+            <a:endParaRPr lang="en-US" sz="1100" dirty="0"/>
           </a:p>
         </p:txBody>
       </p:sp>
       <p:sp>
         <p:nvSpPr>
-          <p:cNvPr id="10" name="Text 8"/>
+          <p:cNvPr id="9" name="Text 7"/>
           <p:cNvSpPr txBox="1"/>
           <p:nvPr/>
         </p:nvSpPr>
         <p:spPr>
           <a:xfrm>
-            <a:off x="3456432" y="1938528"/>
-            <a:ext cx="2368296" cy="548640"/>
+            <a:off x="4453128" y="1709928"/>
+            <a:ext cx="3282696" cy="548640"/>
           </a:xfrm>
           <a:prstGeom prst="rect">
             <a:avLst/>
@@ -2611,7 +2555,7 @@
               <a:buNone/>
             </a:pPr>
             <a:r>
-              <a:rPr lang="en-US" sz="3000" b="1" dirty="0">
+              <a:rPr lang="en-US" sz="2600" b="1" dirty="0">
                 <a:solidFill>
                   <a:srgbClr val="043F52"/>
                 </a:solidFill>
@@ -2621,20 +2565,20 @@
               </a:rPr>
               <a:t>3,6 % = 288</a:t>
             </a:r>
-            <a:endParaRPr lang="en-US" sz="3000" dirty="0"/>
+            <a:endParaRPr lang="en-US" sz="2600" dirty="0"/>
           </a:p>
         </p:txBody>
       </p:sp>
       <p:sp>
         <p:nvSpPr>
-          <p:cNvPr id="11" name="Text 9"/>
+          <p:cNvPr id="10" name="Text 8"/>
           <p:cNvSpPr txBox="1"/>
           <p:nvPr/>
         </p:nvSpPr>
         <p:spPr>
           <a:xfrm>
-            <a:off x="3456432" y="2514600"/>
-            <a:ext cx="2368296" cy="548640"/>
+            <a:off x="4453128" y="2286000"/>
+            <a:ext cx="3282696" cy="502920"/>
           </a:xfrm>
           <a:prstGeom prst="rect">
             <a:avLst/>
@@ -2658,7 +2602,7 @@
                 <a:ea typeface="Calibri" pitchFamily="34" charset="-122"/>
                 <a:cs typeface="Calibri" pitchFamily="34" charset="-120"/>
               </a:rPr>
-              <a:t>Renovaciones/mes sobre los 8.000 gestionados por la herramienta actual (mora 30+: 5,1 %).</a:t>
+              <a:t>Meta 12 %: 960 o 3.000 según denominador.</a:t>
             </a:r>
             <a:endParaRPr lang="en-US" sz="1100" dirty="0"/>
           </a:p>
@@ -2666,18 +2610,18 @@
       </p:sp>
       <p:sp>
         <p:nvSpPr>
-          <p:cNvPr id="12" name="ASPIRACIÓN 12 %"/>
+          <p:cNvPr id="11" name="RIESGO"/>
           <p:cNvSpPr/>
           <p:nvPr/>
         </p:nvSpPr>
         <p:spPr>
           <a:xfrm>
-            <a:off x="6126480" y="1554480"/>
-            <a:ext cx="2697480" cy="1600200"/>
+            <a:off x="8119872" y="1325880"/>
+            <a:ext cx="3611880" cy="1554480"/>
           </a:xfrm>
           <a:prstGeom prst="roundRect">
             <a:avLst>
-              <a:gd name="adj" fmla="val 6857"/>
+              <a:gd name="adj" fmla="val 7059"/>
             </a:avLst>
           </a:prstGeom>
           <a:solidFill>
@@ -2693,14 +2637,14 @@
       </p:sp>
       <p:sp>
         <p:nvSpPr>
-          <p:cNvPr id="13" name="Text 11"/>
+          <p:cNvPr id="12" name="Text 10"/>
           <p:cNvSpPr txBox="1"/>
           <p:nvPr/>
         </p:nvSpPr>
         <p:spPr>
           <a:xfrm>
-            <a:off x="6291072" y="1682496"/>
-            <a:ext cx="2368296" cy="274320"/>
+            <a:off x="8284464" y="1453896"/>
+            <a:ext cx="3282696" cy="274320"/>
           </a:xfrm>
           <a:prstGeom prst="rect">
             <a:avLst/>
@@ -2716,7 +2660,7 @@
               <a:buNone/>
             </a:pPr>
             <a:r>
-              <a:rPr lang="en-US" sz="1000" b="1" spc="150" kern="0" dirty="0">
+              <a:rPr lang="en-US" sz="1100" b="1" spc="150" kern="0" dirty="0">
                 <a:solidFill>
                   <a:srgbClr val="043F52"/>
                 </a:solidFill>
@@ -2724,22 +2668,22 @@
                 <a:ea typeface="Calibri" pitchFamily="34" charset="-122"/>
                 <a:cs typeface="Calibri" pitchFamily="34" charset="-120"/>
               </a:rPr>
-              <a:t>ASPIRACIÓN 12 %</a:t>
+              <a:t>RIESGO</a:t>
             </a:r>
-            <a:endParaRPr lang="en-US" sz="1000" dirty="0"/>
+            <a:endParaRPr lang="en-US" sz="1100" dirty="0"/>
           </a:p>
         </p:txBody>
       </p:sp>
       <p:sp>
         <p:nvSpPr>
-          <p:cNvPr id="14" name="Text 12"/>
+          <p:cNvPr id="13" name="Text 11"/>
           <p:cNvSpPr txBox="1"/>
           <p:nvPr/>
         </p:nvSpPr>
         <p:spPr>
           <a:xfrm>
-            <a:off x="6291072" y="1938528"/>
-            <a:ext cx="2368296" cy="548640"/>
+            <a:off x="8284464" y="1709928"/>
+            <a:ext cx="3282696" cy="548640"/>
           </a:xfrm>
           <a:prstGeom prst="rect">
             <a:avLst/>
@@ -2755,7 +2699,7 @@
               <a:buNone/>
             </a:pPr>
             <a:r>
-              <a:rPr lang="en-US" sz="3000" b="1" dirty="0">
+              <a:rPr lang="en-US" sz="2600" b="1" dirty="0">
                 <a:solidFill>
                   <a:srgbClr val="043F52"/>
                 </a:solidFill>
@@ -2763,22 +2707,22 @@
                 <a:ea typeface="Calibri" pitchFamily="34" charset="-122"/>
                 <a:cs typeface="Calibri" pitchFamily="34" charset="-120"/>
               </a:rPr>
-              <a:t>960 o 3.000</a:t>
+              <a:t>1 mora = 4,3 sanas</a:t>
             </a:r>
-            <a:endParaRPr lang="en-US" sz="3000" dirty="0"/>
+            <a:endParaRPr lang="en-US" sz="2600" dirty="0"/>
           </a:p>
         </p:txBody>
       </p:sp>
       <p:sp>
         <p:nvSpPr>
-          <p:cNvPr id="15" name="Text 13"/>
+          <p:cNvPr id="14" name="Text 12"/>
           <p:cNvSpPr txBox="1"/>
           <p:nvPr/>
         </p:nvSpPr>
         <p:spPr>
           <a:xfrm>
-            <a:off x="6291072" y="2514600"/>
-            <a:ext cx="2368296" cy="548640"/>
+            <a:off x="8284464" y="2286000"/>
+            <a:ext cx="3282696" cy="502920"/>
           </a:xfrm>
           <a:prstGeom prst="rect">
             <a:avLst/>
@@ -2802,7 +2746,7 @@
                 <a:ea typeface="Calibri" pitchFamily="34" charset="-122"/>
                 <a:cs typeface="Calibri" pitchFamily="34" charset="-120"/>
               </a:rPr>
-              <a:t>960 si es sobre 8.000; 3.000 si es sobre 25.000 (exigiría 37,5 % por contacto). El denominador no está definido.</a:t>
+              <a:t>Cada mora 30+ borra 4,3 sanas; equilibrio 23,3 %.</a:t>
             </a:r>
             <a:endParaRPr lang="en-US" sz="1100" dirty="0"/>
           </a:p>
@@ -2810,26 +2754,200 @@
       </p:sp>
       <p:sp>
         <p:nvSpPr>
-          <p:cNvPr id="16" name="MORA DE EQUILIBRIO"/>
+          <p:cNvPr id="15" name="Text 13"/>
+          <p:cNvSpPr txBox="1"/>
+          <p:nvPr/>
+        </p:nvSpPr>
+        <p:spPr>
+          <a:xfrm>
+            <a:off x="457200" y="3291840"/>
+            <a:ext cx="6035040" cy="2926080"/>
+          </a:xfrm>
+          <a:prstGeom prst="rect">
+            <a:avLst/>
+          </a:prstGeom>
+          <a:noFill/>
+          <a:ln/>
+        </p:spPr>
+        <p:txBody>
+          <a:bodyPr wrap="square" lIns="0" tIns="0" rIns="0" bIns="0" rtlCol="0" anchor="t"/>
+          <a:lstStyle/>
+          <a:p>
+            <a:pPr marL="177800" indent="-177800">
+              <a:spcAft>
+                <a:spcPts val="800"/>
+              </a:spcAft>
+              <a:buSzPct val="100000"/>
+              <a:buChar char="•"/>
+            </a:pPr>
+            <a:r>
+              <a:rPr lang="en-US" sz="1250" b="1" dirty="0">
+                <a:solidFill>
+                  <a:srgbClr val="043F52"/>
+                </a:solidFill>
+                <a:latin typeface="Calibri" pitchFamily="34" charset="0"/>
+                <a:ea typeface="Calibri" pitchFamily="34" charset="-122"/>
+                <a:cs typeface="Calibri" pitchFamily="34" charset="-120"/>
+              </a:rPr>
+              <a:t>Decidir a quién contactar: </a:t>
+            </a:r>
+            <a:pPr indent="0" marL="0">
+              <a:spcAft>
+                <a:spcPts val="800"/>
+              </a:spcAft>
+              <a:buNone/>
+            </a:pPr>
+            <a:r>
+              <a:rPr lang="en-US" sz="1250" dirty="0">
+                <a:solidFill>
+                  <a:srgbClr val="043F52"/>
+                </a:solidFill>
+                <a:latin typeface="Calibri" pitchFamily="34" charset="0"/>
+                <a:ea typeface="Calibri" pitchFamily="34" charset="-122"/>
+                <a:cs typeface="Calibri" pitchFamily="34" charset="-120"/>
+              </a:rPr>
+              <a:t>los 8.000 de mayor valor incremental neto.</a:t>
+            </a:r>
+            <a:endParaRPr lang="en-US" sz="1250" dirty="0"/>
+          </a:p>
+          <a:p>
+            <a:pPr marL="177800" indent="-177800">
+              <a:spcAft>
+                <a:spcPts val="800"/>
+              </a:spcAft>
+              <a:buSzPct val="100000"/>
+              <a:buChar char="•"/>
+            </a:pPr>
+            <a:r>
+              <a:rPr lang="en-US" sz="1250" b="1" dirty="0">
+                <a:solidFill>
+                  <a:srgbClr val="043F52"/>
+                </a:solidFill>
+                <a:latin typeface="Calibri" pitchFamily="34" charset="0"/>
+                <a:ea typeface="Calibri" pitchFamily="34" charset="-122"/>
+                <a:cs typeface="Calibri" pitchFamily="34" charset="-120"/>
+              </a:rPr>
+              <a:t>Combinación: </a:t>
+            </a:r>
+            <a:pPr indent="0" marL="0">
+              <a:spcAft>
+                <a:spcPts val="800"/>
+              </a:spcAft>
+              <a:buNone/>
+            </a:pPr>
+            <a:r>
+              <a:rPr lang="en-US" sz="1250" dirty="0">
+                <a:solidFill>
+                  <a:srgbClr val="043F52"/>
+                </a:solidFill>
+                <a:latin typeface="Calibri" pitchFamily="34" charset="0"/>
+                <a:ea typeface="Calibri" pitchFamily="34" charset="-122"/>
+                <a:cs typeface="Calibri" pitchFamily="34" charset="-120"/>
+              </a:rPr>
+              <a:t>propensión calibrada × riesgo × valor; uplift a mediano plazo.</a:t>
+            </a:r>
+            <a:endParaRPr lang="en-US" sz="1250" dirty="0"/>
+          </a:p>
+          <a:p>
+            <a:pPr marL="177800" indent="-177800">
+              <a:spcAft>
+                <a:spcPts val="800"/>
+              </a:spcAft>
+              <a:buSzPct val="100000"/>
+              <a:buChar char="•"/>
+            </a:pPr>
+            <a:r>
+              <a:rPr lang="en-US" sz="1250" b="1" dirty="0">
+                <a:solidFill>
+                  <a:srgbClr val="043F52"/>
+                </a:solidFill>
+                <a:latin typeface="Calibri" pitchFamily="34" charset="0"/>
+                <a:ea typeface="Calibri" pitchFamily="34" charset="-122"/>
+                <a:cs typeface="Calibri" pitchFamily="34" charset="-120"/>
+              </a:rPr>
+              <a:t>Validar el 12 %: </a:t>
+            </a:r>
+            <a:pPr indent="0" marL="0">
+              <a:spcAft>
+                <a:spcPts val="800"/>
+              </a:spcAft>
+              <a:buNone/>
+            </a:pPr>
+            <a:r>
+              <a:rPr lang="en-US" sz="1250" dirty="0">
+                <a:solidFill>
+                  <a:srgbClr val="043F52"/>
+                </a:solidFill>
+                <a:latin typeface="Calibri" pitchFamily="34" charset="0"/>
+                <a:ea typeface="Calibri" pitchFamily="34" charset="-122"/>
+                <a:cs typeface="Calibri" pitchFamily="34" charset="-120"/>
+              </a:rPr>
+              <a:t>denominador, ventana, orgánicas (2,3 % renovó solo).</a:t>
+            </a:r>
+            <a:endParaRPr lang="en-US" sz="1250" dirty="0"/>
+          </a:p>
+          <a:p>
+            <a:pPr marL="177800" indent="-177800">
+              <a:spcAft>
+                <a:spcPts val="800"/>
+              </a:spcAft>
+              <a:buSzPct val="100000"/>
+              <a:buChar char="•"/>
+            </a:pPr>
+            <a:r>
+              <a:rPr lang="en-US" sz="1250" b="1" dirty="0">
+                <a:solidFill>
+                  <a:srgbClr val="043F52"/>
+                </a:solidFill>
+                <a:latin typeface="Calibri" pitchFamily="34" charset="0"/>
+                <a:ea typeface="Calibri" pitchFamily="34" charset="-122"/>
+                <a:cs typeface="Calibri" pitchFamily="34" charset="-120"/>
+              </a:rPr>
+              <a:t>Pregunta única: </a:t>
+            </a:r>
+            <a:pPr indent="0" marL="0">
+              <a:spcAft>
+                <a:spcPts val="800"/>
+              </a:spcAft>
+              <a:buNone/>
+            </a:pPr>
+            <a:r>
+              <a:rPr lang="en-US" sz="1250" dirty="0">
+                <a:solidFill>
+                  <a:srgbClr val="043F52"/>
+                </a:solidFill>
+                <a:latin typeface="Calibri" pitchFamily="34" charset="0"/>
+                <a:ea typeface="Calibri" pitchFamily="34" charset="-122"/>
+                <a:cs typeface="Calibri" pitchFamily="34" charset="-120"/>
+              </a:rPr>
+              <a:t>¿cómo se eligió a quién contactar y qué pasó con el resto?</a:t>
+            </a:r>
+            <a:endParaRPr lang="en-US" sz="1250" dirty="0"/>
+          </a:p>
+        </p:txBody>
+      </p:sp>
+      <p:sp>
+        <p:nvSpPr>
+          <p:cNvPr id="16" name="KPI"/>
           <p:cNvSpPr/>
           <p:nvPr/>
         </p:nvSpPr>
         <p:spPr>
           <a:xfrm>
-            <a:off x="8961120" y="1554480"/>
-            <a:ext cx="2770632" cy="1600200"/>
+            <a:off x="6766560" y="3291840"/>
+            <a:ext cx="4965192" cy="960120"/>
           </a:xfrm>
           <a:prstGeom prst="roundRect">
             <a:avLst>
-              <a:gd name="adj" fmla="val 6857"/>
+              <a:gd name="adj" fmla="val 9524"/>
             </a:avLst>
           </a:prstGeom>
           <a:solidFill>
-            <a:srgbClr val="EEF8F7"/>
+            <a:srgbClr val="E2F2FD"/>
           </a:solidFill>
           <a:ln w="12700">
             <a:solidFill>
-              <a:srgbClr val="EEF8F7"/>
+              <a:srgbClr val="E2F2FD"/>
             </a:solidFill>
             <a:prstDash val="solid"/>
           </a:ln>
@@ -2843,8 +2961,8 @@
         </p:nvSpPr>
         <p:spPr>
           <a:xfrm>
-            <a:off x="9125712" y="1682496"/>
-            <a:ext cx="2441448" cy="274320"/>
+            <a:off x="6903720" y="3337560"/>
+            <a:ext cx="4709160" cy="886968"/>
           </a:xfrm>
           <a:prstGeom prst="rect">
             <a:avLst/>
@@ -2860,7 +2978,7 @@
               <a:buNone/>
             </a:pPr>
             <a:r>
-              <a:rPr lang="en-US" sz="1000" b="1" spc="150" kern="0" dirty="0">
+              <a:rPr lang="en-US" sz="1100" b="1" dirty="0">
                 <a:solidFill>
                   <a:srgbClr val="043F52"/>
                 </a:solidFill>
@@ -2868,72 +2986,8 @@
                 <a:ea typeface="Calibri" pitchFamily="34" charset="-122"/>
                 <a:cs typeface="Calibri" pitchFamily="34" charset="-120"/>
               </a:rPr>
-              <a:t>MORA DE EQUILIBRIO</a:t>
+              <a:t>KPI: </a:t>
             </a:r>
-            <a:endParaRPr lang="en-US" sz="1000" dirty="0"/>
-          </a:p>
-        </p:txBody>
-      </p:sp>
-      <p:sp>
-        <p:nvSpPr>
-          <p:cNvPr id="18" name="Text 16"/>
-          <p:cNvSpPr txBox="1"/>
-          <p:nvPr/>
-        </p:nvSpPr>
-        <p:spPr>
-          <a:xfrm>
-            <a:off x="9125712" y="1938528"/>
-            <a:ext cx="2441448" cy="548640"/>
-          </a:xfrm>
-          <a:prstGeom prst="rect">
-            <a:avLst/>
-          </a:prstGeom>
-          <a:noFill/>
-          <a:ln/>
-        </p:spPr>
-        <p:txBody>
-          <a:bodyPr wrap="square" lIns="0" tIns="0" rIns="0" bIns="0" rtlCol="0" anchor="ctr"/>
-          <a:lstStyle/>
-          <a:p>
-            <a:pPr indent="0" marL="0">
-              <a:buNone/>
-            </a:pPr>
-            <a:r>
-              <a:rPr lang="en-US" sz="3000" b="1" dirty="0">
-                <a:solidFill>
-                  <a:srgbClr val="043F52"/>
-                </a:solidFill>
-                <a:latin typeface="Calibri" pitchFamily="34" charset="0"/>
-                <a:ea typeface="Calibri" pitchFamily="34" charset="-122"/>
-                <a:cs typeface="Calibri" pitchFamily="34" charset="-120"/>
-              </a:rPr>
-              <a:t>23,3 %</a:t>
-            </a:r>
-            <a:endParaRPr lang="en-US" sz="3000" dirty="0"/>
-          </a:p>
-        </p:txBody>
-      </p:sp>
-      <p:sp>
-        <p:nvSpPr>
-          <p:cNvPr id="19" name="Text 17"/>
-          <p:cNvSpPr txBox="1"/>
-          <p:nvPr/>
-        </p:nvSpPr>
-        <p:spPr>
-          <a:xfrm>
-            <a:off x="9125712" y="2514600"/>
-            <a:ext cx="2441448" cy="548640"/>
-          </a:xfrm>
-          <a:prstGeom prst="rect">
-            <a:avLst/>
-          </a:prstGeom>
-          <a:noFill/>
-          <a:ln/>
-        </p:spPr>
-        <p:txBody>
-          <a:bodyPr wrap="square" lIns="0" tIns="0" rIns="0" bIns="0" rtlCol="0" anchor="t"/>
-          <a:lstStyle/>
-          <a:p>
             <a:pPr indent="0" marL="0">
               <a:buNone/>
             </a:pPr>
@@ -2946,7 +3000,35 @@
                 <a:ea typeface="Calibri" pitchFamily="34" charset="-122"/>
                 <a:cs typeface="Calibri" pitchFamily="34" charset="-120"/>
               </a:rPr>
-              <a:t>420.000 / 1.800.000. Cada renovación con mora 30+ borra 4,3 renovaciones sanas.</a:t>
+              <a:t>valor incremental neto por contacto = incrementales vs. control × (420.000 − mora × 1.800.000). </a:t>
+            </a:r>
+            <a:pPr indent="0" marL="0">
+              <a:buNone/>
+            </a:pPr>
+            <a:r>
+              <a:rPr lang="en-US" sz="1100" b="1" dirty="0">
+                <a:solidFill>
+                  <a:srgbClr val="043F52"/>
+                </a:solidFill>
+                <a:latin typeface="Calibri" pitchFamily="34" charset="0"/>
+                <a:ea typeface="Calibri" pitchFamily="34" charset="-122"/>
+                <a:cs typeface="Calibri" pitchFamily="34" charset="-120"/>
+              </a:rPr>
+              <a:t>Proxy: </a:t>
+            </a:r>
+            <a:pPr indent="0" marL="0">
+              <a:buNone/>
+            </a:pPr>
+            <a:r>
+              <a:rPr lang="en-US" sz="1100" dirty="0">
+                <a:solidFill>
+                  <a:srgbClr val="043F52"/>
+                </a:solidFill>
+                <a:latin typeface="Calibri" pitchFamily="34" charset="0"/>
+                <a:ea typeface="Calibri" pitchFamily="34" charset="-122"/>
+                <a:cs typeface="Calibri" pitchFamily="34" charset="-120"/>
+              </a:rPr>
+              <a:t>incrementales por 1.000 contactos.</a:t>
             </a:r>
             <a:endParaRPr lang="en-US" sz="1100" dirty="0"/>
           </a:p>
@@ -2954,53 +3036,14 @@
       </p:sp>
       <p:sp>
         <p:nvSpPr>
-          <p:cNvPr id="20" name="Text 18"/>
+          <p:cNvPr id="18" name="Text 16"/>
           <p:cNvSpPr txBox="1"/>
           <p:nvPr/>
         </p:nvSpPr>
         <p:spPr>
           <a:xfrm>
-            <a:off x="457200" y="3383280"/>
-            <a:ext cx="5486400" cy="320040"/>
-          </a:xfrm>
-          <a:prstGeom prst="rect">
-            <a:avLst/>
-          </a:prstGeom>
-          <a:noFill/>
-          <a:ln/>
-        </p:spPr>
-        <p:txBody>
-          <a:bodyPr wrap="square" lIns="0" tIns="0" rIns="0" bIns="0" rtlCol="0" anchor="ctr"/>
-          <a:lstStyle/>
-          <a:p>
-            <a:pPr indent="0" marL="0">
-              <a:buNone/>
-            </a:pPr>
-            <a:r>
-              <a:rPr lang="en-US" sz="1400" b="1" dirty="0">
-                <a:solidFill>
-                  <a:srgbClr val="043F52"/>
-                </a:solidFill>
-                <a:latin typeface="Calibri" pitchFamily="34" charset="0"/>
-                <a:ea typeface="Calibri" pitchFamily="34" charset="-122"/>
-                <a:cs typeface="Calibri" pitchFamily="34" charset="-120"/>
-              </a:rPr>
-              <a:t>Qué debe resolver Ciencia de Datos</a:t>
-            </a:r>
-            <a:endParaRPr lang="en-US" sz="1400" dirty="0"/>
-          </a:p>
-        </p:txBody>
-      </p:sp>
-      <p:sp>
-        <p:nvSpPr>
-          <p:cNvPr id="21" name="Text 19"/>
-          <p:cNvSpPr txBox="1"/>
-          <p:nvPr/>
-        </p:nvSpPr>
-        <p:spPr>
-          <a:xfrm>
-            <a:off x="457200" y="3703320"/>
-            <a:ext cx="6675120" cy="2651760"/>
+            <a:off x="6766560" y="4434840"/>
+            <a:ext cx="4965192" cy="1828800"/>
           </a:xfrm>
           <a:prstGeom prst="rect">
             <a:avLst/>
@@ -3014,246 +3057,10 @@
           <a:p>
             <a:pPr marL="177800" indent="-177800">
               <a:spcAft>
-                <a:spcPts val="500"/>
+                <a:spcPts val="400"/>
               </a:spcAft>
               <a:buSzPct val="100000"/>
               <a:buChar char="•"/>
-            </a:pPr>
-            <a:r>
-              <a:rPr lang="en-US" sz="1200" b="1" dirty="0">
-                <a:solidFill>
-                  <a:srgbClr val="043F52"/>
-                </a:solidFill>
-                <a:latin typeface="Calibri" pitchFamily="34" charset="0"/>
-                <a:ea typeface="Calibri" pitchFamily="34" charset="-122"/>
-                <a:cs typeface="Calibri" pitchFamily="34" charset="-120"/>
-              </a:rPr>
-              <a:t>Una decisión de asignación bajo capacidad, </a:t>
-            </a:r>
-            <a:pPr indent="0" marL="0">
-              <a:spcAft>
-                <a:spcPts val="500"/>
-              </a:spcAft>
-              <a:buNone/>
-            </a:pPr>
-            <a:r>
-              <a:rPr lang="en-US" sz="1200" dirty="0">
-                <a:solidFill>
-                  <a:srgbClr val="043F52"/>
-                </a:solidFill>
-                <a:latin typeface="Calibri" pitchFamily="34" charset="0"/>
-                <a:ea typeface="Calibri" pitchFamily="34" charset="-122"/>
-                <a:cs typeface="Calibri" pitchFamily="34" charset="-120"/>
-              </a:rPr>
-              <a:t>no un modelo de propensión: elegir los 8.000 contactos que maximizan valor incremental neto de riesgo, respetando la capacidad de cada regional.</a:t>
-            </a:r>
-            <a:endParaRPr lang="en-US" sz="1200" dirty="0"/>
-          </a:p>
-          <a:p>
-            <a:pPr marL="177800" indent="-177800">
-              <a:spcAft>
-                <a:spcPts val="500"/>
-              </a:spcAft>
-              <a:buSzPct val="100000"/>
-              <a:buChar char="•"/>
-            </a:pPr>
-            <a:r>
-              <a:rPr lang="en-US" sz="1200" b="1" dirty="0">
-                <a:solidFill>
-                  <a:srgbClr val="043F52"/>
-                </a:solidFill>
-                <a:latin typeface="Calibri" pitchFamily="34" charset="0"/>
-                <a:ea typeface="Calibri" pitchFamily="34" charset="-122"/>
-                <a:cs typeface="Calibri" pitchFamily="34" charset="-120"/>
-              </a:rPr>
-              <a:t>Combinación: </a:t>
-            </a:r>
-            <a:pPr indent="0" marL="0">
-              <a:spcAft>
-                <a:spcPts val="500"/>
-              </a:spcAft>
-              <a:buNone/>
-            </a:pPr>
-            <a:r>
-              <a:rPr lang="en-US" sz="1200" dirty="0">
-                <a:solidFill>
-                  <a:srgbClr val="043F52"/>
-                </a:solidFill>
-                <a:latin typeface="Calibri" pitchFamily="34" charset="0"/>
-                <a:ea typeface="Calibri" pitchFamily="34" charset="-122"/>
-                <a:cs typeface="Calibri" pitchFamily="34" charset="-120"/>
-              </a:rPr>
-              <a:t>propensión calibrada × filtro de riesgo (mora 30+) × valor por renovación, optimizados contra la capacidad. La incrementalidad (uplift) es el objetivo de mediano plazo: hoy no hay datos para estimarla con confianza.</a:t>
-            </a:r>
-            <a:endParaRPr lang="en-US" sz="1200" dirty="0"/>
-          </a:p>
-          <a:p>
-            <a:pPr marL="177800" indent="-177800">
-              <a:spcAft>
-                <a:spcPts val="500"/>
-              </a:spcAft>
-              <a:buSzPct val="100000"/>
-              <a:buChar char="•"/>
-            </a:pPr>
-            <a:r>
-              <a:rPr lang="en-US" sz="1200" b="1" dirty="0">
-                <a:solidFill>
-                  <a:srgbClr val="043F52"/>
-                </a:solidFill>
-                <a:latin typeface="Calibri" pitchFamily="34" charset="0"/>
-                <a:ea typeface="Calibri" pitchFamily="34" charset="-122"/>
-                <a:cs typeface="Calibri" pitchFamily="34" charset="-120"/>
-              </a:rPr>
-              <a:t>Qué validar antes de adoptar el 12 %: </a:t>
-            </a:r>
-            <a:pPr indent="0" marL="0">
-              <a:spcAft>
-                <a:spcPts val="500"/>
-              </a:spcAft>
-              <a:buNone/>
-            </a:pPr>
-            <a:r>
-              <a:rPr lang="en-US" sz="1200" dirty="0">
-                <a:solidFill>
-                  <a:srgbClr val="043F52"/>
-                </a:solidFill>
-                <a:latin typeface="Calibri" pitchFamily="34" charset="0"/>
-                <a:ea typeface="Calibri" pitchFamily="34" charset="-122"/>
-                <a:cs typeface="Calibri" pitchFamily="34" charset="-120"/>
-              </a:rPr>
-              <a:t>denominador y ventana, si incluye renovaciones orgánicas (en la base, 2,3 % de los no contactados renovó solo), y si es por contacto, por lista o por elegible.</a:t>
-            </a:r>
-            <a:endParaRPr lang="en-US" sz="1200" dirty="0"/>
-          </a:p>
-          <a:p>
-            <a:pPr marL="177800" indent="-177800">
-              <a:spcAft>
-                <a:spcPts val="500"/>
-              </a:spcAft>
-              <a:buSzPct val="100000"/>
-              <a:buChar char="•"/>
-            </a:pPr>
-            <a:r>
-              <a:rPr lang="en-US" sz="1200" b="1" dirty="0">
-                <a:solidFill>
-                  <a:srgbClr val="043F52"/>
-                </a:solidFill>
-                <a:latin typeface="Calibri" pitchFamily="34" charset="0"/>
-                <a:ea typeface="Calibri" pitchFamily="34" charset="-122"/>
-                <a:cs typeface="Calibri" pitchFamily="34" charset="-120"/>
-              </a:rPr>
-              <a:t>La única pregunta al negocio: </a:t>
-            </a:r>
-            <a:pPr indent="0" marL="0">
-              <a:spcAft>
-                <a:spcPts val="500"/>
-              </a:spcAft>
-              <a:buNone/>
-            </a:pPr>
-            <a:r>
-              <a:rPr lang="en-US" sz="1200" dirty="0">
-                <a:solidFill>
-                  <a:srgbClr val="043F52"/>
-                </a:solidFill>
-                <a:latin typeface="Calibri" pitchFamily="34" charset="0"/>
-                <a:ea typeface="Calibri" pitchFamily="34" charset="-122"/>
-                <a:cs typeface="Calibri" pitchFamily="34" charset="-120"/>
-              </a:rPr>
-              <a:t>¿cómo se eligió hasta hoy a quién contactar y qué pasó con los no contactados? Define si el histórico permite medir efecto del contacto o solo describe la política vigente.</a:t>
-            </a:r>
-            <a:endParaRPr lang="en-US" sz="1200" dirty="0"/>
-          </a:p>
-        </p:txBody>
-      </p:sp>
-      <p:sp>
-        <p:nvSpPr>
-          <p:cNvPr id="22" name="Text 20"/>
-          <p:cNvSpPr txBox="1"/>
-          <p:nvPr/>
-        </p:nvSpPr>
-        <p:spPr>
-          <a:xfrm>
-            <a:off x="7406640" y="3383280"/>
-            <a:ext cx="4297680" cy="320040"/>
-          </a:xfrm>
-          <a:prstGeom prst="rect">
-            <a:avLst/>
-          </a:prstGeom>
-          <a:noFill/>
-          <a:ln/>
-        </p:spPr>
-        <p:txBody>
-          <a:bodyPr wrap="square" lIns="0" tIns="0" rIns="0" bIns="0" rtlCol="0" anchor="ctr"/>
-          <a:lstStyle/>
-          <a:p>
-            <a:pPr indent="0" marL="0">
-              <a:buNone/>
-            </a:pPr>
-            <a:r>
-              <a:rPr lang="en-US" sz="1400" b="1" dirty="0">
-                <a:solidFill>
-                  <a:srgbClr val="043F52"/>
-                </a:solidFill>
-                <a:latin typeface="Calibri" pitchFamily="34" charset="0"/>
-                <a:ea typeface="Calibri" pitchFamily="34" charset="-122"/>
-                <a:cs typeface="Calibri" pitchFamily="34" charset="-120"/>
-              </a:rPr>
-              <a:t>KPI de decisión y guardrails</a:t>
-            </a:r>
-            <a:endParaRPr lang="en-US" sz="1400" dirty="0"/>
-          </a:p>
-        </p:txBody>
-      </p:sp>
-      <p:sp>
-        <p:nvSpPr>
-          <p:cNvPr id="23" name="Shape 21"/>
-          <p:cNvSpPr/>
-          <p:nvPr/>
-        </p:nvSpPr>
-        <p:spPr>
-          <a:xfrm>
-            <a:off x="7406640" y="3703320"/>
-            <a:ext cx="4325112" cy="777240"/>
-          </a:xfrm>
-          <a:prstGeom prst="roundRect">
-            <a:avLst>
-              <a:gd name="adj" fmla="val 11765"/>
-            </a:avLst>
-          </a:prstGeom>
-          <a:solidFill>
-            <a:srgbClr val="E2F2FD"/>
-          </a:solidFill>
-          <a:ln w="12700">
-            <a:solidFill>
-              <a:srgbClr val="E2F2FD"/>
-            </a:solidFill>
-            <a:prstDash val="solid"/>
-          </a:ln>
-        </p:spPr>
-      </p:sp>
-      <p:sp>
-        <p:nvSpPr>
-          <p:cNvPr id="24" name="Text 22"/>
-          <p:cNvSpPr txBox="1"/>
-          <p:nvPr/>
-        </p:nvSpPr>
-        <p:spPr>
-          <a:xfrm>
-            <a:off x="7543800" y="3749040"/>
-            <a:ext cx="4069080" cy="713232"/>
-          </a:xfrm>
-          <a:prstGeom prst="rect">
-            <a:avLst/>
-          </a:prstGeom>
-          <a:noFill/>
-          <a:ln/>
-        </p:spPr>
-        <p:txBody>
-          <a:bodyPr wrap="square" lIns="0" tIns="0" rIns="0" bIns="0" rtlCol="0" anchor="ctr"/>
-          <a:lstStyle/>
-          <a:p>
-            <a:pPr indent="0" marL="0">
-              <a:buNone/>
             </a:pPr>
             <a:r>
               <a:rPr lang="en-US" sz="1150" b="1" dirty="0">
@@ -3264,9 +3071,12 @@
                 <a:ea typeface="Calibri" pitchFamily="34" charset="-122"/>
                 <a:cs typeface="Calibri" pitchFamily="34" charset="-120"/>
               </a:rPr>
-              <a:t>KPI principal: </a:t>
+              <a:t>Riesgo: </a:t>
             </a:r>
             <a:pPr indent="0" marL="0">
+              <a:spcAft>
+                <a:spcPts val="400"/>
+              </a:spcAft>
               <a:buNone/>
             </a:pPr>
             <a:r>
@@ -3278,42 +3088,20 @@
                 <a:ea typeface="Calibri" pitchFamily="34" charset="-122"/>
                 <a:cs typeface="Calibri" pitchFamily="34" charset="-120"/>
               </a:rPr>
-              <a:t>valor incremental neto por contacto (COP) = renovaciones incrementales vs. control × (420.000 − mora × 1.800.000), medido sobre los 8.000 asignados.</a:t>
+              <a:t>mora esperada de la lista ≤ umbral pactado antes (veto).</a:t>
             </a:r>
             <a:endParaRPr lang="en-US" sz="1150" dirty="0"/>
           </a:p>
-        </p:txBody>
-      </p:sp>
-      <p:sp>
-        <p:nvSpPr>
-          <p:cNvPr id="25" name="Text 23"/>
-          <p:cNvSpPr txBox="1"/>
-          <p:nvPr/>
-        </p:nvSpPr>
-        <p:spPr>
-          <a:xfrm>
-            <a:off x="7406640" y="4572000"/>
-            <a:ext cx="4325112" cy="1828800"/>
-          </a:xfrm>
-          <a:prstGeom prst="rect">
-            <a:avLst/>
-          </a:prstGeom>
-          <a:noFill/>
-          <a:ln/>
-        </p:spPr>
-        <p:txBody>
-          <a:bodyPr wrap="square" lIns="0" tIns="0" rIns="0" bIns="0" rtlCol="0" anchor="t"/>
-          <a:lstStyle/>
           <a:p>
             <a:pPr marL="177800" indent="-177800">
               <a:spcAft>
-                <a:spcPts val="300"/>
+                <a:spcPts val="400"/>
               </a:spcAft>
               <a:buSzPct val="100000"/>
               <a:buChar char="•"/>
             </a:pPr>
             <a:r>
-              <a:rPr lang="en-US" sz="1100" dirty="0">
+              <a:rPr lang="en-US" sz="1150" b="1" dirty="0">
                 <a:solidFill>
                   <a:srgbClr val="043F52"/>
                 </a:solidFill>
@@ -3321,20 +3109,16 @@
                 <a:ea typeface="Calibri" pitchFamily="34" charset="-122"/>
                 <a:cs typeface="Calibri" pitchFamily="34" charset="-120"/>
               </a:rPr>
-              <a:t>Riesgo: mora 30+ de renovados por cohorte ≤ 5,1 % + 1 pp (veto).</a:t>
+              <a:t>Experiencia: </a:t>
             </a:r>
-            <a:endParaRPr lang="en-US" sz="1100" dirty="0"/>
-          </a:p>
-          <a:p>
-            <a:pPr marL="177800" indent="-177800">
+            <a:pPr indent="0" marL="0">
               <a:spcAft>
-                <a:spcPts val="300"/>
+                <a:spcPts val="400"/>
               </a:spcAft>
-              <a:buSzPct val="100000"/>
-              <a:buChar char="•"/>
+              <a:buNone/>
             </a:pPr>
             <a:r>
-              <a:rPr lang="en-US" sz="1100" dirty="0">
+              <a:rPr lang="en-US" sz="1150" dirty="0">
                 <a:solidFill>
                   <a:srgbClr val="043F52"/>
                 </a:solidFill>
@@ -3342,20 +3126,20 @@
                 <a:ea typeface="Calibri" pitchFamily="34" charset="-122"/>
                 <a:cs typeface="Calibri" pitchFamily="34" charset="-120"/>
               </a:rPr>
-              <a:t>Experiencia: quejas y opt-out por 1.000 contactos no inferiores al control (veto).</a:t>
+              <a:t>quejas y opt-out por 1.000 no peores (veto).</a:t>
             </a:r>
-            <a:endParaRPr lang="en-US" sz="1100" dirty="0"/>
+            <a:endParaRPr lang="en-US" sz="1150" dirty="0"/>
           </a:p>
           <a:p>
             <a:pPr marL="177800" indent="-177800">
               <a:spcAft>
-                <a:spcPts val="300"/>
+                <a:spcPts val="400"/>
               </a:spcAft>
               <a:buSzPct val="100000"/>
               <a:buChar char="•"/>
             </a:pPr>
             <a:r>
-              <a:rPr lang="en-US" sz="1100" dirty="0">
+              <a:rPr lang="en-US" sz="1150" b="1" dirty="0">
                 <a:solidFill>
                   <a:srgbClr val="043F52"/>
                 </a:solidFill>
@@ -3363,20 +3147,16 @@
                 <a:ea typeface="Calibri" pitchFamily="34" charset="-122"/>
                 <a:cs typeface="Calibri" pitchFamily="34" charset="-120"/>
               </a:rPr>
-              <a:t>Equidad y cobertura: tasa de selección por regional y grupo ≥ 0,8 de la referencia (alerta).</a:t>
+              <a:t>Equidad: </a:t>
             </a:r>
-            <a:endParaRPr lang="en-US" sz="1100" dirty="0"/>
-          </a:p>
-          <a:p>
-            <a:pPr marL="177800" indent="-177800">
+            <a:pPr indent="0" marL="0">
               <a:spcAft>
-                <a:spcPts val="300"/>
+                <a:spcPts val="400"/>
               </a:spcAft>
-              <a:buSzPct val="100000"/>
-              <a:buChar char="•"/>
+              <a:buNone/>
             </a:pPr>
             <a:r>
-              <a:rPr lang="en-US" sz="1100" dirty="0">
+              <a:rPr lang="en-US" sz="1150" dirty="0">
                 <a:solidFill>
                   <a:srgbClr val="043F52"/>
                 </a:solidFill>
@@ -3384,20 +3164,20 @@
                 <a:ea typeface="Calibri" pitchFamily="34" charset="-122"/>
                 <a:cs typeface="Calibri" pitchFamily="34" charset="-120"/>
               </a:rPr>
-              <a:t>Operación: ≥ 90 % de la lista ejecutada por regional (alerta).</a:t>
+              <a:t>selección por regional y grupo ≥ 0,8 (alerta).</a:t>
             </a:r>
-            <a:endParaRPr lang="en-US" sz="1100" dirty="0"/>
+            <a:endParaRPr lang="en-US" sz="1150" dirty="0"/>
           </a:p>
           <a:p>
             <a:pPr marL="177800" indent="-177800">
               <a:spcAft>
-                <a:spcPts val="300"/>
+                <a:spcPts val="400"/>
               </a:spcAft>
               <a:buSzPct val="100000"/>
               <a:buChar char="•"/>
             </a:pPr>
             <a:r>
-              <a:rPr lang="en-US" sz="1100" dirty="0">
+              <a:rPr lang="en-US" sz="1150" b="1" dirty="0">
                 <a:solidFill>
                   <a:srgbClr val="043F52"/>
                 </a:solidFill>
@@ -3405,9 +3185,64 @@
                 <a:ea typeface="Calibri" pitchFamily="34" charset="-122"/>
                 <a:cs typeface="Calibri" pitchFamily="34" charset="-120"/>
               </a:rPr>
-              <a:t>Confiabilidad: SRM y chequeos de datos del corte (bloqueo).</a:t>
+              <a:t>Operación: </a:t>
             </a:r>
-            <a:endParaRPr lang="en-US" sz="1100" dirty="0"/>
+            <a:pPr indent="0" marL="0">
+              <a:spcAft>
+                <a:spcPts val="400"/>
+              </a:spcAft>
+              <a:buNone/>
+            </a:pPr>
+            <a:r>
+              <a:rPr lang="en-US" sz="1150" dirty="0">
+                <a:solidFill>
+                  <a:srgbClr val="043F52"/>
+                </a:solidFill>
+                <a:latin typeface="Calibri" pitchFamily="34" charset="0"/>
+                <a:ea typeface="Calibri" pitchFamily="34" charset="-122"/>
+                <a:cs typeface="Calibri" pitchFamily="34" charset="-120"/>
+              </a:rPr>
+              <a:t>≥ 90 % de lista ejecutada (alerta).</a:t>
+            </a:r>
+            <a:endParaRPr lang="en-US" sz="1150" dirty="0"/>
+          </a:p>
+          <a:p>
+            <a:pPr marL="177800" indent="-177800">
+              <a:spcAft>
+                <a:spcPts val="400"/>
+              </a:spcAft>
+              <a:buSzPct val="100000"/>
+              <a:buChar char="•"/>
+            </a:pPr>
+            <a:r>
+              <a:rPr lang="en-US" sz="1150" b="1" dirty="0">
+                <a:solidFill>
+                  <a:srgbClr val="043F52"/>
+                </a:solidFill>
+                <a:latin typeface="Calibri" pitchFamily="34" charset="0"/>
+                <a:ea typeface="Calibri" pitchFamily="34" charset="-122"/>
+                <a:cs typeface="Calibri" pitchFamily="34" charset="-120"/>
+              </a:rPr>
+              <a:t>Confiabilidad: </a:t>
+            </a:r>
+            <a:pPr indent="0" marL="0">
+              <a:spcAft>
+                <a:spcPts val="400"/>
+              </a:spcAft>
+              <a:buNone/>
+            </a:pPr>
+            <a:r>
+              <a:rPr lang="en-US" sz="1150" dirty="0">
+                <a:solidFill>
+                  <a:srgbClr val="043F52"/>
+                </a:solidFill>
+                <a:latin typeface="Calibri" pitchFamily="34" charset="0"/>
+                <a:ea typeface="Calibri" pitchFamily="34" charset="-122"/>
+                <a:cs typeface="Calibri" pitchFamily="34" charset="-120"/>
+              </a:rPr>
+              <a:t>aleatorización y datos válidos (bloqueo).</a:t>
+            </a:r>
+            <a:endParaRPr lang="en-US" sz="1150" dirty="0"/>
           </a:p>
         </p:txBody>
       </p:sp>
@@ -3527,7 +3362,7 @@
         </p:nvSpPr>
         <p:spPr>
           <a:xfrm>
-            <a:off x="457200" y="1234440"/>
+            <a:off x="457200" y="1280160"/>
             <a:ext cx="9144000" cy="274320"/>
           </a:xfrm>
           <a:prstGeom prst="rect">
@@ -3552,7 +3387,7 @@
                 <a:ea typeface="Calibri" pitchFamily="34" charset="-122"/>
                 <a:cs typeface="Calibri" pitchFamily="34" charset="-120"/>
               </a:rPr>
-              <a:t>HALLAZGOS MATERIALES EN BASE_CLIENTES (1.800 FILAS, 8 CORTES) Y DICCIONARIO</a:t>
+              <a:t>CINCO HALLAZGOS EN BASE_CLIENTES (1.800 FILAS, 8 CORTES)</a:t>
             </a:r>
             <a:endParaRPr lang="en-US" sz="1100" dirty="0"/>
           </a:p>
@@ -3573,7 +3408,7 @@
           </p:nvPr>
         </p:nvGraphicFramePr>
         <p:xfrm>
-          <a:off x="457200" y="1554480"/>
+          <a:off x="457200" y="1645920"/>
           <a:ext cx="11274552" cy="914400"/>
         </p:xfrm>
         <a:graphic>
@@ -3581,12 +3416,12 @@
             <a:tbl>
               <a:tblPr/>
               <a:tblGrid>
-                <a:gridCol w="2103120"/>
-                <a:gridCol w="4480560"/>
+                <a:gridCol w="2194560"/>
+                <a:gridCol w="4206240"/>
                 <a:gridCol w="3657600"/>
-                <a:gridCol w="1033272"/>
+                <a:gridCol w="1216152"/>
               </a:tblGrid>
-              <a:tr h="411480">
+              <a:tr h="384048">
                 <a:tc>
                   <a:txBody>
                     <a:bodyPr/>
@@ -3672,7 +3507,7 @@
                           <a:ea typeface="Calibri" pitchFamily="34" charset="-122"/>
                           <a:cs typeface="Calibri" pitchFamily="34" charset="-120"/>
                         </a:rPr>
-                        <a:t>Evidencia en la base</a:t>
+                        <a:t>Cifra</a:t>
                       </a:r>
                       <a:endParaRPr lang="en-US" sz="1050" dirty="0">
                         <a:latin typeface="Calibri" charset="0"/>
@@ -3740,7 +3575,7 @@
                           <a:ea typeface="Calibri" pitchFamily="34" charset="-122"/>
                           <a:cs typeface="Calibri" pitchFamily="34" charset="-120"/>
                         </a:rPr>
-                        <a:t>Qué implica para la decisión</a:t>
+                        <a:t>Qué implica</a:t>
                       </a:r>
                       <a:endParaRPr lang="en-US" sz="1050" dirty="0">
                         <a:latin typeface="Calibri" charset="0"/>
@@ -3860,7 +3695,7 @@
                   </a:tcPr>
                 </a:tc>
               </a:tr>
-              <a:tr h="411480">
+              <a:tr h="384048">
                 <a:tc>
                   <a:txBody>
                     <a:bodyPr/>
@@ -3878,7 +3713,7 @@
                           <a:ea typeface="Calibri" pitchFamily="34" charset="-122"/>
                           <a:cs typeface="Calibri" pitchFamily="34" charset="-120"/>
                         </a:rPr>
-                        <a:t>Fuga de información (dos variables)</a:t>
+                        <a:t>Fuga en dos variables</a:t>
                       </a:r>
                       <a:endParaRPr lang="en-US" sz="1050" dirty="0">
                         <a:latin typeface="Calibri" charset="0"/>
@@ -3943,7 +3778,7 @@
                           <a:ea typeface="Calibri" pitchFamily="34" charset="-122"/>
                           <a:cs typeface="Calibri" pitchFamily="34" charset="-120"/>
                         </a:rPr>
-                        <a:t>resultado_gestion_30d: 78 % de «Acepta» renueva (AUC univariado 0,83). dias_hasta_renovacion: nulo exactamente en los 1.436 no renovados (AUC 1,00).</a:t>
+                        <a:t>resultado_gestion_30d AUC 0,83; dias_hasta_renovacion AUC 1,00</a:t>
                       </a:r>
                       <a:endParaRPr lang="en-US" sz="1050" dirty="0">
                         <a:latin typeface="Calibri" charset="0"/>
@@ -4008,7 +3843,7 @@
                           <a:ea typeface="Calibri" pitchFamily="34" charset="-122"/>
                           <a:cs typeface="Calibri" pitchFamily="34" charset="-120"/>
                         </a:rPr>
-                        <a:t>No existen al momento de priorizar. Cualquier modelo que las use infla métricas y es inviable en producción.</a:t>
+                        <a:t>No existen al priorizar; inflan métricas</a:t>
                       </a:r>
                       <a:endParaRPr lang="en-US" sz="1050" dirty="0">
                         <a:latin typeface="Calibri" charset="0"/>
@@ -4125,7 +3960,7 @@
                   </a:tcPr>
                 </a:tc>
               </a:tr>
-              <a:tr h="411480">
+              <a:tr h="384048">
                 <a:tc>
                   <a:txBody>
                     <a:bodyPr/>
@@ -4208,7 +4043,7 @@
                           <a:ea typeface="Calibri" pitchFamily="34" charset="-122"/>
                           <a:cs typeface="Calibri" pitchFamily="34" charset="-120"/>
                         </a:rPr>
-                        <a:t>Renovación 20,2 % (364/1.800) frente a 3,6 % declarado; 1.800 filas frente a 25.000/mes. «Top 8k» no es calculable desde esta base.</a:t>
+                        <a:t>Renovación 20,2 % vs. 3,6 %; 1.800 filas vs. 25.000/mes</a:t>
                       </a:r>
                       <a:endParaRPr lang="en-US" sz="1050" dirty="0">
                         <a:latin typeface="Calibri" charset="0"/>
@@ -4273,7 +4108,7 @@
                           <a:ea typeface="Calibri" pitchFamily="34" charset="-122"/>
                           <a:cs typeface="Calibri" pitchFamily="34" charset="-120"/>
                         </a:rPr>
-                        <a:t>Las conversiones de la hoja de modelos vienen de otra población o de otra regla. No se pueden extrapolar sin conocer el origen.</a:t>
+                        <a:t>«Top 8k» no se calcula desde aquí</a:t>
                       </a:r>
                       <a:endParaRPr lang="en-US" sz="1050" dirty="0">
                         <a:latin typeface="Calibri" charset="0"/>
@@ -4390,7 +4225,7 @@
                   </a:tcPr>
                 </a:tc>
               </a:tr>
-              <a:tr h="411480">
+              <a:tr h="384048">
                 <a:tc>
                   <a:txBody>
                     <a:bodyPr/>
@@ -4408,7 +4243,7 @@
                           <a:ea typeface="Calibri" pitchFamily="34" charset="-122"/>
                           <a:cs typeface="Calibri" pitchFamily="34" charset="-120"/>
                         </a:rPr>
-                        <a:t>Riesgo no modelable aquí</a:t>
+                        <a:t>Riesgo no modelable</a:t>
                       </a:r>
                       <a:endParaRPr lang="en-US" sz="1050" dirty="0">
                         <a:latin typeface="Calibri" charset="0"/>
@@ -4473,7 +4308,7 @@
                           <a:ea typeface="Calibri" pitchFamily="34" charset="-122"/>
                           <a:cs typeface="Calibri" pitchFamily="34" charset="-120"/>
                         </a:rPr>
-                        <a:t>3 moras 30+ en 364 renovados (0,8 %) frente a 4,6 % a 7,2 % reportados. Mora = 0 en no renovados por construcción.</a:t>
+                        <a:t>3 moras en 364 renovados (0,8 %) vs. 4,6–7,2 % reportado</a:t>
                       </a:r>
                       <a:endParaRPr lang="en-US" sz="1050" dirty="0">
                         <a:latin typeface="Calibri" charset="0"/>
@@ -4538,7 +4373,7 @@
                           <a:ea typeface="Calibri" pitchFamily="34" charset="-122"/>
                           <a:cs typeface="Calibri" pitchFamily="34" charset="-120"/>
                         </a:rPr>
-                        <a:t>El componente de riesgo debe venir de Riesgos (score o política), no de esta base.</a:t>
+                        <a:t>La mora viene de Riesgos, no de esta base</a:t>
                       </a:r>
                       <a:endParaRPr lang="en-US" sz="1050" dirty="0">
                         <a:latin typeface="Calibri" charset="0"/>
@@ -4655,7 +4490,7 @@
                   </a:tcPr>
                 </a:tc>
               </a:tr>
-              <a:tr h="411480">
+              <a:tr h="384048">
                 <a:tc>
                   <a:txBody>
                     <a:bodyPr/>
@@ -4738,7 +4573,7 @@
                           <a:ea typeface="Calibri" pitchFamily="34" charset="-122"/>
                           <a:cs typeface="Calibri" pitchFamily="34" charset="-120"/>
                         </a:rPr>
-                        <a:t>1 duplicado (C01199). max_mora_6m = −4; ahorro −350.000; 25 endeudamientos &gt; 1; 7 scores de buró fuera de 400–850; 1 contacto fechado después del corte (2026-09-15); dias_ultimo_contacto redundante (r = 0,99).</a:t>
+                        <a:t>1 duplicado; 1 contacto posterior al corte; 25 endeudamientos &gt; 1</a:t>
                       </a:r>
                       <a:endParaRPr lang="en-US" sz="1050" dirty="0">
                         <a:latin typeface="Calibri" charset="0"/>
@@ -4803,7 +4638,7 @@
                           <a:ea typeface="Calibri" pitchFamily="34" charset="-122"/>
                           <a:cs typeface="Calibri" pitchFamily="34" charset="-120"/>
                         </a:rPr>
-                        <a:t>Corregibles con reglas de validación en el pipeline. Muestran que el corte no está garantizado point-in-time.</a:t>
+                        <a:t>Validaciones; corte no garantizado point-in-time</a:t>
                       </a:r>
                       <a:endParaRPr lang="en-US" sz="1050" dirty="0">
                         <a:latin typeface="Calibri" charset="0"/>
@@ -4920,7 +4755,7 @@
                   </a:tcPr>
                 </a:tc>
               </a:tr>
-              <a:tr h="411480">
+              <a:tr h="384048">
                 <a:tc>
                   <a:txBody>
                     <a:bodyPr/>
@@ -4938,7 +4773,7 @@
                           <a:ea typeface="Calibri" pitchFamily="34" charset="-122"/>
                           <a:cs typeface="Calibri" pitchFamily="34" charset="-120"/>
                         </a:rPr>
-                        <a:t>Variables con sesgo o sin señal</a:t>
+                        <a:t>Señal concentrada</a:t>
                       </a:r>
                       <a:endParaRPr lang="en-US" sz="1050" dirty="0">
                         <a:latin typeface="Calibri" charset="0"/>
@@ -5003,7 +4838,7 @@
                           <a:ea typeface="Calibri" pitchFamily="34" charset="-122"/>
                           <a:cs typeface="Calibri" pitchFamily="34" charset="-120"/>
                         </a:rPr>
-                        <a:t>contactabilidad_score no predice el contacto: 32 % de no contactados en todos los cuartiles. recibe_remesas: proxy socioeconómico, sin señal (r = −0,01).</a:t>
+                        <a:t>score_buro AUC 0,81; respondio_oferta 0,69; resto &lt; 0,57</a:t>
                       </a:r>
                       <a:endParaRPr lang="en-US" sz="1050" dirty="0">
                         <a:latin typeface="Calibri" charset="0"/>
@@ -5068,272 +4903,7 @@
                           <a:ea typeface="Calibri" pitchFamily="34" charset="-122"/>
                           <a:cs typeface="Calibri" pitchFamily="34" charset="-120"/>
                         </a:rPr>
-                        <a:t>Excluidas del ranking: la primera reproduciría la política pasada; la segunda es un riesgo de uso responsable sin beneficio.</a:t>
-                      </a:r>
-                      <a:endParaRPr lang="en-US" sz="1050" dirty="0">
-                        <a:latin typeface="Calibri" charset="0"/>
-                        <a:ea typeface="Calibri" charset="0"/>
-                        <a:cs typeface="Calibri" charset="0"/>
-                      </a:endParaRPr>
-                    </a:p>
-                  </a:txBody>
-                  <a:tcPr marL="50800" marR="50800" marT="25400" marB="25400" anchor="ctr">
-                    <a:lnL w="9525" cap="flat" cmpd="sng" algn="ctr">
-                      <a:solidFill>
-                        <a:srgbClr val="D6E8E6"/>
-                      </a:solidFill>
-                      <a:prstDash val="solid"/>
-                      <a:round/>
-                      <a:headEnd type="none" w="med" len="med"/>
-                      <a:tailEnd type="none" w="med" len="med"/>
-                    </a:lnL>
-                    <a:lnR w="9525" cap="flat" cmpd="sng" algn="ctr">
-                      <a:solidFill>
-                        <a:srgbClr val="D6E8E6"/>
-                      </a:solidFill>
-                      <a:prstDash val="solid"/>
-                      <a:round/>
-                      <a:headEnd type="none" w="med" len="med"/>
-                      <a:tailEnd type="none" w="med" len="med"/>
-                    </a:lnR>
-                    <a:lnT w="9525" cap="flat" cmpd="sng" algn="ctr">
-                      <a:solidFill>
-                        <a:srgbClr val="D6E8E6"/>
-                      </a:solidFill>
-                      <a:prstDash val="solid"/>
-                      <a:round/>
-                      <a:headEnd type="none" w="med" len="med"/>
-                      <a:tailEnd type="none" w="med" len="med"/>
-                    </a:lnT>
-                    <a:lnB w="9525" cap="flat" cmpd="sng" algn="ctr">
-                      <a:solidFill>
-                        <a:srgbClr val="D6E8E6"/>
-                      </a:solidFill>
-                      <a:prstDash val="solid"/>
-                      <a:round/>
-                      <a:headEnd type="none" w="med" len="med"/>
-                      <a:tailEnd type="none" w="med" len="med"/>
-                    </a:lnB>
-                  </a:tcPr>
-                </a:tc>
-                <a:tc>
-                  <a:txBody>
-                    <a:bodyPr/>
-                    <a:lstStyle/>
-                    <a:p>
-                      <a:pPr algn="ctr" indent="0" marL="0">
-                        <a:buNone/>
-                      </a:pPr>
-                      <a:r>
-                        <a:rPr lang="en-US" sz="1050" b="1" dirty="0">
-                          <a:solidFill>
-                            <a:srgbClr val="6B5300"/>
-                          </a:solidFill>
-                          <a:latin typeface="Calibri" pitchFamily="34" charset="0"/>
-                          <a:ea typeface="Calibri" pitchFamily="34" charset="-122"/>
-                          <a:cs typeface="Calibri" pitchFamily="34" charset="-120"/>
-                        </a:rPr>
-                        <a:t>Moderado</a:t>
-                      </a:r>
-                      <a:endParaRPr lang="en-US" sz="1050" dirty="0">
-                        <a:latin typeface="Calibri" charset="0"/>
-                        <a:ea typeface="Calibri" charset="0"/>
-                        <a:cs typeface="Calibri" charset="0"/>
-                      </a:endParaRPr>
-                    </a:p>
-                  </a:txBody>
-                  <a:tcPr marL="50800" marR="50800" marT="25400" marB="25400" anchor="ctr">
-                    <a:lnL w="9525" cap="flat" cmpd="sng" algn="ctr">
-                      <a:solidFill>
-                        <a:srgbClr val="D6E8E6"/>
-                      </a:solidFill>
-                      <a:prstDash val="solid"/>
-                      <a:round/>
-                      <a:headEnd type="none" w="med" len="med"/>
-                      <a:tailEnd type="none" w="med" len="med"/>
-                    </a:lnL>
-                    <a:lnR w="9525" cap="flat" cmpd="sng" algn="ctr">
-                      <a:solidFill>
-                        <a:srgbClr val="D6E8E6"/>
-                      </a:solidFill>
-                      <a:prstDash val="solid"/>
-                      <a:round/>
-                      <a:headEnd type="none" w="med" len="med"/>
-                      <a:tailEnd type="none" w="med" len="med"/>
-                    </a:lnR>
-                    <a:lnT w="9525" cap="flat" cmpd="sng" algn="ctr">
-                      <a:solidFill>
-                        <a:srgbClr val="D6E8E6"/>
-                      </a:solidFill>
-                      <a:prstDash val="solid"/>
-                      <a:round/>
-                      <a:headEnd type="none" w="med" len="med"/>
-                      <a:tailEnd type="none" w="med" len="med"/>
-                    </a:lnT>
-                    <a:lnB w="9525" cap="flat" cmpd="sng" algn="ctr">
-                      <a:solidFill>
-                        <a:srgbClr val="D6E8E6"/>
-                      </a:solidFill>
-                      <a:prstDash val="solid"/>
-                      <a:round/>
-                      <a:headEnd type="none" w="med" len="med"/>
-                      <a:tailEnd type="none" w="med" len="med"/>
-                    </a:lnB>
-                    <a:solidFill>
-                      <a:srgbClr val="FBF3D5"/>
-                    </a:solidFill>
-                  </a:tcPr>
-                </a:tc>
-              </a:tr>
-              <a:tr h="411480">
-                <a:tc>
-                  <a:txBody>
-                    <a:bodyPr/>
-                    <a:lstStyle/>
-                    <a:p>
-                      <a:pPr indent="0" marL="0">
-                        <a:buNone/>
-                      </a:pPr>
-                      <a:r>
-                        <a:rPr lang="en-US" sz="1050" b="1" dirty="0">
-                          <a:solidFill>
-                            <a:srgbClr val="043F52"/>
-                          </a:solidFill>
-                          <a:latin typeface="Calibri" pitchFamily="34" charset="0"/>
-                          <a:ea typeface="Calibri" pitchFamily="34" charset="-122"/>
-                          <a:cs typeface="Calibri" pitchFamily="34" charset="-120"/>
-                        </a:rPr>
-                        <a:t>Dónde está la señal real</a:t>
-                      </a:r>
-                      <a:endParaRPr lang="en-US" sz="1050" dirty="0">
-                        <a:latin typeface="Calibri" charset="0"/>
-                        <a:ea typeface="Calibri" charset="0"/>
-                        <a:cs typeface="Calibri" charset="0"/>
-                      </a:endParaRPr>
-                    </a:p>
-                  </a:txBody>
-                  <a:tcPr marL="50800" marR="50800" marT="25400" marB="25400" anchor="ctr">
-                    <a:lnL w="9525" cap="flat" cmpd="sng" algn="ctr">
-                      <a:solidFill>
-                        <a:srgbClr val="D6E8E6"/>
-                      </a:solidFill>
-                      <a:prstDash val="solid"/>
-                      <a:round/>
-                      <a:headEnd type="none" w="med" len="med"/>
-                      <a:tailEnd type="none" w="med" len="med"/>
-                    </a:lnL>
-                    <a:lnR w="9525" cap="flat" cmpd="sng" algn="ctr">
-                      <a:solidFill>
-                        <a:srgbClr val="D6E8E6"/>
-                      </a:solidFill>
-                      <a:prstDash val="solid"/>
-                      <a:round/>
-                      <a:headEnd type="none" w="med" len="med"/>
-                      <a:tailEnd type="none" w="med" len="med"/>
-                    </a:lnR>
-                    <a:lnT w="9525" cap="flat" cmpd="sng" algn="ctr">
-                      <a:solidFill>
-                        <a:srgbClr val="D6E8E6"/>
-                      </a:solidFill>
-                      <a:prstDash val="solid"/>
-                      <a:round/>
-                      <a:headEnd type="none" w="med" len="med"/>
-                      <a:tailEnd type="none" w="med" len="med"/>
-                    </a:lnT>
-                    <a:lnB w="9525" cap="flat" cmpd="sng" algn="ctr">
-                      <a:solidFill>
-                        <a:srgbClr val="D6E8E6"/>
-                      </a:solidFill>
-                      <a:prstDash val="solid"/>
-                      <a:round/>
-                      <a:headEnd type="none" w="med" len="med"/>
-                      <a:tailEnd type="none" w="med" len="med"/>
-                    </a:lnB>
-                  </a:tcPr>
-                </a:tc>
-                <a:tc>
-                  <a:txBody>
-                    <a:bodyPr/>
-                    <a:lstStyle/>
-                    <a:p>
-                      <a:pPr indent="0" marL="0">
-                        <a:buNone/>
-                      </a:pPr>
-                      <a:r>
-                        <a:rPr lang="en-US" sz="1050" dirty="0">
-                          <a:solidFill>
-                            <a:srgbClr val="043F52"/>
-                          </a:solidFill>
-                          <a:latin typeface="Calibri" pitchFamily="34" charset="0"/>
-                          <a:ea typeface="Calibri" pitchFamily="34" charset="-122"/>
-                          <a:cs typeface="Calibri" pitchFamily="34" charset="-120"/>
-                        </a:rPr>
-                        <a:t>score_buro (AUC 0,81) y respondio_oferta_previa (0,69). Las otras 18 variables ex ante: AUC &lt; 0,57.</a:t>
-                      </a:r>
-                      <a:endParaRPr lang="en-US" sz="1050" dirty="0">
-                        <a:latin typeface="Calibri" charset="0"/>
-                        <a:ea typeface="Calibri" charset="0"/>
-                        <a:cs typeface="Calibri" charset="0"/>
-                      </a:endParaRPr>
-                    </a:p>
-                  </a:txBody>
-                  <a:tcPr marL="50800" marR="50800" marT="25400" marB="25400" anchor="ctr">
-                    <a:lnL w="9525" cap="flat" cmpd="sng" algn="ctr">
-                      <a:solidFill>
-                        <a:srgbClr val="D6E8E6"/>
-                      </a:solidFill>
-                      <a:prstDash val="solid"/>
-                      <a:round/>
-                      <a:headEnd type="none" w="med" len="med"/>
-                      <a:tailEnd type="none" w="med" len="med"/>
-                    </a:lnL>
-                    <a:lnR w="9525" cap="flat" cmpd="sng" algn="ctr">
-                      <a:solidFill>
-                        <a:srgbClr val="D6E8E6"/>
-                      </a:solidFill>
-                      <a:prstDash val="solid"/>
-                      <a:round/>
-                      <a:headEnd type="none" w="med" len="med"/>
-                      <a:tailEnd type="none" w="med" len="med"/>
-                    </a:lnR>
-                    <a:lnT w="9525" cap="flat" cmpd="sng" algn="ctr">
-                      <a:solidFill>
-                        <a:srgbClr val="D6E8E6"/>
-                      </a:solidFill>
-                      <a:prstDash val="solid"/>
-                      <a:round/>
-                      <a:headEnd type="none" w="med" len="med"/>
-                      <a:tailEnd type="none" w="med" len="med"/>
-                    </a:lnT>
-                    <a:lnB w="9525" cap="flat" cmpd="sng" algn="ctr">
-                      <a:solidFill>
-                        <a:srgbClr val="D6E8E6"/>
-                      </a:solidFill>
-                      <a:prstDash val="solid"/>
-                      <a:round/>
-                      <a:headEnd type="none" w="med" len="med"/>
-                      <a:tailEnd type="none" w="med" len="med"/>
-                    </a:lnB>
-                  </a:tcPr>
-                </a:tc>
-                <a:tc>
-                  <a:txBody>
-                    <a:bodyPr/>
-                    <a:lstStyle/>
-                    <a:p>
-                      <a:pPr indent="0" marL="0">
-                        <a:buNone/>
-                      </a:pPr>
-                      <a:r>
-                        <a:rPr lang="en-US" sz="1050" dirty="0">
-                          <a:solidFill>
-                            <a:srgbClr val="043F52"/>
-                          </a:solidFill>
-                          <a:latin typeface="Calibri" pitchFamily="34" charset="0"/>
-                          <a:ea typeface="Calibri" pitchFamily="34" charset="-122"/>
-                          <a:cs typeface="Calibri" pitchFamily="34" charset="-120"/>
-                        </a:rPr>
-                        <a:t>Un modelo simple y auditable captura casi todo. Verificar permisos y finalidad del uso del score de buró (Ley 1266/2157).</a:t>
+                        <a:t>Un modelo simple captura casi todo</a:t>
                       </a:r>
                       <a:endParaRPr lang="en-US" sz="1050" dirty="0">
                         <a:latin typeface="Calibri" charset="0"/>
@@ -5462,8 +5032,8 @@
         </p:nvSpPr>
         <p:spPr>
           <a:xfrm>
-            <a:off x="457200" y="4983480"/>
-            <a:ext cx="5486400" cy="320040"/>
+            <a:off x="457200" y="4206240"/>
+            <a:ext cx="7315200" cy="320040"/>
           </a:xfrm>
           <a:prstGeom prst="rect">
             <a:avLst/>
@@ -5479,7 +5049,7 @@
               <a:buNone/>
             </a:pPr>
             <a:r>
-              <a:rPr lang="en-US" sz="1300" b="1" dirty="0">
+              <a:rPr lang="en-US" sz="1400" b="1" dirty="0">
                 <a:solidFill>
                   <a:srgbClr val="043F52"/>
                 </a:solidFill>
@@ -5489,7 +5059,7 @@
               </a:rPr>
               <a:t>Decisiones de tratamiento</a:t>
             </a:r>
-            <a:endParaRPr lang="en-US" sz="1300" dirty="0"/>
+            <a:endParaRPr lang="en-US" sz="1400" dirty="0"/>
           </a:p>
         </p:txBody>
       </p:sp>
@@ -5501,8 +5071,8 @@
         </p:nvSpPr>
         <p:spPr>
           <a:xfrm>
-            <a:off x="457200" y="5285232"/>
-            <a:ext cx="11274552" cy="1097280"/>
+            <a:off x="457200" y="4572000"/>
+            <a:ext cx="11274552" cy="1737360"/>
           </a:xfrm>
           <a:prstGeom prst="rect">
             <a:avLst/>
@@ -5516,13 +5086,13 @@
           <a:p>
             <a:pPr marL="177800" indent="-177800">
               <a:spcAft>
-                <a:spcPts val="200"/>
+                <a:spcPts val="500"/>
               </a:spcAft>
               <a:buSzPct val="100000"/>
               <a:buChar char="•"/>
             </a:pPr>
             <a:r>
-              <a:rPr lang="en-US" sz="1050" b="1" dirty="0">
+              <a:rPr lang="en-US" sz="1200" b="1" dirty="0">
                 <a:solidFill>
                   <a:srgbClr val="043F52"/>
                 </a:solidFill>
@@ -5530,16 +5100,16 @@
                 <a:ea typeface="Calibri" pitchFamily="34" charset="-122"/>
                 <a:cs typeface="Calibri" pitchFamily="34" charset="-120"/>
               </a:rPr>
-              <a:t>Excluidas del modelo: </a:t>
+              <a:t>Excluidas: </a:t>
             </a:r>
             <a:pPr indent="0" marL="0">
               <a:spcAft>
-                <a:spcPts val="200"/>
+                <a:spcPts val="500"/>
               </a:spcAft>
               <a:buNone/>
             </a:pPr>
             <a:r>
-              <a:rPr lang="en-US" sz="1050" dirty="0">
+              <a:rPr lang="en-US" sz="1200" dirty="0">
                 <a:solidFill>
                   <a:srgbClr val="043F52"/>
                 </a:solidFill>
@@ -5547,20 +5117,20 @@
                 <a:ea typeface="Calibri" pitchFamily="34" charset="-122"/>
                 <a:cs typeface="Calibri" pitchFamily="34" charset="-120"/>
               </a:rPr>
-              <a:t>resultado_gestion_30d y dias_hasta_renovacion (fuga); mora30_post_renovacion (es resultado); cliente_id; contactabilidad_score (sesgo operacional); recibe_remesas (uso responsable); regional se usa para capacidad, no para rankear.</a:t>
+              <a:t>resultado_gestion_30d, dias_hasta_renovacion y mora30 (resultado); contactabilidad y remesas (sesgo); regional solo para capacidad.</a:t>
             </a:r>
-            <a:endParaRPr lang="en-US" sz="1050" dirty="0"/>
+            <a:endParaRPr lang="en-US" sz="1200" dirty="0"/>
           </a:p>
           <a:p>
             <a:pPr marL="177800" indent="-177800">
               <a:spcAft>
-                <a:spcPts val="200"/>
+                <a:spcPts val="500"/>
               </a:spcAft>
               <a:buSzPct val="100000"/>
               <a:buChar char="•"/>
             </a:pPr>
             <a:r>
-              <a:rPr lang="en-US" sz="1050" b="1" dirty="0">
+              <a:rPr lang="en-US" sz="1200" b="1" dirty="0">
                 <a:solidFill>
                   <a:srgbClr val="043F52"/>
                 </a:solidFill>
@@ -5572,12 +5142,12 @@
             </a:r>
             <a:pPr indent="0" marL="0">
               <a:spcAft>
-                <a:spcPts val="200"/>
+                <a:spcPts val="500"/>
               </a:spcAft>
               <a:buNone/>
             </a:pPr>
             <a:r>
-              <a:rPr lang="en-US" sz="1050" dirty="0">
+              <a:rPr lang="en-US" sz="1200" dirty="0">
                 <a:solidFill>
                   <a:srgbClr val="043F52"/>
                 </a:solidFill>
@@ -5585,20 +5155,20 @@
                 <a:ea typeface="Calibri" pitchFamily="34" charset="-122"/>
                 <a:cs typeface="Calibri" pitchFamily="34" charset="-120"/>
               </a:rPr>
-              <a:t>rolling-origin por mes_corte (entrenar con cortes &lt; t, validar en t, t = abril a agosto), con gap de 30 a 60 días por maduración del target y de la mora. Un cliente nunca en dos particiones del mismo corte.</a:t>
+              <a:t>rolling-origin con un corte de gap (entrenar ≤ t−2, probar en t, mayo a agosto); deduplicar por cliente.</a:t>
             </a:r>
-            <a:endParaRPr lang="en-US" sz="1050" dirty="0"/>
+            <a:endParaRPr lang="en-US" sz="1200" dirty="0"/>
           </a:p>
           <a:p>
             <a:pPr marL="177800" indent="-177800">
               <a:spcAft>
-                <a:spcPts val="200"/>
+                <a:spcPts val="500"/>
               </a:spcAft>
               <a:buSzPct val="100000"/>
               <a:buChar char="•"/>
             </a:pPr>
             <a:r>
-              <a:rPr lang="en-US" sz="1050" b="1" dirty="0">
+              <a:rPr lang="en-US" sz="1200" b="1" dirty="0">
                 <a:solidFill>
                   <a:srgbClr val="043F52"/>
                 </a:solidFill>
@@ -5610,12 +5180,12 @@
             </a:r>
             <a:pPr indent="0" marL="0">
               <a:spcAft>
-                <a:spcPts val="200"/>
+                <a:spcPts val="500"/>
               </a:spcAft>
               <a:buNone/>
             </a:pPr>
             <a:r>
-              <a:rPr lang="en-US" sz="1050" dirty="0">
+              <a:rPr lang="en-US" sz="1200" dirty="0">
                 <a:solidFill>
                   <a:srgbClr val="043F52"/>
                 </a:solidFill>
@@ -5623,9 +5193,9 @@
                 <a:ea typeface="Calibri" pitchFamily="34" charset="-122"/>
                 <a:cs typeface="Calibri" pitchFamily="34" charset="-120"/>
               </a:rPr>
-              <a:t>no remuestrear (daña la calibración); evaluar en el punto de operación (conversión top-32 %, lift, Brier). Accuracy trivial: 79,8 % en la base y 96,4 % en producción sin acertar un renovador.</a:t>
+              <a:t>sin remuestreo; evaluar en el punto de operación (top 32 %, calibración), no con accuracy.</a:t>
             </a:r>
-            <a:endParaRPr lang="en-US" sz="1050" dirty="0"/>
+            <a:endParaRPr lang="en-US" sz="1200" dirty="0"/>
           </a:p>
         </p:txBody>
       </p:sp>
@@ -5753,22 +5323,22 @@
         </p:nvGraphicFramePr>
         <p:xfrm>
           <a:off x="457200" y="1280160"/>
-          <a:ext cx="6949440" cy="914400"/>
+          <a:ext cx="7040880" cy="914400"/>
         </p:xfrm>
         <a:graphic>
           <a:graphicData uri="http://schemas.openxmlformats.org/drawingml/2006/table">
             <a:tbl>
               <a:tblPr/>
               <a:tblGrid>
-                <a:gridCol w="502920"/>
-                <a:gridCol w="731520"/>
                 <a:gridCol w="548640"/>
                 <a:gridCol w="777240"/>
                 <a:gridCol w="640080"/>
-                <a:gridCol w="2834640"/>
+                <a:gridCol w="685800"/>
+                <a:gridCol w="594360"/>
+                <a:gridCol w="2880360"/>
                 <a:gridCol w="914400"/>
               </a:tblGrid>
-              <a:tr h="457200">
+              <a:tr h="512064">
                 <a:tc>
                   <a:txBody>
                     <a:bodyPr/>
@@ -5990,7 +5560,7 @@
                           <a:ea typeface="Calibri" pitchFamily="34" charset="-122"/>
                           <a:cs typeface="Calibri" pitchFamily="34" charset="-120"/>
                         </a:rPr>
-                        <a:t>Conv. top 8k</a:t>
+                        <a:t>Conv. 8k</a:t>
                       </a:r>
                       <a:endParaRPr lang="en-US" sz="1050" dirty="0">
                         <a:latin typeface="Calibri" charset="0"/>
@@ -6058,7 +5628,7 @@
                           <a:ea typeface="Calibri" pitchFamily="34" charset="-122"/>
                           <a:cs typeface="Calibri" pitchFamily="34" charset="-120"/>
                         </a:rPr>
-                        <a:t>Mora 30+</a:t>
+                        <a:t>Mora</a:t>
                       </a:r>
                       <a:endParaRPr lang="en-US" sz="1050" dirty="0">
                         <a:latin typeface="Calibri" charset="0"/>
@@ -6246,7 +5816,7 @@
                   </a:tcPr>
                 </a:tc>
               </a:tr>
-              <a:tr h="457200">
+              <a:tr h="512064">
                 <a:tc>
                   <a:txBody>
                     <a:bodyPr/>
@@ -6589,7 +6159,7 @@
                           <a:ea typeface="Calibri" pitchFamily="34" charset="-122"/>
                           <a:cs typeface="Calibri" pitchFamily="34" charset="-120"/>
                         </a:rPr>
-                        <a:t>Línea base de la decisión; única con conversión observada en producción.</a:t>
+                        <a:t>Línea base; única conversión observada en producción.</a:t>
                       </a:r>
                       <a:endParaRPr lang="en-US" sz="1050" dirty="0">
                         <a:latin typeface="Calibri" charset="0"/>
@@ -6706,7 +6276,7 @@
                   </a:tcPr>
                 </a:tc>
               </a:tr>
-              <a:tr h="457200">
+              <a:tr h="512064">
                 <a:tc>
                   <a:txBody>
                     <a:bodyPr/>
@@ -7049,7 +6619,7 @@
                           <a:ea typeface="Calibri" pitchFamily="34" charset="-122"/>
                           <a:cs typeface="Calibri" pitchFamily="34" charset="-120"/>
                         </a:rPr>
-                        <a:t>«Incluye todas las variables». Replicado: con resultado_gestion_30d el AUC fuera de tiempo es 0,95; sin fuga, 0,80. Inviable en producción.</a:t>
+                        <a:t>Su 0,94 solo se replica con resultado_gestion_30d; sin fuga, 0,79–0,82. Inviable.</a:t>
                       </a:r>
                       <a:endParaRPr lang="en-US" sz="1050" dirty="0">
                         <a:latin typeface="Calibri" charset="0"/>
@@ -7166,7 +6736,7 @@
                   </a:tcPr>
                 </a:tc>
               </a:tr>
-              <a:tr h="457200">
+              <a:tr h="512064">
                 <a:tc>
                   <a:txBody>
                     <a:bodyPr/>
@@ -7509,7 +7079,7 @@
                           <a:ea typeface="Calibri" pitchFamily="34" charset="-122"/>
                           <a:cs typeface="Calibri" pitchFamily="34" charset="-120"/>
                         </a:rPr>
-                        <a:t>Variables «supuestamente» disponibles; 0,86 supera el techo limpio (0,82) y su mora es la peor: selección adversa. Mantener solo tras auditoría point-in-time.</a:t>
+                        <a:t>Supera lo replicable (0,82) pero es otra población; mora, la peor. Auditar variable a variable.</a:t>
                       </a:r>
                       <a:endParaRPr lang="en-US" sz="1050" dirty="0">
                         <a:latin typeface="Calibri" charset="0"/>
@@ -7626,7 +7196,7 @@
                   </a:tcPr>
                 </a:tc>
               </a:tr>
-              <a:tr h="457200">
+              <a:tr h="512064">
                 <a:tc>
                   <a:txBody>
                     <a:bodyPr/>
@@ -7969,7 +7539,7 @@
                           <a:ea typeface="Calibri" pitchFamily="34" charset="-122"/>
                           <a:cs typeface="Calibri" pitchFamily="34" charset="-120"/>
                         </a:rPr>
-                        <a:t>Coherente con la réplica limpia fuera de tiempo (0,79–0,85), calibrado, estable, auditable y con la menor mora.</a:t>
+                        <a:t>Coherente con la réplica limpia (0,78–0,85), calibrado, menor mora. Misma ficha de fuga que A.</a:t>
                       </a:r>
                       <a:endParaRPr lang="en-US" sz="1050" dirty="0">
                         <a:latin typeface="Calibri" charset="0"/>
@@ -8086,7 +7656,7 @@
                   </a:tcPr>
                 </a:tc>
               </a:tr>
-              <a:tr h="457200">
+              <a:tr h="512064">
                 <a:tc>
                   <a:txBody>
                     <a:bodyPr/>
@@ -8364,7 +7934,7 @@
                           <a:ea typeface="Calibri" pitchFamily="34" charset="-122"/>
                           <a:cs typeface="Calibri" pitchFamily="34" charset="-120"/>
                         </a:rPr>
-                        <a:t>+3,1 pp*</a:t>
+                        <a:t>+3,1 pp</a:t>
                       </a:r>
                       <a:endParaRPr lang="en-US" sz="1050" dirty="0">
                         <a:latin typeface="Calibri" charset="0"/>
@@ -8429,7 +7999,7 @@
                           <a:ea typeface="Calibri" pitchFamily="34" charset="-122"/>
                           <a:cs typeface="Calibri" pitchFamily="34" charset="-120"/>
                         </a:rPr>
-                        <a:t>Único que mide efecto del contacto, pero con unidades mezcladas y campaña «parcialmente» aleatorizada sin detalle. Evaluar en el holdout del piloto.</a:t>
+                        <a:t>Único que mide efecto del contacto; unidades mezcladas y aleatorización sin detalle.</a:t>
                       </a:r>
                       <a:endParaRPr lang="en-US" sz="1050" dirty="0">
                         <a:latin typeface="Calibri" charset="0"/>
@@ -8558,47 +8128,8 @@
         </p:nvSpPr>
         <p:spPr>
           <a:xfrm>
-            <a:off x="457200" y="4846320"/>
-            <a:ext cx="6949440" cy="274320"/>
-          </a:xfrm>
-          <a:prstGeom prst="rect">
-            <a:avLst/>
-          </a:prstGeom>
-          <a:noFill/>
-          <a:ln/>
-        </p:spPr>
-        <p:txBody>
-          <a:bodyPr wrap="square" lIns="0" tIns="0" rIns="0" bIns="0" rtlCol="0" anchor="ctr"/>
-          <a:lstStyle/>
-          <a:p>
-            <a:pPr indent="0" marL="0">
-              <a:buNone/>
-            </a:pPr>
-            <a:r>
-              <a:rPr lang="en-US" sz="950" i="1" dirty="0">
-                <a:solidFill>
-                  <a:srgbClr val="4A6A72"/>
-                </a:solidFill>
-                <a:latin typeface="Calibri" pitchFamily="34" charset="0"/>
-                <a:ea typeface="Calibri" pitchFamily="34" charset="-122"/>
-                <a:cs typeface="Calibri" pitchFamily="34" charset="-120"/>
-              </a:rPr>
-              <a:t>* La hoja reporta «+3,1 pp incremental» en la columna de mora y Qini en la de PR-AUC: no es comparable con A, B y C sin aclarar unidades.</a:t>
-            </a:r>
-            <a:endParaRPr lang="en-US" sz="950" dirty="0"/>
-          </a:p>
-        </p:txBody>
-      </p:sp>
-      <p:sp>
-        <p:nvSpPr>
-          <p:cNvPr id="5" name="Text 2"/>
-          <p:cNvSpPr txBox="1"/>
-          <p:nvPr/>
-        </p:nvSpPr>
-        <p:spPr>
-          <a:xfrm>
-            <a:off x="7680960" y="1280160"/>
-            <a:ext cx="4023360" cy="320040"/>
+            <a:off x="7772400" y="1280160"/>
+            <a:ext cx="3959352" cy="320040"/>
           </a:xfrm>
           <a:prstGeom prst="rect">
             <a:avLst/>
@@ -8630,14 +8161,14 @@
       </p:sp>
       <p:sp>
         <p:nvSpPr>
-          <p:cNvPr id="6" name="Text 3"/>
+          <p:cNvPr id="5" name="Text 2"/>
           <p:cNvSpPr txBox="1"/>
           <p:nvPr/>
         </p:nvSpPr>
         <p:spPr>
           <a:xfrm>
-            <a:off x="7680960" y="1572768"/>
-            <a:ext cx="4023360" cy="320040"/>
+            <a:off x="7772400" y="1600200"/>
+            <a:ext cx="3959352" cy="274320"/>
           </a:xfrm>
           <a:prstGeom prst="rect">
             <a:avLst/>
@@ -8653,7 +8184,7 @@
               <a:buNone/>
             </a:pPr>
             <a:r>
-              <a:rPr lang="en-US" sz="1000" dirty="0">
+              <a:rPr lang="en-US" sz="1100" dirty="0">
                 <a:solidFill>
                   <a:srgbClr val="4A6A72"/>
                 </a:solidFill>
@@ -8661,21 +8192,21 @@
                 <a:ea typeface="Calibri" pitchFamily="34" charset="-122"/>
                 <a:cs typeface="Calibri" pitchFamily="34" charset="-120"/>
               </a:rPr>
-              <a:t>AUC fuera de tiempo (entrenar &lt; t, probar en t, abril a agosto) sobre la base entregada</a:t>
+              <a:t>AUC fuera de tiempo: entrenar ≤ t−2, probar en t, mayo a agosto.</a:t>
             </a:r>
-            <a:endParaRPr lang="en-US" sz="1000" dirty="0"/>
+            <a:endParaRPr lang="en-US" sz="1100" dirty="0"/>
           </a:p>
         </p:txBody>
       </p:sp>
       <p:graphicFrame>
         <p:nvGraphicFramePr>
-          <p:cNvPr id="7" name="Chart 0" descr=""/>
+          <p:cNvPr id="6" name="Chart 0" descr=""/>
           <p:cNvGraphicFramePr/>
           <p:nvPr/>
         </p:nvGraphicFramePr>
         <p:xfrm>
-          <a:off x="7680960" y="1874520"/>
-          <a:ext cx="4050792" cy="2377440"/>
+          <a:off x="7772400" y="1874520"/>
+          <a:ext cx="3959352" cy="2148840"/>
         </p:xfrm>
         <a:graphic xmlns:a="http://schemas.openxmlformats.org/drawingml/2006/main">
           <a:graphicData uri="http://schemas.openxmlformats.org/drawingml/2006/chart">
@@ -8685,14 +8216,14 @@
       </p:graphicFrame>
       <p:sp>
         <p:nvSpPr>
-          <p:cNvPr id="8" name="Text 4"/>
+          <p:cNvPr id="7" name="Text 3"/>
           <p:cNvSpPr txBox="1"/>
           <p:nvPr/>
         </p:nvSpPr>
         <p:spPr>
           <a:xfrm>
-            <a:off x="7680960" y="4297680"/>
-            <a:ext cx="4050792" cy="685800"/>
+            <a:off x="7772400" y="4069080"/>
+            <a:ext cx="3959352" cy="548640"/>
           </a:xfrm>
           <a:prstGeom prst="rect">
             <a:avLst/>
@@ -8708,7 +8239,7 @@
               <a:buNone/>
             </a:pPr>
             <a:r>
-              <a:rPr lang="en-US" sz="1050" dirty="0">
+              <a:rPr lang="en-US" sz="1100" dirty="0">
                 <a:solidFill>
                   <a:srgbClr val="043F52"/>
                 </a:solidFill>
@@ -8716,22 +8247,22 @@
                 <a:ea typeface="Calibri" pitchFamily="34" charset="-122"/>
                 <a:cs typeface="Calibri" pitchFamily="34" charset="-120"/>
               </a:rPr>
-              <a:t>Reportado por C: 0,94. Reportado por B: 0,79. Un k-fold aleatorio da 0,82: no esconde la fuga, la temporalidad sí la revela al comparar con el techo limpio.</a:t>
+              <a:t>Reportado: C 0,94 y B 0,79. Un k-fold aleatorio da 0,82: solo la validación temporal revela la fuga.</a:t>
             </a:r>
-            <a:endParaRPr lang="en-US" sz="1050" dirty="0"/>
+            <a:endParaRPr lang="en-US" sz="1100" dirty="0"/>
           </a:p>
         </p:txBody>
       </p:sp>
       <p:sp>
         <p:nvSpPr>
-          <p:cNvPr id="9" name="Text 5"/>
+          <p:cNvPr id="8" name="Text 4"/>
           <p:cNvSpPr txBox="1"/>
           <p:nvPr/>
         </p:nvSpPr>
         <p:spPr>
           <a:xfrm>
-            <a:off x="457200" y="5257800"/>
-            <a:ext cx="5486400" cy="320040"/>
+            <a:off x="457200" y="4846320"/>
+            <a:ext cx="5669280" cy="320040"/>
           </a:xfrm>
           <a:prstGeom prst="rect">
             <a:avLst/>
@@ -8763,14 +8294,14 @@
       </p:sp>
       <p:sp>
         <p:nvSpPr>
-          <p:cNvPr id="10" name="Text 6"/>
+          <p:cNvPr id="9" name="Text 5"/>
           <p:cNvSpPr txBox="1"/>
           <p:nvPr/>
         </p:nvSpPr>
         <p:spPr>
           <a:xfrm>
-            <a:off x="457200" y="5559552"/>
-            <a:ext cx="5669280" cy="822960"/>
+            <a:off x="457200" y="5166360"/>
+            <a:ext cx="5669280" cy="1188720"/>
           </a:xfrm>
           <a:prstGeom prst="rect">
             <a:avLst/>
@@ -8784,13 +8315,13 @@
           <a:p>
             <a:pPr marL="177800" indent="-177800">
               <a:spcAft>
-                <a:spcPts val="100"/>
+                <a:spcPts val="300"/>
               </a:spcAft>
               <a:buSzPct val="100000"/>
               <a:buChar char="•"/>
             </a:pPr>
             <a:r>
-              <a:rPr lang="en-US" sz="1000" dirty="0">
+              <a:rPr lang="en-US" sz="1100" dirty="0">
                 <a:solidFill>
                   <a:srgbClr val="043F52"/>
                 </a:solidFill>
@@ -8798,20 +8329,20 @@
                 <a:ea typeface="Calibri" pitchFamily="34" charset="-122"/>
                 <a:cs typeface="Calibri" pitchFamily="34" charset="-120"/>
               </a:rPr>
-              <a:t>Mide el orden completo; la decisión usa solo el 32 % superior y pondera igual un renovador sano que uno en mora.</a:t>
+              <a:t>Mide el orden completo; la decisión usa solo el 32 % superior y no distingue la mora.</a:t>
             </a:r>
-            <a:endParaRPr lang="en-US" sz="1000" dirty="0"/>
+            <a:endParaRPr lang="en-US" sz="1100" dirty="0"/>
           </a:p>
           <a:p>
             <a:pPr marL="177800" indent="-177800">
               <a:spcAft>
-                <a:spcPts val="100"/>
+                <a:spcPts val="300"/>
               </a:spcAft>
               <a:buSzPct val="100000"/>
               <a:buChar char="•"/>
             </a:pPr>
             <a:r>
-              <a:rPr lang="en-US" sz="1000" dirty="0">
+              <a:rPr lang="en-US" sz="1100" dirty="0">
                 <a:solidFill>
                   <a:srgbClr val="043F52"/>
                 </a:solidFill>
@@ -8819,43 +8350,22 @@
                 <a:ea typeface="Calibri" pitchFamily="34" charset="-122"/>
                 <a:cs typeface="Calibri" pitchFamily="34" charset="-120"/>
               </a:rPr>
-              <a:t>Si lo inflan variables post-contacto, el ranking real en producción será otro.</a:t>
+              <a:t>Propensión alta no es efecto del contacto: llamar a quien renovaría igual gasta cupos.</a:t>
             </a:r>
-            <a:endParaRPr lang="en-US" sz="1000" dirty="0"/>
-          </a:p>
-          <a:p>
-            <a:pPr marL="177800" indent="-177800">
-              <a:spcAft>
-                <a:spcPts val="100"/>
-              </a:spcAft>
-              <a:buSzPct val="100000"/>
-              <a:buChar char="•"/>
-            </a:pPr>
-            <a:r>
-              <a:rPr lang="en-US" sz="1000" dirty="0">
-                <a:solidFill>
-                  <a:srgbClr val="043F52"/>
-                </a:solidFill>
-                <a:latin typeface="Calibri" pitchFamily="34" charset="0"/>
-                <a:ea typeface="Calibri" pitchFamily="34" charset="-122"/>
-                <a:cs typeface="Calibri" pitchFamily="34" charset="-120"/>
-              </a:rPr>
-              <a:t>Propensión alta no es efecto del contacto: llamar a quien renovaría igual consume cupos sin crear valor.</a:t>
-            </a:r>
-            <a:endParaRPr lang="en-US" sz="1000" dirty="0"/>
+            <a:endParaRPr lang="en-US" sz="1100" dirty="0"/>
           </a:p>
         </p:txBody>
       </p:sp>
       <p:sp>
         <p:nvSpPr>
-          <p:cNvPr id="11" name="Text 7"/>
+          <p:cNvPr id="10" name="Text 6"/>
           <p:cNvSpPr txBox="1"/>
           <p:nvPr/>
         </p:nvSpPr>
         <p:spPr>
           <a:xfrm>
-            <a:off x="6400800" y="5257800"/>
-            <a:ext cx="5303520" cy="320040"/>
+            <a:off x="6400800" y="4846320"/>
+            <a:ext cx="5330952" cy="320040"/>
           </a:xfrm>
           <a:prstGeom prst="rect">
             <a:avLst/>
@@ -8887,14 +8397,14 @@
       </p:sp>
       <p:sp>
         <p:nvSpPr>
-          <p:cNvPr id="12" name="Text 8"/>
+          <p:cNvPr id="11" name="Text 7"/>
           <p:cNvSpPr txBox="1"/>
           <p:nvPr/>
         </p:nvSpPr>
         <p:spPr>
           <a:xfrm>
-            <a:off x="6400800" y="5559552"/>
-            <a:ext cx="5330952" cy="822960"/>
+            <a:off x="6400800" y="5166360"/>
+            <a:ext cx="5330952" cy="1188720"/>
           </a:xfrm>
           <a:prstGeom prst="rect">
             <a:avLst/>
@@ -8908,13 +8418,13 @@
           <a:p>
             <a:pPr marL="177800" indent="-177800">
               <a:spcAft>
-                <a:spcPts val="100"/>
+                <a:spcPts val="300"/>
               </a:spcAft>
               <a:buSzPct val="100000"/>
               <a:buChar char="•"/>
             </a:pPr>
             <a:r>
-              <a:rPr lang="en-US" sz="1000" dirty="0">
+              <a:rPr lang="en-US" sz="1100" dirty="0">
                 <a:solidFill>
                   <a:srgbClr val="043F52"/>
                 </a:solidFill>
@@ -8922,20 +8432,20 @@
                 <a:ea typeface="Calibri" pitchFamily="34" charset="-122"/>
                 <a:cs typeface="Calibri" pitchFamily="34" charset="-120"/>
               </a:rPr>
-              <a:t>Indicador de tratamiento y control con la regla de asignación de la campaña de D (fracción aleatorizada, unidad, cumplimiento).</a:t>
+              <a:t>La regla de asignación de la campaña de D: fracción aleatorizada, unidad y cumplimiento.</a:t>
             </a:r>
-            <a:endParaRPr lang="en-US" sz="1000" dirty="0"/>
+            <a:endParaRPr lang="en-US" sz="1100" dirty="0"/>
           </a:p>
           <a:p>
             <a:pPr marL="177800" indent="-177800">
               <a:spcAft>
-                <a:spcPts val="100"/>
+                <a:spcPts val="300"/>
               </a:spcAft>
               <a:buSzPct val="100000"/>
               <a:buChar char="•"/>
             </a:pPr>
             <a:r>
-              <a:rPr lang="en-US" sz="1000" dirty="0">
+              <a:rPr lang="en-US" sz="1100" dirty="0">
                 <a:solidFill>
                   <a:srgbClr val="043F52"/>
                 </a:solidFill>
@@ -8943,9 +8453,9 @@
                 <a:ea typeface="Calibri" pitchFamily="34" charset="-122"/>
                 <a:cs typeface="Calibri" pitchFamily="34" charset="-120"/>
               </a:rPr>
-              <a:t>Un mismo holdout aleatorizado donde se mida uplift@8k de cada modelo, en renovaciones y COP netos de mora, con intervalos.</a:t>
+              <a:t>Un mismo holdout donde medir uplift@8k de cada modelo en COP netos de mora, con intervalos.</a:t>
             </a:r>
-            <a:endParaRPr lang="en-US" sz="1000" dirty="0"/>
+            <a:endParaRPr lang="en-US" sz="1100" dirty="0"/>
           </a:p>
         </p:txBody>
       </p:sp>
@@ -9066,7 +8576,7 @@
         <p:spPr>
           <a:xfrm>
             <a:off x="457200" y="1280160"/>
-            <a:ext cx="6400800" cy="320040"/>
+            <a:ext cx="6583680" cy="320040"/>
           </a:xfrm>
           <a:prstGeom prst="rect">
             <a:avLst/>
@@ -9090,7 +8600,7 @@
                 <a:ea typeface="Calibri" pitchFamily="34" charset="-122"/>
                 <a:cs typeface="Calibri" pitchFamily="34" charset="-120"/>
               </a:rPr>
-              <a:t>Valor esperado mensual neto de mora sobre 8.000 contactos</a:t>
+              <a:t>Valor esperado mensual neto de mora (COP millones)</a:t>
             </a:r>
             <a:endParaRPr lang="en-US" sz="1300" dirty="0"/>
           </a:p>
@@ -9104,8 +8614,8 @@
         </p:nvSpPr>
         <p:spPr>
           <a:xfrm>
-            <a:off x="457200" y="1572768"/>
-            <a:ext cx="6583680" cy="365760"/>
+            <a:off x="457200" y="1600200"/>
+            <a:ext cx="6583680" cy="411480"/>
           </a:xfrm>
           <a:prstGeom prst="rect">
             <a:avLst/>
@@ -9121,7 +8631,7 @@
               <a:buNone/>
             </a:pPr>
             <a:r>
-              <a:rPr lang="en-US" sz="1000" dirty="0">
+              <a:rPr lang="en-US" sz="1100" dirty="0">
                 <a:solidFill>
                   <a:srgbClr val="4A6A72"/>
                 </a:solidFill>
@@ -9129,9 +8639,9 @@
                 <a:ea typeface="Calibri" pitchFamily="34" charset="-122"/>
                 <a:cs typeface="Calibri" pitchFamily="34" charset="-120"/>
               </a:rPr>
-              <a:t>COP millones. Renovaciones × (420.000 − mora × 1.800.000). D con mora supuesta 5,1 %. C mostrada solo como referencia: no es confiable.</a:t>
+              <a:t>8.000 contactos × conversión × (420.000 − mora × 1.800.000). D con mora 5,1 % supuesta; C descartada por fuga.</a:t>
             </a:r>
-            <a:endParaRPr lang="en-US" sz="1000" dirty="0"/>
+            <a:endParaRPr lang="en-US" sz="1100" dirty="0"/>
           </a:p>
         </p:txBody>
       </p:sp>
@@ -9142,8 +8652,8 @@
           <p:nvPr/>
         </p:nvGraphicFramePr>
         <p:xfrm>
-          <a:off x="457200" y="1920240"/>
-          <a:ext cx="6583680" cy="2194560"/>
+          <a:off x="457200" y="2011680"/>
+          <a:ext cx="6583680" cy="2103120"/>
         </p:xfrm>
         <a:graphic xmlns:a="http://schemas.openxmlformats.org/drawingml/2006/main">
           <a:graphicData uri="http://schemas.openxmlformats.org/drawingml/2006/chart">
@@ -9153,18 +8663,18 @@
       </p:graphicFrame>
       <p:sp>
         <p:nvSpPr>
-          <p:cNvPr id="6" name="B vs. actual"/>
+          <p:cNvPr id="6" name="B VS. ACTUAL"/>
           <p:cNvSpPr/>
           <p:nvPr/>
         </p:nvSpPr>
         <p:spPr>
           <a:xfrm>
             <a:off x="7269480" y="1280160"/>
-            <a:ext cx="2148840" cy="1463040"/>
+            <a:ext cx="2148840" cy="1417320"/>
           </a:xfrm>
           <a:prstGeom prst="roundRect">
             <a:avLst>
-              <a:gd name="adj" fmla="val 7500"/>
+              <a:gd name="adj" fmla="val 7742"/>
             </a:avLst>
           </a:prstGeom>
           <a:solidFill>
@@ -9203,7 +8713,7 @@
               <a:buNone/>
             </a:pPr>
             <a:r>
-              <a:rPr lang="en-US" sz="1000" b="1" spc="150" kern="0" dirty="0">
+              <a:rPr lang="en-US" sz="1100" b="1" spc="150" kern="0" dirty="0">
                 <a:solidFill>
                   <a:srgbClr val="043F52"/>
                 </a:solidFill>
@@ -9211,9 +8721,9 @@
                 <a:ea typeface="Calibri" pitchFamily="34" charset="-122"/>
                 <a:cs typeface="Calibri" pitchFamily="34" charset="-120"/>
               </a:rPr>
-              <a:t>B vs. actual</a:t>
+              <a:t>B VS. ACTUAL</a:t>
             </a:r>
-            <a:endParaRPr lang="en-US" sz="1000" dirty="0"/>
+            <a:endParaRPr lang="en-US" sz="1100" dirty="0"/>
           </a:p>
         </p:txBody>
       </p:sp>
@@ -9265,7 +8775,7 @@
         <p:spPr>
           <a:xfrm>
             <a:off x="7434072" y="2240280"/>
-            <a:ext cx="1819656" cy="411480"/>
+            <a:ext cx="1819656" cy="365760"/>
           </a:xfrm>
           <a:prstGeom prst="rect">
             <a:avLst/>
@@ -9289,7 +8799,7 @@
                 <a:ea typeface="Calibri" pitchFamily="34" charset="-122"/>
                 <a:cs typeface="Calibri" pitchFamily="34" charset="-120"/>
               </a:rPr>
-              <a:t>al mes, si las conversiones «top 8k» se sostienen en producción.</a:t>
+              <a:t>al mes si el «top 8k» se sostiene.</a:t>
             </a:r>
             <a:endParaRPr lang="en-US" sz="1100" dirty="0"/>
           </a:p>
@@ -9297,18 +8807,18 @@
       </p:sp>
       <p:sp>
         <p:nvSpPr>
-          <p:cNvPr id="10" name="Valor por renovación"/>
+          <p:cNvPr id="10" name="POR RENOVACIÓN"/>
           <p:cNvSpPr/>
           <p:nvPr/>
         </p:nvSpPr>
         <p:spPr>
           <a:xfrm>
             <a:off x="9582912" y="1280160"/>
-            <a:ext cx="2148840" cy="1463040"/>
+            <a:ext cx="2148840" cy="1417320"/>
           </a:xfrm>
           <a:prstGeom prst="roundRect">
             <a:avLst>
-              <a:gd name="adj" fmla="val 7500"/>
+              <a:gd name="adj" fmla="val 7742"/>
             </a:avLst>
           </a:prstGeom>
           <a:solidFill>
@@ -9347,7 +8857,7 @@
               <a:buNone/>
             </a:pPr>
             <a:r>
-              <a:rPr lang="en-US" sz="1000" b="1" spc="150" kern="0" dirty="0">
+              <a:rPr lang="en-US" sz="1100" b="1" spc="150" kern="0" dirty="0">
                 <a:solidFill>
                   <a:srgbClr val="043F52"/>
                 </a:solidFill>
@@ -9355,9 +8865,9 @@
                 <a:ea typeface="Calibri" pitchFamily="34" charset="-122"/>
                 <a:cs typeface="Calibri" pitchFamily="34" charset="-120"/>
               </a:rPr>
-              <a:t>Valor por renovación</a:t>
+              <a:t>POR RENOVACIÓN</a:t>
             </a:r>
-            <a:endParaRPr lang="en-US" sz="1000" dirty="0"/>
+            <a:endParaRPr lang="en-US" sz="1100" dirty="0"/>
           </a:p>
         </p:txBody>
       </p:sp>
@@ -9409,7 +8919,7 @@
         <p:spPr>
           <a:xfrm>
             <a:off x="9747504" y="2240280"/>
-            <a:ext cx="1819656" cy="411480"/>
+            <a:ext cx="1819656" cy="365760"/>
           </a:xfrm>
           <a:prstGeom prst="rect">
             <a:avLst/>
@@ -9433,7 +8943,7 @@
                 <a:ea typeface="Calibri" pitchFamily="34" charset="-122"/>
                 <a:cs typeface="Calibri" pitchFamily="34" charset="-120"/>
               </a:rPr>
-              <a:t>B frente a A: la mora 4,6 % vs 7,2 % vale más que 0,6 pp de conversión.</a:t>
+              <a:t>B vs. A: la mora pesa más que 0,6 pp.</a:t>
             </a:r>
             <a:endParaRPr lang="en-US" sz="1100" dirty="0"/>
           </a:p>
@@ -9447,7 +8957,7 @@
         </p:nvSpPr>
         <p:spPr>
           <a:xfrm>
-            <a:off x="7269480" y="2880360"/>
+            <a:off x="7269480" y="2834640"/>
             <a:ext cx="4480560" cy="320040"/>
           </a:xfrm>
           <a:prstGeom prst="rect">
@@ -9486,8 +8996,8 @@
         </p:nvSpPr>
         <p:spPr>
           <a:xfrm>
-            <a:off x="7269480" y="3200400"/>
-            <a:ext cx="4462272" cy="1280160"/>
+            <a:off x="7269480" y="3154680"/>
+            <a:ext cx="4462272" cy="1188720"/>
           </a:xfrm>
           <a:prstGeom prst="rect">
             <a:avLst/>
@@ -9507,7 +9017,7 @@
               <a:buChar char="•"/>
             </a:pPr>
             <a:r>
-              <a:rPr lang="en-US" sz="1050" dirty="0">
+              <a:rPr lang="en-US" sz="1100" dirty="0">
                 <a:solidFill>
                   <a:srgbClr val="043F52"/>
                 </a:solidFill>
@@ -9515,9 +9025,9 @@
                 <a:ea typeface="Calibri" pitchFamily="34" charset="-122"/>
                 <a:cs typeface="Calibri" pitchFamily="34" charset="-120"/>
               </a:rPr>
-              <a:t>No es incremental: si la mitad de las 704 renovaciones de B ocurriría sin contacto, el valor baja a 119 M.</a:t>
+              <a:t>No incremental: si la mitad de las 704 renovaciones de B fuera orgánica, baja a 119 M.</a:t>
             </a:r>
-            <a:endParaRPr lang="en-US" sz="1050" dirty="0"/>
+            <a:endParaRPr lang="en-US" sz="1100" dirty="0"/>
           </a:p>
           <a:p>
             <a:pPr marL="177800" indent="-177800">
@@ -9528,7 +9038,7 @@
               <a:buChar char="•"/>
             </a:pPr>
             <a:r>
-              <a:rPr lang="en-US" sz="1050" dirty="0">
+              <a:rPr lang="en-US" sz="1100" dirty="0">
                 <a:solidFill>
                   <a:srgbClr val="043F52"/>
                 </a:solidFill>
@@ -9536,9 +9046,9 @@
                 <a:ea typeface="Calibri" pitchFamily="34" charset="-122"/>
                 <a:cs typeface="Calibri" pitchFamily="34" charset="-120"/>
               </a:rPr>
-              <a:t>A supera a B solo si su mora real es &lt; 5,8 %; con pérdida de 3,5 M por mora, B 182 M vs. A 126 M.</a:t>
+              <a:t>B vs. A: conversión no distinguible (z ≈ 1,3), mora apenas (z ≈ 2,1); B gana por robustez.</a:t>
             </a:r>
-            <a:endParaRPr lang="en-US" sz="1050" dirty="0"/>
+            <a:endParaRPr lang="en-US" sz="1100" dirty="0"/>
           </a:p>
           <a:p>
             <a:pPr marL="177800" indent="-177800">
@@ -9549,7 +9059,7 @@
               <a:buChar char="•"/>
             </a:pPr>
             <a:r>
-              <a:rPr lang="en-US" sz="1050" dirty="0">
+              <a:rPr lang="en-US" sz="1100" dirty="0">
                 <a:solidFill>
                   <a:srgbClr val="043F52"/>
                 </a:solidFill>
@@ -9557,9 +9067,9 @@
                 <a:ea typeface="Calibri" pitchFamily="34" charset="-122"/>
                 <a:cs typeface="Calibri" pitchFamily="34" charset="-120"/>
               </a:rPr>
-              <a:t>Faltan costo de contacto, LGD real y el origen de las conversiones «top 8k» (no salen de esta base).</a:t>
+              <a:t>A supera a B solo con mora &lt; 5,8 %. Faltan costo de contacto, LGD y origen del «top 8k».</a:t>
             </a:r>
-            <a:endParaRPr lang="en-US" sz="1050" dirty="0"/>
+            <a:endParaRPr lang="en-US" sz="1100" dirty="0"/>
           </a:p>
         </p:txBody>
       </p:sp>
@@ -9571,7 +9081,7 @@
         </p:nvSpPr>
         <p:spPr>
           <a:xfrm>
-            <a:off x="457200" y="4251960"/>
+            <a:off x="457200" y="4297680"/>
             <a:ext cx="9144000" cy="320040"/>
           </a:xfrm>
           <a:prstGeom prst="rect">
@@ -9596,7 +9106,7 @@
                 <a:ea typeface="Calibri" pitchFamily="34" charset="-122"/>
                 <a:cs typeface="Calibri" pitchFamily="34" charset="-120"/>
               </a:rPr>
-              <a:t>De score a lista operativa: cuotas por regional con transferencia por valor marginal</a:t>
+              <a:t>Lista operativa: cuotas por regional con transferencia por valor marginal</a:t>
             </a:r>
             <a:endParaRPr lang="en-US" sz="1300" dirty="0"/>
           </a:p>
@@ -9617,7 +9127,7 @@
           </p:nvPr>
         </p:nvGraphicFramePr>
         <p:xfrm>
-          <a:off x="457200" y="4572000"/>
+          <a:off x="457200" y="4617720"/>
           <a:ext cx="11274552" cy="914400"/>
         </p:xfrm>
         <a:graphic>
@@ -9628,11 +9138,11 @@
                 <a:gridCol w="1371600"/>
                 <a:gridCol w="1005840"/>
                 <a:gridCol w="1371600"/>
-                <a:gridCol w="1463040"/>
+                <a:gridCol w="1554480"/>
                 <a:gridCol w="914400"/>
-                <a:gridCol w="5148072"/>
+                <a:gridCol w="5056632"/>
               </a:tblGrid>
-              <a:tr h="237744">
+              <a:tr h="256032">
                 <a:tc>
                   <a:txBody>
                     <a:bodyPr/>
@@ -10042,7 +9552,7 @@
                   </a:tcPr>
                 </a:tc>
               </a:tr>
-              <a:tr h="237744">
+              <a:tr h="256032">
                 <a:tc>
                   <a:txBody>
                     <a:bodyPr/>
@@ -10190,7 +9700,7 @@
                           <a:ea typeface="Calibri" pitchFamily="34" charset="-122"/>
                           <a:cs typeface="Calibri" pitchFamily="34" charset="-120"/>
                         </a:rPr>
-                        <a:t>2.332</a:t>
+                        <a:t>≈ 2.400</a:t>
                       </a:r>
                       <a:endParaRPr lang="en-US" sz="1050" dirty="0">
                         <a:latin typeface="Calibri" charset="0"/>
@@ -10255,7 +9765,7 @@
                           <a:ea typeface="Calibri" pitchFamily="34" charset="-122"/>
                           <a:cs typeface="Calibri" pitchFamily="34" charset="-120"/>
                         </a:rPr>
-                        <a:t>−268 ociosos</a:t>
+                        <a:t>≈ −200 ociosos</a:t>
                       </a:r>
                       <a:endParaRPr lang="en-US" sz="1050" dirty="0">
                         <a:latin typeface="Calibri" charset="0"/>
@@ -10385,7 +9895,7 @@
                           <a:ea typeface="Calibri" pitchFamily="34" charset="-122"/>
                           <a:cs typeface="Calibri" pitchFamily="34" charset="-120"/>
                         </a:rPr>
-                        <a:t>Cuota llena con su propio ranking; cede cupos sobrantes</a:t>
+                        <a:t>Llena su cuota con su ranking; cede sobrantes</a:t>
                       </a:r>
                       <a:endParaRPr lang="en-US" sz="1050" dirty="0">
                         <a:latin typeface="Calibri" charset="0"/>
@@ -10434,7 +9944,7 @@
                   </a:tcPr>
                 </a:tc>
               </a:tr>
-              <a:tr h="237744">
+              <a:tr h="256032">
                 <a:tc>
                   <a:txBody>
                     <a:bodyPr/>
@@ -10582,7 +10092,7 @@
                           <a:ea typeface="Calibri" pitchFamily="34" charset="-122"/>
                           <a:cs typeface="Calibri" pitchFamily="34" charset="-120"/>
                         </a:rPr>
-                        <a:t>2.117</a:t>
+                        <a:t>≈ 2.100</a:t>
                       </a:r>
                       <a:endParaRPr lang="en-US" sz="1050" dirty="0">
                         <a:latin typeface="Calibri" charset="0"/>
@@ -10647,7 +10157,7 @@
                           <a:ea typeface="Calibri" pitchFamily="34" charset="-122"/>
                           <a:cs typeface="Calibri" pitchFamily="34" charset="-120"/>
                         </a:rPr>
-                        <a:t>+217 sin gestor</a:t>
+                        <a:t>≈ +200 sin gestor</a:t>
                       </a:r>
                       <a:endParaRPr lang="en-US" sz="1050" dirty="0">
                         <a:latin typeface="Calibri" charset="0"/>
@@ -10777,7 +10287,7 @@
                           <a:ea typeface="Calibri" pitchFamily="34" charset="-122"/>
                           <a:cs typeface="Calibri" pitchFamily="34" charset="-120"/>
                         </a:rPr>
-                        <a:t>Corte por cuota; lista semanal para evitar saturación de cierre de mes</a:t>
+                        <a:t>Corte por cuota; lista semanal contra saturación de cierre</a:t>
                       </a:r>
                       <a:endParaRPr lang="en-US" sz="1050" dirty="0">
                         <a:latin typeface="Calibri" charset="0"/>
@@ -10826,7 +10336,7 @@
                   </a:tcPr>
                 </a:tc>
               </a:tr>
-              <a:tr h="237744">
+              <a:tr h="256032">
                 <a:tc>
                   <a:txBody>
                     <a:bodyPr/>
@@ -10974,7 +10484,7 @@
                           <a:ea typeface="Calibri" pitchFamily="34" charset="-122"/>
                           <a:cs typeface="Calibri" pitchFamily="34" charset="-120"/>
                         </a:rPr>
-                        <a:t>1.435</a:t>
+                        <a:t>≈ 1.300</a:t>
                       </a:r>
                       <a:endParaRPr lang="en-US" sz="1050" dirty="0">
                         <a:latin typeface="Calibri" charset="0"/>
@@ -11039,7 +10549,7 @@
                           <a:ea typeface="Calibri" pitchFamily="34" charset="-122"/>
                           <a:cs typeface="Calibri" pitchFamily="34" charset="-120"/>
                         </a:rPr>
-                        <a:t>+235 sin gestor</a:t>
+                        <a:t>≈ +100 sin gestor</a:t>
                       </a:r>
                       <a:endParaRPr lang="en-US" sz="1050" dirty="0">
                         <a:latin typeface="Calibri" charset="0"/>
@@ -11169,7 +10679,7 @@
                           <a:ea typeface="Calibri" pitchFamily="34" charset="-122"/>
                           <a:cs typeface="Calibri" pitchFamily="34" charset="-120"/>
                         </a:rPr>
-                        <a:t>Mayor valor marginal (93 k por último contacto): recibe cupos transferidos</a:t>
+                        <a:t>Mayor valor marginal (86 k): recibe cupos transferidos</a:t>
                       </a:r>
                       <a:endParaRPr lang="en-US" sz="1050" dirty="0">
                         <a:latin typeface="Calibri" charset="0"/>
@@ -11218,7 +10728,7 @@
                   </a:tcPr>
                 </a:tc>
               </a:tr>
-              <a:tr h="237744">
+              <a:tr h="256032">
                 <a:tc>
                   <a:txBody>
                     <a:bodyPr/>
@@ -11366,7 +10876,7 @@
                           <a:ea typeface="Calibri" pitchFamily="34" charset="-122"/>
                           <a:cs typeface="Calibri" pitchFamily="34" charset="-120"/>
                         </a:rPr>
-                        <a:t>1.148</a:t>
+                        <a:t>≈ 1.100</a:t>
                       </a:r>
                       <a:endParaRPr lang="en-US" sz="1050" dirty="0">
                         <a:latin typeface="Calibri" charset="0"/>
@@ -11431,7 +10941,7 @@
                           <a:ea typeface="Calibri" pitchFamily="34" charset="-122"/>
                           <a:cs typeface="Calibri" pitchFamily="34" charset="-120"/>
                         </a:rPr>
-                        <a:t>+148 sin gestor</a:t>
+                        <a:t>≈ +100 sin gestor</a:t>
                       </a:r>
                       <a:endParaRPr lang="en-US" sz="1050" dirty="0">
                         <a:latin typeface="Calibri" charset="0"/>
@@ -11561,7 +11071,7 @@
                           <a:ea typeface="Calibri" pitchFamily="34" charset="-122"/>
                           <a:cs typeface="Calibri" pitchFamily="34" charset="-120"/>
                         </a:rPr>
-                        <a:t>Corte por cuota; segundo en valor marginal (90 k)</a:t>
+                        <a:t>Corte por cuota; segundo valor marginal (81 k)</a:t>
                       </a:r>
                       <a:endParaRPr lang="en-US" sz="1050" dirty="0">
                         <a:latin typeface="Calibri" charset="0"/>
@@ -11610,7 +11120,7 @@
                   </a:tcPr>
                 </a:tc>
               </a:tr>
-              <a:tr h="237744">
+              <a:tr h="256032">
                 <a:tc>
                   <a:txBody>
                     <a:bodyPr/>
@@ -11758,7 +11268,7 @@
                           <a:ea typeface="Calibri" pitchFamily="34" charset="-122"/>
                           <a:cs typeface="Calibri" pitchFamily="34" charset="-120"/>
                         </a:rPr>
-                        <a:t>969</a:t>
+                        <a:t>≈ 1.100</a:t>
                       </a:r>
                       <a:endParaRPr lang="en-US" sz="1050" dirty="0">
                         <a:latin typeface="Calibri" charset="0"/>
@@ -11823,7 +11333,7 @@
                           <a:ea typeface="Calibri" pitchFamily="34" charset="-122"/>
                           <a:cs typeface="Calibri" pitchFamily="34" charset="-120"/>
                         </a:rPr>
-                        <a:t>−331 ociosos</a:t>
+                        <a:t>≈ −200 ociosos</a:t>
                       </a:r>
                       <a:endParaRPr lang="en-US" sz="1050" dirty="0">
                         <a:latin typeface="Calibri" charset="0"/>
@@ -11953,7 +11463,7 @@
                           <a:ea typeface="Calibri" pitchFamily="34" charset="-122"/>
                           <a:cs typeface="Calibri" pitchFamily="34" charset="-120"/>
                         </a:rPr>
-                        <a:t>Menor valor marginal (60 k): transfiere hasta 10 % de su cuota</a:t>
+                        <a:t>Menor valor marginal (61 k): cede cupos, tope a pactar (10 %)</a:t>
                       </a:r>
                       <a:endParaRPr lang="en-US" sz="1050" dirty="0">
                         <a:latin typeface="Calibri" charset="0"/>
@@ -12014,8 +11524,8 @@
         </p:nvSpPr>
         <p:spPr>
           <a:xfrm>
-            <a:off x="457200" y="6144768"/>
-            <a:ext cx="11274552" cy="274320"/>
+            <a:off x="457200" y="6172200"/>
+            <a:ext cx="11274552" cy="256032"/>
           </a:xfrm>
           <a:prstGeom prst="rect">
             <a:avLst/>
@@ -12031,7 +11541,7 @@
               <a:buNone/>
             </a:pPr>
             <a:r>
-              <a:rPr lang="en-US" sz="900" i="1" dirty="0">
+              <a:rPr lang="en-US" sz="1100" i="1" dirty="0">
                 <a:solidFill>
                   <a:srgbClr val="4A6A72"/>
                 </a:solidFill>
@@ -12039,9 +11549,9 @@
                 <a:ea typeface="Calibri" pitchFamily="34" charset="-122"/>
                 <a:cs typeface="Calibri" pitchFamily="34" charset="-120"/>
               </a:rPr>
-              <a:t>Simulación con un modelo logístico limpio sobre los cortes junio a agosto (n = 696), VE = p × (420.000 − mora regional × 1.800.000). Con cuotas, la conversión del top 32 % cae de 43,5 % a 41,9 % en muestra, pero la lista es ejecutable.</a:t>
+              <a:t>Logística limpia, junio–agosto (n = 696); proyección a centenas con la mezcla regional de la muestra.</a:t>
             </a:r>
-            <a:endParaRPr lang="en-US" sz="900" dirty="0"/>
+            <a:endParaRPr lang="en-US" sz="1100" dirty="0"/>
           </a:p>
         </p:txBody>
       </p:sp>
@@ -12147,7 +11657,7 @@
                   <a:srgbClr val="043F52"/>
                 </a:solidFill>
               </a:rPr>
-              <a:t>5 · Un piloto de dos meses con tres brazos prueba la incrementalidad; el riesgo se controla por política, no por el piloto</a:t>
+              <a:t>5 · Un piloto de dos meses mide si la lista nueva convierte más y si el contacto crea renovaciones; el riesgo se controla por política</a:t>
             </a:r>
             <a:endParaRPr lang="en-US" sz="2400" dirty="0"/>
           </a:p>
@@ -12161,8 +11671,8 @@
         </p:nvSpPr>
         <p:spPr>
           <a:xfrm>
-            <a:off x="457200" y="1325880"/>
-            <a:ext cx="6400800" cy="320040"/>
+            <a:off x="457200" y="1280160"/>
+            <a:ext cx="6858000" cy="320040"/>
           </a:xfrm>
           <a:prstGeom prst="rect">
             <a:avLst/>
@@ -12186,7 +11696,7 @@
                 <a:ea typeface="Calibri" pitchFamily="34" charset="-122"/>
                 <a:cs typeface="Calibri" pitchFamily="34" charset="-120"/>
               </a:rPr>
-              <a:t>Diseño: aleatorización por cliente, estratificada por regional</a:t>
+              <a:t>Diseño: dos pools al azar, mismo piso de riesgo</a:t>
             </a:r>
             <a:endParaRPr lang="en-US" sz="1300" dirty="0"/>
           </a:p>
@@ -12194,18 +11704,18 @@
       </p:sp>
       <p:sp>
         <p:nvSpPr>
-          <p:cNvPr id="4" name="Shape 2"/>
+          <p:cNvPr id="4" name="CHAMPION"/>
           <p:cNvSpPr/>
           <p:nvPr/>
         </p:nvSpPr>
         <p:spPr>
           <a:xfrm>
-            <a:off x="457200" y="1691640"/>
-            <a:ext cx="2148840" cy="1325880"/>
+            <a:off x="457200" y="1645920"/>
+            <a:ext cx="2194560" cy="1371600"/>
           </a:xfrm>
           <a:prstGeom prst="roundRect">
             <a:avLst>
-              <a:gd name="adj" fmla="val 8276"/>
+              <a:gd name="adj" fmla="val 8000"/>
             </a:avLst>
           </a:prstGeom>
           <a:solidFill>
@@ -12227,8 +11737,8 @@
         </p:nvSpPr>
         <p:spPr>
           <a:xfrm>
-            <a:off x="594360" y="1783080"/>
-            <a:ext cx="1874520" cy="256032"/>
+            <a:off x="594360" y="1737360"/>
+            <a:ext cx="1920240" cy="256032"/>
           </a:xfrm>
           <a:prstGeom prst="rect">
             <a:avLst/>
@@ -12244,7 +11754,7 @@
               <a:buNone/>
             </a:pPr>
             <a:r>
-              <a:rPr lang="en-US" sz="1000" b="1" spc="150" kern="0" dirty="0">
+              <a:rPr lang="en-US" sz="1100" b="1" spc="150" kern="0" dirty="0">
                 <a:solidFill>
                   <a:srgbClr val="043F52"/>
                 </a:solidFill>
@@ -12254,7 +11764,7 @@
               </a:rPr>
               <a:t>CHAMPION</a:t>
             </a:r>
-            <a:endParaRPr lang="en-US" sz="1000" dirty="0"/>
+            <a:endParaRPr lang="en-US" sz="1100" dirty="0"/>
           </a:p>
         </p:txBody>
       </p:sp>
@@ -12266,8 +11776,8 @@
         </p:nvSpPr>
         <p:spPr>
           <a:xfrm>
-            <a:off x="594360" y="2057400"/>
-            <a:ext cx="1874520" cy="548640"/>
+            <a:off x="594360" y="2011680"/>
+            <a:ext cx="1920240" cy="685800"/>
           </a:xfrm>
           <a:prstGeom prst="rect">
             <a:avLst/>
@@ -12291,7 +11801,7 @@
                 <a:ea typeface="Calibri" pitchFamily="34" charset="-122"/>
                 <a:cs typeface="Calibri" pitchFamily="34" charset="-120"/>
               </a:rPr>
-              <a:t>Herramienta actual</a:t>
+              <a:t>Herramienta actual elige sus 4.000 en su pool</a:t>
             </a:r>
             <a:endParaRPr lang="en-US" sz="1200" dirty="0"/>
           </a:p>
@@ -12305,8 +11815,8 @@
         </p:nvSpPr>
         <p:spPr>
           <a:xfrm>
-            <a:off x="594360" y="2633472"/>
-            <a:ext cx="1874520" cy="274320"/>
+            <a:off x="594360" y="2651760"/>
+            <a:ext cx="1920240" cy="274320"/>
           </a:xfrm>
           <a:prstGeom prst="rect">
             <a:avLst/>
@@ -12322,7 +11832,7 @@
               <a:buNone/>
             </a:pPr>
             <a:r>
-              <a:rPr lang="en-US" sz="1050" dirty="0">
+              <a:rPr lang="en-US" sz="1100" dirty="0">
                 <a:solidFill>
                   <a:srgbClr val="043F52"/>
                 </a:solidFill>
@@ -12332,24 +11842,24 @@
               </a:rPr>
               <a:t>4.000 contactos/mes</a:t>
             </a:r>
-            <a:endParaRPr lang="en-US" sz="1050" dirty="0"/>
+            <a:endParaRPr lang="en-US" sz="1100" dirty="0"/>
           </a:p>
         </p:txBody>
       </p:sp>
       <p:sp>
         <p:nvSpPr>
-          <p:cNvPr id="8" name="Shape 6"/>
+          <p:cNvPr id="8" name="CHALLENGER"/>
           <p:cNvSpPr/>
           <p:nvPr/>
         </p:nvSpPr>
         <p:spPr>
           <a:xfrm>
-            <a:off x="2743200" y="1691640"/>
-            <a:ext cx="2148840" cy="1325880"/>
+            <a:off x="2788920" y="1645920"/>
+            <a:ext cx="2194560" cy="1371600"/>
           </a:xfrm>
           <a:prstGeom prst="roundRect">
             <a:avLst>
-              <a:gd name="adj" fmla="val 8276"/>
+              <a:gd name="adj" fmla="val 8000"/>
             </a:avLst>
           </a:prstGeom>
           <a:solidFill>
@@ -12371,8 +11881,8 @@
         </p:nvSpPr>
         <p:spPr>
           <a:xfrm>
-            <a:off x="2880360" y="1783080"/>
-            <a:ext cx="1874520" cy="256032"/>
+            <a:off x="2926080" y="1737360"/>
+            <a:ext cx="1920240" cy="256032"/>
           </a:xfrm>
           <a:prstGeom prst="rect">
             <a:avLst/>
@@ -12388,7 +11898,7 @@
               <a:buNone/>
             </a:pPr>
             <a:r>
-              <a:rPr lang="en-US" sz="1000" b="1" spc="150" kern="0" dirty="0">
+              <a:rPr lang="en-US" sz="1100" b="1" spc="150" kern="0" dirty="0">
                 <a:solidFill>
                   <a:srgbClr val="043F52"/>
                 </a:solidFill>
@@ -12398,7 +11908,7 @@
               </a:rPr>
               <a:t>CHALLENGER</a:t>
             </a:r>
-            <a:endParaRPr lang="en-US" sz="1000" dirty="0"/>
+            <a:endParaRPr lang="en-US" sz="1100" dirty="0"/>
           </a:p>
         </p:txBody>
       </p:sp>
@@ -12410,8 +11920,8 @@
         </p:nvSpPr>
         <p:spPr>
           <a:xfrm>
-            <a:off x="2880360" y="2057400"/>
-            <a:ext cx="1874520" cy="548640"/>
+            <a:off x="2926080" y="2011680"/>
+            <a:ext cx="1920240" cy="685800"/>
           </a:xfrm>
           <a:prstGeom prst="rect">
             <a:avLst/>
@@ -12435,7 +11945,7 @@
                 <a:ea typeface="Calibri" pitchFamily="34" charset="-122"/>
                 <a:cs typeface="Calibri" pitchFamily="34" charset="-120"/>
               </a:rPr>
-              <a:t>B + filtro de riesgo + cuotas regionales</a:t>
+              <a:t>B rankea su pool con cuotas; toma su top 4.800</a:t>
             </a:r>
             <a:endParaRPr lang="en-US" sz="1200" dirty="0"/>
           </a:p>
@@ -12449,8 +11959,8 @@
         </p:nvSpPr>
         <p:spPr>
           <a:xfrm>
-            <a:off x="2880360" y="2633472"/>
-            <a:ext cx="1874520" cy="274320"/>
+            <a:off x="2926080" y="2651760"/>
+            <a:ext cx="1920240" cy="274320"/>
           </a:xfrm>
           <a:prstGeom prst="rect">
             <a:avLst/>
@@ -12466,7 +11976,7 @@
               <a:buNone/>
             </a:pPr>
             <a:r>
-              <a:rPr lang="en-US" sz="1050" dirty="0">
+              <a:rPr lang="en-US" sz="1100" dirty="0">
                 <a:solidFill>
                   <a:srgbClr val="043F52"/>
                 </a:solidFill>
@@ -12474,26 +11984,26 @@
                 <a:ea typeface="Calibri" pitchFamily="34" charset="-122"/>
                 <a:cs typeface="Calibri" pitchFamily="34" charset="-120"/>
               </a:rPr>
-              <a:t>4.000 contactos/mes</a:t>
+              <a:t>4.000 contactados/mes</a:t>
             </a:r>
-            <a:endParaRPr lang="en-US" sz="1050" dirty="0"/>
+            <a:endParaRPr lang="en-US" sz="1100" dirty="0"/>
           </a:p>
         </p:txBody>
       </p:sp>
       <p:sp>
         <p:nvSpPr>
-          <p:cNvPr id="12" name="Shape 10"/>
+          <p:cNvPr id="12" name="HOLDOUT"/>
           <p:cNvSpPr/>
           <p:nvPr/>
         </p:nvSpPr>
         <p:spPr>
           <a:xfrm>
-            <a:off x="5029200" y="1691640"/>
-            <a:ext cx="2148840" cy="1325880"/>
+            <a:off x="5120640" y="1645920"/>
+            <a:ext cx="2194560" cy="1371600"/>
           </a:xfrm>
           <a:prstGeom prst="roundRect">
             <a:avLst>
-              <a:gd name="adj" fmla="val 8276"/>
+              <a:gd name="adj" fmla="val 8000"/>
             </a:avLst>
           </a:prstGeom>
           <a:solidFill>
@@ -12515,8 +12025,8 @@
         </p:nvSpPr>
         <p:spPr>
           <a:xfrm>
-            <a:off x="5166360" y="1783080"/>
-            <a:ext cx="1874520" cy="256032"/>
+            <a:off x="5257800" y="1737360"/>
+            <a:ext cx="1920240" cy="256032"/>
           </a:xfrm>
           <a:prstGeom prst="rect">
             <a:avLst/>
@@ -12532,7 +12042,7 @@
               <a:buNone/>
             </a:pPr>
             <a:r>
-              <a:rPr lang="en-US" sz="1000" b="1" spc="150" kern="0" dirty="0">
+              <a:rPr lang="en-US" sz="1100" b="1" spc="150" kern="0" dirty="0">
                 <a:solidFill>
                   <a:srgbClr val="043F52"/>
                 </a:solidFill>
@@ -12542,7 +12052,7 @@
               </a:rPr>
               <a:t>HOLDOUT</a:t>
             </a:r>
-            <a:endParaRPr lang="en-US" sz="1000" dirty="0"/>
+            <a:endParaRPr lang="en-US" sz="1100" dirty="0"/>
           </a:p>
         </p:txBody>
       </p:sp>
@@ -12554,8 +12064,8 @@
         </p:nvSpPr>
         <p:spPr>
           <a:xfrm>
-            <a:off x="5166360" y="2057400"/>
-            <a:ext cx="1874520" cy="548640"/>
+            <a:off x="5257800" y="2011680"/>
+            <a:ext cx="1920240" cy="685800"/>
           </a:xfrm>
           <a:prstGeom prst="rect">
             <a:avLst/>
@@ -12579,7 +12089,7 @@
                 <a:ea typeface="Calibri" pitchFamily="34" charset="-122"/>
                 <a:cs typeface="Calibri" pitchFamily="34" charset="-120"/>
               </a:rPr>
-              <a:t>Sin contacto comercial (top de B)</a:t>
+              <a:t>800 al azar del top 4.800 de B, sin contacto</a:t>
             </a:r>
             <a:endParaRPr lang="en-US" sz="1200" dirty="0"/>
           </a:p>
@@ -12593,8 +12103,8 @@
         </p:nvSpPr>
         <p:spPr>
           <a:xfrm>
-            <a:off x="5166360" y="2633472"/>
-            <a:ext cx="1874520" cy="274320"/>
+            <a:off x="5257800" y="2651760"/>
+            <a:ext cx="1920240" cy="274320"/>
           </a:xfrm>
           <a:prstGeom prst="rect">
             <a:avLst/>
@@ -12610,7 +12120,7 @@
               <a:buNone/>
             </a:pPr>
             <a:r>
-              <a:rPr lang="en-US" sz="1050" dirty="0">
+              <a:rPr lang="en-US" sz="1100" dirty="0">
                 <a:solidFill>
                   <a:srgbClr val="043F52"/>
                 </a:solidFill>
@@ -12620,7 +12130,7 @@
               </a:rPr>
               <a:t>≈ 800 clientes/mes</a:t>
             </a:r>
-            <a:endParaRPr lang="en-US" sz="1050" dirty="0"/>
+            <a:endParaRPr lang="en-US" sz="1100" dirty="0"/>
           </a:p>
         </p:txBody>
       </p:sp>
@@ -12633,7 +12143,7 @@
         <p:spPr>
           <a:xfrm>
             <a:off x="457200" y="3154680"/>
-            <a:ext cx="6675120" cy="1371600"/>
+            <a:ext cx="6858000" cy="1463040"/>
           </a:xfrm>
           <a:prstGeom prst="rect">
             <a:avLst/>
@@ -12653,7 +12163,7 @@
               <a:buChar char="•"/>
             </a:pPr>
             <a:r>
-              <a:rPr lang="en-US" sz="1050" b="1" dirty="0">
+              <a:rPr lang="en-US" sz="1100" b="1" dirty="0">
                 <a:solidFill>
                   <a:srgbClr val="043F52"/>
                 </a:solidFill>
@@ -12661,7 +12171,7 @@
                 <a:ea typeface="Calibri" pitchFamily="34" charset="-122"/>
                 <a:cs typeface="Calibri" pitchFamily="34" charset="-120"/>
               </a:rPr>
-              <a:t>Potencia: </a:t>
+              <a:t>Calidad de lista: </a:t>
             </a:r>
             <a:pPr indent="0" marL="0">
               <a:spcAft>
@@ -12670,7 +12180,7 @@
               <a:buNone/>
             </a:pPr>
             <a:r>
-              <a:rPr lang="en-US" sz="1050" dirty="0">
+              <a:rPr lang="en-US" sz="1100" dirty="0">
                 <a:solidFill>
                   <a:srgbClr val="043F52"/>
                 </a:solidFill>
@@ -12678,9 +12188,9 @@
                 <a:ea typeface="Calibri" pitchFamily="34" charset="-122"/>
                 <a:cs typeface="Calibri" pitchFamily="34" charset="-120"/>
               </a:rPr>
-              <a:t>pasar de 3,6 % a 5,4 % se detecta con 2.081 clientes por brazo (un mes); de 3,6 % a 4,5 % exige 7.530 (dos meses). El holdout de 800 detecta un uplift de 2,3 % a 5 %.</a:t>
+              <a:t>3,6 → 5,4 % se detecta con 2.081 por brazo (un mes); 3,6 → 4,5 %, dos meses.</a:t>
             </a:r>
-            <a:endParaRPr lang="en-US" sz="1050" dirty="0"/>
+            <a:endParaRPr lang="en-US" sz="1100" dirty="0"/>
           </a:p>
           <a:p>
             <a:pPr marL="177800" indent="-177800">
@@ -12691,7 +12201,45 @@
               <a:buChar char="•"/>
             </a:pPr>
             <a:r>
-              <a:rPr lang="en-US" sz="1050" b="1" dirty="0">
+              <a:rPr lang="en-US" sz="1100" b="1" dirty="0">
+                <a:solidFill>
+                  <a:srgbClr val="043F52"/>
+                </a:solidFill>
+                <a:latin typeface="Calibri" pitchFamily="34" charset="0"/>
+                <a:ea typeface="Calibri" pitchFamily="34" charset="-122"/>
+                <a:cs typeface="Calibri" pitchFamily="34" charset="-120"/>
+              </a:rPr>
+              <a:t>Efecto del contacto: </a:t>
+            </a:r>
+            <a:pPr indent="0" marL="0">
+              <a:spcAft>
+                <a:spcPts val="200"/>
+              </a:spcAft>
+              <a:buNone/>
+            </a:pPr>
+            <a:r>
+              <a:rPr lang="en-US" sz="1100" dirty="0">
+                <a:solidFill>
+                  <a:srgbClr val="043F52"/>
+                </a:solidFill>
+                <a:latin typeface="Calibri" pitchFamily="34" charset="0"/>
+                <a:ea typeface="Calibri" pitchFamily="34" charset="-122"/>
+                <a:cs typeface="Calibri" pitchFamily="34" charset="-120"/>
+              </a:rPr>
+              <a:t>uplift plausible 2,3 → 4,0 % (mitad del +3,1 pp de D) en 1,3 meses; cuesta 4,6 M/mes.</a:t>
+            </a:r>
+            <a:endParaRPr lang="en-US" sz="1100" dirty="0"/>
+          </a:p>
+          <a:p>
+            <a:pPr marL="177800" indent="-177800">
+              <a:spcAft>
+                <a:spcPts val="200"/>
+              </a:spcAft>
+              <a:buSzPct val="100000"/>
+              <a:buChar char="•"/>
+            </a:pPr>
+            <a:r>
+              <a:rPr lang="en-US" sz="1100" b="1" dirty="0">
                 <a:solidFill>
                   <a:srgbClr val="043F52"/>
                 </a:solidFill>
@@ -12708,7 +12256,7 @@
               <a:buNone/>
             </a:pPr>
             <a:r>
-              <a:rPr lang="en-US" sz="1050" dirty="0">
+              <a:rPr lang="en-US" sz="1100" dirty="0">
                 <a:solidFill>
                   <a:srgbClr val="043F52"/>
                 </a:solidFill>
@@ -12716,9 +12264,9 @@
                 <a:ea typeface="Calibri" pitchFamily="34" charset="-122"/>
                 <a:cs typeface="Calibri" pitchFamily="34" charset="-120"/>
               </a:rPr>
-              <a:t>probar mora 5,1 % vs. 7,2 % exigiría 2.053 renovados por brazo (meses). Por eso el riesgo entra como política dura (corte de score de buró y max_mora acordado con Riesgos) y se vigila por vintage.</a:t>
+              <a:t>el mismo piso en ambos brazos aísla el modelo; mora vigilada por vintage.</a:t>
             </a:r>
-            <a:endParaRPr lang="en-US" sz="1050" dirty="0"/>
+            <a:endParaRPr lang="en-US" sz="1100" dirty="0"/>
           </a:p>
           <a:p>
             <a:pPr marL="177800" indent="-177800">
@@ -12729,7 +12277,7 @@
               <a:buChar char="•"/>
             </a:pPr>
             <a:r>
-              <a:rPr lang="en-US" sz="1050" b="1" dirty="0">
+              <a:rPr lang="en-US" sz="1100" b="1" dirty="0">
                 <a:solidFill>
                   <a:srgbClr val="043F52"/>
                 </a:solidFill>
@@ -12737,7 +12285,7 @@
                 <a:ea typeface="Calibri" pitchFamily="34" charset="-122"/>
                 <a:cs typeface="Calibri" pitchFamily="34" charset="-120"/>
               </a:rPr>
-              <a:t>Duración: </a:t>
+              <a:t>Límite: </a:t>
             </a:r>
             <a:pPr indent="0" marL="0">
               <a:spcAft>
@@ -12746,7 +12294,7 @@
               <a:buNone/>
             </a:pPr>
             <a:r>
-              <a:rPr lang="en-US" sz="1050" dirty="0">
+              <a:rPr lang="en-US" sz="1100" dirty="0">
                 <a:solidFill>
                   <a:srgbClr val="043F52"/>
                 </a:solidFill>
@@ -12754,9 +12302,9 @@
                 <a:ea typeface="Calibri" pitchFamily="34" charset="-122"/>
                 <a:cs typeface="Calibri" pitchFamily="34" charset="-120"/>
               </a:rPr>
-              <a:t>30 días de ventana de renovación + 30 a 60 de maduración de mora. Decisión ship/no-ship pre-registrada a los 90 días. Unidad por cliente; un gestor no atiende dos brazos del mismo cliente.</a:t>
+              <a:t>sin holdout en el champion no se compara su incrementalidad; opción, 400 allí (≈ 2,3 M/mes).</a:t>
             </a:r>
-            <a:endParaRPr lang="en-US" sz="1050" dirty="0"/>
+            <a:endParaRPr lang="en-US" sz="1100" dirty="0"/>
           </a:p>
         </p:txBody>
       </p:sp>
@@ -12768,8 +12316,8 @@
         </p:nvSpPr>
         <p:spPr>
           <a:xfrm>
-            <a:off x="7406640" y="1325880"/>
-            <a:ext cx="4297680" cy="320040"/>
+            <a:off x="7589520" y="1280160"/>
+            <a:ext cx="4142232" cy="320040"/>
           </a:xfrm>
           <a:prstGeom prst="rect">
             <a:avLst/>
@@ -12814,16 +12362,16 @@
           </p:nvPr>
         </p:nvGraphicFramePr>
         <p:xfrm>
-          <a:off x="7406640" y="1691640"/>
-          <a:ext cx="4325112" cy="914400"/>
+          <a:off x="7589520" y="1645920"/>
+          <a:ext cx="4142232" cy="914400"/>
         </p:xfrm>
         <a:graphic>
           <a:graphicData uri="http://schemas.openxmlformats.org/drawingml/2006/table">
             <a:tbl>
               <a:tblPr/>
               <a:tblGrid>
-                <a:gridCol w="2103120"/>
-                <a:gridCol w="2221992"/>
+                <a:gridCol w="2057400"/>
+                <a:gridCol w="2084832"/>
               </a:tblGrid>
               <a:tr h="274320">
                 <a:tc>
@@ -12981,7 +12529,7 @@
                           <a:ea typeface="Calibri" pitchFamily="34" charset="-122"/>
                           <a:cs typeface="Calibri" pitchFamily="34" charset="-120"/>
                         </a:rPr>
-                        <a:t>Uplift challenger vs. champion</a:t>
+                        <a:t>Calidad: challenger − champion</a:t>
                       </a:r>
                       <a:endParaRPr lang="en-US" sz="1050" dirty="0">
                         <a:latin typeface="Calibri" charset="0"/>
@@ -13046,7 +12594,7 @@
                           <a:ea typeface="Calibri" pitchFamily="34" charset="-122"/>
                           <a:cs typeface="Calibri" pitchFamily="34" charset="-120"/>
                         </a:rPr>
-                        <a:t>IC 95 % excluye 0 y ≥ +1,5 pp</a:t>
+                        <a:t>≥ +1,5 pp, IC 95 % excluye 0</a:t>
                       </a:r>
                       <a:endParaRPr lang="en-US" sz="1050" dirty="0">
                         <a:latin typeface="Calibri" charset="0"/>
@@ -13113,7 +12661,7 @@
                           <a:ea typeface="Calibri" pitchFamily="34" charset="-122"/>
                           <a:cs typeface="Calibri" pitchFamily="34" charset="-120"/>
                         </a:rPr>
-                        <a:t>Mora 30+ de renovados</a:t>
+                        <a:t>Efecto: contactado − holdout</a:t>
                       </a:r>
                       <a:endParaRPr lang="en-US" sz="1050" dirty="0">
                         <a:latin typeface="Calibri" charset="0"/>
@@ -13178,7 +12726,7 @@
                           <a:ea typeface="Calibri" pitchFamily="34" charset="-122"/>
                           <a:cs typeface="Calibri" pitchFamily="34" charset="-120"/>
                         </a:rPr>
-                        <a:t>No inferior: ≤ champion + 1 pp</a:t>
+                        <a:t>&gt; 0, IC 95 % excluye 0</a:t>
                       </a:r>
                       <a:endParaRPr lang="en-US" sz="1050" dirty="0">
                         <a:latin typeface="Calibri" charset="0"/>
@@ -13245,7 +12793,7 @@
                           <a:ea typeface="Calibri" pitchFamily="34" charset="-122"/>
                           <a:cs typeface="Calibri" pitchFamily="34" charset="-120"/>
                         </a:rPr>
-                        <a:t>Quejas y opt-out por 1.000</a:t>
+                        <a:t>Mora 30+ de renovados</a:t>
                       </a:r>
                       <a:endParaRPr lang="en-US" sz="1050" dirty="0">
                         <a:latin typeface="Calibri" charset="0"/>
@@ -13310,7 +12858,7 @@
                           <a:ea typeface="Calibri" pitchFamily="34" charset="-122"/>
                           <a:cs typeface="Calibri" pitchFamily="34" charset="-120"/>
                         </a:rPr>
-                        <a:t>No inferiores al champion</a:t>
+                        <a:t>≤ champion + 1 pp</a:t>
                       </a:r>
                       <a:endParaRPr lang="en-US" sz="1050" dirty="0">
                         <a:latin typeface="Calibri" charset="0"/>
@@ -13377,7 +12925,7 @@
                           <a:ea typeface="Calibri" pitchFamily="34" charset="-122"/>
                           <a:cs typeface="Calibri" pitchFamily="34" charset="-120"/>
                         </a:rPr>
-                        <a:t>Lista ejecutada por regional</a:t>
+                        <a:t>Quejas y opt-out por 1.000</a:t>
                       </a:r>
                       <a:endParaRPr lang="en-US" sz="1050" dirty="0">
                         <a:latin typeface="Calibri" charset="0"/>
@@ -13442,7 +12990,7 @@
                           <a:ea typeface="Calibri" pitchFamily="34" charset="-122"/>
                           <a:cs typeface="Calibri" pitchFamily="34" charset="-120"/>
                         </a:rPr>
-                        <a:t>≥ 90 % en las 5 regionales</a:t>
+                        <a:t>No peores que el champion</a:t>
                       </a:r>
                       <a:endParaRPr lang="en-US" sz="1050" dirty="0">
                         <a:latin typeface="Calibri" charset="0"/>
@@ -13509,7 +13057,7 @@
                           <a:ea typeface="Calibri" pitchFamily="34" charset="-122"/>
                           <a:cs typeface="Calibri" pitchFamily="34" charset="-120"/>
                         </a:rPr>
-                        <a:t>SRM y calidad del corte</a:t>
+                        <a:t>Ejecución y aleatorización</a:t>
                       </a:r>
                       <a:endParaRPr lang="en-US" sz="1050" dirty="0">
                         <a:latin typeface="Calibri" charset="0"/>
@@ -13574,7 +13122,7 @@
                           <a:ea typeface="Calibri" pitchFamily="34" charset="-122"/>
                           <a:cs typeface="Calibri" pitchFamily="34" charset="-120"/>
                         </a:rPr>
-                        <a:t>χ² p &gt; 0,001; 0 violaciones de esquema</a:t>
+                        <a:t>≥ 90 % por regional; sin sesgo de asignación</a:t>
                       </a:r>
                       <a:endParaRPr lang="en-US" sz="1050" dirty="0">
                         <a:latin typeface="Calibri" charset="0"/>
@@ -13635,8 +13183,8 @@
         </p:nvSpPr>
         <p:spPr>
           <a:xfrm>
-            <a:off x="457200" y="4434840"/>
-            <a:ext cx="5486400" cy="320040"/>
+            <a:off x="457200" y="4617720"/>
+            <a:ext cx="6858000" cy="320040"/>
           </a:xfrm>
           <a:prstGeom prst="rect">
             <a:avLst/>
@@ -13660,7 +13208,7 @@
                 <a:ea typeface="Calibri" pitchFamily="34" charset="-122"/>
                 <a:cs typeface="Calibri" pitchFamily="34" charset="-120"/>
               </a:rPr>
-              <a:t>Monitoreo de los primeros tres meses</a:t>
+              <a:t>Monitoreo, primeros tres meses</a:t>
             </a:r>
             <a:endParaRPr lang="en-US" sz="1300" dirty="0"/>
           </a:p>
@@ -13681,19 +13229,19 @@
           </p:nvPr>
         </p:nvGraphicFramePr>
         <p:xfrm>
-          <a:off x="457200" y="4736592"/>
-          <a:ext cx="6675120" cy="914400"/>
+          <a:off x="457200" y="4937760"/>
+          <a:ext cx="6858000" cy="914400"/>
         </p:xfrm>
         <a:graphic>
           <a:graphicData uri="http://schemas.openxmlformats.org/drawingml/2006/table">
             <a:tbl>
               <a:tblPr/>
               <a:tblGrid>
-                <a:gridCol w="1417320"/>
-                <a:gridCol w="3794760"/>
-                <a:gridCol w="1463040"/>
+                <a:gridCol w="1188720"/>
+                <a:gridCol w="3749040"/>
+                <a:gridCol w="1920240"/>
               </a:tblGrid>
-              <a:tr h="219456">
+              <a:tr h="192024">
                 <a:tc>
                   <a:txBody>
                     <a:bodyPr/>
@@ -13779,7 +13327,7 @@
                           <a:ea typeface="Calibri" pitchFamily="34" charset="-122"/>
                           <a:cs typeface="Calibri" pitchFamily="34" charset="-120"/>
                         </a:rPr>
-                        <a:t>Métrica y frecuencia</a:t>
+                        <a:t>Métrica</a:t>
                       </a:r>
                       <a:endParaRPr lang="en-US" sz="1050" dirty="0">
                         <a:latin typeface="Calibri" charset="0"/>
@@ -13899,7 +13447,7 @@
                   </a:tcPr>
                 </a:tc>
               </a:tr>
-              <a:tr h="219456">
+              <a:tr h="192024">
                 <a:tc>
                   <a:txBody>
                     <a:bodyPr/>
@@ -13982,7 +13530,7 @@
                           <a:ea typeface="Calibri" pitchFamily="34" charset="-122"/>
                           <a:cs typeface="Calibri" pitchFamily="34" charset="-120"/>
                         </a:rPr>
-                        <a:t>Esquema, nulos, rangos, fechas posteriores al corte; cada corte</a:t>
+                        <a:t>Esquema, rangos y fechas posteriores al corte; cada corte</a:t>
                       </a:r>
                       <a:endParaRPr lang="en-US" sz="1050" dirty="0">
                         <a:latin typeface="Calibri" charset="0"/>
@@ -14096,7 +13644,7 @@
                   </a:tcPr>
                 </a:tc>
               </a:tr>
-              <a:tr h="219456">
+              <a:tr h="192024">
                 <a:tc>
                   <a:txBody>
                     <a:bodyPr/>
@@ -14179,7 +13727,7 @@
                           <a:ea typeface="Calibri" pitchFamily="34" charset="-122"/>
                           <a:cs typeface="Calibri" pitchFamily="34" charset="-120"/>
                         </a:rPr>
-                        <a:t>PSI del score y CSI por variable; mensual, umbral por percentil (n ≈ 250)</a:t>
+                        <a:t>PSI del score sobre el universo (25.000); drift por variable</a:t>
                       </a:r>
                       <a:endParaRPr lang="en-US" sz="1050" dirty="0">
                         <a:latin typeface="Calibri" charset="0"/>
@@ -14244,7 +13792,7 @@
                           <a:ea typeface="Calibri" pitchFamily="34" charset="-122"/>
                           <a:cs typeface="Calibri" pitchFamily="34" charset="-120"/>
                         </a:rPr>
-                        <a:t>Investigar; revalidar</a:t>
+                        <a:t>0,10 investigar; 0,25 revalidar</a:t>
                       </a:r>
                       <a:endParaRPr lang="en-US" sz="1050" dirty="0">
                         <a:latin typeface="Calibri" charset="0"/>
@@ -14293,7 +13841,7 @@
                   </a:tcPr>
                 </a:tc>
               </a:tr>
-              <a:tr h="219456">
+              <a:tr h="192024">
                 <a:tc>
                   <a:txBody>
                     <a:bodyPr/>
@@ -14376,7 +13924,7 @@
                           <a:ea typeface="Calibri" pitchFamily="34" charset="-122"/>
                           <a:cs typeface="Calibri" pitchFamily="34" charset="-120"/>
                         </a:rPr>
-                        <a:t>AUC, calibración y conversión top-k con labels a 30 a 60 días</a:t>
+                        <a:t>AUC, calibración y conversión top-k con labels a 30–60 días</a:t>
                       </a:r>
                       <a:endParaRPr lang="en-US" sz="1050" dirty="0">
                         <a:latin typeface="Calibri" charset="0"/>
@@ -14490,7 +14038,7 @@
                   </a:tcPr>
                 </a:tc>
               </a:tr>
-              <a:tr h="219456">
+              <a:tr h="192024">
                 <a:tc>
                   <a:txBody>
                     <a:bodyPr/>
@@ -14573,7 +14121,7 @@
                           <a:ea typeface="Calibri" pitchFamily="34" charset="-122"/>
                           <a:cs typeface="Calibri" pitchFamily="34" charset="-120"/>
                         </a:rPr>
-                        <a:t>Vintage de mora 30+ por cohorte y brazo; mensual</a:t>
+                        <a:t>Vintage de mora 30+ por cohorte, brazo y regional</a:t>
                       </a:r>
                       <a:endParaRPr lang="en-US" sz="1050" dirty="0">
                         <a:latin typeface="Calibri" charset="0"/>
@@ -14687,7 +14235,7 @@
                   </a:tcPr>
                 </a:tc>
               </a:tr>
-              <a:tr h="219456">
+              <a:tr h="192024">
                 <a:tc>
                   <a:txBody>
                     <a:bodyPr/>
@@ -14705,7 +14253,7 @@
                           <a:ea typeface="Calibri" pitchFamily="34" charset="-122"/>
                           <a:cs typeface="Calibri" pitchFamily="34" charset="-120"/>
                         </a:rPr>
-                        <a:t>Operación y experiencia</a:t>
+                        <a:t>Operación</a:t>
                       </a:r>
                       <a:endParaRPr lang="en-US" sz="1050" dirty="0">
                         <a:latin typeface="Calibri" charset="0"/>
@@ -14770,7 +14318,7 @@
                           <a:ea typeface="Calibri" pitchFamily="34" charset="-122"/>
                           <a:cs typeface="Calibri" pitchFamily="34" charset="-120"/>
                         </a:rPr>
-                        <a:t>% de lista contactada por regional y semana; quejas, opt-out, frecuencia</a:t>
+                        <a:t>% de lista contactada por regional y semana</a:t>
                       </a:r>
                       <a:endParaRPr lang="en-US" sz="1050" dirty="0">
                         <a:latin typeface="Calibri" charset="0"/>
@@ -14835,7 +14383,204 @@
                           <a:ea typeface="Calibri" pitchFamily="34" charset="-122"/>
                           <a:cs typeface="Calibri" pitchFamily="34" charset="-120"/>
                         </a:rPr>
-                        <a:t>Reasignar cupos; pausa</a:t>
+                        <a:t>Reasignar cupos</a:t>
+                      </a:r>
+                      <a:endParaRPr lang="en-US" sz="1050" dirty="0">
+                        <a:latin typeface="Calibri" charset="0"/>
+                        <a:ea typeface="Calibri" charset="0"/>
+                        <a:cs typeface="Calibri" charset="0"/>
+                      </a:endParaRPr>
+                    </a:p>
+                  </a:txBody>
+                  <a:tcPr marL="50800" marR="50800" marT="25400" marB="25400" anchor="ctr">
+                    <a:lnL w="9525" cap="flat" cmpd="sng" algn="ctr">
+                      <a:solidFill>
+                        <a:srgbClr val="D6E8E6"/>
+                      </a:solidFill>
+                      <a:prstDash val="solid"/>
+                      <a:round/>
+                      <a:headEnd type="none" w="med" len="med"/>
+                      <a:tailEnd type="none" w="med" len="med"/>
+                    </a:lnL>
+                    <a:lnR w="9525" cap="flat" cmpd="sng" algn="ctr">
+                      <a:solidFill>
+                        <a:srgbClr val="D6E8E6"/>
+                      </a:solidFill>
+                      <a:prstDash val="solid"/>
+                      <a:round/>
+                      <a:headEnd type="none" w="med" len="med"/>
+                      <a:tailEnd type="none" w="med" len="med"/>
+                    </a:lnR>
+                    <a:lnT w="9525" cap="flat" cmpd="sng" algn="ctr">
+                      <a:solidFill>
+                        <a:srgbClr val="D6E8E6"/>
+                      </a:solidFill>
+                      <a:prstDash val="solid"/>
+                      <a:round/>
+                      <a:headEnd type="none" w="med" len="med"/>
+                      <a:tailEnd type="none" w="med" len="med"/>
+                    </a:lnT>
+                    <a:lnB w="9525" cap="flat" cmpd="sng" algn="ctr">
+                      <a:solidFill>
+                        <a:srgbClr val="D6E8E6"/>
+                      </a:solidFill>
+                      <a:prstDash val="solid"/>
+                      <a:round/>
+                      <a:headEnd type="none" w="med" len="med"/>
+                      <a:tailEnd type="none" w="med" len="med"/>
+                    </a:lnB>
+                  </a:tcPr>
+                </a:tc>
+              </a:tr>
+              <a:tr h="192024">
+                <a:tc>
+                  <a:txBody>
+                    <a:bodyPr/>
+                    <a:lstStyle/>
+                    <a:p>
+                      <a:pPr indent="0" marL="0">
+                        <a:buNone/>
+                      </a:pPr>
+                      <a:r>
+                        <a:rPr lang="en-US" sz="1050" dirty="0">
+                          <a:solidFill>
+                            <a:srgbClr val="043F52"/>
+                          </a:solidFill>
+                          <a:latin typeface="Calibri" pitchFamily="34" charset="0"/>
+                          <a:ea typeface="Calibri" pitchFamily="34" charset="-122"/>
+                          <a:cs typeface="Calibri" pitchFamily="34" charset="-120"/>
+                        </a:rPr>
+                        <a:t>Experiencia</a:t>
+                      </a:r>
+                      <a:endParaRPr lang="en-US" sz="1050" dirty="0">
+                        <a:latin typeface="Calibri" charset="0"/>
+                        <a:ea typeface="Calibri" charset="0"/>
+                        <a:cs typeface="Calibri" charset="0"/>
+                      </a:endParaRPr>
+                    </a:p>
+                  </a:txBody>
+                  <a:tcPr marL="50800" marR="50800" marT="25400" marB="25400" anchor="ctr">
+                    <a:lnL w="9525" cap="flat" cmpd="sng" algn="ctr">
+                      <a:solidFill>
+                        <a:srgbClr val="D6E8E6"/>
+                      </a:solidFill>
+                      <a:prstDash val="solid"/>
+                      <a:round/>
+                      <a:headEnd type="none" w="med" len="med"/>
+                      <a:tailEnd type="none" w="med" len="med"/>
+                    </a:lnL>
+                    <a:lnR w="9525" cap="flat" cmpd="sng" algn="ctr">
+                      <a:solidFill>
+                        <a:srgbClr val="D6E8E6"/>
+                      </a:solidFill>
+                      <a:prstDash val="solid"/>
+                      <a:round/>
+                      <a:headEnd type="none" w="med" len="med"/>
+                      <a:tailEnd type="none" w="med" len="med"/>
+                    </a:lnR>
+                    <a:lnT w="9525" cap="flat" cmpd="sng" algn="ctr">
+                      <a:solidFill>
+                        <a:srgbClr val="D6E8E6"/>
+                      </a:solidFill>
+                      <a:prstDash val="solid"/>
+                      <a:round/>
+                      <a:headEnd type="none" w="med" len="med"/>
+                      <a:tailEnd type="none" w="med" len="med"/>
+                    </a:lnT>
+                    <a:lnB w="9525" cap="flat" cmpd="sng" algn="ctr">
+                      <a:solidFill>
+                        <a:srgbClr val="D6E8E6"/>
+                      </a:solidFill>
+                      <a:prstDash val="solid"/>
+                      <a:round/>
+                      <a:headEnd type="none" w="med" len="med"/>
+                      <a:tailEnd type="none" w="med" len="med"/>
+                    </a:lnB>
+                  </a:tcPr>
+                </a:tc>
+                <a:tc>
+                  <a:txBody>
+                    <a:bodyPr/>
+                    <a:lstStyle/>
+                    <a:p>
+                      <a:pPr indent="0" marL="0">
+                        <a:buNone/>
+                      </a:pPr>
+                      <a:r>
+                        <a:rPr lang="en-US" sz="1050" dirty="0">
+                          <a:solidFill>
+                            <a:srgbClr val="043F52"/>
+                          </a:solidFill>
+                          <a:latin typeface="Calibri" pitchFamily="34" charset="0"/>
+                          <a:ea typeface="Calibri" pitchFamily="34" charset="-122"/>
+                          <a:cs typeface="Calibri" pitchFamily="34" charset="-120"/>
+                        </a:rPr>
+                        <a:t>Quejas y opt-out por 1.000 contactos</a:t>
+                      </a:r>
+                      <a:endParaRPr lang="en-US" sz="1050" dirty="0">
+                        <a:latin typeface="Calibri" charset="0"/>
+                        <a:ea typeface="Calibri" charset="0"/>
+                        <a:cs typeface="Calibri" charset="0"/>
+                      </a:endParaRPr>
+                    </a:p>
+                  </a:txBody>
+                  <a:tcPr marL="50800" marR="50800" marT="25400" marB="25400" anchor="ctr">
+                    <a:lnL w="9525" cap="flat" cmpd="sng" algn="ctr">
+                      <a:solidFill>
+                        <a:srgbClr val="D6E8E6"/>
+                      </a:solidFill>
+                      <a:prstDash val="solid"/>
+                      <a:round/>
+                      <a:headEnd type="none" w="med" len="med"/>
+                      <a:tailEnd type="none" w="med" len="med"/>
+                    </a:lnL>
+                    <a:lnR w="9525" cap="flat" cmpd="sng" algn="ctr">
+                      <a:solidFill>
+                        <a:srgbClr val="D6E8E6"/>
+                      </a:solidFill>
+                      <a:prstDash val="solid"/>
+                      <a:round/>
+                      <a:headEnd type="none" w="med" len="med"/>
+                      <a:tailEnd type="none" w="med" len="med"/>
+                    </a:lnR>
+                    <a:lnT w="9525" cap="flat" cmpd="sng" algn="ctr">
+                      <a:solidFill>
+                        <a:srgbClr val="D6E8E6"/>
+                      </a:solidFill>
+                      <a:prstDash val="solid"/>
+                      <a:round/>
+                      <a:headEnd type="none" w="med" len="med"/>
+                      <a:tailEnd type="none" w="med" len="med"/>
+                    </a:lnT>
+                    <a:lnB w="9525" cap="flat" cmpd="sng" algn="ctr">
+                      <a:solidFill>
+                        <a:srgbClr val="D6E8E6"/>
+                      </a:solidFill>
+                      <a:prstDash val="solid"/>
+                      <a:round/>
+                      <a:headEnd type="none" w="med" len="med"/>
+                      <a:tailEnd type="none" w="med" len="med"/>
+                    </a:lnB>
+                  </a:tcPr>
+                </a:tc>
+                <a:tc>
+                  <a:txBody>
+                    <a:bodyPr/>
+                    <a:lstStyle/>
+                    <a:p>
+                      <a:pPr indent="0" marL="0">
+                        <a:buNone/>
+                      </a:pPr>
+                      <a:r>
+                        <a:rPr lang="en-US" sz="1050" dirty="0">
+                          <a:solidFill>
+                            <a:srgbClr val="043F52"/>
+                          </a:solidFill>
+                          <a:latin typeface="Calibri" pitchFamily="34" charset="0"/>
+                          <a:ea typeface="Calibri" pitchFamily="34" charset="-122"/>
+                          <a:cs typeface="Calibri" pitchFamily="34" charset="-120"/>
+                        </a:rPr>
+                        <a:t>Pausa</a:t>
                       </a:r>
                       <a:endParaRPr lang="en-US" sz="1050" dirty="0">
                         <a:latin typeface="Calibri" charset="0"/>
@@ -14896,8 +14641,8 @@
         </p:nvSpPr>
         <p:spPr>
           <a:xfrm>
-            <a:off x="7406640" y="4434840"/>
-            <a:ext cx="4297680" cy="320040"/>
+            <a:off x="7589520" y="4617720"/>
+            <a:ext cx="4142232" cy="320040"/>
           </a:xfrm>
           <a:prstGeom prst="rect">
             <a:avLst/>
@@ -14921,7 +14666,7 @@
                 <a:ea typeface="Calibri" pitchFamily="34" charset="-122"/>
                 <a:cs typeface="Calibri" pitchFamily="34" charset="-120"/>
               </a:rPr>
-              <a:t>No libero aunque las métricas offline sean buenas si</a:t>
+              <a:t>No libero si</a:t>
             </a:r>
             <a:endParaRPr lang="en-US" sz="1300" dirty="0"/>
           </a:p>
@@ -14935,8 +14680,8 @@
         </p:nvSpPr>
         <p:spPr>
           <a:xfrm>
-            <a:off x="7406640" y="4736592"/>
-            <a:ext cx="4325112" cy="1371600"/>
+            <a:off x="7589520" y="4937760"/>
+            <a:ext cx="4142232" cy="1280160"/>
           </a:xfrm>
           <a:prstGeom prst="rect">
             <a:avLst/>
@@ -14950,13 +14695,13 @@
           <a:p>
             <a:pPr marL="177800" indent="-177800">
               <a:spcAft>
-                <a:spcPts val="100"/>
+                <a:spcPts val="200"/>
               </a:spcAft>
               <a:buSzPct val="100000"/>
               <a:buChar char="•"/>
             </a:pPr>
             <a:r>
-              <a:rPr lang="en-US" sz="1000" dirty="0">
+              <a:rPr lang="en-US" sz="1100" dirty="0">
                 <a:solidFill>
                   <a:srgbClr val="043F52"/>
                 </a:solidFill>
@@ -14964,20 +14709,20 @@
                 <a:ea typeface="Calibri" pitchFamily="34" charset="-122"/>
                 <a:cs typeface="Calibri" pitchFamily="34" charset="-120"/>
               </a:rPr>
-              <a:t>Alguna variable no existe point-in-time en producción o el split no fue temporal.</a:t>
+              <a:t>Variable no point-in-time o split no temporal.</a:t>
             </a:r>
-            <a:endParaRPr lang="en-US" sz="1000" dirty="0"/>
+            <a:endParaRPr lang="en-US" sz="1100" dirty="0"/>
           </a:p>
           <a:p>
             <a:pPr marL="177800" indent="-177800">
               <a:spcAft>
-                <a:spcPts val="100"/>
+                <a:spcPts val="200"/>
               </a:spcAft>
               <a:buSzPct val="100000"/>
               <a:buChar char="•"/>
             </a:pPr>
             <a:r>
-              <a:rPr lang="en-US" sz="1000" dirty="0">
+              <a:rPr lang="en-US" sz="1100" dirty="0">
                 <a:solidFill>
                   <a:srgbClr val="043F52"/>
                 </a:solidFill>
@@ -14985,51 +14730,9 @@
                 <a:ea typeface="Calibri" pitchFamily="34" charset="-122"/>
                 <a:cs typeface="Calibri" pitchFamily="34" charset="-120"/>
               </a:rPr>
-              <a:t>No hay calibración verificada, validación independiente ni plan de rollback.</a:t>
+              <a:t>Sin calibración verificada, holdout, rollback o dueño.</a:t>
             </a:r>
-            <a:endParaRPr lang="en-US" sz="1000" dirty="0"/>
-          </a:p>
-          <a:p>
-            <a:pPr marL="177800" indent="-177800">
-              <a:spcAft>
-                <a:spcPts val="100"/>
-              </a:spcAft>
-              <a:buSzPct val="100000"/>
-              <a:buChar char="•"/>
-            </a:pPr>
-            <a:r>
-              <a:rPr lang="en-US" sz="1000" dirty="0">
-                <a:solidFill>
-                  <a:srgbClr val="043F52"/>
-                </a:solidFill>
-                <a:latin typeface="Calibri" pitchFamily="34" charset="0"/>
-                <a:ea typeface="Calibri" pitchFamily="34" charset="-122"/>
-                <a:cs typeface="Calibri" pitchFamily="34" charset="-120"/>
-              </a:rPr>
-              <a:t>No hay holdout para medir incrementalidad ni dueño por guardrail.</a:t>
-            </a:r>
-            <a:endParaRPr lang="en-US" sz="1000" dirty="0"/>
-          </a:p>
-          <a:p>
-            <a:pPr marL="177800" indent="-177800">
-              <a:spcAft>
-                <a:spcPts val="100"/>
-              </a:spcAft>
-              <a:buSzPct val="100000"/>
-              <a:buChar char="•"/>
-            </a:pPr>
-            <a:r>
-              <a:rPr lang="en-US" sz="1000" dirty="0">
-                <a:solidFill>
-                  <a:srgbClr val="043F52"/>
-                </a:solidFill>
-                <a:latin typeface="Calibri" pitchFamily="34" charset="0"/>
-                <a:ea typeface="Calibri" pitchFamily="34" charset="-122"/>
-                <a:cs typeface="Calibri" pitchFamily="34" charset="-120"/>
-              </a:rPr>
-              <a:t>La selección excluye a una regional o grupo sin explicación de negocio.</a:t>
-            </a:r>
-            <a:endParaRPr lang="en-US" sz="1000" dirty="0"/>
+            <a:endParaRPr lang="en-US" sz="1100" dirty="0"/>
           </a:p>
         </p:txBody>
       </p:sp>
@@ -15143,57 +14846,18 @@
       </p:sp>
       <p:sp>
         <p:nvSpPr>
-          <p:cNvPr id="3" name="Text 1"/>
-          <p:cNvSpPr txBox="1"/>
-          <p:nvPr/>
-        </p:nvSpPr>
-        <p:spPr>
-          <a:xfrm>
-            <a:off x="457200" y="1234440"/>
-            <a:ext cx="7315200" cy="274320"/>
-          </a:xfrm>
-          <a:prstGeom prst="rect">
-            <a:avLst/>
-          </a:prstGeom>
-          <a:noFill/>
-          <a:ln/>
-        </p:spPr>
-        <p:txBody>
-          <a:bodyPr wrap="square" lIns="0" tIns="0" rIns="0" bIns="0" rtlCol="0" anchor="ctr"/>
-          <a:lstStyle/>
-          <a:p>
-            <a:pPr indent="0" marL="0">
-              <a:buNone/>
-            </a:pPr>
-            <a:r>
-              <a:rPr lang="en-US" sz="1100" b="1" spc="200" kern="0" dirty="0">
-                <a:solidFill>
-                  <a:srgbClr val="4A6A72"/>
-                </a:solidFill>
-                <a:latin typeface="Calibri" pitchFamily="34" charset="0"/>
-                <a:ea typeface="Calibri" pitchFamily="34" charset="-122"/>
-                <a:cs typeface="Calibri" pitchFamily="34" charset="-120"/>
-              </a:rPr>
-              <a:t>TRES DECISIONES QUE PEDIMOS HOY AL COMITÉ</a:t>
-            </a:r>
-            <a:endParaRPr lang="en-US" sz="1100" dirty="0"/>
-          </a:p>
-        </p:txBody>
-      </p:sp>
-      <p:sp>
-        <p:nvSpPr>
-          <p:cNvPr id="4" name="Shape 2"/>
+          <p:cNvPr id="3" name="Decisión 1"/>
           <p:cNvSpPr/>
           <p:nvPr/>
         </p:nvSpPr>
         <p:spPr>
           <a:xfrm>
-            <a:off x="457200" y="1554480"/>
-            <a:ext cx="3657600" cy="1737360"/>
+            <a:off x="457200" y="1325880"/>
+            <a:ext cx="3657600" cy="1554480"/>
           </a:xfrm>
           <a:prstGeom prst="roundRect">
             <a:avLst>
-              <a:gd name="adj" fmla="val 6316"/>
+              <a:gd name="adj" fmla="val 7059"/>
             </a:avLst>
           </a:prstGeom>
           <a:solidFill>
@@ -15209,13 +14873,13 @@
       </p:sp>
       <p:sp>
         <p:nvSpPr>
-          <p:cNvPr id="5" name="Text 3"/>
+          <p:cNvPr id="4" name="Text 2"/>
           <p:cNvSpPr txBox="1"/>
           <p:nvPr/>
         </p:nvSpPr>
         <p:spPr>
           <a:xfrm>
-            <a:off x="640080" y="1645920"/>
+            <a:off x="640080" y="1417320"/>
             <a:ext cx="548640" cy="502920"/>
           </a:xfrm>
           <a:prstGeom prst="rect">
@@ -15248,13 +14912,13 @@
       </p:sp>
       <p:sp>
         <p:nvSpPr>
-          <p:cNvPr id="6" name="Text 4"/>
+          <p:cNvPr id="5" name="Text 3"/>
           <p:cNvSpPr txBox="1"/>
           <p:nvPr/>
         </p:nvSpPr>
         <p:spPr>
           <a:xfrm>
-            <a:off x="1188720" y="1691640"/>
+            <a:off x="1188720" y="1463040"/>
             <a:ext cx="2788920" cy="457200"/>
           </a:xfrm>
           <a:prstGeom prst="rect">
@@ -15287,14 +14951,14 @@
       </p:sp>
       <p:sp>
         <p:nvSpPr>
-          <p:cNvPr id="7" name="Text 5"/>
+          <p:cNvPr id="6" name="Text 4"/>
           <p:cNvSpPr txBox="1"/>
           <p:nvPr/>
         </p:nvSpPr>
         <p:spPr>
           <a:xfrm>
-            <a:off x="640080" y="2194560"/>
-            <a:ext cx="3291840" cy="1188720"/>
+            <a:off x="640080" y="1965960"/>
+            <a:ext cx="3291840" cy="822960"/>
           </a:xfrm>
           <a:prstGeom prst="rect">
             <a:avLst/>
@@ -15310,7 +14974,7 @@
               <a:buNone/>
             </a:pPr>
             <a:r>
-              <a:rPr lang="en-US" sz="1100" dirty="0">
+              <a:rPr lang="en-US" sz="1150" dirty="0">
                 <a:solidFill>
                   <a:srgbClr val="043F52"/>
                 </a:solidFill>
@@ -15318,26 +14982,26 @@
                 <a:ea typeface="Calibri" pitchFamily="34" charset="-122"/>
                 <a:cs typeface="Calibri" pitchFamily="34" charset="-120"/>
               </a:rPr>
-              <a:t>Dos meses, tres brazos, 8.000 contactos/mes. Challenger = B + política de riesgo + cuotas regionales. Dueños: Comercial (ejecución), Riesgos (corte), Datos (medición).</a:t>
+              <a:t>Dos meses, tres brazos, 8.000 contactos al mes.</a:t>
             </a:r>
-            <a:endParaRPr lang="en-US" sz="1100" dirty="0"/>
+            <a:endParaRPr lang="en-US" sz="1150" dirty="0"/>
           </a:p>
         </p:txBody>
       </p:sp>
       <p:sp>
         <p:nvSpPr>
-          <p:cNvPr id="8" name="Shape 6"/>
+          <p:cNvPr id="7" name="Decisión 2"/>
           <p:cNvSpPr/>
           <p:nvPr/>
         </p:nvSpPr>
         <p:spPr>
           <a:xfrm>
-            <a:off x="4251960" y="1554480"/>
-            <a:ext cx="3657600" cy="1737360"/>
+            <a:off x="4251960" y="1325880"/>
+            <a:ext cx="3657600" cy="1554480"/>
           </a:xfrm>
           <a:prstGeom prst="roundRect">
             <a:avLst>
-              <a:gd name="adj" fmla="val 6316"/>
+              <a:gd name="adj" fmla="val 7059"/>
             </a:avLst>
           </a:prstGeom>
           <a:solidFill>
@@ -15353,13 +15017,13 @@
       </p:sp>
       <p:sp>
         <p:nvSpPr>
-          <p:cNvPr id="9" name="Text 7"/>
+          <p:cNvPr id="8" name="Text 6"/>
           <p:cNvSpPr txBox="1"/>
           <p:nvPr/>
         </p:nvSpPr>
         <p:spPr>
           <a:xfrm>
-            <a:off x="4434840" y="1645920"/>
+            <a:off x="4434840" y="1417320"/>
             <a:ext cx="548640" cy="502920"/>
           </a:xfrm>
           <a:prstGeom prst="rect">
@@ -15392,13 +15056,13 @@
       </p:sp>
       <p:sp>
         <p:nvSpPr>
-          <p:cNvPr id="10" name="Text 8"/>
+          <p:cNvPr id="9" name="Text 7"/>
           <p:cNvSpPr txBox="1"/>
           <p:nvPr/>
         </p:nvSpPr>
         <p:spPr>
           <a:xfrm>
-            <a:off x="4983480" y="1691640"/>
+            <a:off x="4983480" y="1463040"/>
             <a:ext cx="2788920" cy="457200"/>
           </a:xfrm>
           <a:prstGeom prst="rect">
@@ -15431,14 +15095,14 @@
       </p:sp>
       <p:sp>
         <p:nvSpPr>
-          <p:cNvPr id="11" name="Text 9"/>
+          <p:cNvPr id="10" name="Text 8"/>
           <p:cNvSpPr txBox="1"/>
           <p:nvPr/>
         </p:nvSpPr>
         <p:spPr>
           <a:xfrm>
-            <a:off x="4434840" y="2194560"/>
-            <a:ext cx="3291840" cy="1188720"/>
+            <a:off x="4434840" y="1965960"/>
+            <a:ext cx="3291840" cy="822960"/>
           </a:xfrm>
           <a:prstGeom prst="rect">
             <a:avLst/>
@@ -15454,7 +15118,7 @@
               <a:buNone/>
             </a:pPr>
             <a:r>
-              <a:rPr lang="en-US" sz="1100" dirty="0">
+              <a:rPr lang="en-US" sz="1150" dirty="0">
                 <a:solidFill>
                   <a:srgbClr val="043F52"/>
                 </a:solidFill>
@@ -15462,26 +15126,26 @@
                 <a:ea typeface="Calibri" pitchFamily="34" charset="-122"/>
                 <a:cs typeface="Calibri" pitchFamily="34" charset="-120"/>
               </a:rPr>
-              <a:t>C usa el resultado de la gestión: inviable. A pasa a producción solo si supera la auditoría point-in-time. D se reevalúa con los datos del holdout.</a:t>
+              <a:t>C usa el resultado; A tras ficha de fuga; D al holdout.</a:t>
             </a:r>
-            <a:endParaRPr lang="en-US" sz="1100" dirty="0"/>
+            <a:endParaRPr lang="en-US" sz="1150" dirty="0"/>
           </a:p>
         </p:txBody>
       </p:sp>
       <p:sp>
         <p:nvSpPr>
-          <p:cNvPr id="12" name="Shape 10"/>
+          <p:cNvPr id="11" name="Decisión 3"/>
           <p:cNvSpPr/>
           <p:nvPr/>
         </p:nvSpPr>
         <p:spPr>
           <a:xfrm>
-            <a:off x="8046720" y="1554480"/>
-            <a:ext cx="3657600" cy="1737360"/>
+            <a:off x="8046720" y="1325880"/>
+            <a:ext cx="3657600" cy="1554480"/>
           </a:xfrm>
           <a:prstGeom prst="roundRect">
             <a:avLst>
-              <a:gd name="adj" fmla="val 6316"/>
+              <a:gd name="adj" fmla="val 7059"/>
             </a:avLst>
           </a:prstGeom>
           <a:solidFill>
@@ -15497,13 +15161,13 @@
       </p:sp>
       <p:sp>
         <p:nvSpPr>
-          <p:cNvPr id="13" name="Text 11"/>
+          <p:cNvPr id="12" name="Text 10"/>
           <p:cNvSpPr txBox="1"/>
           <p:nvPr/>
         </p:nvSpPr>
         <p:spPr>
           <a:xfrm>
-            <a:off x="8229600" y="1645920"/>
+            <a:off x="8229600" y="1417320"/>
             <a:ext cx="548640" cy="502920"/>
           </a:xfrm>
           <a:prstGeom prst="rect">
@@ -15536,13 +15200,13 @@
       </p:sp>
       <p:sp>
         <p:nvSpPr>
-          <p:cNvPr id="14" name="Text 12"/>
+          <p:cNvPr id="13" name="Text 11"/>
           <p:cNvSpPr txBox="1"/>
           <p:nvPr/>
         </p:nvSpPr>
         <p:spPr>
           <a:xfrm>
-            <a:off x="8778240" y="1691640"/>
+            <a:off x="8778240" y="1463040"/>
             <a:ext cx="2788920" cy="457200"/>
           </a:xfrm>
           <a:prstGeom prst="rect">
@@ -15567,7 +15231,7 @@
                 <a:ea typeface="Calibri" pitchFamily="34" charset="-122"/>
                 <a:cs typeface="Calibri" pitchFamily="34" charset="-120"/>
               </a:rPr>
-              <a:t>Fijar KPI y guardrails con dueño</a:t>
+              <a:t>Fijar KPI y guardrails</a:t>
             </a:r>
             <a:endParaRPr lang="en-US" sz="1400" dirty="0"/>
           </a:p>
@@ -15575,14 +15239,14 @@
       </p:sp>
       <p:sp>
         <p:nvSpPr>
-          <p:cNvPr id="15" name="Text 13"/>
+          <p:cNvPr id="14" name="Text 12"/>
           <p:cNvSpPr txBox="1"/>
           <p:nvPr/>
         </p:nvSpPr>
         <p:spPr>
           <a:xfrm>
-            <a:off x="8229600" y="2194560"/>
-            <a:ext cx="3291840" cy="1188720"/>
+            <a:off x="8229600" y="1965960"/>
+            <a:ext cx="3291840" cy="822960"/>
           </a:xfrm>
           <a:prstGeom prst="rect">
             <a:avLst/>
@@ -15598,7 +15262,7 @@
               <a:buNone/>
             </a:pPr>
             <a:r>
-              <a:rPr lang="en-US" sz="1100" dirty="0">
+              <a:rPr lang="en-US" sz="1150" dirty="0">
                 <a:solidFill>
                   <a:srgbClr val="043F52"/>
                 </a:solidFill>
@@ -15606,21 +15270,21 @@
                 <a:ea typeface="Calibri" pitchFamily="34" charset="-122"/>
                 <a:cs typeface="Calibri" pitchFamily="34" charset="-120"/>
               </a:rPr>
-              <a:t>Valor incremental neto por contacto como KPI; cinco guardrails con umbral, ventana y responsable firmados por Riesgos, Comercial, Tecnología y Datos antes del primer corte.</a:t>
+              <a:t>KPI incremental neto por contacto; guardrails con dueño.</a:t>
             </a:r>
-            <a:endParaRPr lang="en-US" sz="1100" dirty="0"/>
+            <a:endParaRPr lang="en-US" sz="1150" dirty="0"/>
           </a:p>
         </p:txBody>
       </p:sp>
       <p:sp>
         <p:nvSpPr>
-          <p:cNvPr id="16" name="Text 14"/>
+          <p:cNvPr id="15" name="Text 13"/>
           <p:cNvSpPr txBox="1"/>
           <p:nvPr/>
         </p:nvSpPr>
         <p:spPr>
           <a:xfrm>
-            <a:off x="457200" y="3566160"/>
+            <a:off x="457200" y="3154680"/>
             <a:ext cx="5486400" cy="320040"/>
           </a:xfrm>
           <a:prstGeom prst="rect">
@@ -15645,7 +15309,7 @@
                 <a:ea typeface="Calibri" pitchFamily="34" charset="-122"/>
                 <a:cs typeface="Calibri" pitchFamily="34" charset="-120"/>
               </a:rPr>
-              <a:t>Ruta de 90 días</a:t>
+              <a:t>Ruta 90 días</a:t>
             </a:r>
             <a:endParaRPr lang="en-US" sz="1300" dirty="0"/>
           </a:p>
@@ -15653,14 +15317,14 @@
       </p:sp>
       <p:sp>
         <p:nvSpPr>
-          <p:cNvPr id="17" name="Shape 15"/>
+          <p:cNvPr id="16" name="Paso 1"/>
           <p:cNvSpPr/>
           <p:nvPr/>
         </p:nvSpPr>
         <p:spPr>
           <a:xfrm>
-            <a:off x="457200" y="4005072"/>
-            <a:ext cx="292608" cy="292608"/>
+            <a:off x="457200" y="3657600"/>
+            <a:ext cx="310896" cy="310896"/>
           </a:xfrm>
           <a:prstGeom prst="ellipse">
             <a:avLst/>
@@ -15678,14 +15342,14 @@
       </p:sp>
       <p:sp>
         <p:nvSpPr>
-          <p:cNvPr id="18" name="Text 16"/>
+          <p:cNvPr id="17" name="Text 15"/>
           <p:cNvSpPr txBox="1"/>
           <p:nvPr/>
         </p:nvSpPr>
         <p:spPr>
           <a:xfrm>
-            <a:off x="457200" y="4005072"/>
-            <a:ext cx="292608" cy="292608"/>
+            <a:off x="457200" y="3657600"/>
+            <a:ext cx="310896" cy="310896"/>
           </a:xfrm>
           <a:prstGeom prst="rect">
             <a:avLst/>
@@ -15717,14 +15381,14 @@
       </p:sp>
       <p:sp>
         <p:nvSpPr>
-          <p:cNvPr id="19" name="Text 17"/>
+          <p:cNvPr id="18" name="Text 16"/>
           <p:cNvSpPr txBox="1"/>
           <p:nvPr/>
         </p:nvSpPr>
         <p:spPr>
           <a:xfrm>
-            <a:off x="868680" y="3931920"/>
-            <a:ext cx="6309360" cy="502920"/>
+            <a:off x="896112" y="3566160"/>
+            <a:ext cx="6309360" cy="530352"/>
           </a:xfrm>
           <a:prstGeom prst="rect">
             <a:avLst/>
@@ -15740,7 +15404,7 @@
               <a:buNone/>
             </a:pPr>
             <a:r>
-              <a:rPr lang="en-US" sz="1050" b="1" dirty="0">
+              <a:rPr lang="en-US" sz="1150" b="1" dirty="0">
                 <a:solidFill>
                   <a:srgbClr val="043F52"/>
                 </a:solidFill>
@@ -15754,7 +15418,7 @@
               <a:buNone/>
             </a:pPr>
             <a:r>
-              <a:rPr lang="en-US" sz="1050" dirty="0">
+              <a:rPr lang="en-US" sz="1150" dirty="0">
                 <a:solidFill>
                   <a:srgbClr val="043F52"/>
                 </a:solidFill>
@@ -15762,22 +15426,22 @@
                 <a:ea typeface="Calibri" pitchFamily="34" charset="-122"/>
                 <a:cs typeface="Calibri" pitchFamily="34" charset="-120"/>
               </a:rPr>
-              <a:t>Aclarar denominador del 12 %, regla histórica de contacto y origen de las conversiones «top 8k». Validar permisos del score de buró (Ley 1266/2157, Ley 1581).</a:t>
+              <a:t>Denominador del 12 %, regla de contacto, permisos del buró.</a:t>
             </a:r>
-            <a:endParaRPr lang="en-US" sz="1050" dirty="0"/>
+            <a:endParaRPr lang="en-US" sz="1150" dirty="0"/>
           </a:p>
         </p:txBody>
       </p:sp>
       <p:sp>
         <p:nvSpPr>
-          <p:cNvPr id="20" name="Shape 18"/>
+          <p:cNvPr id="19" name="Paso 2"/>
           <p:cNvSpPr/>
           <p:nvPr/>
         </p:nvSpPr>
         <p:spPr>
           <a:xfrm>
-            <a:off x="457200" y="4572000"/>
-            <a:ext cx="292608" cy="292608"/>
+            <a:off x="457200" y="4315968"/>
+            <a:ext cx="310896" cy="310896"/>
           </a:xfrm>
           <a:prstGeom prst="ellipse">
             <a:avLst/>
@@ -15795,14 +15459,14 @@
       </p:sp>
       <p:sp>
         <p:nvSpPr>
-          <p:cNvPr id="21" name="Text 19"/>
+          <p:cNvPr id="20" name="Text 18"/>
           <p:cNvSpPr txBox="1"/>
           <p:nvPr/>
         </p:nvSpPr>
         <p:spPr>
           <a:xfrm>
-            <a:off x="457200" y="4572000"/>
-            <a:ext cx="292608" cy="292608"/>
+            <a:off x="457200" y="4315968"/>
+            <a:ext cx="310896" cy="310896"/>
           </a:xfrm>
           <a:prstGeom prst="rect">
             <a:avLst/>
@@ -15834,14 +15498,14 @@
       </p:sp>
       <p:sp>
         <p:nvSpPr>
-          <p:cNvPr id="22" name="Text 20"/>
+          <p:cNvPr id="21" name="Text 19"/>
           <p:cNvSpPr txBox="1"/>
           <p:nvPr/>
         </p:nvSpPr>
         <p:spPr>
           <a:xfrm>
-            <a:off x="868680" y="4498848"/>
-            <a:ext cx="6309360" cy="502920"/>
+            <a:off x="896112" y="4224528"/>
+            <a:ext cx="6309360" cy="530352"/>
           </a:xfrm>
           <a:prstGeom prst="rect">
             <a:avLst/>
@@ -15857,7 +15521,7 @@
               <a:buNone/>
             </a:pPr>
             <a:r>
-              <a:rPr lang="en-US" sz="1050" b="1" dirty="0">
+              <a:rPr lang="en-US" sz="1150" b="1" dirty="0">
                 <a:solidFill>
                   <a:srgbClr val="043F52"/>
                 </a:solidFill>
@@ -15871,7 +15535,7 @@
               <a:buNone/>
             </a:pPr>
             <a:r>
-              <a:rPr lang="en-US" sz="1050" dirty="0">
+              <a:rPr lang="en-US" sz="1150" dirty="0">
                 <a:solidFill>
                   <a:srgbClr val="043F52"/>
                 </a:solidFill>
@@ -15879,22 +15543,22 @@
                 <a:ea typeface="Calibri" pitchFamily="34" charset="-122"/>
                 <a:cs typeface="Calibri" pitchFamily="34" charset="-120"/>
               </a:rPr>
-              <a:t>Pipeline point-in-time con validaciones de esquema; reentrenar B con partición temporal; política de riesgo con Riesgos; cuotas y transferencia por regional.</a:t>
+              <a:t>Ficha de fuga de A y B; pipeline point-in-time; cuotas.</a:t>
             </a:r>
-            <a:endParaRPr lang="en-US" sz="1050" dirty="0"/>
+            <a:endParaRPr lang="en-US" sz="1150" dirty="0"/>
           </a:p>
         </p:txBody>
       </p:sp>
       <p:sp>
         <p:nvSpPr>
-          <p:cNvPr id="23" name="Shape 21"/>
+          <p:cNvPr id="22" name="Paso 3"/>
           <p:cNvSpPr/>
           <p:nvPr/>
         </p:nvSpPr>
         <p:spPr>
           <a:xfrm>
-            <a:off x="457200" y="5138928"/>
-            <a:ext cx="292608" cy="292608"/>
+            <a:off x="457200" y="4974336"/>
+            <a:ext cx="310896" cy="310896"/>
           </a:xfrm>
           <a:prstGeom prst="ellipse">
             <a:avLst/>
@@ -15912,14 +15576,14 @@
       </p:sp>
       <p:sp>
         <p:nvSpPr>
-          <p:cNvPr id="24" name="Text 22"/>
+          <p:cNvPr id="23" name="Text 21"/>
           <p:cNvSpPr txBox="1"/>
           <p:nvPr/>
         </p:nvSpPr>
         <p:spPr>
           <a:xfrm>
-            <a:off x="457200" y="5138928"/>
-            <a:ext cx="292608" cy="292608"/>
+            <a:off x="457200" y="4974336"/>
+            <a:ext cx="310896" cy="310896"/>
           </a:xfrm>
           <a:prstGeom prst="rect">
             <a:avLst/>
@@ -15951,14 +15615,14 @@
       </p:sp>
       <p:sp>
         <p:nvSpPr>
-          <p:cNvPr id="25" name="Text 23"/>
+          <p:cNvPr id="24" name="Text 22"/>
           <p:cNvSpPr txBox="1"/>
           <p:nvPr/>
         </p:nvSpPr>
         <p:spPr>
           <a:xfrm>
-            <a:off x="868680" y="5065776"/>
-            <a:ext cx="6309360" cy="502920"/>
+            <a:off x="896112" y="4882896"/>
+            <a:ext cx="6309360" cy="530352"/>
           </a:xfrm>
           <a:prstGeom prst="rect">
             <a:avLst/>
@@ -15974,7 +15638,7 @@
               <a:buNone/>
             </a:pPr>
             <a:r>
-              <a:rPr lang="en-US" sz="1050" b="1" dirty="0">
+              <a:rPr lang="en-US" sz="1150" b="1" dirty="0">
                 <a:solidFill>
                   <a:srgbClr val="043F52"/>
                 </a:solidFill>
@@ -15988,7 +15652,7 @@
               <a:buNone/>
             </a:pPr>
             <a:r>
-              <a:rPr lang="en-US" sz="1050" dirty="0">
+              <a:rPr lang="en-US" sz="1150" dirty="0">
                 <a:solidFill>
                   <a:srgbClr val="043F52"/>
                 </a:solidFill>
@@ -15996,22 +15660,22 @@
                 <a:ea typeface="Calibri" pitchFamily="34" charset="-122"/>
                 <a:cs typeface="Calibri" pitchFamily="34" charset="-120"/>
               </a:rPr>
-              <a:t>Piloto en producción con holdout; monitoreo semanal; lectura de mora a 60 días; decisión ship/no-ship pre-registrada.</a:t>
+              <a:t>Piloto con holdout; monitoreo semanal; decisión pre-registrada.</a:t>
             </a:r>
-            <a:endParaRPr lang="en-US" sz="1050" dirty="0"/>
+            <a:endParaRPr lang="en-US" sz="1150" dirty="0"/>
           </a:p>
         </p:txBody>
       </p:sp>
       <p:sp>
         <p:nvSpPr>
-          <p:cNvPr id="26" name="Shape 24"/>
+          <p:cNvPr id="25" name="Paso 4"/>
           <p:cNvSpPr/>
           <p:nvPr/>
         </p:nvSpPr>
         <p:spPr>
           <a:xfrm>
-            <a:off x="457200" y="5705856"/>
-            <a:ext cx="292608" cy="292608"/>
+            <a:off x="457200" y="5632704"/>
+            <a:ext cx="310896" cy="310896"/>
           </a:xfrm>
           <a:prstGeom prst="ellipse">
             <a:avLst/>
@@ -16029,14 +15693,14 @@
       </p:sp>
       <p:sp>
         <p:nvSpPr>
-          <p:cNvPr id="27" name="Text 25"/>
+          <p:cNvPr id="26" name="Text 24"/>
           <p:cNvSpPr txBox="1"/>
           <p:nvPr/>
         </p:nvSpPr>
         <p:spPr>
           <a:xfrm>
-            <a:off x="457200" y="5705856"/>
-            <a:ext cx="292608" cy="292608"/>
+            <a:off x="457200" y="5632704"/>
+            <a:ext cx="310896" cy="310896"/>
           </a:xfrm>
           <a:prstGeom prst="rect">
             <a:avLst/>
@@ -16068,14 +15732,14 @@
       </p:sp>
       <p:sp>
         <p:nvSpPr>
-          <p:cNvPr id="28" name="Text 26"/>
+          <p:cNvPr id="27" name="Text 25"/>
           <p:cNvSpPr txBox="1"/>
           <p:nvPr/>
         </p:nvSpPr>
         <p:spPr>
           <a:xfrm>
-            <a:off x="868680" y="5632704"/>
-            <a:ext cx="6309360" cy="502920"/>
+            <a:off x="896112" y="5541264"/>
+            <a:ext cx="6309360" cy="530352"/>
           </a:xfrm>
           <a:prstGeom prst="rect">
             <a:avLst/>
@@ -16091,7 +15755,7 @@
               <a:buNone/>
             </a:pPr>
             <a:r>
-              <a:rPr lang="en-US" sz="1050" b="1" dirty="0">
+              <a:rPr lang="en-US" sz="1150" b="1" dirty="0">
                 <a:solidFill>
                   <a:srgbClr val="043F52"/>
                 </a:solidFill>
@@ -16105,7 +15769,7 @@
               <a:buNone/>
             </a:pPr>
             <a:r>
-              <a:rPr lang="en-US" sz="1050" dirty="0">
+              <a:rPr lang="en-US" sz="1150" dirty="0">
                 <a:solidFill>
                   <a:srgbClr val="043F52"/>
                 </a:solidFill>
@@ -16113,22 +15777,22 @@
                 <a:ea typeface="Calibri" pitchFamily="34" charset="-122"/>
                 <a:cs typeface="Calibri" pitchFamily="34" charset="-120"/>
               </a:rPr>
-              <a:t>Si hay uplift: escalar y reentrenar uplift con los datos aleatorizados del piloto. Si no: mantener champion y revisar la hipótesis de contacto.</a:t>
+              <a:t>Con uplift, escalar; si no, champion.</a:t>
             </a:r>
-            <a:endParaRPr lang="en-US" sz="1050" dirty="0"/>
+            <a:endParaRPr lang="en-US" sz="1150" dirty="0"/>
           </a:p>
         </p:txBody>
       </p:sp>
       <p:sp>
         <p:nvSpPr>
-          <p:cNvPr id="29" name="Text 27"/>
+          <p:cNvPr id="28" name="Text 26"/>
           <p:cNvSpPr txBox="1"/>
           <p:nvPr/>
         </p:nvSpPr>
         <p:spPr>
           <a:xfrm>
-            <a:off x="7406640" y="3566160"/>
-            <a:ext cx="4297680" cy="320040"/>
+            <a:off x="7406640" y="3154680"/>
+            <a:ext cx="4325112" cy="320040"/>
           </a:xfrm>
           <a:prstGeom prst="rect">
             <a:avLst/>
@@ -16152,7 +15816,7 @@
                 <a:ea typeface="Calibri" pitchFamily="34" charset="-122"/>
                 <a:cs typeface="Calibri" pitchFamily="34" charset="-120"/>
               </a:rPr>
-              <a:t>Gobierno y uso responsable</a:t>
+              <a:t>Gobierno</a:t>
             </a:r>
             <a:endParaRPr lang="en-US" sz="1300" dirty="0"/>
           </a:p>
@@ -16160,14 +15824,14 @@
       </p:sp>
       <p:sp>
         <p:nvSpPr>
-          <p:cNvPr id="30" name="Text 28"/>
+          <p:cNvPr id="29" name="Text 27"/>
           <p:cNvSpPr txBox="1"/>
           <p:nvPr/>
         </p:nvSpPr>
         <p:spPr>
           <a:xfrm>
-            <a:off x="7406640" y="3886200"/>
-            <a:ext cx="4325112" cy="2468880"/>
+            <a:off x="7406640" y="3520440"/>
+            <a:ext cx="4325112" cy="2743200"/>
           </a:xfrm>
           <a:prstGeom prst="rect">
             <a:avLst/>
@@ -16181,13 +15845,13 @@
           <a:p>
             <a:pPr marL="177800" indent="-177800">
               <a:spcAft>
-                <a:spcPts val="300"/>
+                <a:spcPts val="400"/>
               </a:spcAft>
               <a:buSzPct val="100000"/>
               <a:buChar char="•"/>
             </a:pPr>
             <a:r>
-              <a:rPr lang="en-US" sz="1050" b="1" dirty="0">
+              <a:rPr lang="en-US" sz="1100" b="1" dirty="0">
                 <a:solidFill>
                   <a:srgbClr val="043F52"/>
                 </a:solidFill>
@@ -16195,16 +15859,16 @@
                 <a:ea typeface="Calibri" pitchFamily="34" charset="-122"/>
                 <a:cs typeface="Calibri" pitchFamily="34" charset="-120"/>
               </a:rPr>
-              <a:t>Exclusión sistemática: </a:t>
+              <a:t>Equidad: </a:t>
             </a:r>
             <a:pPr indent="0" marL="0">
               <a:spcAft>
-                <a:spcPts val="300"/>
+                <a:spcPts val="400"/>
               </a:spcAft>
               <a:buNone/>
             </a:pPr>
             <a:r>
-              <a:rPr lang="en-US" sz="1050" dirty="0">
+              <a:rPr lang="en-US" sz="1100" dirty="0">
                 <a:solidFill>
                   <a:srgbClr val="043F52"/>
                 </a:solidFill>
@@ -16212,20 +15876,20 @@
                 <a:ea typeface="Calibri" pitchFamily="34" charset="-122"/>
                 <a:cs typeface="Calibri" pitchFamily="34" charset="-120"/>
               </a:rPr>
-              <a:t>tasas de selección y conversión por regional, remesas, contactabilidad y tercil de buró cada corte (regla 0,8). El modelo limpio ya concentra el 80 % de la lista en el tercil alto de buró: la política de riesgo debe fijar ese piso de forma explícita, no el algoritmo.</a:t>
+              <a:t>selección y conversión por grupo; con cuotas, dentro de cada regional.</a:t>
             </a:r>
-            <a:endParaRPr lang="en-US" sz="1050" dirty="0"/>
+            <a:endParaRPr lang="en-US" sz="1100" dirty="0"/>
           </a:p>
           <a:p>
             <a:pPr marL="177800" indent="-177800">
               <a:spcAft>
-                <a:spcPts val="300"/>
+                <a:spcPts val="400"/>
               </a:spcAft>
               <a:buSzPct val="100000"/>
               <a:buChar char="•"/>
             </a:pPr>
             <a:r>
-              <a:rPr lang="en-US" sz="1050" b="1" dirty="0">
+              <a:rPr lang="en-US" sz="1100" b="1" dirty="0">
                 <a:solidFill>
                   <a:srgbClr val="043F52"/>
                 </a:solidFill>
@@ -16237,12 +15901,12 @@
             </a:r>
             <a:pPr indent="0" marL="0">
               <a:spcAft>
-                <a:spcPts val="300"/>
+                <a:spcPts val="400"/>
               </a:spcAft>
               <a:buNone/>
             </a:pPr>
             <a:r>
-              <a:rPr lang="en-US" sz="1050" dirty="0">
+              <a:rPr lang="en-US" sz="1100" dirty="0">
                 <a:solidFill>
                   <a:srgbClr val="043F52"/>
                 </a:solidFill>
@@ -16250,20 +15914,20 @@
                 <a:ea typeface="Calibri" pitchFamily="34" charset="-122"/>
                 <a:cs typeface="Calibri" pitchFamily="34" charset="-120"/>
               </a:rPr>
-              <a:t>model card, datasheet de la base, ficha de fuga por variable (timestamp y fuente), partición y semillas, plan de monitoreo con dueños y bitácora de decisiones (RACI).</a:t>
+              <a:t>model card, datasheet, ficha de fuga, monitoreo, RACI.</a:t>
             </a:r>
-            <a:endParaRPr lang="en-US" sz="1050" dirty="0"/>
+            <a:endParaRPr lang="en-US" sz="1100" dirty="0"/>
           </a:p>
           <a:p>
             <a:pPr marL="177800" indent="-177800">
               <a:spcAft>
-                <a:spcPts val="300"/>
+                <a:spcPts val="400"/>
               </a:spcAft>
               <a:buSzPct val="100000"/>
               <a:buChar char="•"/>
             </a:pPr>
             <a:r>
-              <a:rPr lang="en-US" sz="1050" b="1" dirty="0">
+              <a:rPr lang="en-US" sz="1100" b="1" dirty="0">
                 <a:solidFill>
                   <a:srgbClr val="043F52"/>
                 </a:solidFill>
@@ -16275,12 +15939,12 @@
             </a:r>
             <a:pPr indent="0" marL="0">
               <a:spcAft>
-                <a:spcPts val="300"/>
+                <a:spcPts val="400"/>
               </a:spcAft>
               <a:buNone/>
             </a:pPr>
             <a:r>
-              <a:rPr lang="en-US" sz="1050" dirty="0">
+              <a:rPr lang="en-US" sz="1100" dirty="0">
                 <a:solidFill>
                   <a:srgbClr val="043F52"/>
                 </a:solidFill>
@@ -16288,9 +15952,9 @@
                 <a:ea typeface="Calibri" pitchFamily="34" charset="-122"/>
                 <a:cs typeface="Calibri" pitchFamily="34" charset="-120"/>
               </a:rPr>
-              <a:t>muestra qué acompaña la renovación en el histórico, no qué la provoca; el score de buró pesa porque a quien lo tiene alto se le ofrece más. Solo el holdout dice si llamar cambia el resultado.</a:t>
+              <a:t>al buró alto se le busca más (37 % vs. 22 %); solo el holdout lo prueba.</a:t>
             </a:r>
-            <a:endParaRPr lang="en-US" sz="1050" dirty="0"/>
+            <a:endParaRPr lang="en-US" sz="1100" dirty="0"/>
           </a:p>
         </p:txBody>
       </p:sp>
@@ -16410,8 +16074,8 @@
         </p:nvSpPr>
         <p:spPr>
           <a:xfrm>
-            <a:off x="457200" y="1234440"/>
-            <a:ext cx="5486400" cy="320040"/>
+            <a:off x="457200" y="1188720"/>
+            <a:ext cx="6675120" cy="320040"/>
           </a:xfrm>
           <a:prstGeom prst="rect">
             <a:avLst/>
@@ -16435,7 +16099,7 @@
                 <a:ea typeface="Calibri" pitchFamily="34" charset="-122"/>
                 <a:cs typeface="Calibri" pitchFamily="34" charset="-120"/>
               </a:rPr>
-              <a:t>Réplica fuera de tiempo (train &lt; t, test = t, t = abril a agosto)</a:t>
+              <a:t>Réplica fuera de tiempo (train ≤ t−2, un corte de gap, test = t, t = mayo a agosto)</a:t>
             </a:r>
             <a:endParaRPr lang="en-US" sz="1200" dirty="0"/>
           </a:p>
@@ -16456,7 +16120,7 @@
           </p:nvPr>
         </p:nvGraphicFramePr>
         <p:xfrm>
-          <a:off x="457200" y="1554480"/>
+          <a:off x="457200" y="1508760"/>
           <a:ext cx="6675120" cy="914400"/>
         </p:xfrm>
         <a:graphic>
@@ -16469,8 +16133,8 @@
                 <a:gridCol w="640080"/>
                 <a:gridCol w="868680"/>
                 <a:gridCol w="685800"/>
-                <a:gridCol w="914400"/>
-                <a:gridCol w="548640"/>
+                <a:gridCol w="1005840"/>
+                <a:gridCol w="457200"/>
               </a:tblGrid>
               <a:tr h="246888">
                 <a:tc>
@@ -16830,7 +16494,7 @@
                           <a:ea typeface="Calibri" pitchFamily="34" charset="-122"/>
                           <a:cs typeface="Calibri" pitchFamily="34" charset="-120"/>
                         </a:rPr>
-                        <a:t>Conv. top 32 %</a:t>
+                        <a:t>Calibración (pend.)</a:t>
                       </a:r>
                       <a:endParaRPr lang="en-US" sz="1050" dirty="0">
                         <a:latin typeface="Calibri" charset="0"/>
@@ -16968,7 +16632,7 @@
                           <a:ea typeface="Calibri" pitchFamily="34" charset="-122"/>
                           <a:cs typeface="Calibri" pitchFamily="34" charset="-120"/>
                         </a:rPr>
-                        <a:t>18 ex ante limpias</a:t>
+                        <a:t>16 ex ante limpias</a:t>
                       </a:r>
                       <a:endParaRPr lang="en-US" sz="1050" dirty="0">
                         <a:latin typeface="Calibri" charset="0"/>
@@ -17098,7 +16762,7 @@
                           <a:ea typeface="Calibri" pitchFamily="34" charset="-122"/>
                           <a:cs typeface="Calibri" pitchFamily="34" charset="-120"/>
                         </a:rPr>
-                        <a:t>0,820</a:t>
+                        <a:t>0,817</a:t>
                       </a:r>
                       <a:endParaRPr lang="en-US" sz="1050" dirty="0">
                         <a:latin typeface="Calibri" charset="0"/>
@@ -17163,7 +16827,7 @@
                           <a:ea typeface="Calibri" pitchFamily="34" charset="-122"/>
                           <a:cs typeface="Calibri" pitchFamily="34" charset="-120"/>
                         </a:rPr>
-                        <a:t>0,79–0,85</a:t>
+                        <a:t>0,78–0,85</a:t>
                       </a:r>
                       <a:endParaRPr lang="en-US" sz="1050" dirty="0">
                         <a:latin typeface="Calibri" charset="0"/>
@@ -17293,7 +16957,7 @@
                           <a:ea typeface="Calibri" pitchFamily="34" charset="-122"/>
                           <a:cs typeface="Calibri" pitchFamily="34" charset="-120"/>
                         </a:rPr>
-                        <a:t>44,6 %</a:t>
+                        <a:t>0,90</a:t>
                       </a:r>
                       <a:endParaRPr lang="en-US" sz="1050" dirty="0">
                         <a:latin typeface="Calibri" charset="0"/>
@@ -17358,7 +17022,7 @@
                           <a:ea typeface="Calibri" pitchFamily="34" charset="-122"/>
                           <a:cs typeface="Calibri" pitchFamily="34" charset="-120"/>
                         </a:rPr>
-                        <a:t>0,128</a:t>
+                        <a:t>0,130</a:t>
                       </a:r>
                       <a:endParaRPr lang="en-US" sz="1050" dirty="0">
                         <a:latin typeface="Calibri" charset="0"/>
@@ -17425,7 +17089,7 @@
                           <a:ea typeface="Calibri" pitchFamily="34" charset="-122"/>
                           <a:cs typeface="Calibri" pitchFamily="34" charset="-120"/>
                         </a:rPr>
-                        <a:t>18 ex ante limpias</a:t>
+                        <a:t>16 ex ante limpias</a:t>
                       </a:r>
                       <a:endParaRPr lang="en-US" sz="1050" dirty="0">
                         <a:latin typeface="Calibri" charset="0"/>
@@ -17555,7 +17219,7 @@
                           <a:ea typeface="Calibri" pitchFamily="34" charset="-122"/>
                           <a:cs typeface="Calibri" pitchFamily="34" charset="-120"/>
                         </a:rPr>
-                        <a:t>0,797</a:t>
+                        <a:t>0,786</a:t>
                       </a:r>
                       <a:endParaRPr lang="en-US" sz="1050" dirty="0">
                         <a:latin typeface="Calibri" charset="0"/>
@@ -17620,7 +17284,7 @@
                           <a:ea typeface="Calibri" pitchFamily="34" charset="-122"/>
                           <a:cs typeface="Calibri" pitchFamily="34" charset="-120"/>
                         </a:rPr>
-                        <a:t>0,76–0,83</a:t>
+                        <a:t>0,76–0,81</a:t>
                       </a:r>
                       <a:endParaRPr lang="en-US" sz="1050" dirty="0">
                         <a:latin typeface="Calibri" charset="0"/>
@@ -17750,7 +17414,7 @@
                           <a:ea typeface="Calibri" pitchFamily="34" charset="-122"/>
                           <a:cs typeface="Calibri" pitchFamily="34" charset="-120"/>
                         </a:rPr>
-                        <a:t>42,3 %</a:t>
+                        <a:t>0,77</a:t>
                       </a:r>
                       <a:endParaRPr lang="en-US" sz="1050" dirty="0">
                         <a:latin typeface="Calibri" charset="0"/>
@@ -17815,7 +17479,7 @@
                           <a:ea typeface="Calibri" pitchFamily="34" charset="-122"/>
                           <a:cs typeface="Calibri" pitchFamily="34" charset="-120"/>
                         </a:rPr>
-                        <a:t>0,134</a:t>
+                        <a:t>0,138</a:t>
                       </a:r>
                       <a:endParaRPr lang="en-US" sz="1050" dirty="0">
                         <a:latin typeface="Calibri" charset="0"/>
@@ -18012,7 +17676,7 @@
                           <a:ea typeface="Calibri" pitchFamily="34" charset="-122"/>
                           <a:cs typeface="Calibri" pitchFamily="34" charset="-120"/>
                         </a:rPr>
-                        <a:t>0,822</a:t>
+                        <a:t>0,819</a:t>
                       </a:r>
                       <a:endParaRPr lang="en-US" sz="1050" dirty="0">
                         <a:latin typeface="Calibri" charset="0"/>
@@ -18077,7 +17741,7 @@
                           <a:ea typeface="Calibri" pitchFamily="34" charset="-122"/>
                           <a:cs typeface="Calibri" pitchFamily="34" charset="-120"/>
                         </a:rPr>
-                        <a:t>0,79–0,85</a:t>
+                        <a:t>0,78–0,85</a:t>
                       </a:r>
                       <a:endParaRPr lang="en-US" sz="1050" dirty="0">
                         <a:latin typeface="Calibri" charset="0"/>
@@ -18142,7 +17806,7 @@
                           <a:ea typeface="Calibri" pitchFamily="34" charset="-122"/>
                           <a:cs typeface="Calibri" pitchFamily="34" charset="-120"/>
                         </a:rPr>
-                        <a:t>0,52</a:t>
+                        <a:t>0,53</a:t>
                       </a:r>
                       <a:endParaRPr lang="en-US" sz="1050" dirty="0">
                         <a:latin typeface="Calibri" charset="0"/>
@@ -18207,7 +17871,7 @@
                           <a:ea typeface="Calibri" pitchFamily="34" charset="-122"/>
                           <a:cs typeface="Calibri" pitchFamily="34" charset="-120"/>
                         </a:rPr>
-                        <a:t>44,6 %</a:t>
+                        <a:t>0,90</a:t>
                       </a:r>
                       <a:endParaRPr lang="en-US" sz="1050" dirty="0">
                         <a:latin typeface="Calibri" charset="0"/>
@@ -18272,7 +17936,7 @@
                           <a:ea typeface="Calibri" pitchFamily="34" charset="-122"/>
                           <a:cs typeface="Calibri" pitchFamily="34" charset="-120"/>
                         </a:rPr>
-                        <a:t>0,127</a:t>
+                        <a:t>0,129</a:t>
                       </a:r>
                       <a:endParaRPr lang="en-US" sz="1050" dirty="0">
                         <a:latin typeface="Calibri" charset="0"/>
@@ -18469,7 +18133,7 @@
                           <a:ea typeface="Calibri" pitchFamily="34" charset="-122"/>
                           <a:cs typeface="Calibri" pitchFamily="34" charset="-120"/>
                         </a:rPr>
-                        <a:t>0,949</a:t>
+                        <a:t>0,944</a:t>
                       </a:r>
                       <a:endParaRPr lang="en-US" sz="1050" dirty="0">
                         <a:latin typeface="Calibri" charset="0"/>
@@ -18534,7 +18198,7 @@
                           <a:ea typeface="Calibri" pitchFamily="34" charset="-122"/>
                           <a:cs typeface="Calibri" pitchFamily="34" charset="-120"/>
                         </a:rPr>
-                        <a:t>0,93–0,97</a:t>
+                        <a:t>0,93–0,96</a:t>
                       </a:r>
                       <a:endParaRPr lang="en-US" sz="1050" dirty="0">
                         <a:latin typeface="Calibri" charset="0"/>
@@ -18599,7 +18263,7 @@
                           <a:ea typeface="Calibri" pitchFamily="34" charset="-122"/>
                           <a:cs typeface="Calibri" pitchFamily="34" charset="-120"/>
                         </a:rPr>
-                        <a:t>0,86</a:t>
+                        <a:t>0,85</a:t>
                       </a:r>
                       <a:endParaRPr lang="en-US" sz="1050" dirty="0">
                         <a:latin typeface="Calibri" charset="0"/>
@@ -18664,7 +18328,7 @@
                           <a:ea typeface="Calibri" pitchFamily="34" charset="-122"/>
                           <a:cs typeface="Calibri" pitchFamily="34" charset="-120"/>
                         </a:rPr>
-                        <a:t>58,9 %</a:t>
+                        <a:t>0,99</a:t>
                       </a:r>
                       <a:endParaRPr lang="en-US" sz="1050" dirty="0">
                         <a:latin typeface="Calibri" charset="0"/>
@@ -18729,7 +18393,7 @@
                           <a:ea typeface="Calibri" pitchFamily="34" charset="-122"/>
                           <a:cs typeface="Calibri" pitchFamily="34" charset="-120"/>
                         </a:rPr>
-                        <a:t>0,062</a:t>
+                        <a:t>0,067</a:t>
                       </a:r>
                       <a:endParaRPr lang="en-US" sz="1050" dirty="0">
                         <a:latin typeface="Calibri" charset="0"/>
@@ -19121,7 +18785,7 @@
                           <a:ea typeface="Calibri" pitchFamily="34" charset="-122"/>
                           <a:cs typeface="Calibri" pitchFamily="34" charset="-120"/>
                         </a:rPr>
-                        <a:t>63,4 %</a:t>
+                        <a:t>1,00</a:t>
                       </a:r>
                       <a:endParaRPr lang="en-US" sz="1050" dirty="0">
                         <a:latin typeface="Calibri" charset="0"/>
@@ -19247,8 +18911,8 @@
         </p:nvSpPr>
         <p:spPr>
           <a:xfrm>
-            <a:off x="457200" y="3154680"/>
-            <a:ext cx="6675120" cy="502920"/>
+            <a:off x="457200" y="3108960"/>
+            <a:ext cx="6675120" cy="685800"/>
           </a:xfrm>
           <a:prstGeom prst="rect">
             <a:avLst/>
@@ -19264,7 +18928,7 @@
               <a:buNone/>
             </a:pPr>
             <a:r>
-              <a:rPr lang="en-US" sz="950" dirty="0">
+              <a:rPr lang="en-US" sz="900" dirty="0">
                 <a:solidFill>
                   <a:srgbClr val="4A6A72"/>
                 </a:solidFill>
@@ -19272,9 +18936,9 @@
                 <a:ea typeface="Calibri" pitchFamily="34" charset="-122"/>
                 <a:cs typeface="Calibri" pitchFamily="34" charset="-120"/>
               </a:rPr>
-              <a:t>Prevalencia de la base 20,2 %; top 32 % = 8.000/25.000. k-fold aleatorio con variables limpias: 0,82. Coeficientes estandarizados del modelo limpio: score_buro 1,30; max_mora_6m −0,56; respondio_oferta_previa 0,26; el resto &lt; 0,15.</a:t>
+              <a:t>Prevalencia de la base 20,2 %. Calibración: pendiente de observado sobre predicho (1 = perfecta); media predicha 0,197 vs. observada 0,207. Las conversiones «top 8k» de la hoja no son comparables con esta base. Sin gap (train &lt; t, abril a agosto): 0,82 / 0,80; k-fold aleatorio: 0,82. Coeficientes estandarizados del modelo limpio: score_buro 1,30; max_mora_6m −0,56; respondio_oferta_previa 0,27; el resto &lt; 0,15.</a:t>
             </a:r>
-            <a:endParaRPr lang="en-US" sz="950" dirty="0"/>
+            <a:endParaRPr lang="en-US" sz="900" dirty="0"/>
           </a:p>
         </p:txBody>
       </p:sp>
@@ -19286,7 +18950,7 @@
         </p:nvSpPr>
         <p:spPr>
           <a:xfrm>
-            <a:off x="7406640" y="1234440"/>
+            <a:off x="7406640" y="1188720"/>
             <a:ext cx="4297680" cy="320040"/>
           </a:xfrm>
           <a:prstGeom prst="rect">
@@ -19332,7 +18996,7 @@
           </p:nvPr>
         </p:nvGraphicFramePr>
         <p:xfrm>
-          <a:off x="7406640" y="1554480"/>
+          <a:off x="7406640" y="1508760"/>
           <a:ext cx="4325112" cy="914400"/>
         </p:xfrm>
         <a:graphic>
@@ -21729,8 +21393,8 @@
         </p:nvSpPr>
         <p:spPr>
           <a:xfrm>
-            <a:off x="7406640" y="3154680"/>
-            <a:ext cx="4325112" cy="640080"/>
+            <a:off x="7406640" y="3108960"/>
+            <a:ext cx="4325112" cy="685800"/>
           </a:xfrm>
           <a:prstGeom prst="rect">
             <a:avLst/>
@@ -21746,7 +21410,7 @@
               <a:buNone/>
             </a:pPr>
             <a:r>
-              <a:rPr lang="en-US" sz="950" dirty="0">
+              <a:rPr lang="en-US" sz="900" dirty="0">
                 <a:solidFill>
                   <a:srgbClr val="4A6A72"/>
                 </a:solidFill>
@@ -21756,7 +21420,7 @@
               </a:rPr>
               <a:t>* Mora no reportada para D; se asume la de la herramienta actual. Valor incremental de D si +3,1 pp es uplift de conversión: 248 × 328 k = 81 M/mes. Sensibilidad B vs. A con pérdida por mora de 1,0 / 1,8 / 2,5 / 3,5 M: 263/237/215/182 vs. 262/218/181/126.</a:t>
             </a:r>
-            <a:endParaRPr lang="en-US" sz="950" dirty="0"/>
+            <a:endParaRPr lang="en-US" sz="900" dirty="0"/>
           </a:p>
         </p:txBody>
       </p:sp>
@@ -21793,7 +21457,7 @@
                 <a:ea typeface="Calibri" pitchFamily="34" charset="-122"/>
                 <a:cs typeface="Calibri" pitchFamily="34" charset="-120"/>
               </a:rPr>
-              <a:t>Tamaño por brazo (α 5 %, potencia 80 %)</a:t>
+              <a:t>Tamaños de muestra (α 5 %, potencia 80 %) y costo del holdout</a:t>
             </a:r>
             <a:endParaRPr lang="en-US" sz="1200" dirty="0"/>
           </a:p>
@@ -21815,17 +21479,18 @@
         </p:nvGraphicFramePr>
         <p:xfrm>
           <a:off x="457200" y="4160520"/>
-          <a:ext cx="4754880" cy="914400"/>
+          <a:ext cx="5212080" cy="914400"/>
         </p:xfrm>
         <a:graphic>
           <a:graphicData uri="http://schemas.openxmlformats.org/drawingml/2006/table">
             <a:tbl>
               <a:tblPr/>
               <a:tblGrid>
-                <a:gridCol w="3566160"/>
-                <a:gridCol w="1188720"/>
+                <a:gridCol w="2103120"/>
+                <a:gridCol w="1691640"/>
+                <a:gridCol w="1417320"/>
               </a:tblGrid>
-              <a:tr h="246888">
+              <a:tr h="219456">
                 <a:tc>
                   <a:txBody>
                     <a:bodyPr/>
@@ -21911,7 +21576,7 @@
                           <a:ea typeface="Calibri" pitchFamily="34" charset="-122"/>
                           <a:cs typeface="Calibri" pitchFamily="34" charset="-120"/>
                         </a:rPr>
-                        <a:t>n por brazo</a:t>
+                        <a:t>n</a:t>
                       </a:r>
                       <a:endParaRPr lang="en-US" sz="1050" dirty="0">
                         <a:latin typeface="Calibri" charset="0"/>
@@ -21962,8 +21627,76 @@
                     </a:solidFill>
                   </a:tcPr>
                 </a:tc>
+                <a:tc>
+                  <a:txBody>
+                    <a:bodyPr/>
+                    <a:lstStyle/>
+                    <a:p>
+                      <a:pPr indent="0" marL="0">
+                        <a:buNone/>
+                      </a:pPr>
+                      <a:r>
+                        <a:rPr lang="en-US" sz="1050" b="1" dirty="0">
+                          <a:solidFill>
+                            <a:srgbClr val="043F52"/>
+                          </a:solidFill>
+                          <a:latin typeface="Calibri" pitchFamily="34" charset="0"/>
+                          <a:ea typeface="Calibri" pitchFamily="34" charset="-122"/>
+                          <a:cs typeface="Calibri" pitchFamily="34" charset="-120"/>
+                        </a:rPr>
+                        <a:t>Meses · costo</a:t>
+                      </a:r>
+                      <a:endParaRPr lang="en-US" sz="1050" dirty="0">
+                        <a:latin typeface="Calibri" charset="0"/>
+                        <a:ea typeface="Calibri" charset="0"/>
+                        <a:cs typeface="Calibri" charset="0"/>
+                      </a:endParaRPr>
+                    </a:p>
+                  </a:txBody>
+                  <a:tcPr marL="50800" marR="50800" marT="25400" marB="25400" anchor="ctr">
+                    <a:lnL w="9525" cap="flat" cmpd="sng" algn="ctr">
+                      <a:solidFill>
+                        <a:srgbClr val="D6E8E6"/>
+                      </a:solidFill>
+                      <a:prstDash val="solid"/>
+                      <a:round/>
+                      <a:headEnd type="none" w="med" len="med"/>
+                      <a:tailEnd type="none" w="med" len="med"/>
+                    </a:lnL>
+                    <a:lnR w="9525" cap="flat" cmpd="sng" algn="ctr">
+                      <a:solidFill>
+                        <a:srgbClr val="D6E8E6"/>
+                      </a:solidFill>
+                      <a:prstDash val="solid"/>
+                      <a:round/>
+                      <a:headEnd type="none" w="med" len="med"/>
+                      <a:tailEnd type="none" w="med" len="med"/>
+                    </a:lnR>
+                    <a:lnT w="9525" cap="flat" cmpd="sng" algn="ctr">
+                      <a:solidFill>
+                        <a:srgbClr val="D6E8E6"/>
+                      </a:solidFill>
+                      <a:prstDash val="solid"/>
+                      <a:round/>
+                      <a:headEnd type="none" w="med" len="med"/>
+                      <a:tailEnd type="none" w="med" len="med"/>
+                    </a:lnT>
+                    <a:lnB w="9525" cap="flat" cmpd="sng" algn="ctr">
+                      <a:solidFill>
+                        <a:srgbClr val="D6E8E6"/>
+                      </a:solidFill>
+                      <a:prstDash val="solid"/>
+                      <a:round/>
+                      <a:headEnd type="none" w="med" len="med"/>
+                      <a:tailEnd type="none" w="med" len="med"/>
+                    </a:lnB>
+                    <a:solidFill>
+                      <a:srgbClr val="EEF8F7"/>
+                    </a:solidFill>
+                  </a:tcPr>
+                </a:tc>
               </a:tr>
-              <a:tr h="246888">
+              <a:tr h="219456">
                 <a:tc>
                   <a:txBody>
                     <a:bodyPr/>
@@ -21981,7 +21714,7 @@
                           <a:ea typeface="Calibri" pitchFamily="34" charset="-122"/>
                           <a:cs typeface="Calibri" pitchFamily="34" charset="-120"/>
                         </a:rPr>
-                        <a:t>Conversión 3,6 % a 4,5 % (+25 % relativo)</a:t>
+                        <a:t>Conv. 3,6 % a 4,5 / 5,4 / 7,2 %</a:t>
                       </a:r>
                       <a:endParaRPr lang="en-US" sz="1050" dirty="0">
                         <a:latin typeface="Calibri" charset="0"/>
@@ -22046,7 +21779,72 @@
                           <a:ea typeface="Calibri" pitchFamily="34" charset="-122"/>
                           <a:cs typeface="Calibri" pitchFamily="34" charset="-120"/>
                         </a:rPr>
-                        <a:t>7.530</a:t>
+                        <a:t>7.530 / 2.081 / 618 por brazo</a:t>
+                      </a:r>
+                      <a:endParaRPr lang="en-US" sz="1050" dirty="0">
+                        <a:latin typeface="Calibri" charset="0"/>
+                        <a:ea typeface="Calibri" charset="0"/>
+                        <a:cs typeface="Calibri" charset="0"/>
+                      </a:endParaRPr>
+                    </a:p>
+                  </a:txBody>
+                  <a:tcPr marL="50800" marR="50800" marT="25400" marB="25400" anchor="ctr">
+                    <a:lnL w="9525" cap="flat" cmpd="sng" algn="ctr">
+                      <a:solidFill>
+                        <a:srgbClr val="D6E8E6"/>
+                      </a:solidFill>
+                      <a:prstDash val="solid"/>
+                      <a:round/>
+                      <a:headEnd type="none" w="med" len="med"/>
+                      <a:tailEnd type="none" w="med" len="med"/>
+                    </a:lnL>
+                    <a:lnR w="9525" cap="flat" cmpd="sng" algn="ctr">
+                      <a:solidFill>
+                        <a:srgbClr val="D6E8E6"/>
+                      </a:solidFill>
+                      <a:prstDash val="solid"/>
+                      <a:round/>
+                      <a:headEnd type="none" w="med" len="med"/>
+                      <a:tailEnd type="none" w="med" len="med"/>
+                    </a:lnR>
+                    <a:lnT w="9525" cap="flat" cmpd="sng" algn="ctr">
+                      <a:solidFill>
+                        <a:srgbClr val="D6E8E6"/>
+                      </a:solidFill>
+                      <a:prstDash val="solid"/>
+                      <a:round/>
+                      <a:headEnd type="none" w="med" len="med"/>
+                      <a:tailEnd type="none" w="med" len="med"/>
+                    </a:lnT>
+                    <a:lnB w="9525" cap="flat" cmpd="sng" algn="ctr">
+                      <a:solidFill>
+                        <a:srgbClr val="D6E8E6"/>
+                      </a:solidFill>
+                      <a:prstDash val="solid"/>
+                      <a:round/>
+                      <a:headEnd type="none" w="med" len="med"/>
+                      <a:tailEnd type="none" w="med" len="med"/>
+                    </a:lnB>
+                  </a:tcPr>
+                </a:tc>
+                <a:tc>
+                  <a:txBody>
+                    <a:bodyPr/>
+                    <a:lstStyle/>
+                    <a:p>
+                      <a:pPr indent="0" marL="0">
+                        <a:buNone/>
+                      </a:pPr>
+                      <a:r>
+                        <a:rPr lang="en-US" sz="1050" dirty="0">
+                          <a:solidFill>
+                            <a:srgbClr val="043F52"/>
+                          </a:solidFill>
+                          <a:latin typeface="Calibri" pitchFamily="34" charset="0"/>
+                          <a:ea typeface="Calibri" pitchFamily="34" charset="-122"/>
+                          <a:cs typeface="Calibri" pitchFamily="34" charset="-120"/>
+                        </a:rPr>
+                        <a:t>2 / 1 / 1 meses</a:t>
                       </a:r>
                       <a:endParaRPr lang="en-US" sz="1050" dirty="0">
                         <a:latin typeface="Calibri" charset="0"/>
@@ -22095,7 +21893,7 @@
                   </a:tcPr>
                 </a:tc>
               </a:tr>
-              <a:tr h="246888">
+              <a:tr h="219456">
                 <a:tc>
                   <a:txBody>
                     <a:bodyPr/>
@@ -22113,7 +21911,7 @@
                           <a:ea typeface="Calibri" pitchFamily="34" charset="-122"/>
                           <a:cs typeface="Calibri" pitchFamily="34" charset="-120"/>
                         </a:rPr>
-                        <a:t>Conversión 3,6 % a 5,4 % (+50 % relativo)</a:t>
+                        <a:t>Mora 5,1 % a 7,2 % (renovados)</a:t>
                       </a:r>
                       <a:endParaRPr lang="en-US" sz="1050" dirty="0">
                         <a:latin typeface="Calibri" charset="0"/>
@@ -22178,7 +21976,72 @@
                           <a:ea typeface="Calibri" pitchFamily="34" charset="-122"/>
                           <a:cs typeface="Calibri" pitchFamily="34" charset="-120"/>
                         </a:rPr>
-                        <a:t>2.081</a:t>
+                        <a:t>2.053 renovados por brazo</a:t>
+                      </a:r>
+                      <a:endParaRPr lang="en-US" sz="1050" dirty="0">
+                        <a:latin typeface="Calibri" charset="0"/>
+                        <a:ea typeface="Calibri" charset="0"/>
+                        <a:cs typeface="Calibri" charset="0"/>
+                      </a:endParaRPr>
+                    </a:p>
+                  </a:txBody>
+                  <a:tcPr marL="50800" marR="50800" marT="25400" marB="25400" anchor="ctr">
+                    <a:lnL w="9525" cap="flat" cmpd="sng" algn="ctr">
+                      <a:solidFill>
+                        <a:srgbClr val="D6E8E6"/>
+                      </a:solidFill>
+                      <a:prstDash val="solid"/>
+                      <a:round/>
+                      <a:headEnd type="none" w="med" len="med"/>
+                      <a:tailEnd type="none" w="med" len="med"/>
+                    </a:lnL>
+                    <a:lnR w="9525" cap="flat" cmpd="sng" algn="ctr">
+                      <a:solidFill>
+                        <a:srgbClr val="D6E8E6"/>
+                      </a:solidFill>
+                      <a:prstDash val="solid"/>
+                      <a:round/>
+                      <a:headEnd type="none" w="med" len="med"/>
+                      <a:tailEnd type="none" w="med" len="med"/>
+                    </a:lnR>
+                    <a:lnT w="9525" cap="flat" cmpd="sng" algn="ctr">
+                      <a:solidFill>
+                        <a:srgbClr val="D6E8E6"/>
+                      </a:solidFill>
+                      <a:prstDash val="solid"/>
+                      <a:round/>
+                      <a:headEnd type="none" w="med" len="med"/>
+                      <a:tailEnd type="none" w="med" len="med"/>
+                    </a:lnT>
+                    <a:lnB w="9525" cap="flat" cmpd="sng" algn="ctr">
+                      <a:solidFill>
+                        <a:srgbClr val="D6E8E6"/>
+                      </a:solidFill>
+                      <a:prstDash val="solid"/>
+                      <a:round/>
+                      <a:headEnd type="none" w="med" len="med"/>
+                      <a:tailEnd type="none" w="med" len="med"/>
+                    </a:lnB>
+                  </a:tcPr>
+                </a:tc>
+                <a:tc>
+                  <a:txBody>
+                    <a:bodyPr/>
+                    <a:lstStyle/>
+                    <a:p>
+                      <a:pPr indent="0" marL="0">
+                        <a:buNone/>
+                      </a:pPr>
+                      <a:r>
+                        <a:rPr lang="en-US" sz="1050" dirty="0">
+                          <a:solidFill>
+                            <a:srgbClr val="043F52"/>
+                          </a:solidFill>
+                          <a:latin typeface="Calibri" pitchFamily="34" charset="0"/>
+                          <a:ea typeface="Calibri" pitchFamily="34" charset="-122"/>
+                          <a:cs typeface="Calibri" pitchFamily="34" charset="-120"/>
+                        </a:rPr>
+                        <a:t>fuera del piloto</a:t>
                       </a:r>
                       <a:endParaRPr lang="en-US" sz="1050" dirty="0">
                         <a:latin typeface="Calibri" charset="0"/>
@@ -22227,7 +22090,7 @@
                   </a:tcPr>
                 </a:tc>
               </a:tr>
-              <a:tr h="246888">
+              <a:tr h="219456">
                 <a:tc>
                   <a:txBody>
                     <a:bodyPr/>
@@ -22245,7 +22108,7 @@
                           <a:ea typeface="Calibri" pitchFamily="34" charset="-122"/>
                           <a:cs typeface="Calibri" pitchFamily="34" charset="-120"/>
                         </a:rPr>
-                        <a:t>Conversión 3,6 % a 7,2 % (×2)</a:t>
+                        <a:t>Holdout 2,3 a 3,5 % (800 vs. 4.000)</a:t>
                       </a:r>
                       <a:endParaRPr lang="en-US" sz="1050" dirty="0">
                         <a:latin typeface="Calibri" charset="0"/>
@@ -22310,7 +22173,72 @@
                           <a:ea typeface="Calibri" pitchFamily="34" charset="-122"/>
                           <a:cs typeface="Calibri" pitchFamily="34" charset="-120"/>
                         </a:rPr>
-                        <a:t>618</a:t>
+                        <a:t>1.932 en holdout</a:t>
+                      </a:r>
+                      <a:endParaRPr lang="en-US" sz="1050" dirty="0">
+                        <a:latin typeface="Calibri" charset="0"/>
+                        <a:ea typeface="Calibri" charset="0"/>
+                        <a:cs typeface="Calibri" charset="0"/>
+                      </a:endParaRPr>
+                    </a:p>
+                  </a:txBody>
+                  <a:tcPr marL="50800" marR="50800" marT="25400" marB="25400" anchor="ctr">
+                    <a:lnL w="9525" cap="flat" cmpd="sng" algn="ctr">
+                      <a:solidFill>
+                        <a:srgbClr val="D6E8E6"/>
+                      </a:solidFill>
+                      <a:prstDash val="solid"/>
+                      <a:round/>
+                      <a:headEnd type="none" w="med" len="med"/>
+                      <a:tailEnd type="none" w="med" len="med"/>
+                    </a:lnL>
+                    <a:lnR w="9525" cap="flat" cmpd="sng" algn="ctr">
+                      <a:solidFill>
+                        <a:srgbClr val="D6E8E6"/>
+                      </a:solidFill>
+                      <a:prstDash val="solid"/>
+                      <a:round/>
+                      <a:headEnd type="none" w="med" len="med"/>
+                      <a:tailEnd type="none" w="med" len="med"/>
+                    </a:lnR>
+                    <a:lnT w="9525" cap="flat" cmpd="sng" algn="ctr">
+                      <a:solidFill>
+                        <a:srgbClr val="D6E8E6"/>
+                      </a:solidFill>
+                      <a:prstDash val="solid"/>
+                      <a:round/>
+                      <a:headEnd type="none" w="med" len="med"/>
+                      <a:tailEnd type="none" w="med" len="med"/>
+                    </a:lnT>
+                    <a:lnB w="9525" cap="flat" cmpd="sng" algn="ctr">
+                      <a:solidFill>
+                        <a:srgbClr val="D6E8E6"/>
+                      </a:solidFill>
+                      <a:prstDash val="solid"/>
+                      <a:round/>
+                      <a:headEnd type="none" w="med" len="med"/>
+                      <a:tailEnd type="none" w="med" len="med"/>
+                    </a:lnB>
+                  </a:tcPr>
+                </a:tc>
+                <a:tc>
+                  <a:txBody>
+                    <a:bodyPr/>
+                    <a:lstStyle/>
+                    <a:p>
+                      <a:pPr indent="0" marL="0">
+                        <a:buNone/>
+                      </a:pPr>
+                      <a:r>
+                        <a:rPr lang="en-US" sz="1050" dirty="0">
+                          <a:solidFill>
+                            <a:srgbClr val="043F52"/>
+                          </a:solidFill>
+                          <a:latin typeface="Calibri" pitchFamily="34" charset="0"/>
+                          <a:ea typeface="Calibri" pitchFamily="34" charset="-122"/>
+                          <a:cs typeface="Calibri" pitchFamily="34" charset="-120"/>
+                        </a:rPr>
+                        <a:t>2,4 meses · 3,2 M/mes</a:t>
                       </a:r>
                       <a:endParaRPr lang="en-US" sz="1050" dirty="0">
                         <a:latin typeface="Calibri" charset="0"/>
@@ -22359,7 +22287,7 @@
                   </a:tcPr>
                 </a:tc>
               </a:tr>
-              <a:tr h="246888">
+              <a:tr h="219456">
                 <a:tc>
                   <a:txBody>
                     <a:bodyPr/>
@@ -22377,7 +22305,7 @@
                           <a:ea typeface="Calibri" pitchFamily="34" charset="-122"/>
                           <a:cs typeface="Calibri" pitchFamily="34" charset="-120"/>
                         </a:rPr>
-                        <a:t>Mora 5,1 % a 7,2 % entre renovados</a:t>
+                        <a:t>Holdout 2,3 a 4,0 % (plausible)</a:t>
                       </a:r>
                       <a:endParaRPr lang="en-US" sz="1050" dirty="0">
                         <a:latin typeface="Calibri" charset="0"/>
@@ -22442,7 +22370,72 @@
                           <a:ea typeface="Calibri" pitchFamily="34" charset="-122"/>
                           <a:cs typeface="Calibri" pitchFamily="34" charset="-120"/>
                         </a:rPr>
-                        <a:t>2.053 renovados</a:t>
+                        <a:t>1.056 en holdout</a:t>
+                      </a:r>
+                      <a:endParaRPr lang="en-US" sz="1050" dirty="0">
+                        <a:latin typeface="Calibri" charset="0"/>
+                        <a:ea typeface="Calibri" charset="0"/>
+                        <a:cs typeface="Calibri" charset="0"/>
+                      </a:endParaRPr>
+                    </a:p>
+                  </a:txBody>
+                  <a:tcPr marL="50800" marR="50800" marT="25400" marB="25400" anchor="ctr">
+                    <a:lnL w="9525" cap="flat" cmpd="sng" algn="ctr">
+                      <a:solidFill>
+                        <a:srgbClr val="D6E8E6"/>
+                      </a:solidFill>
+                      <a:prstDash val="solid"/>
+                      <a:round/>
+                      <a:headEnd type="none" w="med" len="med"/>
+                      <a:tailEnd type="none" w="med" len="med"/>
+                    </a:lnL>
+                    <a:lnR w="9525" cap="flat" cmpd="sng" algn="ctr">
+                      <a:solidFill>
+                        <a:srgbClr val="D6E8E6"/>
+                      </a:solidFill>
+                      <a:prstDash val="solid"/>
+                      <a:round/>
+                      <a:headEnd type="none" w="med" len="med"/>
+                      <a:tailEnd type="none" w="med" len="med"/>
+                    </a:lnR>
+                    <a:lnT w="9525" cap="flat" cmpd="sng" algn="ctr">
+                      <a:solidFill>
+                        <a:srgbClr val="D6E8E6"/>
+                      </a:solidFill>
+                      <a:prstDash val="solid"/>
+                      <a:round/>
+                      <a:headEnd type="none" w="med" len="med"/>
+                      <a:tailEnd type="none" w="med" len="med"/>
+                    </a:lnT>
+                    <a:lnB w="9525" cap="flat" cmpd="sng" algn="ctr">
+                      <a:solidFill>
+                        <a:srgbClr val="D6E8E6"/>
+                      </a:solidFill>
+                      <a:prstDash val="solid"/>
+                      <a:round/>
+                      <a:headEnd type="none" w="med" len="med"/>
+                      <a:tailEnd type="none" w="med" len="med"/>
+                    </a:lnB>
+                  </a:tcPr>
+                </a:tc>
+                <a:tc>
+                  <a:txBody>
+                    <a:bodyPr/>
+                    <a:lstStyle/>
+                    <a:p>
+                      <a:pPr indent="0" marL="0">
+                        <a:buNone/>
+                      </a:pPr>
+                      <a:r>
+                        <a:rPr lang="en-US" sz="1050" dirty="0">
+                          <a:solidFill>
+                            <a:srgbClr val="043F52"/>
+                          </a:solidFill>
+                          <a:latin typeface="Calibri" pitchFamily="34" charset="0"/>
+                          <a:ea typeface="Calibri" pitchFamily="34" charset="-122"/>
+                          <a:cs typeface="Calibri" pitchFamily="34" charset="-120"/>
+                        </a:rPr>
+                        <a:t>1,3 meses · 4,6 M/mes</a:t>
                       </a:r>
                       <a:endParaRPr lang="en-US" sz="1050" dirty="0">
                         <a:latin typeface="Calibri" charset="0"/>
@@ -22491,7 +22484,7 @@
                   </a:tcPr>
                 </a:tc>
               </a:tr>
-              <a:tr h="246888">
+              <a:tr h="219456">
                 <a:tc>
                   <a:txBody>
                     <a:bodyPr/>
@@ -22509,7 +22502,7 @@
                           <a:ea typeface="Calibri" pitchFamily="34" charset="-122"/>
                           <a:cs typeface="Calibri" pitchFamily="34" charset="-120"/>
                         </a:rPr>
-                        <a:t>Holdout: orgánico 2,3 % a 5 % con contacto</a:t>
+                        <a:t>Holdout 2,3 a 4,5 / 5,0 %</a:t>
                       </a:r>
                       <a:endParaRPr lang="en-US" sz="1050" dirty="0">
                         <a:latin typeface="Calibri" charset="0"/>
@@ -22574,7 +22567,269 @@
                           <a:ea typeface="Calibri" pitchFamily="34" charset="-122"/>
                           <a:cs typeface="Calibri" pitchFamily="34" charset="-120"/>
                         </a:rPr>
-                        <a:t>756</a:t>
+                        <a:t>685 / 491 en holdout</a:t>
+                      </a:r>
+                      <a:endParaRPr lang="en-US" sz="1050" dirty="0">
+                        <a:latin typeface="Calibri" charset="0"/>
+                        <a:ea typeface="Calibri" charset="0"/>
+                        <a:cs typeface="Calibri" charset="0"/>
+                      </a:endParaRPr>
+                    </a:p>
+                  </a:txBody>
+                  <a:tcPr marL="50800" marR="50800" marT="25400" marB="25400" anchor="ctr">
+                    <a:lnL w="9525" cap="flat" cmpd="sng" algn="ctr">
+                      <a:solidFill>
+                        <a:srgbClr val="D6E8E6"/>
+                      </a:solidFill>
+                      <a:prstDash val="solid"/>
+                      <a:round/>
+                      <a:headEnd type="none" w="med" len="med"/>
+                      <a:tailEnd type="none" w="med" len="med"/>
+                    </a:lnL>
+                    <a:lnR w="9525" cap="flat" cmpd="sng" algn="ctr">
+                      <a:solidFill>
+                        <a:srgbClr val="D6E8E6"/>
+                      </a:solidFill>
+                      <a:prstDash val="solid"/>
+                      <a:round/>
+                      <a:headEnd type="none" w="med" len="med"/>
+                      <a:tailEnd type="none" w="med" len="med"/>
+                    </a:lnR>
+                    <a:lnT w="9525" cap="flat" cmpd="sng" algn="ctr">
+                      <a:solidFill>
+                        <a:srgbClr val="D6E8E6"/>
+                      </a:solidFill>
+                      <a:prstDash val="solid"/>
+                      <a:round/>
+                      <a:headEnd type="none" w="med" len="med"/>
+                      <a:tailEnd type="none" w="med" len="med"/>
+                    </a:lnT>
+                    <a:lnB w="9525" cap="flat" cmpd="sng" algn="ctr">
+                      <a:solidFill>
+                        <a:srgbClr val="D6E8E6"/>
+                      </a:solidFill>
+                      <a:prstDash val="solid"/>
+                      <a:round/>
+                      <a:headEnd type="none" w="med" len="med"/>
+                      <a:tailEnd type="none" w="med" len="med"/>
+                    </a:lnB>
+                  </a:tcPr>
+                </a:tc>
+                <a:tc>
+                  <a:txBody>
+                    <a:bodyPr/>
+                    <a:lstStyle/>
+                    <a:p>
+                      <a:pPr indent="0" marL="0">
+                        <a:buNone/>
+                      </a:pPr>
+                      <a:r>
+                        <a:rPr lang="en-US" sz="1050" dirty="0">
+                          <a:solidFill>
+                            <a:srgbClr val="043F52"/>
+                          </a:solidFill>
+                          <a:latin typeface="Calibri" pitchFamily="34" charset="0"/>
+                          <a:ea typeface="Calibri" pitchFamily="34" charset="-122"/>
+                          <a:cs typeface="Calibri" pitchFamily="34" charset="-120"/>
+                        </a:rPr>
+                        <a:t>0,9 / 0,6 m · 5,9 / 7,3 M</a:t>
+                      </a:r>
+                      <a:endParaRPr lang="en-US" sz="1050" dirty="0">
+                        <a:latin typeface="Calibri" charset="0"/>
+                        <a:ea typeface="Calibri" charset="0"/>
+                        <a:cs typeface="Calibri" charset="0"/>
+                      </a:endParaRPr>
+                    </a:p>
+                  </a:txBody>
+                  <a:tcPr marL="50800" marR="50800" marT="25400" marB="25400" anchor="ctr">
+                    <a:lnL w="9525" cap="flat" cmpd="sng" algn="ctr">
+                      <a:solidFill>
+                        <a:srgbClr val="D6E8E6"/>
+                      </a:solidFill>
+                      <a:prstDash val="solid"/>
+                      <a:round/>
+                      <a:headEnd type="none" w="med" len="med"/>
+                      <a:tailEnd type="none" w="med" len="med"/>
+                    </a:lnL>
+                    <a:lnR w="9525" cap="flat" cmpd="sng" algn="ctr">
+                      <a:solidFill>
+                        <a:srgbClr val="D6E8E6"/>
+                      </a:solidFill>
+                      <a:prstDash val="solid"/>
+                      <a:round/>
+                      <a:headEnd type="none" w="med" len="med"/>
+                      <a:tailEnd type="none" w="med" len="med"/>
+                    </a:lnR>
+                    <a:lnT w="9525" cap="flat" cmpd="sng" algn="ctr">
+                      <a:solidFill>
+                        <a:srgbClr val="D6E8E6"/>
+                      </a:solidFill>
+                      <a:prstDash val="solid"/>
+                      <a:round/>
+                      <a:headEnd type="none" w="med" len="med"/>
+                      <a:tailEnd type="none" w="med" len="med"/>
+                    </a:lnT>
+                    <a:lnB w="9525" cap="flat" cmpd="sng" algn="ctr">
+                      <a:solidFill>
+                        <a:srgbClr val="D6E8E6"/>
+                      </a:solidFill>
+                      <a:prstDash val="solid"/>
+                      <a:round/>
+                      <a:headEnd type="none" w="med" len="med"/>
+                      <a:tailEnd type="none" w="med" len="med"/>
+                    </a:lnB>
+                  </a:tcPr>
+                </a:tc>
+              </a:tr>
+              <a:tr h="219456">
+                <a:tc>
+                  <a:txBody>
+                    <a:bodyPr/>
+                    <a:lstStyle/>
+                    <a:p>
+                      <a:pPr indent="0" marL="0">
+                        <a:buNone/>
+                      </a:pPr>
+                      <a:r>
+                        <a:rPr lang="en-US" sz="1050" dirty="0">
+                          <a:solidFill>
+                            <a:srgbClr val="043F52"/>
+                          </a:solidFill>
+                          <a:latin typeface="Calibri" pitchFamily="34" charset="0"/>
+                          <a:ea typeface="Calibri" pitchFamily="34" charset="-122"/>
+                          <a:cs typeface="Calibri" pitchFamily="34" charset="-120"/>
+                        </a:rPr>
+                        <a:t>A − B reportada (8.000 c/u)</a:t>
+                      </a:r>
+                      <a:endParaRPr lang="en-US" sz="1050" dirty="0">
+                        <a:latin typeface="Calibri" charset="0"/>
+                        <a:ea typeface="Calibri" charset="0"/>
+                        <a:cs typeface="Calibri" charset="0"/>
+                      </a:endParaRPr>
+                    </a:p>
+                  </a:txBody>
+                  <a:tcPr marL="50800" marR="50800" marT="25400" marB="25400" anchor="ctr">
+                    <a:lnL w="9525" cap="flat" cmpd="sng" algn="ctr">
+                      <a:solidFill>
+                        <a:srgbClr val="D6E8E6"/>
+                      </a:solidFill>
+                      <a:prstDash val="solid"/>
+                      <a:round/>
+                      <a:headEnd type="none" w="med" len="med"/>
+                      <a:tailEnd type="none" w="med" len="med"/>
+                    </a:lnL>
+                    <a:lnR w="9525" cap="flat" cmpd="sng" algn="ctr">
+                      <a:solidFill>
+                        <a:srgbClr val="D6E8E6"/>
+                      </a:solidFill>
+                      <a:prstDash val="solid"/>
+                      <a:round/>
+                      <a:headEnd type="none" w="med" len="med"/>
+                      <a:tailEnd type="none" w="med" len="med"/>
+                    </a:lnR>
+                    <a:lnT w="9525" cap="flat" cmpd="sng" algn="ctr">
+                      <a:solidFill>
+                        <a:srgbClr val="D6E8E6"/>
+                      </a:solidFill>
+                      <a:prstDash val="solid"/>
+                      <a:round/>
+                      <a:headEnd type="none" w="med" len="med"/>
+                      <a:tailEnd type="none" w="med" len="med"/>
+                    </a:lnT>
+                    <a:lnB w="9525" cap="flat" cmpd="sng" algn="ctr">
+                      <a:solidFill>
+                        <a:srgbClr val="D6E8E6"/>
+                      </a:solidFill>
+                      <a:prstDash val="solid"/>
+                      <a:round/>
+                      <a:headEnd type="none" w="med" len="med"/>
+                      <a:tailEnd type="none" w="med" len="med"/>
+                    </a:lnB>
+                  </a:tcPr>
+                </a:tc>
+                <a:tc>
+                  <a:txBody>
+                    <a:bodyPr/>
+                    <a:lstStyle/>
+                    <a:p>
+                      <a:pPr indent="0" marL="0">
+                        <a:buNone/>
+                      </a:pPr>
+                      <a:r>
+                        <a:rPr lang="en-US" sz="1050" dirty="0">
+                          <a:solidFill>
+                            <a:srgbClr val="043F52"/>
+                          </a:solidFill>
+                          <a:latin typeface="Calibri" pitchFamily="34" charset="0"/>
+                          <a:ea typeface="Calibri" pitchFamily="34" charset="-122"/>
+                          <a:cs typeface="Calibri" pitchFamily="34" charset="-120"/>
+                        </a:rPr>
+                        <a:t>conv. z 1,32 (p 0,19)</a:t>
+                      </a:r>
+                      <a:endParaRPr lang="en-US" sz="1050" dirty="0">
+                        <a:latin typeface="Calibri" charset="0"/>
+                        <a:ea typeface="Calibri" charset="0"/>
+                        <a:cs typeface="Calibri" charset="0"/>
+                      </a:endParaRPr>
+                    </a:p>
+                  </a:txBody>
+                  <a:tcPr marL="50800" marR="50800" marT="25400" marB="25400" anchor="ctr">
+                    <a:lnL w="9525" cap="flat" cmpd="sng" algn="ctr">
+                      <a:solidFill>
+                        <a:srgbClr val="D6E8E6"/>
+                      </a:solidFill>
+                      <a:prstDash val="solid"/>
+                      <a:round/>
+                      <a:headEnd type="none" w="med" len="med"/>
+                      <a:tailEnd type="none" w="med" len="med"/>
+                    </a:lnL>
+                    <a:lnR w="9525" cap="flat" cmpd="sng" algn="ctr">
+                      <a:solidFill>
+                        <a:srgbClr val="D6E8E6"/>
+                      </a:solidFill>
+                      <a:prstDash val="solid"/>
+                      <a:round/>
+                      <a:headEnd type="none" w="med" len="med"/>
+                      <a:tailEnd type="none" w="med" len="med"/>
+                    </a:lnR>
+                    <a:lnT w="9525" cap="flat" cmpd="sng" algn="ctr">
+                      <a:solidFill>
+                        <a:srgbClr val="D6E8E6"/>
+                      </a:solidFill>
+                      <a:prstDash val="solid"/>
+                      <a:round/>
+                      <a:headEnd type="none" w="med" len="med"/>
+                      <a:tailEnd type="none" w="med" len="med"/>
+                    </a:lnT>
+                    <a:lnB w="9525" cap="flat" cmpd="sng" algn="ctr">
+                      <a:solidFill>
+                        <a:srgbClr val="D6E8E6"/>
+                      </a:solidFill>
+                      <a:prstDash val="solid"/>
+                      <a:round/>
+                      <a:headEnd type="none" w="med" len="med"/>
+                      <a:tailEnd type="none" w="med" len="med"/>
+                    </a:lnB>
+                  </a:tcPr>
+                </a:tc>
+                <a:tc>
+                  <a:txBody>
+                    <a:bodyPr/>
+                    <a:lstStyle/>
+                    <a:p>
+                      <a:pPr indent="0" marL="0">
+                        <a:buNone/>
+                      </a:pPr>
+                      <a:r>
+                        <a:rPr lang="en-US" sz="1050" dirty="0">
+                          <a:solidFill>
+                            <a:srgbClr val="043F52"/>
+                          </a:solidFill>
+                          <a:latin typeface="Calibri" pitchFamily="34" charset="0"/>
+                          <a:ea typeface="Calibri" pitchFamily="34" charset="-122"/>
+                          <a:cs typeface="Calibri" pitchFamily="34" charset="-120"/>
+                        </a:rPr>
+                        <a:t>mora z 2,11 (p 0,03)</a:t>
                       </a:r>
                       <a:endParaRPr lang="en-US" sz="1050" dirty="0">
                         <a:latin typeface="Calibri" charset="0"/>
@@ -22635,8 +22890,8 @@
         </p:nvSpPr>
         <p:spPr>
           <a:xfrm>
-            <a:off x="5486400" y="3840480"/>
-            <a:ext cx="6217920" cy="320040"/>
+            <a:off x="5943600" y="3840480"/>
+            <a:ext cx="5760720" cy="320040"/>
           </a:xfrm>
           <a:prstGeom prst="rect">
             <a:avLst/>
@@ -22681,19 +22936,19 @@
           </p:nvPr>
         </p:nvGraphicFramePr>
         <p:xfrm>
-          <a:off x="5486400" y="4160520"/>
-          <a:ext cx="6245352" cy="914400"/>
+          <a:off x="5943600" y="4160520"/>
+          <a:ext cx="5788152" cy="914400"/>
         </p:xfrm>
         <a:graphic>
           <a:graphicData uri="http://schemas.openxmlformats.org/drawingml/2006/table">
             <a:tbl>
               <a:tblPr/>
               <a:tblGrid>
-                <a:gridCol w="1325880"/>
-                <a:gridCol w="3200400"/>
-                <a:gridCol w="1719072"/>
+                <a:gridCol w="1143000"/>
+                <a:gridCol w="3108960"/>
+                <a:gridCol w="1536192"/>
               </a:tblGrid>
-              <a:tr h="384048">
+              <a:tr h="329184">
                 <a:tc>
                   <a:txBody>
                     <a:bodyPr/>
@@ -22899,7 +23154,7 @@
                   </a:tcPr>
                 </a:tc>
               </a:tr>
-              <a:tr h="384048">
+              <a:tr h="329184">
                 <a:tc>
                   <a:txBody>
                     <a:bodyPr/>
@@ -23047,7 +23302,7 @@
                           <a:ea typeface="Calibri" pitchFamily="34" charset="-122"/>
                           <a:cs typeface="Calibri" pitchFamily="34" charset="-120"/>
                         </a:rPr>
-                        <a:t>Solo como target o para evaluación</a:t>
+                        <a:t>Solo como target o evaluación</a:t>
                       </a:r>
                       <a:endParaRPr lang="en-US" sz="1050" dirty="0">
                         <a:latin typeface="Calibri" charset="0"/>
@@ -23096,7 +23351,7 @@
                   </a:tcPr>
                 </a:tc>
               </a:tr>
-              <a:tr h="384048">
+              <a:tr h="329184">
                 <a:tc>
                   <a:txBody>
                     <a:bodyPr/>
@@ -23179,7 +23434,7 @@
                           <a:ea typeface="Calibri" pitchFamily="34" charset="-122"/>
                           <a:cs typeface="Calibri" pitchFamily="34" charset="-120"/>
                         </a:rPr>
-                        <a:t>fecha_ultimo_contacto (1 fecha &gt; corte), cuotas_pagadas_pct y monto_preaprobado sin timestamp</a:t>
+                        <a:t>fecha_ultimo_contacto (1 &gt; corte); cuotas_pagadas_pct, monto_preaprobado sin timestamp</a:t>
                       </a:r>
                       <a:endParaRPr lang="en-US" sz="1050" dirty="0">
                         <a:latin typeface="Calibri" charset="0"/>
@@ -23244,7 +23499,7 @@
                           <a:ea typeface="Calibri" pitchFamily="34" charset="-122"/>
                           <a:cs typeface="Calibri" pitchFamily="34" charset="-120"/>
                         </a:rPr>
-                        <a:t>Reconstruir point-in-time; validar antes de usar</a:t>
+                        <a:t>Fuera del set; sin costo (AUC 0,52–0,53); vuelven con timestamp</a:t>
                       </a:r>
                       <a:endParaRPr lang="en-US" sz="1050" dirty="0">
                         <a:latin typeface="Calibri" charset="0"/>
@@ -23293,7 +23548,7 @@
                   </a:tcPr>
                 </a:tc>
               </a:tr>
-              <a:tr h="384048">
+              <a:tr h="329184">
                 <a:tc>
                   <a:txBody>
                     <a:bodyPr/>
@@ -23376,7 +23631,7 @@
                           <a:ea typeface="Calibri" pitchFamily="34" charset="-122"/>
                           <a:cs typeface="Calibri" pitchFamily="34" charset="-120"/>
                         </a:rPr>
-                        <a:t>max_mora_6m &lt; 0, saldo_ahorros &lt; 0, endeudamiento &gt; 1, score_buro fuera de rango, duplicado C01199</a:t>
+                        <a:t>max_mora_6m &lt; 0, saldo_ahorros &lt; 0, endeudamiento &gt; 1, duplicado; buró dentro de 150–950</a:t>
                       </a:r>
                       <a:endParaRPr lang="en-US" sz="1050" dirty="0">
                         <a:latin typeface="Calibri" charset="0"/>
@@ -23441,7 +23696,7 @@
                           <a:ea typeface="Calibri" pitchFamily="34" charset="-122"/>
                           <a:cs typeface="Calibri" pitchFamily="34" charset="-120"/>
                         </a:rPr>
-                        <a:t>Reglas de validación; corregir o imputar con registro</a:t>
+                        <a:t>Validar y corregir con registro; confirmar central y vigencia</a:t>
                       </a:r>
                       <a:endParaRPr lang="en-US" sz="1050" dirty="0">
                         <a:latin typeface="Calibri" charset="0"/>
@@ -23490,7 +23745,7 @@
                   </a:tcPr>
                 </a:tc>
               </a:tr>
-              <a:tr h="384048">
+              <a:tr h="329184">
                 <a:tc>
                   <a:txBody>
                     <a:bodyPr/>
@@ -23573,7 +23828,7 @@
                           <a:ea typeface="Calibri" pitchFamily="34" charset="-122"/>
                           <a:cs typeface="Calibri" pitchFamily="34" charset="-120"/>
                         </a:rPr>
-                        <a:t>recibe_remesas (proxy), contactabilidad_score (política pasada), regional (solo capacidad), cliente_id</a:t>
+                        <a:t>recibe_remesas, contactabilidad_score, regional (solo capacidad), cliente_id</a:t>
                       </a:r>
                       <a:endParaRPr lang="en-US" sz="1050" dirty="0">
                         <a:latin typeface="Calibri" charset="0"/>
@@ -23638,7 +23893,7 @@
                           <a:ea typeface="Calibri" pitchFamily="34" charset="-122"/>
                           <a:cs typeface="Calibri" pitchFamily="34" charset="-120"/>
                         </a:rPr>
-                        <a:t>Fuera del score; monitoreadas como grupos de equidad</a:t>
+                        <a:t>Fuera del score; grupos de equidad</a:t>
                       </a:r>
                       <a:endParaRPr lang="en-US" sz="1050" dirty="0">
                         <a:latin typeface="Calibri" charset="0"/>
@@ -23699,8 +23954,8 @@
         </p:nvSpPr>
         <p:spPr>
           <a:xfrm>
-            <a:off x="457200" y="5715000"/>
-            <a:ext cx="4754880" cy="640080"/>
+            <a:off x="457200" y="5806440"/>
+            <a:ext cx="5212080" cy="548640"/>
           </a:xfrm>
           <a:prstGeom prst="rect">
             <a:avLst/>
@@ -23716,7 +23971,7 @@
               <a:buNone/>
             </a:pPr>
             <a:r>
-              <a:rPr lang="en-US" sz="900" i="1" dirty="0">
+              <a:rPr lang="en-US" sz="800" i="1" dirty="0">
                 <a:solidFill>
                   <a:srgbClr val="4A6A72"/>
                 </a:solidFill>
@@ -23724,9 +23979,9 @@
                 <a:ea typeface="Calibri" pitchFamily="34" charset="-122"/>
                 <a:cs typeface="Calibri" pitchFamily="34" charset="-120"/>
               </a:rPr>
-              <a:t>Código y cálculos: work/01_diagnostico.py, work/02_modelos_fuga.py y work/03_economia_capacidad_piloto.py, sobre una copia del anexo. El original no se modificó (hash verificado).</a:t>
+              <a:t>Código y cálculos: work/01_diagnostico.py, 02_modelos_fuga.py y 03_economia_capacidad_piloto.py sobre una copia del anexo; el original no se modificó (hash verificado). Jerga: SRM = sample ratio mismatch; CSI = índice de estabilidad por variable; CUPED = ajuste por covariable pre-periodo.</a:t>
             </a:r>
-            <a:endParaRPr lang="en-US" sz="900" dirty="0"/>
+            <a:endParaRPr lang="en-US" sz="800" dirty="0"/>
           </a:p>
         </p:txBody>
       </p:sp>

--- a/entregables/BancoW_Priorizacion_Renovaciones_DavinsonArteaga.pptx
+++ b/entregables/BancoW_Priorizacion_Renovaciones_DavinsonArteaga.pptx
@@ -113,37 +113,37 @@
   <p:extLst>
     <p:ext uri="{521415D9-36F7-43E2-AB2F-B90AF26B5E84}">
       <p14:sectionLst xmlns:p14="http://schemas.microsoft.com/office/powerpoint/2010/main">
-        <p14:section name="Decisión" id="{e4c02c71-ceda-7b49-74e9-8e2f8530038e}">
+        <p14:section name="Decisión" id="{e947533a-1f8c-ddc9-6a8d-dc7f84333afb}">
           <p14:sldIdLst>
             <p14:sldId id="256"/>
           </p14:sldIdLst>
         </p14:section>
-        <p14:section name="Datos" id="{ef1c5fd9-f216-731a-5277-e17ab4990be2}">
+        <p14:section name="Datos" id="{e80421bd-7d7d-c0a0-8877-68a39b68fed6}">
           <p14:sldIdLst>
             <p14:sldId id="257"/>
           </p14:sldIdLst>
         </p14:section>
-        <p14:section name="Alternativas" id="{7b7374ad-2f28-a385-5077-f8b384940cbb}">
+        <p14:section name="Alternativas" id="{22e6a8a1-7a02-047a-9b86-4cdcce09a56a}">
           <p14:sldIdLst>
             <p14:sldId id="258"/>
           </p14:sldIdLst>
         </p14:section>
-        <p14:section name="Valor" id="{ed4a0ec5-9aef-63dc-471b-782daca6fce7}">
+        <p14:section name="Valor" id="{6d5c723c-b6d9-03f2-6343-c404c537882d}">
           <p14:sldIdLst>
             <p14:sldId id="259"/>
           </p14:sldIdLst>
         </p14:section>
-        <p14:section name="Piloto" id="{e79aa1ad-e39c-6136-15b1-1bb2090ba871}">
+        <p14:section name="Piloto" id="{b121952c-9a25-e750-c985-3de904b0b9b1}">
           <p14:sldIdLst>
             <p14:sldId id="260"/>
           </p14:sldIdLst>
         </p14:section>
-        <p14:section name="Recomendación" id="{4c358d63-ed23-00cf-4b28-344bf50c8a6d}">
+        <p14:section name="Recomendación" id="{746314d4-711a-3af3-61a3-83cd38e026d5}">
           <p14:sldIdLst>
             <p14:sldId id="261"/>
           </p14:sldIdLst>
         </p14:section>
-        <p14:section name="Anexo" id="{97888735-91ed-4517-c918-b6d390b0572b}">
+        <p14:section name="Anexo" id="{b2138efb-b2ad-2767-aee6-74243d776485}">
           <p14:sldIdLst>
             <p14:sldId id="262"/>
           </p14:sldIdLst>
@@ -254,7 +254,7 @@
                 <c:ptCount val="3"/>
                 <c:lvl>
                   <c:pt idx="0">
-                    <c:v>16 variables ex ante</c:v>
+                    <c:v>15 variables ex ante</c:v>
                   </c:pt>
                   <c:pt idx="1">
                     <c:v>+ resultado_gestion_30d</c:v>
@@ -1206,7 +1206,7 @@
           <a:p>
             <a:r>
               <a:rPr lang="en-US" dirty="0"/>
-              <a:t>Detalle de cada hallazgo en la guía P5 y P6. Fuga: 78 % de «Acepta» renueva; dias_hasta_renovacion es nulo exactamente en los 1.436 no renovados. Calidad: max_mora_6m = −4, ahorro −350.000, contacto fechado 2026-09-15 con corte agosto; score de buró 352–912 está dentro de la escala DataCrédito 150–950 (confirmar central, versión y vigencia). contactabilidad_score no predice el contacto (32 % de no contactados en todos los cuartiles). cuotas_pagadas_pct y monto_preaprobado quedan fuera del set limpio hasta certificar su timestamp: no cuesta señal (AUC 0,52–0,53). Accuracy trivial: 79,8 % en la base, 96,4 % en producción sin acertar un renovador.</a:t>
+              <a:t>Detalle de cada hallazgo en la guía P5 y P6. Fuga: 78 % de «Acepta» renueva; dias_hasta_renovacion es nulo exactamente en los 1.436 no renovados. Calidad: max_mora_6m = −4, ahorro −350.000, contacto fechado 2026-09-15 con corte agosto; score de buró 352–912 está dentro de la escala DataCrédito 150–950 (confirmar central, versión y vigencia). contactabilidad_score no predice el contacto (32 % de no contactados en todos los cuartiles). cuotas_pagadas_pct, monto_preaprobado y dias_ultimo_contacto quedan fuera del set limpio hasta certificar su timestamp (51 contactos fechados dentro del mes de corte y 1 después): no cuesta señal (AUC univariado 0,50–0,53); en producción se recalcula a la fecha de corte. Accuracy trivial: 79,8 % en la base, 96,4 % en producción sin acertar un renovador.</a:t>
             </a:r>
             <a:endParaRPr lang="en-US" dirty="0"/>
           </a:p>
@@ -1294,7 +1294,7 @@
           <a:p>
             <a:r>
               <a:rPr lang="en-US" dirty="0"/>
-              <a:t>Repliqué con la base: el AUC de C (0,94) solo se obtiene incluyendo el resultado de gestión; con dias_hasta_renovacion llega a 1,00. A: 0,86 supera lo que esta base permite replicar (0,82), pero la hoja viene de otra población, así que no es concluyente; su mora 7,2 % es la peor y, de ser real, lo convierte en la alternativa de menor valor; ambas cosas exigen auditoría variable por variable. B: coherente con la réplica, calibrado (pendiente 0,90), estable; pasa a piloto tras la misma ficha de fuga. D: la hoja reporta «+3,1 pp incremental» en la columna de mora y Qini en la de PR-AUC; no es comparable con A, B y C sin aclarar unidades. Las conversiones «top 8k» de la hoja y la conversión top 32 % de la réplica (≈ 45 %) no son comparables: otra población y otra regla de contacto.</a:t>
+              <a:t>Repliqué con la base: el AUC de C (0,94) solo se obtiene incluyendo el resultado de gestión; con dias_hasta_renovacion llega a 1,00. A: 0,86 supera lo que esta base permite replicar (0,82), pero la hoja viene de otra población, así que no es concluyente; su mora 7,2 % es la peor y, de ser real, lo convierte en la alternativa de menor valor; ambas cosas exigen auditoría variable por variable. B: coherente con la réplica, calibrado (pendiente 0,91), estable; pasa a piloto tras la misma ficha de fuga. D: la hoja reporta «+3,1 pp incremental» en la columna de mora y Qini en la de PR-AUC; no es comparable con A, B y C sin aclarar unidades. Las conversiones «top 8k» de la hoja y la conversión top 32 % de la réplica (≈ 45 %) no son comparables: otra población y otra regla de contacto.</a:t>
             </a:r>
             <a:endParaRPr lang="en-US" dirty="0"/>
           </a:p>
@@ -1382,7 +1382,7 @@
           <a:p>
             <a:r>
               <a:rPr lang="en-US" dirty="0"/>
-              <a:t>B gana por riesgo, no por conversión: cada renovación de B vale 337.200 frente a 290.400 de A. Incertidumbre (supuesto 8.000 contactos por alternativa, 752 y 704 renovados): conversión z = 1,32 (p 0,19), mora z = 2,11 (p 0,03); en valor B es al menos equivalente dentro de la incertidumbre. El valor no es incremental: por eso el piloto. Capacidad: un ranking global sobrecarga Centro, Norte y Eje y deja ≈ 400 cupos ociosos en Suroccidente y Oriente; cuotas por regional con transferencia por valor marginal (tope a pactar con Comercial). La conversión en muestra con y sin cuotas es equivalente (43,2 % vs. 42,6 %, dentro del ruido). Sensibilidad a la pérdida por mora de 1,0 / 1,8 / 2,5 / 3,5 M: B 263 / 237 / 215 / 182 vs. A 262 / 218 / 181 / 126.</a:t>
+              <a:t>B gana por riesgo, no por conversión: cada renovación de B vale 337.200 frente a 290.400 de A. Incertidumbre (supuesto 8.000 contactos por alternativa, 752 y 704 renovados): conversión z = 1,32 (p 0,19), mora z = 2,11 (p 0,03); en valor B es al menos equivalente dentro de la incertidumbre. El valor no es incremental: el orgánico del tercil alto de buró (de donde sale el top de B) es ≈ 5 % (7 de 129 no contactados renovaron solos; IC 2,7–10,8 %), así que ≈ 57 % de las renovaciones de B serían orgánicas y el valor incremental ≈ 103 M (129 M con orgánico 4 %, 76 M con 6 %). Por eso el piloto. Capacidad: un ranking global sobrecarga Centro, Norte y Eje y deja ≈ 400 cupos ociosos en Suroccidente y Oriente; cuotas por regional con transferencia por valor marginal (tope a pactar con Comercial). La conversión en muestra con y sin cuotas es equivalente (41,9 % vs. 43,5 %, cuatro renovaciones de diferencia, dentro del ruido). Sensibilidad a la pérdida por mora de 1,0 / 1,8 / 2,5 / 3,5 M: B 263 / 237 / 215 / 182 vs. A 262 / 218 / 181 / 126.</a:t>
             </a:r>
             <a:endParaRPr lang="en-US" dirty="0"/>
           </a:p>
@@ -1470,7 +1470,7 @@
           <a:p>
             <a:r>
               <a:rPr lang="en-US" dirty="0"/>
-              <a:t>Mecánica: el universo elegible del mes (filtrado por el mismo piso de riesgo: corte de buró y max_mora pactados con Riesgos) se parte al azar en dos pools por cliente, estratificando por regional y tercil de score. El champion elige sus 4.000 en su pool; el challenger rankea el suyo, toma su top 4.800, retiene 800 al azar como holdout sin contacto y contacta 4.000. Capacidad intacta: 8.000. Dos reglas separadas: calidad de lista (challenger vs. champion) y efecto del contacto (challenger contactado vs. holdout). Potencia del holdout (800 vs. 4.000): uplift +1,2 pp exige 2,4 meses; +1,7 pp, 1,3 meses; +2,2 pp, 0,9. Costo de oportunidad 3,2 / 4,6 / 5,9 / 7,3 M/mes, ≤ 2 % del VE de B. Limitación: sin holdout en el champion no comparamos la incrementalidad de las dos políticas; la opción de 400 de holdout en el champion cuesta ≈ 2,3 M/mes y deja ese brazo en 3.600. Probar mora 5,1 % vs. 7,2 % exigiría 2.053 renovados por brazo: el riesgo entra por política y se vigila por vintage. Duración: dos meses de asignación + 30 días de ventana + 30 a 60 de maduración; decisión a los 90 días. Jerga (SRM, CSI, Brier, CUPED) en el anexo y la guía. Condiciones completas de no liberación en la guía P16.</a:t>
+              <a:t>Mecánica: el universo elegible del mes (filtrado por el mismo piso de riesgo: corte de buró y max_mora pactados con Riesgos) se parte al azar en dos pools por cliente, estratificando por regional y tercil de score. El champion elige sus 4.000 en su pool; el challenger rankea el suyo, toma su top 4.800, retiene 800 al azar como holdout sin contacto y contacta 4.000. Capacidad intacta: 8.000. Dos reglas separadas: calidad de lista (challenger vs. champion) y efecto del contacto (challenger contactado vs. holdout). Baseline del holdout: no el 2,3 % global, sino el orgánico del tercil alto de buró (≈ 5 %, 7 de 129, IC 2,7–10,8 %), porque el holdout sale del top de B. Potencia (800 vs. 4.000, baseline 5 %): conservador +1,7 pp exige 1.856 en holdout, 2,3 meses, 4,6 M/mes de costo; plausible +3,8 pp (el uplift implícito si B convierte 8,8 % sobre un orgánico de 5 %) exige 444, 0,6 meses, 10,3 M/mes. Dos meses detectan el escenario plausible con margen; el conservador necesita un tercer mes. El costo es ≤ 4 % del VE de B. Limitación: sin holdout en el champion no comparamos la incrementalidad de las dos políticas; la opción de 400 de holdout en el champion cuesta ≈ 2,3 M/mes y deja ese brazo en 3.600. Probar mora 5,1 % vs. 7,2 % exigiría 2.053 renovados por brazo: el riesgo entra por política y se vigila por vintage. Duración: dos meses de asignación + 30 días de ventana + 30 a 60 de maduración; decisión a los 90 días. Jerga (SRM, CSI, Brier, CUPED) en el anexo y la guía. Condiciones completas de no liberación en la guía P16.</a:t>
             </a:r>
             <a:endParaRPr lang="en-US" dirty="0"/>
           </a:p>
@@ -1558,7 +1558,7 @@
           <a:p>
             <a:r>
               <a:rPr lang="en-US" dirty="0"/>
-              <a:t>Pedimos tres decisiones. Ruta de 90 días con la ficha de fuga variable por variable para A y B en las semanas 3 a 4 (fuente, timestamp, disponibilidad al puntuar). Gobierno: sin cuotas, el modelo limpio selecciona 28 % en Oriente frente a 35 % en Centro (AIR ≈ 0,80, en el límite); con cuotas, la selección por regional la fija la capacidad, así que la equidad se vigila en conversión y calibración por grupo dentro de cada regional. El 79 % de la lista cae en el tercil alto de buró: ese piso lo fija la política de riesgo, no el algoritmo. SHAP es correlación: en la base, 37 % del tercil bajo de buró quedó sin contactar frente a 22 % del alto.</a:t>
+              <a:t>Pedimos tres decisiones. Ruta de 90 días con la ficha de fuga variable por variable para A y B en las semanas 3 a 4 (fuente, timestamp, disponibilidad al puntuar). Gobierno: sin cuotas, el modelo limpio selecciona 28 % en Oriente frente a 35 % en Centro (AIR ≈ 0,80 puntual, pero con 100 a 200 clientes por regional el intervalo bootstrap es 0,49–0,88: el 0,80 no informa y el 0,67 de la partición sin gap cae dentro; la regla está pensada para el universo mensual de 25.000, donde el intervalo se estrecha unas seis veces); con cuotas, la selección por regional la fija la capacidad, así que la equidad se vigila en conversión y calibración por grupo dentro de cada regional. El 79 % de la lista cae en el tercil alto de buró: ese piso lo fija la política de riesgo, no el algoritmo. SHAP es correlación: en la base, 37 % del tercil bajo de buró quedó sin contactar frente a 22 % del alto.</a:t>
             </a:r>
             <a:endParaRPr lang="en-US" dirty="0"/>
           </a:p>
@@ -2329,11 +2329,11 @@
         <p:spPr>
           <a:xfrm>
             <a:off x="457200" y="1325880"/>
-            <a:ext cx="3611880" cy="1554480"/>
+            <a:ext cx="3611880" cy="1691640"/>
           </a:xfrm>
           <a:prstGeom prst="roundRect">
             <a:avLst>
-              <a:gd name="adj" fmla="val 7059"/>
+              <a:gd name="adj" fmla="val 6486"/>
             </a:avLst>
           </a:prstGeom>
           <a:solidFill>
@@ -2434,7 +2434,7 @@
         <p:spPr>
           <a:xfrm>
             <a:off x="621792" y="2286000"/>
-            <a:ext cx="3282696" cy="502920"/>
+            <a:ext cx="3282696" cy="640080"/>
           </a:xfrm>
           <a:prstGeom prst="rect">
             <a:avLst/>
@@ -2473,11 +2473,11 @@
         <p:spPr>
           <a:xfrm>
             <a:off x="4288536" y="1325880"/>
-            <a:ext cx="3611880" cy="1554480"/>
+            <a:ext cx="3611880" cy="1691640"/>
           </a:xfrm>
           <a:prstGeom prst="roundRect">
             <a:avLst>
-              <a:gd name="adj" fmla="val 7059"/>
+              <a:gd name="adj" fmla="val 6486"/>
             </a:avLst>
           </a:prstGeom>
           <a:solidFill>
@@ -2578,7 +2578,7 @@
         <p:spPr>
           <a:xfrm>
             <a:off x="4453128" y="2286000"/>
-            <a:ext cx="3282696" cy="502920"/>
+            <a:ext cx="3282696" cy="640080"/>
           </a:xfrm>
           <a:prstGeom prst="rect">
             <a:avLst/>
@@ -2617,11 +2617,11 @@
         <p:spPr>
           <a:xfrm>
             <a:off x="8119872" y="1325880"/>
-            <a:ext cx="3611880" cy="1554480"/>
+            <a:ext cx="3611880" cy="1691640"/>
           </a:xfrm>
           <a:prstGeom prst="roundRect">
             <a:avLst>
-              <a:gd name="adj" fmla="val 7059"/>
+              <a:gd name="adj" fmla="val 6486"/>
             </a:avLst>
           </a:prstGeom>
           <a:solidFill>
@@ -2722,7 +2722,7 @@
         <p:spPr>
           <a:xfrm>
             <a:off x="8284464" y="2286000"/>
-            <a:ext cx="3282696" cy="502920"/>
+            <a:ext cx="3282696" cy="640080"/>
           </a:xfrm>
           <a:prstGeom prst="rect">
             <a:avLst/>
@@ -2760,8 +2760,8 @@
         </p:nvSpPr>
         <p:spPr>
           <a:xfrm>
-            <a:off x="457200" y="3291840"/>
-            <a:ext cx="6035040" cy="2926080"/>
+            <a:off x="457200" y="3520440"/>
+            <a:ext cx="6035040" cy="2834640"/>
           </a:xfrm>
           <a:prstGeom prst="rect">
             <a:avLst/>
@@ -2775,13 +2775,13 @@
           <a:p>
             <a:pPr marL="177800" indent="-177800">
               <a:spcAft>
-                <a:spcPts val="800"/>
+                <a:spcPts val="3000"/>
               </a:spcAft>
               <a:buSzPct val="100000"/>
               <a:buChar char="•"/>
             </a:pPr>
             <a:r>
-              <a:rPr lang="en-US" sz="1250" b="1" dirty="0">
+              <a:rPr lang="en-US" sz="1400" b="1" dirty="0">
                 <a:solidFill>
                   <a:srgbClr val="043F52"/>
                 </a:solidFill>
@@ -2793,12 +2793,12 @@
             </a:r>
             <a:pPr indent="0" marL="0">
               <a:spcAft>
-                <a:spcPts val="800"/>
+                <a:spcPts val="3000"/>
               </a:spcAft>
               <a:buNone/>
             </a:pPr>
             <a:r>
-              <a:rPr lang="en-US" sz="1250" dirty="0">
+              <a:rPr lang="en-US" sz="1400" dirty="0">
                 <a:solidFill>
                   <a:srgbClr val="043F52"/>
                 </a:solidFill>
@@ -2808,18 +2808,18 @@
               </a:rPr>
               <a:t>los 8.000 de mayor valor incremental neto.</a:t>
             </a:r>
-            <a:endParaRPr lang="en-US" sz="1250" dirty="0"/>
+            <a:endParaRPr lang="en-US" sz="1400" dirty="0"/>
           </a:p>
           <a:p>
             <a:pPr marL="177800" indent="-177800">
               <a:spcAft>
-                <a:spcPts val="800"/>
+                <a:spcPts val="3000"/>
               </a:spcAft>
               <a:buSzPct val="100000"/>
               <a:buChar char="•"/>
             </a:pPr>
             <a:r>
-              <a:rPr lang="en-US" sz="1250" b="1" dirty="0">
+              <a:rPr lang="en-US" sz="1400" b="1" dirty="0">
                 <a:solidFill>
                   <a:srgbClr val="043F52"/>
                 </a:solidFill>
@@ -2831,12 +2831,12 @@
             </a:r>
             <a:pPr indent="0" marL="0">
               <a:spcAft>
-                <a:spcPts val="800"/>
+                <a:spcPts val="3000"/>
               </a:spcAft>
               <a:buNone/>
             </a:pPr>
             <a:r>
-              <a:rPr lang="en-US" sz="1250" dirty="0">
+              <a:rPr lang="en-US" sz="1400" dirty="0">
                 <a:solidFill>
                   <a:srgbClr val="043F52"/>
                 </a:solidFill>
@@ -2846,18 +2846,18 @@
               </a:rPr>
               <a:t>propensión calibrada × riesgo × valor; uplift a mediano plazo.</a:t>
             </a:r>
-            <a:endParaRPr lang="en-US" sz="1250" dirty="0"/>
+            <a:endParaRPr lang="en-US" sz="1400" dirty="0"/>
           </a:p>
           <a:p>
             <a:pPr marL="177800" indent="-177800">
               <a:spcAft>
-                <a:spcPts val="800"/>
+                <a:spcPts val="3000"/>
               </a:spcAft>
               <a:buSzPct val="100000"/>
               <a:buChar char="•"/>
             </a:pPr>
             <a:r>
-              <a:rPr lang="en-US" sz="1250" b="1" dirty="0">
+              <a:rPr lang="en-US" sz="1400" b="1" dirty="0">
                 <a:solidFill>
                   <a:srgbClr val="043F52"/>
                 </a:solidFill>
@@ -2869,12 +2869,12 @@
             </a:r>
             <a:pPr indent="0" marL="0">
               <a:spcAft>
-                <a:spcPts val="800"/>
+                <a:spcPts val="3000"/>
               </a:spcAft>
               <a:buNone/>
             </a:pPr>
             <a:r>
-              <a:rPr lang="en-US" sz="1250" dirty="0">
+              <a:rPr lang="en-US" sz="1400" dirty="0">
                 <a:solidFill>
                   <a:srgbClr val="043F52"/>
                 </a:solidFill>
@@ -2884,18 +2884,18 @@
               </a:rPr>
               <a:t>denominador, ventana, orgánicas (2,3 % renovó solo).</a:t>
             </a:r>
-            <a:endParaRPr lang="en-US" sz="1250" dirty="0"/>
+            <a:endParaRPr lang="en-US" sz="1400" dirty="0"/>
           </a:p>
           <a:p>
             <a:pPr marL="177800" indent="-177800">
               <a:spcAft>
-                <a:spcPts val="800"/>
+                <a:spcPts val="3000"/>
               </a:spcAft>
               <a:buSzPct val="100000"/>
               <a:buChar char="•"/>
             </a:pPr>
             <a:r>
-              <a:rPr lang="en-US" sz="1250" b="1" dirty="0">
+              <a:rPr lang="en-US" sz="1400" b="1" dirty="0">
                 <a:solidFill>
                   <a:srgbClr val="043F52"/>
                 </a:solidFill>
@@ -2907,12 +2907,12 @@
             </a:r>
             <a:pPr indent="0" marL="0">
               <a:spcAft>
-                <a:spcPts val="800"/>
+                <a:spcPts val="3000"/>
               </a:spcAft>
               <a:buNone/>
             </a:pPr>
             <a:r>
-              <a:rPr lang="en-US" sz="1250" dirty="0">
+              <a:rPr lang="en-US" sz="1400" dirty="0">
                 <a:solidFill>
                   <a:srgbClr val="043F52"/>
                 </a:solidFill>
@@ -2922,7 +2922,7 @@
               </a:rPr>
               <a:t>¿cómo se eligió a quién contactar y qué pasó con el resto?</a:t>
             </a:r>
-            <a:endParaRPr lang="en-US" sz="1250" dirty="0"/>
+            <a:endParaRPr lang="en-US" sz="1400" dirty="0"/>
           </a:p>
         </p:txBody>
       </p:sp>
@@ -2934,12 +2934,12 @@
         </p:nvSpPr>
         <p:spPr>
           <a:xfrm>
-            <a:off x="6766560" y="3291840"/>
-            <a:ext cx="4965192" cy="960120"/>
+            <a:off x="6766560" y="3429000"/>
+            <a:ext cx="4965192" cy="1097280"/>
           </a:xfrm>
           <a:prstGeom prst="roundRect">
             <a:avLst>
-              <a:gd name="adj" fmla="val 9524"/>
+              <a:gd name="adj" fmla="val 8333"/>
             </a:avLst>
           </a:prstGeom>
           <a:solidFill>
@@ -2961,8 +2961,8 @@
         </p:nvSpPr>
         <p:spPr>
           <a:xfrm>
-            <a:off x="6903720" y="3337560"/>
-            <a:ext cx="4709160" cy="886968"/>
+            <a:off x="6903720" y="3474720"/>
+            <a:ext cx="4709160" cy="1005840"/>
           </a:xfrm>
           <a:prstGeom prst="rect">
             <a:avLst/>
@@ -2978,7 +2978,7 @@
               <a:buNone/>
             </a:pPr>
             <a:r>
-              <a:rPr lang="en-US" sz="1100" b="1" dirty="0">
+              <a:rPr lang="en-US" sz="1200" b="1" dirty="0">
                 <a:solidFill>
                   <a:srgbClr val="043F52"/>
                 </a:solidFill>
@@ -2992,7 +2992,7 @@
               <a:buNone/>
             </a:pPr>
             <a:r>
-              <a:rPr lang="en-US" sz="1100" dirty="0">
+              <a:rPr lang="en-US" sz="1200" dirty="0">
                 <a:solidFill>
                   <a:srgbClr val="043F52"/>
                 </a:solidFill>
@@ -3006,7 +3006,7 @@
               <a:buNone/>
             </a:pPr>
             <a:r>
-              <a:rPr lang="en-US" sz="1100" b="1" dirty="0">
+              <a:rPr lang="en-US" sz="1200" b="1" dirty="0">
                 <a:solidFill>
                   <a:srgbClr val="043F52"/>
                 </a:solidFill>
@@ -3020,7 +3020,7 @@
               <a:buNone/>
             </a:pPr>
             <a:r>
-              <a:rPr lang="en-US" sz="1100" dirty="0">
+              <a:rPr lang="en-US" sz="1200" dirty="0">
                 <a:solidFill>
                   <a:srgbClr val="043F52"/>
                 </a:solidFill>
@@ -3030,7 +3030,7 @@
               </a:rPr>
               <a:t>incrementales por 1.000 contactos.</a:t>
             </a:r>
-            <a:endParaRPr lang="en-US" sz="1100" dirty="0"/>
+            <a:endParaRPr lang="en-US" sz="1200" dirty="0"/>
           </a:p>
         </p:txBody>
       </p:sp>
@@ -3042,8 +3042,8 @@
         </p:nvSpPr>
         <p:spPr>
           <a:xfrm>
-            <a:off x="6766560" y="4434840"/>
-            <a:ext cx="4965192" cy="1828800"/>
+            <a:off x="6766560" y="4754880"/>
+            <a:ext cx="4965192" cy="1645920"/>
           </a:xfrm>
           <a:prstGeom prst="rect">
             <a:avLst/>
@@ -3057,13 +3057,13 @@
           <a:p>
             <a:pPr marL="177800" indent="-177800">
               <a:spcAft>
-                <a:spcPts val="400"/>
+                <a:spcPts val="900"/>
               </a:spcAft>
               <a:buSzPct val="100000"/>
               <a:buChar char="•"/>
             </a:pPr>
             <a:r>
-              <a:rPr lang="en-US" sz="1150" b="1" dirty="0">
+              <a:rPr lang="en-US" sz="1200" b="1" dirty="0">
                 <a:solidFill>
                   <a:srgbClr val="043F52"/>
                 </a:solidFill>
@@ -3075,12 +3075,12 @@
             </a:r>
             <a:pPr indent="0" marL="0">
               <a:spcAft>
-                <a:spcPts val="400"/>
+                <a:spcPts val="900"/>
               </a:spcAft>
               <a:buNone/>
             </a:pPr>
             <a:r>
-              <a:rPr lang="en-US" sz="1150" dirty="0">
+              <a:rPr lang="en-US" sz="1200" dirty="0">
                 <a:solidFill>
                   <a:srgbClr val="043F52"/>
                 </a:solidFill>
@@ -3090,18 +3090,18 @@
               </a:rPr>
               <a:t>mora esperada de la lista ≤ umbral pactado antes (veto).</a:t>
             </a:r>
-            <a:endParaRPr lang="en-US" sz="1150" dirty="0"/>
+            <a:endParaRPr lang="en-US" sz="1200" dirty="0"/>
           </a:p>
           <a:p>
             <a:pPr marL="177800" indent="-177800">
               <a:spcAft>
-                <a:spcPts val="400"/>
+                <a:spcPts val="900"/>
               </a:spcAft>
               <a:buSzPct val="100000"/>
               <a:buChar char="•"/>
             </a:pPr>
             <a:r>
-              <a:rPr lang="en-US" sz="1150" b="1" dirty="0">
+              <a:rPr lang="en-US" sz="1200" b="1" dirty="0">
                 <a:solidFill>
                   <a:srgbClr val="043F52"/>
                 </a:solidFill>
@@ -3113,12 +3113,12 @@
             </a:r>
             <a:pPr indent="0" marL="0">
               <a:spcAft>
-                <a:spcPts val="400"/>
+                <a:spcPts val="900"/>
               </a:spcAft>
               <a:buNone/>
             </a:pPr>
             <a:r>
-              <a:rPr lang="en-US" sz="1150" dirty="0">
+              <a:rPr lang="en-US" sz="1200" dirty="0">
                 <a:solidFill>
                   <a:srgbClr val="043F52"/>
                 </a:solidFill>
@@ -3128,18 +3128,18 @@
               </a:rPr>
               <a:t>quejas y opt-out por 1.000 no peores (veto).</a:t>
             </a:r>
-            <a:endParaRPr lang="en-US" sz="1150" dirty="0"/>
+            <a:endParaRPr lang="en-US" sz="1200" dirty="0"/>
           </a:p>
           <a:p>
             <a:pPr marL="177800" indent="-177800">
               <a:spcAft>
-                <a:spcPts val="400"/>
+                <a:spcPts val="900"/>
               </a:spcAft>
               <a:buSzPct val="100000"/>
               <a:buChar char="•"/>
             </a:pPr>
             <a:r>
-              <a:rPr lang="en-US" sz="1150" b="1" dirty="0">
+              <a:rPr lang="en-US" sz="1200" b="1" dirty="0">
                 <a:solidFill>
                   <a:srgbClr val="043F52"/>
                 </a:solidFill>
@@ -3151,12 +3151,12 @@
             </a:r>
             <a:pPr indent="0" marL="0">
               <a:spcAft>
-                <a:spcPts val="400"/>
+                <a:spcPts val="900"/>
               </a:spcAft>
               <a:buNone/>
             </a:pPr>
             <a:r>
-              <a:rPr lang="en-US" sz="1150" dirty="0">
+              <a:rPr lang="en-US" sz="1200" dirty="0">
                 <a:solidFill>
                   <a:srgbClr val="043F52"/>
                 </a:solidFill>
@@ -3166,18 +3166,18 @@
               </a:rPr>
               <a:t>selección por regional y grupo ≥ 0,8 (alerta).</a:t>
             </a:r>
-            <a:endParaRPr lang="en-US" sz="1150" dirty="0"/>
+            <a:endParaRPr lang="en-US" sz="1200" dirty="0"/>
           </a:p>
           <a:p>
             <a:pPr marL="177800" indent="-177800">
               <a:spcAft>
-                <a:spcPts val="400"/>
+                <a:spcPts val="900"/>
               </a:spcAft>
               <a:buSzPct val="100000"/>
               <a:buChar char="•"/>
             </a:pPr>
             <a:r>
-              <a:rPr lang="en-US" sz="1150" b="1" dirty="0">
+              <a:rPr lang="en-US" sz="1200" b="1" dirty="0">
                 <a:solidFill>
                   <a:srgbClr val="043F52"/>
                 </a:solidFill>
@@ -3189,12 +3189,12 @@
             </a:r>
             <a:pPr indent="0" marL="0">
               <a:spcAft>
-                <a:spcPts val="400"/>
+                <a:spcPts val="900"/>
               </a:spcAft>
               <a:buNone/>
             </a:pPr>
             <a:r>
-              <a:rPr lang="en-US" sz="1150" dirty="0">
+              <a:rPr lang="en-US" sz="1200" dirty="0">
                 <a:solidFill>
                   <a:srgbClr val="043F52"/>
                 </a:solidFill>
@@ -3204,18 +3204,18 @@
               </a:rPr>
               <a:t>≥ 90 % de lista ejecutada (alerta).</a:t>
             </a:r>
-            <a:endParaRPr lang="en-US" sz="1150" dirty="0"/>
+            <a:endParaRPr lang="en-US" sz="1200" dirty="0"/>
           </a:p>
           <a:p>
             <a:pPr marL="177800" indent="-177800">
               <a:spcAft>
-                <a:spcPts val="400"/>
+                <a:spcPts val="900"/>
               </a:spcAft>
               <a:buSzPct val="100000"/>
               <a:buChar char="•"/>
             </a:pPr>
             <a:r>
-              <a:rPr lang="en-US" sz="1150" b="1" dirty="0">
+              <a:rPr lang="en-US" sz="1200" b="1" dirty="0">
                 <a:solidFill>
                   <a:srgbClr val="043F52"/>
                 </a:solidFill>
@@ -3227,12 +3227,12 @@
             </a:r>
             <a:pPr indent="0" marL="0">
               <a:spcAft>
-                <a:spcPts val="400"/>
+                <a:spcPts val="900"/>
               </a:spcAft>
               <a:buNone/>
             </a:pPr>
             <a:r>
-              <a:rPr lang="en-US" sz="1150" dirty="0">
+              <a:rPr lang="en-US" sz="1200" dirty="0">
                 <a:solidFill>
                   <a:srgbClr val="043F52"/>
                 </a:solidFill>
@@ -3242,7 +3242,7 @@
               </a:rPr>
               <a:t>aleatorización y datos válidos (bloqueo).</a:t>
             </a:r>
-            <a:endParaRPr lang="en-US" sz="1150" dirty="0"/>
+            <a:endParaRPr lang="en-US" sz="1200" dirty="0"/>
           </a:p>
         </p:txBody>
       </p:sp>
@@ -9025,7 +9025,7 @@
                 <a:ea typeface="Calibri" pitchFamily="34" charset="-122"/>
                 <a:cs typeface="Calibri" pitchFamily="34" charset="-120"/>
               </a:rPr>
-              <a:t>No incremental: si la mitad de las 704 renovaciones de B fuera orgánica, baja a 119 M.</a:t>
+              <a:t>No incremental: con orgánico ≈ 5 % (57 % de las 704 renovaciones de B), el valor incremental baja a ≈ 103 M.</a:t>
             </a:r>
             <a:endParaRPr lang="en-US" sz="1100" dirty="0"/>
           </a:p>
@@ -10679,7 +10679,7 @@
                           <a:ea typeface="Calibri" pitchFamily="34" charset="-122"/>
                           <a:cs typeface="Calibri" pitchFamily="34" charset="-120"/>
                         </a:rPr>
-                        <a:t>Mayor valor marginal (86 k): recibe cupos transferidos</a:t>
+                        <a:t>Mayor valor marginal (85 k): recibe cupos transferidos</a:t>
                       </a:r>
                       <a:endParaRPr lang="en-US" sz="1050" dirty="0">
                         <a:latin typeface="Calibri" charset="0"/>
@@ -11071,7 +11071,7 @@
                           <a:ea typeface="Calibri" pitchFamily="34" charset="-122"/>
                           <a:cs typeface="Calibri" pitchFamily="34" charset="-120"/>
                         </a:rPr>
-                        <a:t>Corte por cuota; segundo valor marginal (81 k)</a:t>
+                        <a:t>Corte por cuota; segundo valor marginal (82 k)</a:t>
                       </a:r>
                       <a:endParaRPr lang="en-US" sz="1050" dirty="0">
                         <a:latin typeface="Calibri" charset="0"/>
@@ -11463,7 +11463,7 @@
                           <a:ea typeface="Calibri" pitchFamily="34" charset="-122"/>
                           <a:cs typeface="Calibri" pitchFamily="34" charset="-120"/>
                         </a:rPr>
-                        <a:t>Menor valor marginal (61 k): cede cupos, tope a pactar (10 %)</a:t>
+                        <a:t>Menor valor marginal (65 k): cede cupos, tope a pactar (10 %)</a:t>
                       </a:r>
                       <a:endParaRPr lang="en-US" sz="1050" dirty="0">
                         <a:latin typeface="Calibri" charset="0"/>
@@ -11696,7 +11696,7 @@
                 <a:ea typeface="Calibri" pitchFamily="34" charset="-122"/>
                 <a:cs typeface="Calibri" pitchFamily="34" charset="-120"/>
               </a:rPr>
-              <a:t>Diseño: dos pools al azar, mismo piso de riesgo</a:t>
+              <a:t>Diseño: dos pools al azar, mismo piso</a:t>
             </a:r>
             <a:endParaRPr lang="en-US" sz="1300" dirty="0"/>
           </a:p>
@@ -11801,7 +11801,7 @@
                 <a:ea typeface="Calibri" pitchFamily="34" charset="-122"/>
                 <a:cs typeface="Calibri" pitchFamily="34" charset="-120"/>
               </a:rPr>
-              <a:t>Herramienta actual elige sus 4.000 en su pool</a:t>
+              <a:t>Herramienta actual elige 4.000 en su pool</a:t>
             </a:r>
             <a:endParaRPr lang="en-US" sz="1200" dirty="0"/>
           </a:p>
@@ -11945,7 +11945,7 @@
                 <a:ea typeface="Calibri" pitchFamily="34" charset="-122"/>
                 <a:cs typeface="Calibri" pitchFamily="34" charset="-120"/>
               </a:rPr>
-              <a:t>B rankea su pool con cuotas; toma su top 4.800</a:t>
+              <a:t>B rankea su pool con cuotas; top 4.800</a:t>
             </a:r>
             <a:endParaRPr lang="en-US" sz="1200" dirty="0"/>
           </a:p>
@@ -12089,7 +12089,7 @@
                 <a:ea typeface="Calibri" pitchFamily="34" charset="-122"/>
                 <a:cs typeface="Calibri" pitchFamily="34" charset="-120"/>
               </a:rPr>
-              <a:t>800 al azar del top 4.800 de B, sin contacto</a:t>
+              <a:t>800 al azar del top de B, sin contacto</a:t>
             </a:r>
             <a:endParaRPr lang="en-US" sz="1200" dirty="0"/>
           </a:p>
@@ -12171,7 +12171,7 @@
                 <a:ea typeface="Calibri" pitchFamily="34" charset="-122"/>
                 <a:cs typeface="Calibri" pitchFamily="34" charset="-120"/>
               </a:rPr>
-              <a:t>Calidad de lista: </a:t>
+              <a:t>Calidad: </a:t>
             </a:r>
             <a:pPr indent="0" marL="0">
               <a:spcAft>
@@ -12188,7 +12188,7 @@
                 <a:ea typeface="Calibri" pitchFamily="34" charset="-122"/>
                 <a:cs typeface="Calibri" pitchFamily="34" charset="-120"/>
               </a:rPr>
-              <a:t>3,6 → 5,4 % se detecta con 2.081 por brazo (un mes); 3,6 → 4,5 %, dos meses.</a:t>
+              <a:t>3,6 → 5,4 % se detecta con 2.081 por brazo en un mes.</a:t>
             </a:r>
             <a:endParaRPr lang="en-US" sz="1100" dirty="0"/>
           </a:p>
@@ -12226,7 +12226,7 @@
                 <a:ea typeface="Calibri" pitchFamily="34" charset="-122"/>
                 <a:cs typeface="Calibri" pitchFamily="34" charset="-120"/>
               </a:rPr>
-              <a:t>uplift plausible 2,3 → 4,0 % (mitad del +3,1 pp de D) en 1,3 meses; cuesta 4,6 M/mes.</a:t>
+              <a:t>baseline 5 % (tercil alto); +3,8 pp en 0,6 meses, +1,7 pp en 2,3.</a:t>
             </a:r>
             <a:endParaRPr lang="en-US" sz="1100" dirty="0"/>
           </a:p>
@@ -12264,7 +12264,7 @@
                 <a:ea typeface="Calibri" pitchFamily="34" charset="-122"/>
                 <a:cs typeface="Calibri" pitchFamily="34" charset="-120"/>
               </a:rPr>
-              <a:t>el mismo piso en ambos brazos aísla el modelo; mora vigilada por vintage.</a:t>
+              <a:t>mismo piso en ambos brazos; vigilado por vintage.</a:t>
             </a:r>
             <a:endParaRPr lang="en-US" sz="1100" dirty="0"/>
           </a:p>
@@ -12302,7 +12302,7 @@
                 <a:ea typeface="Calibri" pitchFamily="34" charset="-122"/>
                 <a:cs typeface="Calibri" pitchFamily="34" charset="-120"/>
               </a:rPr>
-              <a:t>sin holdout en el champion no se compara su incrementalidad; opción, 400 allí (≈ 2,3 M/mes).</a:t>
+              <a:t>el champion sin holdout no mide su incrementalidad; opción, 400 allí (≈ 2,3 M/mes).</a:t>
             </a:r>
             <a:endParaRPr lang="en-US" sz="1100" dirty="0"/>
           </a:p>
@@ -13208,7 +13208,7 @@
                 <a:ea typeface="Calibri" pitchFamily="34" charset="-122"/>
                 <a:cs typeface="Calibri" pitchFamily="34" charset="-120"/>
               </a:rPr>
-              <a:t>Monitoreo, primeros tres meses</a:t>
+              <a:t>Monitoreo (tres meses)</a:t>
             </a:r>
             <a:endParaRPr lang="en-US" sz="1300" dirty="0"/>
           </a:p>
@@ -14681,7 +14681,7 @@
         <p:spPr>
           <a:xfrm>
             <a:off x="7589520" y="4937760"/>
-            <a:ext cx="4142232" cy="1280160"/>
+            <a:ext cx="4142232" cy="1417320"/>
           </a:xfrm>
           <a:prstGeom prst="rect">
             <a:avLst/>
@@ -14731,6 +14731,48 @@
                 <a:cs typeface="Calibri" pitchFamily="34" charset="-120"/>
               </a:rPr>
               <a:t>Sin calibración verificada, holdout, rollback o dueño.</a:t>
+            </a:r>
+            <a:endParaRPr lang="en-US" sz="1100" dirty="0"/>
+          </a:p>
+          <a:p>
+            <a:pPr marL="177800" indent="-177800">
+              <a:spcAft>
+                <a:spcPts val="200"/>
+              </a:spcAft>
+              <a:buSzPct val="100000"/>
+              <a:buChar char="•"/>
+            </a:pPr>
+            <a:r>
+              <a:rPr lang="en-US" sz="1100" dirty="0">
+                <a:solidFill>
+                  <a:srgbClr val="043F52"/>
+                </a:solidFill>
+                <a:latin typeface="Calibri" pitchFamily="34" charset="0"/>
+                <a:ea typeface="Calibri" pitchFamily="34" charset="-122"/>
+                <a:cs typeface="Calibri" pitchFamily="34" charset="-120"/>
+              </a:rPr>
+              <a:t>Capacidad que no ejecuta ≥ 90 % de la lista: el modelo no se prueba.</a:t>
+            </a:r>
+            <a:endParaRPr lang="en-US" sz="1100" dirty="0"/>
+          </a:p>
+          <a:p>
+            <a:pPr marL="177800" indent="-177800">
+              <a:spcAft>
+                <a:spcPts val="200"/>
+              </a:spcAft>
+              <a:buSzPct val="100000"/>
+              <a:buChar char="•"/>
+            </a:pPr>
+            <a:r>
+              <a:rPr lang="en-US" sz="1100" dirty="0">
+                <a:solidFill>
+                  <a:srgbClr val="043F52"/>
+                </a:solidFill>
+                <a:latin typeface="Calibri" pitchFamily="34" charset="0"/>
+                <a:ea typeface="Calibri" pitchFamily="34" charset="-122"/>
+                <a:cs typeface="Calibri" pitchFamily="34" charset="-120"/>
+              </a:rPr>
+              <a:t>Selección que excluye un grupo o regional sin explicación de negocio.</a:t>
             </a:r>
             <a:endParaRPr lang="en-US" sz="1100" dirty="0"/>
           </a:p>
@@ -16632,7 +16674,7 @@
                           <a:ea typeface="Calibri" pitchFamily="34" charset="-122"/>
                           <a:cs typeface="Calibri" pitchFamily="34" charset="-120"/>
                         </a:rPr>
-                        <a:t>16 ex ante limpias</a:t>
+                        <a:t>15 ex ante limpias</a:t>
                       </a:r>
                       <a:endParaRPr lang="en-US" sz="1050" dirty="0">
                         <a:latin typeface="Calibri" charset="0"/>
@@ -16762,7 +16804,7 @@
                           <a:ea typeface="Calibri" pitchFamily="34" charset="-122"/>
                           <a:cs typeface="Calibri" pitchFamily="34" charset="-120"/>
                         </a:rPr>
-                        <a:t>0,817</a:t>
+                        <a:t>0,820</a:t>
                       </a:r>
                       <a:endParaRPr lang="en-US" sz="1050" dirty="0">
                         <a:latin typeface="Calibri" charset="0"/>
@@ -16892,7 +16934,7 @@
                           <a:ea typeface="Calibri" pitchFamily="34" charset="-122"/>
                           <a:cs typeface="Calibri" pitchFamily="34" charset="-120"/>
                         </a:rPr>
-                        <a:t>0,52</a:t>
+                        <a:t>0,53</a:t>
                       </a:r>
                       <a:endParaRPr lang="en-US" sz="1050" dirty="0">
                         <a:latin typeface="Calibri" charset="0"/>
@@ -16957,7 +16999,7 @@
                           <a:ea typeface="Calibri" pitchFamily="34" charset="-122"/>
                           <a:cs typeface="Calibri" pitchFamily="34" charset="-120"/>
                         </a:rPr>
-                        <a:t>0,90</a:t>
+                        <a:t>0,91</a:t>
                       </a:r>
                       <a:endParaRPr lang="en-US" sz="1050" dirty="0">
                         <a:latin typeface="Calibri" charset="0"/>
@@ -17022,7 +17064,7 @@
                           <a:ea typeface="Calibri" pitchFamily="34" charset="-122"/>
                           <a:cs typeface="Calibri" pitchFamily="34" charset="-120"/>
                         </a:rPr>
-                        <a:t>0,130</a:t>
+                        <a:t>0,129</a:t>
                       </a:r>
                       <a:endParaRPr lang="en-US" sz="1050" dirty="0">
                         <a:latin typeface="Calibri" charset="0"/>
@@ -17089,7 +17131,7 @@
                           <a:ea typeface="Calibri" pitchFamily="34" charset="-122"/>
                           <a:cs typeface="Calibri" pitchFamily="34" charset="-120"/>
                         </a:rPr>
-                        <a:t>16 ex ante limpias</a:t>
+                        <a:t>15 ex ante limpias</a:t>
                       </a:r>
                       <a:endParaRPr lang="en-US" sz="1050" dirty="0">
                         <a:latin typeface="Calibri" charset="0"/>
@@ -17219,7 +17261,7 @@
                           <a:ea typeface="Calibri" pitchFamily="34" charset="-122"/>
                           <a:cs typeface="Calibri" pitchFamily="34" charset="-120"/>
                         </a:rPr>
-                        <a:t>0,786</a:t>
+                        <a:t>0,791</a:t>
                       </a:r>
                       <a:endParaRPr lang="en-US" sz="1050" dirty="0">
                         <a:latin typeface="Calibri" charset="0"/>
@@ -17284,7 +17326,7 @@
                           <a:ea typeface="Calibri" pitchFamily="34" charset="-122"/>
                           <a:cs typeface="Calibri" pitchFamily="34" charset="-120"/>
                         </a:rPr>
-                        <a:t>0,76–0,81</a:t>
+                        <a:t>0,77–0,82</a:t>
                       </a:r>
                       <a:endParaRPr lang="en-US" sz="1050" dirty="0">
                         <a:latin typeface="Calibri" charset="0"/>
@@ -17414,7 +17456,7 @@
                           <a:ea typeface="Calibri" pitchFamily="34" charset="-122"/>
                           <a:cs typeface="Calibri" pitchFamily="34" charset="-120"/>
                         </a:rPr>
-                        <a:t>0,77</a:t>
+                        <a:t>0,78</a:t>
                       </a:r>
                       <a:endParaRPr lang="en-US" sz="1050" dirty="0">
                         <a:latin typeface="Calibri" charset="0"/>
@@ -17479,7 +17521,7 @@
                           <a:ea typeface="Calibri" pitchFamily="34" charset="-122"/>
                           <a:cs typeface="Calibri" pitchFamily="34" charset="-120"/>
                         </a:rPr>
-                        <a:t>0,138</a:t>
+                        <a:t>0,137</a:t>
                       </a:r>
                       <a:endParaRPr lang="en-US" sz="1050" dirty="0">
                         <a:latin typeface="Calibri" charset="0"/>
@@ -17676,7 +17718,7 @@
                           <a:ea typeface="Calibri" pitchFamily="34" charset="-122"/>
                           <a:cs typeface="Calibri" pitchFamily="34" charset="-120"/>
                         </a:rPr>
-                        <a:t>0,819</a:t>
+                        <a:t>0,821</a:t>
                       </a:r>
                       <a:endParaRPr lang="en-US" sz="1050" dirty="0">
                         <a:latin typeface="Calibri" charset="0"/>
@@ -17741,7 +17783,7 @@
                           <a:ea typeface="Calibri" pitchFamily="34" charset="-122"/>
                           <a:cs typeface="Calibri" pitchFamily="34" charset="-120"/>
                         </a:rPr>
-                        <a:t>0,78–0,85</a:t>
+                        <a:t>0,79–0,85</a:t>
                       </a:r>
                       <a:endParaRPr lang="en-US" sz="1050" dirty="0">
                         <a:latin typeface="Calibri" charset="0"/>
@@ -17871,7 +17913,7 @@
                           <a:ea typeface="Calibri" pitchFamily="34" charset="-122"/>
                           <a:cs typeface="Calibri" pitchFamily="34" charset="-120"/>
                         </a:rPr>
-                        <a:t>0,90</a:t>
+                        <a:t>0,91</a:t>
                       </a:r>
                       <a:endParaRPr lang="en-US" sz="1050" dirty="0">
                         <a:latin typeface="Calibri" charset="0"/>
@@ -17936,7 +17978,7 @@
                           <a:ea typeface="Calibri" pitchFamily="34" charset="-122"/>
                           <a:cs typeface="Calibri" pitchFamily="34" charset="-120"/>
                         </a:rPr>
-                        <a:t>0,129</a:t>
+                        <a:t>0,128</a:t>
                       </a:r>
                       <a:endParaRPr lang="en-US" sz="1050" dirty="0">
                         <a:latin typeface="Calibri" charset="0"/>
@@ -18198,7 +18240,7 @@
                           <a:ea typeface="Calibri" pitchFamily="34" charset="-122"/>
                           <a:cs typeface="Calibri" pitchFamily="34" charset="-120"/>
                         </a:rPr>
-                        <a:t>0,93–0,96</a:t>
+                        <a:t>0,93–0,97</a:t>
                       </a:r>
                       <a:endParaRPr lang="en-US" sz="1050" dirty="0">
                         <a:latin typeface="Calibri" charset="0"/>
@@ -18911,8 +18953,8 @@
         </p:nvSpPr>
         <p:spPr>
           <a:xfrm>
-            <a:off x="457200" y="3108960"/>
-            <a:ext cx="6675120" cy="685800"/>
+            <a:off x="457200" y="3044952"/>
+            <a:ext cx="6675120" cy="777240"/>
           </a:xfrm>
           <a:prstGeom prst="rect">
             <a:avLst/>
@@ -18928,7 +18970,7 @@
               <a:buNone/>
             </a:pPr>
             <a:r>
-              <a:rPr lang="en-US" sz="900" dirty="0">
+              <a:rPr lang="en-US" sz="850" dirty="0">
                 <a:solidFill>
                   <a:srgbClr val="4A6A72"/>
                 </a:solidFill>
@@ -18936,9 +18978,9 @@
                 <a:ea typeface="Calibri" pitchFamily="34" charset="-122"/>
                 <a:cs typeface="Calibri" pitchFamily="34" charset="-120"/>
               </a:rPr>
-              <a:t>Prevalencia de la base 20,2 %. Calibración: pendiente de observado sobre predicho (1 = perfecta); media predicha 0,197 vs. observada 0,207. Las conversiones «top 8k» de la hoja no son comparables con esta base. Sin gap (train &lt; t, abril a agosto): 0,82 / 0,80; k-fold aleatorio: 0,82. Coeficientes estandarizados del modelo limpio: score_buro 1,30; max_mora_6m −0,56; respondio_oferta_previa 0,27; el resto &lt; 0,15.</a:t>
+              <a:t>Prevalencia de la base 20,2 %. Calibración: pendiente de observado sobre predicho (1 = perfecta); media predicha 0,197 vs. observada 0,207. Las conversiones «top 8k» de la hoja no son comparables con esta base. Sin gap (train &lt; t, abril a agosto): 0,82 / 0,80; k-fold aleatorio: 0,82. Coeficientes estandarizados del modelo limpio: score_buro 1,29; max_mora_6m −0,56; respondio_oferta_previa 0,27; el resto &lt; 0,15. Orgánico por tercil de buró (no contactados): alto 5,4 % (7/129, IC 2,7–10,8 %), contactados del tercil alto 53 %: parte del valor de B es orgánica y el holdout lo mide.</a:t>
             </a:r>
-            <a:endParaRPr lang="en-US" sz="900" dirty="0"/>
+            <a:endParaRPr lang="en-US" sz="850" dirty="0"/>
           </a:p>
         </p:txBody>
       </p:sp>
@@ -21486,8 +21528,8 @@
             <a:tbl>
               <a:tblPr/>
               <a:tblGrid>
-                <a:gridCol w="2103120"/>
-                <a:gridCol w="1691640"/>
+                <a:gridCol w="2240280"/>
+                <a:gridCol w="1554480"/>
                 <a:gridCol w="1417320"/>
               </a:tblGrid>
               <a:tr h="219456">
@@ -21779,7 +21821,7 @@
                           <a:ea typeface="Calibri" pitchFamily="34" charset="-122"/>
                           <a:cs typeface="Calibri" pitchFamily="34" charset="-120"/>
                         </a:rPr>
-                        <a:t>7.530 / 2.081 / 618 por brazo</a:t>
+                        <a:t>7.530 / 2.081 / 618 / brazo</a:t>
                       </a:r>
                       <a:endParaRPr lang="en-US" sz="1050" dirty="0">
                         <a:latin typeface="Calibri" charset="0"/>
@@ -22108,7 +22150,7 @@
                           <a:ea typeface="Calibri" pitchFamily="34" charset="-122"/>
                           <a:cs typeface="Calibri" pitchFamily="34" charset="-120"/>
                         </a:rPr>
-                        <a:t>Holdout 2,3 a 3,5 % (800 vs. 4.000)</a:t>
+                        <a:t>Holdout 5 %, +1,7 pp (conservador)</a:t>
                       </a:r>
                       <a:endParaRPr lang="en-US" sz="1050" dirty="0">
                         <a:latin typeface="Calibri" charset="0"/>
@@ -22173,7 +22215,7 @@
                           <a:ea typeface="Calibri" pitchFamily="34" charset="-122"/>
                           <a:cs typeface="Calibri" pitchFamily="34" charset="-120"/>
                         </a:rPr>
-                        <a:t>1.932 en holdout</a:t>
+                        <a:t>1.856 en holdout</a:t>
                       </a:r>
                       <a:endParaRPr lang="en-US" sz="1050" dirty="0">
                         <a:latin typeface="Calibri" charset="0"/>
@@ -22238,7 +22280,7 @@
                           <a:ea typeface="Calibri" pitchFamily="34" charset="-122"/>
                           <a:cs typeface="Calibri" pitchFamily="34" charset="-120"/>
                         </a:rPr>
-                        <a:t>2,4 meses · 3,2 M/mes</a:t>
+                        <a:t>2,3 meses · 4,6 M/mes</a:t>
                       </a:r>
                       <a:endParaRPr lang="en-US" sz="1050" dirty="0">
                         <a:latin typeface="Calibri" charset="0"/>
@@ -22305,7 +22347,7 @@
                           <a:ea typeface="Calibri" pitchFamily="34" charset="-122"/>
                           <a:cs typeface="Calibri" pitchFamily="34" charset="-120"/>
                         </a:rPr>
-                        <a:t>Holdout 2,3 a 4,0 % (plausible)</a:t>
+                        <a:t>Holdout 5 %, +3,8 pp (plausible, B)</a:t>
                       </a:r>
                       <a:endParaRPr lang="en-US" sz="1050" dirty="0">
                         <a:latin typeface="Calibri" charset="0"/>
@@ -22370,7 +22412,7 @@
                           <a:ea typeface="Calibri" pitchFamily="34" charset="-122"/>
                           <a:cs typeface="Calibri" pitchFamily="34" charset="-120"/>
                         </a:rPr>
-                        <a:t>1.056 en holdout</a:t>
+                        <a:t>444 en holdout</a:t>
                       </a:r>
                       <a:endParaRPr lang="en-US" sz="1050" dirty="0">
                         <a:latin typeface="Calibri" charset="0"/>
@@ -22435,7 +22477,7 @@
                           <a:ea typeface="Calibri" pitchFamily="34" charset="-122"/>
                           <a:cs typeface="Calibri" pitchFamily="34" charset="-120"/>
                         </a:rPr>
-                        <a:t>1,3 meses · 4,6 M/mes</a:t>
+                        <a:t>0,6 meses · 10,3 M/mes</a:t>
                       </a:r>
                       <a:endParaRPr lang="en-US" sz="1050" dirty="0">
                         <a:latin typeface="Calibri" charset="0"/>
@@ -22502,7 +22544,7 @@
                           <a:ea typeface="Calibri" pitchFamily="34" charset="-122"/>
                           <a:cs typeface="Calibri" pitchFamily="34" charset="-120"/>
                         </a:rPr>
-                        <a:t>Holdout 2,3 a 4,5 / 5,0 %</a:t>
+                        <a:t>Holdout 4 / 6 %, +2,5 pp</a:t>
                       </a:r>
                       <a:endParaRPr lang="en-US" sz="1050" dirty="0">
                         <a:latin typeface="Calibri" charset="0"/>
@@ -22567,7 +22609,7 @@
                           <a:ea typeface="Calibri" pitchFamily="34" charset="-122"/>
                           <a:cs typeface="Calibri" pitchFamily="34" charset="-120"/>
                         </a:rPr>
-                        <a:t>685 / 491 en holdout</a:t>
+                        <a:t>790 / 1.053 en holdout</a:t>
                       </a:r>
                       <a:endParaRPr lang="en-US" sz="1050" dirty="0">
                         <a:latin typeface="Calibri" charset="0"/>
@@ -22632,7 +22674,7 @@
                           <a:ea typeface="Calibri" pitchFamily="34" charset="-122"/>
                           <a:cs typeface="Calibri" pitchFamily="34" charset="-120"/>
                         </a:rPr>
-                        <a:t>0,9 / 0,6 m · 5,9 / 7,3 M</a:t>
+                        <a:t>1,0 / 1,3 m · 6,7 M/mes</a:t>
                       </a:r>
                       <a:endParaRPr lang="en-US" sz="1050" dirty="0">
                         <a:latin typeface="Calibri" charset="0"/>
@@ -23434,7 +23476,7 @@
                           <a:ea typeface="Calibri" pitchFamily="34" charset="-122"/>
                           <a:cs typeface="Calibri" pitchFamily="34" charset="-120"/>
                         </a:rPr>
-                        <a:t>fecha_ultimo_contacto (1 &gt; corte); cuotas_pagadas_pct, monto_preaprobado sin timestamp</a:t>
+                        <a:t>fecha_ultimo_contacto / dias_ultimo_contacto (51 en el mes, 1 &gt; corte); cuotas_pagadas_pct, monto_preaprobado</a:t>
                       </a:r>
                       <a:endParaRPr lang="en-US" sz="1050" dirty="0">
                         <a:latin typeface="Calibri" charset="0"/>
@@ -23499,7 +23541,7 @@
                           <a:ea typeface="Calibri" pitchFamily="34" charset="-122"/>
                           <a:cs typeface="Calibri" pitchFamily="34" charset="-120"/>
                         </a:rPr>
-                        <a:t>Fuera del set; sin costo (AUC 0,52–0,53); vuelven con timestamp</a:t>
+                        <a:t>Fuera del set; sin costo (AUC 0,50–0,53); vuelven con timestamp</a:t>
                       </a:r>
                       <a:endParaRPr lang="en-US" sz="1050" dirty="0">
                         <a:latin typeface="Calibri" charset="0"/>
@@ -23954,8 +23996,8 @@
         </p:nvSpPr>
         <p:spPr>
           <a:xfrm>
-            <a:off x="457200" y="5806440"/>
-            <a:ext cx="5212080" cy="548640"/>
+            <a:off x="457200" y="5870448"/>
+            <a:ext cx="5212080" cy="502920"/>
           </a:xfrm>
           <a:prstGeom prst="rect">
             <a:avLst/>

--- a/entregables/BancoW_Priorizacion_Renovaciones_DavinsonArteaga.pptx
+++ b/entregables/BancoW_Priorizacion_Renovaciones_DavinsonArteaga.pptx
@@ -113,37 +113,37 @@
   <p:extLst>
     <p:ext uri="{521415D9-36F7-43E2-AB2F-B90AF26B5E84}">
       <p14:sectionLst xmlns:p14="http://schemas.microsoft.com/office/powerpoint/2010/main">
-        <p14:section name="Decisión" id="{e947533a-1f8c-ddc9-6a8d-dc7f84333afb}">
+        <p14:section name="Decisión" id="{e9f31a0d-397b-8867-dfbe-56bb269d0875}">
           <p14:sldIdLst>
             <p14:sldId id="256"/>
           </p14:sldIdLst>
         </p14:section>
-        <p14:section name="Datos" id="{e80421bd-7d7d-c0a0-8877-68a39b68fed6}">
+        <p14:section name="Datos" id="{68687150-3602-484a-0941-9f6517c1d253}">
           <p14:sldIdLst>
             <p14:sldId id="257"/>
           </p14:sldIdLst>
         </p14:section>
-        <p14:section name="Alternativas" id="{22e6a8a1-7a02-047a-9b86-4cdcce09a56a}">
+        <p14:section name="Alternativas" id="{20f0819c-1626-47d9-7c0e-a65cd6979644}">
           <p14:sldIdLst>
             <p14:sldId id="258"/>
           </p14:sldIdLst>
         </p14:section>
-        <p14:section name="Valor" id="{6d5c723c-b6d9-03f2-6343-c404c537882d}">
+        <p14:section name="Valor" id="{4fc722d8-d9e8-5379-6e30-5e0ef208b379}">
           <p14:sldIdLst>
             <p14:sldId id="259"/>
           </p14:sldIdLst>
         </p14:section>
-        <p14:section name="Piloto" id="{b121952c-9a25-e750-c985-3de904b0b9b1}">
+        <p14:section name="Piloto" id="{483e50f1-10ec-6603-5819-a22227e44ee4}">
           <p14:sldIdLst>
             <p14:sldId id="260"/>
           </p14:sldIdLst>
         </p14:section>
-        <p14:section name="Recomendación" id="{746314d4-711a-3af3-61a3-83cd38e026d5}">
+        <p14:section name="Recomendación" id="{30e5bb2a-9f5e-84bc-2889-b7d8df712cf3}">
           <p14:sldIdLst>
             <p14:sldId id="261"/>
           </p14:sldIdLst>
         </p14:section>
-        <p14:section name="Anexo" id="{b2138efb-b2ad-2767-aee6-74243d776485}">
+        <p14:section name="Anexo" id="{5675a295-83ce-ec0e-428e-910a547753e9}">
           <p14:sldIdLst>
             <p14:sldId id="262"/>
           </p14:sldIdLst>
@@ -276,10 +276,10 @@
                   <c:v>0.82</c:v>
                 </c:pt>
                 <c:pt idx="1">
-                  <c:v>0.94</c:v>
+                  <c:v>0.944</c:v>
                 </c:pt>
                 <c:pt idx="2">
-                  <c:v>1</c:v>
+                  <c:v>0.997</c:v>
                 </c:pt>
               </c:numCache>
             </c:numRef>
@@ -1206,7 +1206,7 @@
           <a:p>
             <a:r>
               <a:rPr lang="en-US" dirty="0"/>
-              <a:t>Detalle de cada hallazgo en la guía P5 y P6. Fuga: 78 % de «Acepta» renueva; dias_hasta_renovacion es nulo exactamente en los 1.436 no renovados. Calidad: max_mora_6m = −4, ahorro −350.000, contacto fechado 2026-09-15 con corte agosto; score de buró 352–912 está dentro de la escala DataCrédito 150–950 (confirmar central, versión y vigencia). contactabilidad_score no predice el contacto (32 % de no contactados en todos los cuartiles). cuotas_pagadas_pct, monto_preaprobado y dias_ultimo_contacto quedan fuera del set limpio hasta certificar su timestamp (51 contactos fechados dentro del mes de corte y 1 después): no cuesta señal (AUC univariado 0,50–0,53); en producción se recalcula a la fecha de corte. Accuracy trivial: 79,8 % en la base, 96,4 % en producción sin acertar un renovador.</a:t>
+              <a:t>Detalle de cada hallazgo en la guía P5 y P6. Fuga: 78 % de «Acepta» renueva; dias_hasta_renovacion es nulo exactamente en los 1.436 no renovados. Calidad: max_mora_6m = −4, ahorro −350.000, contacto fechado 2026-09-15 con corte agosto; score de buró 352–912 está dentro de la escala DataCrédito 150–950 (confirmar central, versión y vigencia). contactabilidad_score no predice el contacto (entre 29 % y 32 % de no contactados en los cuatro cuartiles). cuotas_pagadas_pct, monto_preaprobado y dias_ultimo_contacto quedan fuera del set limpio hasta certificar su timestamp (51 contactos fechados dentro del mes de corte y 1 después): no cuesta señal (AUC univariado 0,50–0,53); en producción se recalcula a la fecha de corte. Accuracy trivial: 79,8 % en la base, 96,4 % en producción sin acertar un renovador.</a:t>
             </a:r>
             <a:endParaRPr lang="en-US" dirty="0"/>
           </a:p>
@@ -1470,7 +1470,7 @@
           <a:p>
             <a:r>
               <a:rPr lang="en-US" dirty="0"/>
-              <a:t>Mecánica: el universo elegible del mes (filtrado por el mismo piso de riesgo: corte de buró y max_mora pactados con Riesgos) se parte al azar en dos pools por cliente, estratificando por regional y tercil de score. El champion elige sus 4.000 en su pool; el challenger rankea el suyo, toma su top 4.800, retiene 800 al azar como holdout sin contacto y contacta 4.000. Capacidad intacta: 8.000. Dos reglas separadas: calidad de lista (challenger vs. champion) y efecto del contacto (challenger contactado vs. holdout). Baseline del holdout: no el 2,3 % global, sino el orgánico del tercil alto de buró (≈ 5 %, 7 de 129, IC 2,7–10,8 %), porque el holdout sale del top de B. Potencia (800 vs. 4.000, baseline 5 %): conservador +1,7 pp exige 1.856 en holdout, 2,3 meses, 4,6 M/mes de costo; plausible +3,8 pp (el uplift implícito si B convierte 8,8 % sobre un orgánico de 5 %) exige 444, 0,6 meses, 10,3 M/mes. Dos meses detectan el escenario plausible con margen; el conservador necesita un tercer mes. El costo es ≤ 4 % del VE de B. Limitación: sin holdout en el champion no comparamos la incrementalidad de las dos políticas; la opción de 400 de holdout en el champion cuesta ≈ 2,3 M/mes y deja ese brazo en 3.600. Probar mora 5,1 % vs. 7,2 % exigiría 2.053 renovados por brazo: el riesgo entra por política y se vigila por vintage. Duración: dos meses de asignación + 30 días de ventana + 30 a 60 de maduración; decisión a los 90 días. Jerga (SRM, CSI, Brier, CUPED) en el anexo y la guía. Condiciones completas de no liberación en la guía P16.</a:t>
+              <a:t>Mecánica: el universo elegible del mes (filtrado por el mismo piso de riesgo: corte de buró y max_mora pactados con Riesgos) se parte al azar en dos pools por cliente, estratificando por regional y tercil de score. El champion elige sus 4.000 en su pool; el challenger rankea el suyo, toma su top 4.800, retiene 800 al azar como holdout sin contacto y contacta 4.000. Capacidad intacta: 8.000. Dos reglas separadas: calidad de lista (challenger vs. champion) y efecto del contacto (challenger contactado vs. holdout). Baseline del holdout: no el 2,3 % global, sino el orgánico del tercil alto de buró (≈ 5 %, 7 de 129, IC 2,7–10,8 %), porque el holdout sale del top de B. Potencia (800 vs. 4.000, baseline 5 %): conservador +1,7 pp exige 1.856 en holdout, 2,3 meses, 4,6 M/mes de costo; plausible +3,8 pp (el uplift implícito si B convierte 8,8 % sobre un orgánico de 5 %) exige 444, 0,6 meses, 10,3 M/mes. Dos meses detectan el escenario plausible con margen; el conservador necesita un tercer mes. El costo es cerca del 4 % del VE de B (10,3 de 237 M). Limitación: sin holdout en el champion no comparamos la incrementalidad de las dos políticas; la opción de 400 de holdout en el champion cuesta ≈ 2,3 M/mes y deja ese brazo en 3.600. Probar mora 5,1 % vs. 7,2 % exigiría 2.053 renovados por brazo: el riesgo entra por política y se vigila por vintage. Duración: dos meses de asignación + 30 días de ventana + 30 a 60 de maduración; decisión a los 90 días. Jerga (SRM, CSI, Brier, CUPED) en el anexo y la guía. Condiciones completas de no liberación en la guía P16.</a:t>
             </a:r>
             <a:endParaRPr lang="en-US" dirty="0"/>
           </a:p>
@@ -1558,7 +1558,7 @@
           <a:p>
             <a:r>
               <a:rPr lang="en-US" dirty="0"/>
-              <a:t>Pedimos tres decisiones. Ruta de 90 días con la ficha de fuga variable por variable para A y B en las semanas 3 a 4 (fuente, timestamp, disponibilidad al puntuar). Gobierno: sin cuotas, el modelo limpio selecciona 28 % en Oriente frente a 35 % en Centro (AIR ≈ 0,80 puntual, pero con 100 a 200 clientes por regional el intervalo bootstrap es 0,49–0,88: el 0,80 no informa y el 0,67 de la partición sin gap cae dentro; la regla está pensada para el universo mensual de 25.000, donde el intervalo se estrecha unas seis veces); con cuotas, la selección por regional la fija la capacidad, así que la equidad se vigila en conversión y calibración por grupo dentro de cada regional. El 79 % de la lista cae en el tercil alto de buró: ese piso lo fija la política de riesgo, no el algoritmo. SHAP es correlación: en la base, 37 % del tercil bajo de buró quedó sin contactar frente a 22 % del alto.</a:t>
+              <a:t>Pedimos tres decisiones. Ruta de 90 días con la ficha de fuga variable por variable para A y B en las semanas 3 a 4 (fuente, timestamp, disponibilidad al puntuar). Gobierno: sin cuotas, el modelo limpio selecciona 28 % en Oriente frente a 35 % en Centro (AIR ≈ 0,80 puntual, pero con 100 a 200 clientes por regional el intervalo bootstrap es 0,49–0,88: el 0,80 no informa; la regla está pensada para el universo mensual de 25.000, donde el intervalo se estrecha unas seis veces); con cuotas, la selección por regional la fija la capacidad, así que la equidad se vigila en conversión y calibración por grupo dentro de cada regional. El 79 % de la lista cae en el tercil alto de buró: ese piso lo fija la política de riesgo, no el algoritmo. SHAP es correlación: en la base, 37 % del tercil bajo de buró quedó sin contactar frente a 22 % del alto.</a:t>
             </a:r>
             <a:endParaRPr lang="en-US" dirty="0"/>
           </a:p>

--- a/entregables/BancoW_Priorizacion_Renovaciones_DavinsonArteaga.pptx
+++ b/entregables/BancoW_Priorizacion_Renovaciones_DavinsonArteaga.pptx
@@ -113,37 +113,37 @@
   <p:extLst>
     <p:ext uri="{521415D9-36F7-43E2-AB2F-B90AF26B5E84}">
       <p14:sectionLst xmlns:p14="http://schemas.microsoft.com/office/powerpoint/2010/main">
-        <p14:section name="Decisión" id="{e9f31a0d-397b-8867-dfbe-56bb269d0875}">
+        <p14:section name="Decisión" id="{b340e7e8-a6d6-60b1-bf6b-1efaa20b1dae}">
           <p14:sldIdLst>
             <p14:sldId id="256"/>
           </p14:sldIdLst>
         </p14:section>
-        <p14:section name="Datos" id="{68687150-3602-484a-0941-9f6517c1d253}">
+        <p14:section name="Datos" id="{14736fbf-d3ae-cb9a-e127-2f681939fc0d}">
           <p14:sldIdLst>
             <p14:sldId id="257"/>
           </p14:sldIdLst>
         </p14:section>
-        <p14:section name="Alternativas" id="{20f0819c-1626-47d9-7c0e-a65cd6979644}">
+        <p14:section name="Alternativas" id="{e70fd718-6072-6f61-1319-fb3ceb35c3ec}">
           <p14:sldIdLst>
             <p14:sldId id="258"/>
           </p14:sldIdLst>
         </p14:section>
-        <p14:section name="Valor" id="{4fc722d8-d9e8-5379-6e30-5e0ef208b379}">
+        <p14:section name="Valor" id="{126b1a22-929d-8553-fc6a-996e819c1cd9}">
           <p14:sldIdLst>
             <p14:sldId id="259"/>
           </p14:sldIdLst>
         </p14:section>
-        <p14:section name="Piloto" id="{483e50f1-10ec-6603-5819-a22227e44ee4}">
+        <p14:section name="Piloto" id="{0146a202-a17d-2a23-9252-6cf1673bb115}">
           <p14:sldIdLst>
             <p14:sldId id="260"/>
           </p14:sldIdLst>
         </p14:section>
-        <p14:section name="Recomendación" id="{30e5bb2a-9f5e-84bc-2889-b7d8df712cf3}">
+        <p14:section name="Recomendación" id="{26403855-f7bb-1dcf-e875-1f6f417c68c7}">
           <p14:sldIdLst>
             <p14:sldId id="261"/>
           </p14:sldIdLst>
         </p14:section>
-        <p14:section name="Anexo" id="{5675a295-83ce-ec0e-428e-910a547753e9}">
+        <p14:section name="Anexo" id="{002793cf-48b5-e63c-3530-0cebefaf6857}">
           <p14:sldIdLst>
             <p14:sldId id="262"/>
           </p14:sldIdLst>
@@ -254,7 +254,7 @@
                 <c:ptCount val="3"/>
                 <c:lvl>
                   <c:pt idx="0">
-                    <c:v>15 variables ex ante</c:v>
+                    <c:v>15 variables disponibles al corte</c:v>
                   </c:pt>
                   <c:pt idx="1">
                     <c:v>+ resultado_gestion_30d</c:v>
@@ -1118,7 +1118,7 @@
           <a:p>
             <a:r>
               <a:rPr lang="en-US" dirty="0"/>
-              <a:t>Mensaje: la restricción es la capacidad, así que el problema es decidir a quién contactar, no predecir. KPI incremental neto de riesgo; el proxy mensual (incrementales por 1.000 contactos) sirve mientras madura la mora. 12 % sin denominador no es una meta: 960 si es sobre 8.000, 3.000 si es sobre 25.000 (37,5 % por contacto). Guardrail de riesgo: la mora esperada de la lista (score y política de Riesgos) se verifica antes de ejecutar; el vintage de mora 30+ a 60 días por cohorte confirma (alarma y pausa). La pregunta única define si el histórico permite medir causalidad o solo describe la política vigente.</a:t>
+              <a:t>Mensaje: la restricción es la capacidad, así que el problema es decidir a quién contactar, no predecir. KPI incremental neto de riesgo; el proxy mensual (incrementales por 1.000 contactos) sirve mientras madura la mora. 12 % sin denominador no es una meta: 960 si es sobre 8.000, 3.000 si es sobre 25.000 (37,5 % por contacto). Punto de equilibrio: una renovación deja de aportar si la mora supera 23,3 % (420.000 / 1.800.000). Guardrail de riesgo: la mora esperada de la lista (score y política de Riesgos) se verifica antes de ejecutar; el vintage de mora 30+ a 60 días por cohorte confirma (alarma y pausa). La pregunta única define si el histórico permite medir causalidad o solo describe la política vigente.</a:t>
             </a:r>
             <a:endParaRPr lang="en-US" dirty="0"/>
           </a:p>
@@ -1206,7 +1206,7 @@
           <a:p>
             <a:r>
               <a:rPr lang="en-US" dirty="0"/>
-              <a:t>Detalle de cada hallazgo en la guía P5 y P6. Fuga: 78 % de «Acepta» renueva; dias_hasta_renovacion es nulo exactamente en los 1.436 no renovados. Calidad: max_mora_6m = −4, ahorro −350.000, contacto fechado 2026-09-15 con corte agosto; score de buró 352–912 está dentro de la escala DataCrédito 150–950 (confirmar central, versión y vigencia). contactabilidad_score no predice el contacto (entre 29 % y 32 % de no contactados en los cuatro cuartiles). cuotas_pagadas_pct, monto_preaprobado y dias_ultimo_contacto quedan fuera del set limpio hasta certificar su timestamp (51 contactos fechados dentro del mes de corte y 1 después): no cuesta señal (AUC univariado 0,50–0,53); en producción se recalcula a la fecha de corte. Accuracy trivial: 79,8 % en la base, 96,4 % en producción sin acertar un renovador.</a:t>
+              <a:t>Detalle de cada hallazgo en la guía P5 y P6. Fuga: 78 % de «Acepta» renueva; dias_hasta_renovacion es nulo exactamente en los 1.436 no renovados. Calidad: max_mora_6m = −4, ahorro −350.000, contacto fechado 2026-09-15 con corte agosto; score de buró 352–912 está dentro de la escala DataCrédito 150–950 (confirmar central, versión y vigencia). contactabilidad_score no predice el contacto (entre 29 % y 32 % de no contactados en los cuatro cuartiles). cuotas_pagadas_pct, monto_preaprobado y dias_ultimo_contacto quedan fuera del set limpio hasta certificar su timestamp (51 contactos fechados dentro del mes de corte y 1 después): no cuesta señal (AUC univariado 0,50–0,53); en producción se recalcula a la fecha de corte. Partición rolling-origin con un corte de gap (entrenar ≤ t−2, probar en t, mayo a agosto); deduplicar por cliente. Accuracy trivial: 79,8 % en la base, 96,4 % en producción sin acertar un renovador.</a:t>
             </a:r>
             <a:endParaRPr lang="en-US" dirty="0"/>
           </a:p>
@@ -1294,7 +1294,7 @@
           <a:p>
             <a:r>
               <a:rPr lang="en-US" dirty="0"/>
-              <a:t>Repliqué con la base: el AUC de C (0,94) solo se obtiene incluyendo el resultado de gestión; con dias_hasta_renovacion llega a 1,00. A: 0,86 supera lo que esta base permite replicar (0,82), pero la hoja viene de otra población, así que no es concluyente; su mora 7,2 % es la peor y, de ser real, lo convierte en la alternativa de menor valor; ambas cosas exigen auditoría variable por variable. B: coherente con la réplica, calibrado (pendiente 0,91), estable; pasa a piloto tras la misma ficha de fuga. D: la hoja reporta «+3,1 pp incremental» en la columna de mora y Qini en la de PR-AUC; no es comparable con A, B y C sin aclarar unidades. Las conversiones «top 8k» de la hoja y la conversión top 32 % de la réplica (≈ 45 %) no son comparables: otra población y otra regla de contacto.</a:t>
+              <a:t>Repliqué con la base: el AUC de C (0,94) solo se obtiene incluyendo el resultado de gestión; con dias_hasta_renovacion llega a 1,00. A: 0,86 supera lo que esta base permite replicar (0,82), pero la hoja viene de otra población, así que no es concluyente; su mora 7,2 % es la peor y, de ser real, lo convierte en la alternativa de menor valor; ambas cosas exigen auditoría variable por variable. B: coherente con la réplica, calibrado (pendiente 0,91), estable; pasa a piloto tras la misma ficha de fuga. D: la hoja reporta «+3,1 pp incremental» en la columna de mora y Qini en la de PR-AUC; no es comparable con A, B y C sin aclarar unidades. Las conversiones «top 8k» de la hoja y la conversión top 32 % de la réplica (≈ 45 %) no son comparables: otra población y otra regla de contacto. Para comparar propensión vs. uplift: la regla de asignación de la campaña de D (fracción aleatorizada, unidad, cumplimiento) y un mismo holdout donde medir uplift@8k de cada modelo en COP netos de mora, con intervalos.</a:t>
             </a:r>
             <a:endParaRPr lang="en-US" dirty="0"/>
           </a:p>
@@ -1382,7 +1382,7 @@
           <a:p>
             <a:r>
               <a:rPr lang="en-US" dirty="0"/>
-              <a:t>B gana por riesgo, no por conversión: cada renovación de B vale 337.200 frente a 290.400 de A. Incertidumbre (supuesto 8.000 contactos por alternativa, 752 y 704 renovados): conversión z = 1,32 (p 0,19), mora z = 2,11 (p 0,03); en valor B es al menos equivalente dentro de la incertidumbre. El valor no es incremental: el orgánico del tercil alto de buró (de donde sale el top de B) es ≈ 5 % (7 de 129 no contactados renovaron solos; IC 2,7–10,8 %), así que ≈ 57 % de las renovaciones de B serían orgánicas y el valor incremental ≈ 103 M (129 M con orgánico 4 %, 76 M con 6 %). Por eso el piloto. Capacidad: un ranking global sobrecarga Centro, Norte y Eje y deja ≈ 400 cupos ociosos en Suroccidente y Oriente; cuotas por regional con transferencia por valor marginal (tope a pactar con Comercial). La conversión en muestra con y sin cuotas es equivalente (41,9 % vs. 43,5 %, cuatro renovaciones de diferencia, dentro del ruido). Sensibilidad a la pérdida por mora de 1,0 / 1,8 / 2,5 / 3,5 M: B 263 / 237 / 215 / 182 vs. A 262 / 218 / 181 / 126.</a:t>
+              <a:t>B gana por riesgo, no por conversión: cada renovación de B vale 337.200 frente a 290.400 de A. Incertidumbre (supuesto 8.000 contactos por alternativa, 752 y 704 renovados): conversión z = 1,32 (p 0,19), mora z = 2,11 (p 0,03); en valor B es al menos equivalente dentro de la incertidumbre. El valor no es incremental: el orgánico del tercil alto de buró (de donde sale el top de B) es ≈ 5 % (7 de 129 no contactados renovaron solos; IC 2,7–10,8 %), así que ≈ 57 % de las renovaciones de B serían orgánicas y el valor incremental ≈ 103 M (129 M con orgánico 4 %, 76 M con 6 %). Por eso el piloto. Faltan el costo de contacto, la LGD real y el origen del «top 8k». Capacidad: un ranking global sobrecarga Centro, Norte y Eje y deja ≈ 400 cupos ociosos en Suroccidente y Oriente; cuotas por regional con transferencia por valor marginal (tope a pactar con Comercial, 10 % como referencia). La conversión en muestra con y sin cuotas es equivalente (41,9 % vs. 43,5 %, cuatro renovaciones de diferencia, dentro del ruido). Sensibilidad a la pérdida por mora de 1,0 / 1,8 / 2,5 / 3,5 M: B 263 / 237 / 215 / 182 vs. A 262 / 218 / 181 / 126.</a:t>
             </a:r>
             <a:endParaRPr lang="en-US" dirty="0"/>
           </a:p>
@@ -1470,7 +1470,7 @@
           <a:p>
             <a:r>
               <a:rPr lang="en-US" dirty="0"/>
-              <a:t>Mecánica: el universo elegible del mes (filtrado por el mismo piso de riesgo: corte de buró y max_mora pactados con Riesgos) se parte al azar en dos pools por cliente, estratificando por regional y tercil de score. El champion elige sus 4.000 en su pool; el challenger rankea el suyo, toma su top 4.800, retiene 800 al azar como holdout sin contacto y contacta 4.000. Capacidad intacta: 8.000. Dos reglas separadas: calidad de lista (challenger vs. champion) y efecto del contacto (challenger contactado vs. holdout). Baseline del holdout: no el 2,3 % global, sino el orgánico del tercil alto de buró (≈ 5 %, 7 de 129, IC 2,7–10,8 %), porque el holdout sale del top de B. Potencia (800 vs. 4.000, baseline 5 %): conservador +1,7 pp exige 1.856 en holdout, 2,3 meses, 4,6 M/mes de costo; plausible +3,8 pp (el uplift implícito si B convierte 8,8 % sobre un orgánico de 5 %) exige 444, 0,6 meses, 10,3 M/mes. Dos meses detectan el escenario plausible con margen; el conservador necesita un tercer mes. El costo es cerca del 4 % del VE de B (10,3 de 237 M). Limitación: sin holdout en el champion no comparamos la incrementalidad de las dos políticas; la opción de 400 de holdout en el champion cuesta ≈ 2,3 M/mes y deja ese brazo en 3.600. Probar mora 5,1 % vs. 7,2 % exigiría 2.053 renovados por brazo: el riesgo entra por política y se vigila por vintage. Duración: dos meses de asignación + 30 días de ventana + 30 a 60 de maduración; decisión a los 90 días. Jerga (SRM, CSI, Brier, CUPED) en el anexo y la guía. Condiciones completas de no liberación en la guía P16.</a:t>
+              <a:t>Mecánica: el universo elegible del mes (filtrado por el mismo piso de riesgo: corte de buró y max_mora pactados con Riesgos) se parte al azar en dos pools por cliente, estratificando por regional y tercil de score. El champion elige sus 4.000 en su pool; el challenger rankea el suyo, toma su top 4.800, retiene 800 al azar como holdout sin contacto y contacta 4.000. Capacidad intacta: 8.000. Dos reglas separadas: calidad de lista (challenger vs. champion) y efecto del contacto (challenger contactado vs. holdout). Baseline del holdout: no el 2,3 % global, sino el orgánico del tercil alto de buró (≈ 5 %, 7 de 129, IC 2,7–10,8 %), porque el holdout sale del top de B. Potencia (800 vs. 4.000, baseline 5 %): conservador +1,7 pp exige 1.856 en holdout, 2,3 meses, 4,6 M/mes de costo; plausible +3,8 pp (el uplift implícito si B convierte 8,8 % sobre un orgánico de 5 %) exige 444, 0,6 meses, 10,3 M/mes. Dos meses detectan el escenario plausible con margen; el conservador necesita un tercer mes. El costo es cerca del 4 % del VE de B (10,3 de 237 M). Limitación: sin holdout en el champion no comparamos la incrementalidad de las dos políticas; la opción de 400 de holdout en el champion cuesta ≈ 2,3 M/mes y deja ese brazo en 3.600. Probar mora 5,1 % vs. 7,2 % exigiría 2.053 renovados por brazo: el riesgo entra por política y se vigila por vintage. Reglas de salida pre-registradas: calidad ≥ +1,5 pp con IC 95 % que excluye 0; efecto &gt; 0 con IC 95 % que excluye 0; mora ≤ champion + 1 pp. Duración: dos meses de asignación + 30 días de ventana + 30 a 60 de maduración; decisión a los 90 días. Jerga (SRM, CSI, Brier, CUPED) en el anexo y la guía. Condiciones completas de no liberación en la guía P16.</a:t>
             </a:r>
             <a:endParaRPr lang="en-US" dirty="0"/>
           </a:p>
@@ -1558,7 +1558,7 @@
           <a:p>
             <a:r>
               <a:rPr lang="en-US" dirty="0"/>
-              <a:t>Pedimos tres decisiones. Ruta de 90 días con la ficha de fuga variable por variable para A y B en las semanas 3 a 4 (fuente, timestamp, disponibilidad al puntuar). Gobierno: sin cuotas, el modelo limpio selecciona 28 % en Oriente frente a 35 % en Centro (AIR ≈ 0,80 puntual, pero con 100 a 200 clientes por regional el intervalo bootstrap es 0,49–0,88: el 0,80 no informa; la regla está pensada para el universo mensual de 25.000, donde el intervalo se estrecha unas seis veces); con cuotas, la selección por regional la fija la capacidad, así que la equidad se vigila en conversión y calibración por grupo dentro de cada regional. El 79 % de la lista cae en el tercil alto de buró: ese piso lo fija la política de riesgo, no el algoritmo. SHAP es correlación: en la base, 37 % del tercil bajo de buró quedó sin contactar frente a 22 % del alto.</a:t>
+              <a:t>Pedimos tres decisiones. Ruta de 90 días con la ficha de fuga variable por variable para A y B en las semanas 3 a 4 (fuente, timestamp, disponibilidad al puntuar); pipeline point-in-time. Gobierno: sin cuotas, el modelo limpio selecciona 28 % en Oriente frente a 35 % en Centro (AIR ≈ 0,80 puntual, pero con 100 a 200 clientes por regional el intervalo bootstrap es 0,49–0,88: el 0,80 no informa; la regla está pensada para el universo mensual de 25.000, donde el intervalo se estrecha unas seis veces); con cuotas, la selección por regional la fija la capacidad, así que la equidad se vigila en conversión y calibración por grupo dentro de cada regional. El 79 % de la lista cae en el tercil alto de buró: ese piso lo fija la política de riesgo, no el algoritmo. Auditable: model card, datasheet, ficha de fuga, plan de monitoreo, RACI. SHAP es correlación: en la base, 37 % del tercil bajo de buró quedó sin contactar frente a 22 % del alto; solo el holdout prueba causalidad.</a:t>
             </a:r>
             <a:endParaRPr lang="en-US" dirty="0"/>
           </a:p>
@@ -1772,7 +1772,7 @@
                   <a:srgbClr val="4A6A72"/>
                 </a:solidFill>
               </a:rPr>
-              <a:t>Banco W · Prueba técnica Científico de Datos · Davinson Arteaga · Data Scientist · AI Engineer</a:t>
+              <a:t>Preparado para Banco W · Prueba técnica Científico de Datos · Davinson Arteaga</a:t>
             </a:r>
             <a:endParaRPr lang="en-US" sz="900" dirty="0"/>
           </a:p>
@@ -1789,7 +1789,7 @@
         <p:spPr>
           <a:xfrm>
             <a:off x="457200" y="320040"/>
-            <a:ext cx="11274552" cy="868680"/>
+            <a:ext cx="11274552" cy="502920"/>
           </a:xfrm>
           <a:prstGeom prst="rect">
             <a:avLst/>
@@ -1870,77 +1870,6 @@
 </p:sldLayout>
 </file>
 
-<file path=ppt/slideLayouts/slideLayout3.xml><?xml version="1.0" encoding="utf-8"?>
-<p:sldLayout xmlns:a="http://schemas.openxmlformats.org/drawingml/2006/main" xmlns:r="http://schemas.openxmlformats.org/officeDocument/2006/relationships" xmlns:p="http://schemas.openxmlformats.org/presentationml/2006/main" preserve="1">
-  <p:cSld name="COVER">
-    <p:bg>
-      <p:bgPr>
-        <a:solidFill>
-          <a:srgbClr val="0E2024"/>
-        </a:solidFill>
-      </p:bgPr>
-    </p:bg>
-    <p:spTree>
-      <p:nvGrpSpPr>
-        <p:cNvPr id="1" name=""/>
-        <p:cNvGrpSpPr/>
-        <p:nvPr/>
-      </p:nvGrpSpPr>
-      <p:grpSpPr>
-        <a:xfrm>
-          <a:off x="0" y="0"/>
-          <a:ext cx="0" cy="0"/>
-          <a:chOff x="0" y="0"/>
-          <a:chExt cx="0" cy="0"/>
-        </a:xfrm>
-      </p:grpSpPr>
-      <p:sp>
-        <p:nvSpPr>
-          <p:cNvPr id="2" name="Text 0"/>
-          <p:cNvSpPr/>
-          <p:nvPr>
-            <p:ph idx="100" type="title" hasCustomPrompt="1"/>
-          </p:nvPr>
-        </p:nvSpPr>
-        <p:spPr>
-          <a:xfrm>
-            <a:off x="731520" y="2011680"/>
-            <a:ext cx="10515600" cy="1463040"/>
-          </a:xfrm>
-          <a:prstGeom prst="rect">
-            <a:avLst/>
-          </a:prstGeom>
-          <a:noFill/>
-          <a:ln/>
-        </p:spPr>
-        <p:txBody>
-          <a:bodyPr wrap="square" rtlCol="0"/>
-          <a:lstStyle>
-            <a:lvl1pPr indent="0" marL="0">
-              <a:buNone/>
-              <a:defRPr lang="en-US" sz="4000" b="1" dirty="0">
-                <a:solidFill>
-                  <a:srgbClr val="E6F2F1"/>
-                </a:solidFill>
-              </a:defRPr>
-            </a:lvl1pPr>
-          </a:lstStyle>
-          <a:p>
-            <a:pPr indent="0" marL="0">
-              <a:buNone/>
-            </a:pPr>
-            <a:endParaRPr lang="en-US" sz="4000" dirty="0"/>
-          </a:p>
-        </p:txBody>
-      </p:sp>
-    </p:spTree>
-  </p:cSld>
-  <p:clrMapOvr>
-    <a:masterClrMapping/>
-  </p:clrMapOvr>
-</p:sldLayout>
-</file>
-
 <file path=ppt/slideMasters/slideMaster1.xml><?xml version="1.0" encoding="utf-8"?>
 <p:sldMaster xmlns:a="http://schemas.openxmlformats.org/drawingml/2006/main" xmlns:r="http://schemas.openxmlformats.org/officeDocument/2006/relationships" xmlns:p="http://schemas.openxmlformats.org/presentationml/2006/main">
   <p:cSld>
@@ -2009,7 +1938,6 @@
   <p:sldLayoutIdLst>
     <p:sldLayoutId id="2147483649" r:id="rId1"/>
     <p:sldLayoutId id="2147483650" r:id="rId2"/>
-    <p:sldLayoutId id="2147483651" r:id="rId3"/>
   </p:sldLayoutIdLst>
   <p:hf sldNum="0" hdr="0" ftr="0" dt="0"/>
   <p:txStyles>
@@ -2293,7 +2221,7 @@
         <p:spPr>
           <a:xfrm>
             <a:off x="457200" y="320040"/>
-            <a:ext cx="11274552" cy="868680"/>
+            <a:ext cx="11274552" cy="502920"/>
           </a:xfrm>
           <a:prstGeom prst="rect">
             <a:avLst/>
@@ -2314,7 +2242,7 @@
                   <a:srgbClr val="043F52"/>
                 </a:solidFill>
               </a:rPr>
-              <a:t>1 · Decidir a quién contactar con 8.000 cupos al mes, no solo predecir quién renueva</a:t>
+              <a:t>1 · Decidir a quién contactar con 8.000 cupos al mes</a:t>
             </a:r>
             <a:endParaRPr lang="en-US" sz="2400" dirty="0"/>
           </a:p>
@@ -2322,18 +2250,85 @@
       </p:sp>
       <p:sp>
         <p:nvSpPr>
-          <p:cNvPr id="3" name="CAPACIDAD"/>
+          <p:cNvPr id="3" name="Respuesta"/>
           <p:cNvSpPr/>
           <p:nvPr/>
         </p:nvSpPr>
         <p:spPr>
           <a:xfrm>
-            <a:off x="457200" y="1325880"/>
-            <a:ext cx="3611880" cy="1691640"/>
+            <a:off x="457200" y="868680"/>
+            <a:ext cx="54864" cy="658368"/>
+          </a:xfrm>
+          <a:prstGeom prst="rect">
+            <a:avLst/>
+          </a:prstGeom>
+          <a:solidFill>
+            <a:srgbClr val="009786"/>
+          </a:solidFill>
+          <a:ln w="12700">
+            <a:solidFill>
+              <a:srgbClr val="009786"/>
+            </a:solidFill>
+            <a:prstDash val="solid"/>
+          </a:ln>
+        </p:spPr>
+      </p:sp>
+      <p:sp>
+        <p:nvSpPr>
+          <p:cNvPr id="4" name="Text 2"/>
+          <p:cNvSpPr txBox="1"/>
+          <p:nvPr/>
+        </p:nvSpPr>
+        <p:spPr>
+          <a:xfrm>
+            <a:off x="640080" y="868680"/>
+            <a:ext cx="11091672" cy="658368"/>
+          </a:xfrm>
+          <a:prstGeom prst="rect">
+            <a:avLst/>
+          </a:prstGeom>
+          <a:noFill/>
+          <a:ln/>
+        </p:spPr>
+        <p:txBody>
+          <a:bodyPr wrap="square" lIns="0" tIns="0" rIns="0" bIns="0" rtlCol="0" anchor="ctr"/>
+          <a:lstStyle/>
+          <a:p>
+            <a:pPr indent="0" marL="0">
+              <a:lnSpc>
+                <a:spcPct val="110000"/>
+              </a:lnSpc>
+              <a:buNone/>
+            </a:pPr>
+            <a:r>
+              <a:rPr lang="en-US" sz="1250" dirty="0">
+                <a:solidFill>
+                  <a:srgbClr val="043F52"/>
+                </a:solidFill>
+                <a:latin typeface="Calibri" pitchFamily="34" charset="0"/>
+                <a:ea typeface="Calibri" pitchFamily="34" charset="-122"/>
+                <a:cs typeface="Calibri" pitchFamily="34" charset="-120"/>
+              </a:rPr>
+              <a:t>Debemos decidir a cuáles 8.000 de los 25.000 clientes elegibles contactamos cada mes, y elegirlos por valor neto de riesgo, no por probabilidad de renovar. Importa porque una renovación que cae en mora 30+ borra lo que aportan 4,3 renovaciones sanas.</a:t>
+            </a:r>
+            <a:endParaRPr lang="en-US" sz="1250" dirty="0"/>
+          </a:p>
+        </p:txBody>
+      </p:sp>
+      <p:sp>
+        <p:nvSpPr>
+          <p:cNvPr id="5" name="CAPACIDAD"/>
+          <p:cNvSpPr/>
+          <p:nvPr/>
+        </p:nvSpPr>
+        <p:spPr>
+          <a:xfrm>
+            <a:off x="457200" y="1645920"/>
+            <a:ext cx="3611880" cy="1371600"/>
           </a:xfrm>
           <a:prstGeom prst="roundRect">
             <a:avLst>
-              <a:gd name="adj" fmla="val 6486"/>
+              <a:gd name="adj" fmla="val 8000"/>
             </a:avLst>
           </a:prstGeom>
           <a:solidFill>
@@ -2349,13 +2344,13 @@
       </p:sp>
       <p:sp>
         <p:nvSpPr>
-          <p:cNvPr id="4" name="Text 2"/>
+          <p:cNvPr id="6" name="Text 4"/>
           <p:cNvSpPr txBox="1"/>
           <p:nvPr/>
         </p:nvSpPr>
         <p:spPr>
           <a:xfrm>
-            <a:off x="621792" y="1453896"/>
+            <a:off x="621792" y="1755648"/>
             <a:ext cx="3282696" cy="274320"/>
           </a:xfrm>
           <a:prstGeom prst="rect">
@@ -2388,14 +2383,14 @@
       </p:sp>
       <p:sp>
         <p:nvSpPr>
-          <p:cNvPr id="5" name="Text 3"/>
+          <p:cNvPr id="7" name="Text 5"/>
           <p:cNvSpPr txBox="1"/>
           <p:nvPr/>
         </p:nvSpPr>
         <p:spPr>
           <a:xfrm>
-            <a:off x="621792" y="1709928"/>
-            <a:ext cx="3282696" cy="548640"/>
+            <a:off x="621792" y="1993392"/>
+            <a:ext cx="3282696" cy="457200"/>
           </a:xfrm>
           <a:prstGeom prst="rect">
             <a:avLst/>
@@ -2411,7 +2406,7 @@
               <a:buNone/>
             </a:pPr>
             <a:r>
-              <a:rPr lang="en-US" sz="2600" b="1" dirty="0">
+              <a:rPr lang="en-US" sz="2400" b="1" dirty="0">
                 <a:solidFill>
                   <a:srgbClr val="043F52"/>
                 </a:solidFill>
@@ -2421,20 +2416,20 @@
               </a:rPr>
               <a:t>8.000 de 25.000</a:t>
             </a:r>
-            <a:endParaRPr lang="en-US" sz="2600" dirty="0"/>
+            <a:endParaRPr lang="en-US" sz="2400" dirty="0"/>
           </a:p>
         </p:txBody>
       </p:sp>
       <p:sp>
         <p:nvSpPr>
-          <p:cNvPr id="6" name="Text 4"/>
+          <p:cNvPr id="8" name="Text 6"/>
           <p:cNvSpPr txBox="1"/>
           <p:nvPr/>
         </p:nvSpPr>
         <p:spPr>
           <a:xfrm>
-            <a:off x="621792" y="2286000"/>
-            <a:ext cx="3282696" cy="640080"/>
+            <a:off x="621792" y="2487168"/>
+            <a:ext cx="3282696" cy="457200"/>
           </a:xfrm>
           <a:prstGeom prst="rect">
             <a:avLst/>
@@ -2466,18 +2461,18 @@
       </p:sp>
       <p:sp>
         <p:nvSpPr>
-          <p:cNvPr id="7" name="HOY Y META"/>
+          <p:cNvPr id="9" name="HOY Y META"/>
           <p:cNvSpPr/>
           <p:nvPr/>
         </p:nvSpPr>
         <p:spPr>
           <a:xfrm>
-            <a:off x="4288536" y="1325880"/>
-            <a:ext cx="3611880" cy="1691640"/>
+            <a:off x="4288536" y="1645920"/>
+            <a:ext cx="3611880" cy="1371600"/>
           </a:xfrm>
           <a:prstGeom prst="roundRect">
             <a:avLst>
-              <a:gd name="adj" fmla="val 6486"/>
+              <a:gd name="adj" fmla="val 8000"/>
             </a:avLst>
           </a:prstGeom>
           <a:solidFill>
@@ -2493,13 +2488,13 @@
       </p:sp>
       <p:sp>
         <p:nvSpPr>
-          <p:cNvPr id="8" name="Text 6"/>
+          <p:cNvPr id="10" name="Text 8"/>
           <p:cNvSpPr txBox="1"/>
           <p:nvPr/>
         </p:nvSpPr>
         <p:spPr>
           <a:xfrm>
-            <a:off x="4453128" y="1453896"/>
+            <a:off x="4453128" y="1755648"/>
             <a:ext cx="3282696" cy="274320"/>
           </a:xfrm>
           <a:prstGeom prst="rect">
@@ -2532,14 +2527,14 @@
       </p:sp>
       <p:sp>
         <p:nvSpPr>
-          <p:cNvPr id="9" name="Text 7"/>
+          <p:cNvPr id="11" name="Text 9"/>
           <p:cNvSpPr txBox="1"/>
           <p:nvPr/>
         </p:nvSpPr>
         <p:spPr>
           <a:xfrm>
-            <a:off x="4453128" y="1709928"/>
-            <a:ext cx="3282696" cy="548640"/>
+            <a:off x="4453128" y="1993392"/>
+            <a:ext cx="3282696" cy="457200"/>
           </a:xfrm>
           <a:prstGeom prst="rect">
             <a:avLst/>
@@ -2555,7 +2550,7 @@
               <a:buNone/>
             </a:pPr>
             <a:r>
-              <a:rPr lang="en-US" sz="2600" b="1" dirty="0">
+              <a:rPr lang="en-US" sz="2400" b="1" dirty="0">
                 <a:solidFill>
                   <a:srgbClr val="043F52"/>
                 </a:solidFill>
@@ -2565,20 +2560,20 @@
               </a:rPr>
               <a:t>3,6 % = 288</a:t>
             </a:r>
-            <a:endParaRPr lang="en-US" sz="2600" dirty="0"/>
+            <a:endParaRPr lang="en-US" sz="2400" dirty="0"/>
           </a:p>
         </p:txBody>
       </p:sp>
       <p:sp>
         <p:nvSpPr>
-          <p:cNvPr id="10" name="Text 8"/>
+          <p:cNvPr id="12" name="Text 10"/>
           <p:cNvSpPr txBox="1"/>
           <p:nvPr/>
         </p:nvSpPr>
         <p:spPr>
           <a:xfrm>
-            <a:off x="4453128" y="2286000"/>
-            <a:ext cx="3282696" cy="640080"/>
+            <a:off x="4453128" y="2487168"/>
+            <a:ext cx="3282696" cy="457200"/>
           </a:xfrm>
           <a:prstGeom prst="rect">
             <a:avLst/>
@@ -2602,7 +2597,7 @@
                 <a:ea typeface="Calibri" pitchFamily="34" charset="-122"/>
                 <a:cs typeface="Calibri" pitchFamily="34" charset="-120"/>
               </a:rPr>
-              <a:t>Meta 12 %: 960 o 3.000 según denominador.</a:t>
+              <a:t>Meta 12 %: 960 renovaciones si es sobre contactados, 3.000 si es sobre elegibles.</a:t>
             </a:r>
             <a:endParaRPr lang="en-US" sz="1100" dirty="0"/>
           </a:p>
@@ -2610,18 +2605,18 @@
       </p:sp>
       <p:sp>
         <p:nvSpPr>
-          <p:cNvPr id="11" name="RIESGO"/>
+          <p:cNvPr id="13" name="RIESGO"/>
           <p:cNvSpPr/>
           <p:nvPr/>
         </p:nvSpPr>
         <p:spPr>
           <a:xfrm>
-            <a:off x="8119872" y="1325880"/>
-            <a:ext cx="3611880" cy="1691640"/>
+            <a:off x="8119872" y="1645920"/>
+            <a:ext cx="3611880" cy="1371600"/>
           </a:xfrm>
           <a:prstGeom prst="roundRect">
             <a:avLst>
-              <a:gd name="adj" fmla="val 6486"/>
+              <a:gd name="adj" fmla="val 8000"/>
             </a:avLst>
           </a:prstGeom>
           <a:solidFill>
@@ -2637,13 +2632,13 @@
       </p:sp>
       <p:sp>
         <p:nvSpPr>
-          <p:cNvPr id="12" name="Text 10"/>
+          <p:cNvPr id="14" name="Text 12"/>
           <p:cNvSpPr txBox="1"/>
           <p:nvPr/>
         </p:nvSpPr>
         <p:spPr>
           <a:xfrm>
-            <a:off x="8284464" y="1453896"/>
+            <a:off x="8284464" y="1755648"/>
             <a:ext cx="3282696" cy="274320"/>
           </a:xfrm>
           <a:prstGeom prst="rect">
@@ -2676,14 +2671,14 @@
       </p:sp>
       <p:sp>
         <p:nvSpPr>
-          <p:cNvPr id="13" name="Text 11"/>
+          <p:cNvPr id="15" name="Text 13"/>
           <p:cNvSpPr txBox="1"/>
           <p:nvPr/>
         </p:nvSpPr>
         <p:spPr>
           <a:xfrm>
-            <a:off x="8284464" y="1709928"/>
-            <a:ext cx="3282696" cy="548640"/>
+            <a:off x="8284464" y="1993392"/>
+            <a:ext cx="3282696" cy="457200"/>
           </a:xfrm>
           <a:prstGeom prst="rect">
             <a:avLst/>
@@ -2699,7 +2694,7 @@
               <a:buNone/>
             </a:pPr>
             <a:r>
-              <a:rPr lang="en-US" sz="2600" b="1" dirty="0">
+              <a:rPr lang="en-US" sz="2400" b="1" dirty="0">
                 <a:solidFill>
                   <a:srgbClr val="043F52"/>
                 </a:solidFill>
@@ -2709,20 +2704,20 @@
               </a:rPr>
               <a:t>1 mora = 4,3 sanas</a:t>
             </a:r>
-            <a:endParaRPr lang="en-US" sz="2600" dirty="0"/>
+            <a:endParaRPr lang="en-US" sz="2400" dirty="0"/>
           </a:p>
         </p:txBody>
       </p:sp>
       <p:sp>
         <p:nvSpPr>
-          <p:cNvPr id="14" name="Text 12"/>
+          <p:cNvPr id="16" name="Text 14"/>
           <p:cNvSpPr txBox="1"/>
           <p:nvPr/>
         </p:nvSpPr>
         <p:spPr>
           <a:xfrm>
-            <a:off x="8284464" y="2286000"/>
-            <a:ext cx="3282696" cy="640080"/>
+            <a:off x="8284464" y="2487168"/>
+            <a:ext cx="3282696" cy="457200"/>
           </a:xfrm>
           <a:prstGeom prst="rect">
             <a:avLst/>
@@ -2746,7 +2741,7 @@
                 <a:ea typeface="Calibri" pitchFamily="34" charset="-122"/>
                 <a:cs typeface="Calibri" pitchFamily="34" charset="-120"/>
               </a:rPr>
-              <a:t>Cada mora 30+ borra 4,3 sanas; equilibrio 23,3 %.</a:t>
+              <a:t>Una mora 30+ cuesta lo que aportan 4,3 renovaciones sanas.</a:t>
             </a:r>
             <a:endParaRPr lang="en-US" sz="1100" dirty="0"/>
           </a:p>
@@ -2754,14 +2749,14 @@
       </p:sp>
       <p:sp>
         <p:nvSpPr>
-          <p:cNvPr id="15" name="Text 13"/>
+          <p:cNvPr id="17" name="Text 15"/>
           <p:cNvSpPr txBox="1"/>
           <p:nvPr/>
         </p:nvSpPr>
         <p:spPr>
           <a:xfrm>
-            <a:off x="457200" y="3520440"/>
-            <a:ext cx="6035040" cy="2834640"/>
+            <a:off x="457200" y="3200400"/>
+            <a:ext cx="6035040" cy="3108960"/>
           </a:xfrm>
           <a:prstGeom prst="rect">
             <a:avLst/>
@@ -2775,13 +2770,13 @@
           <a:p>
             <a:pPr marL="177800" indent="-177800">
               <a:spcAft>
-                <a:spcPts val="3000"/>
+                <a:spcPts val="1400"/>
               </a:spcAft>
               <a:buSzPct val="100000"/>
               <a:buChar char="•"/>
             </a:pPr>
             <a:r>
-              <a:rPr lang="en-US" sz="1400" b="1" dirty="0">
+              <a:rPr lang="en-US" sz="1200" dirty="0">
                 <a:solidFill>
                   <a:srgbClr val="043F52"/>
                 </a:solidFill>
@@ -2789,16 +2784,20 @@
                 <a:ea typeface="Calibri" pitchFamily="34" charset="-122"/>
                 <a:cs typeface="Calibri" pitchFamily="34" charset="-120"/>
               </a:rPr>
-              <a:t>Decidir a quién contactar: </a:t>
+              <a:t>Hoy podemos ordenar por propensión, filtrar riesgo con la política de Riesgos y valorar cada renovación; medir el efecto real del contacto exige un grupo de control que aún no existe.</a:t>
             </a:r>
-            <a:pPr indent="0" marL="0">
+            <a:endParaRPr lang="en-US" sz="1200" dirty="0"/>
+          </a:p>
+          <a:p>
+            <a:pPr marL="177800" indent="-177800">
               <a:spcAft>
-                <a:spcPts val="3000"/>
+                <a:spcPts val="1400"/>
               </a:spcAft>
-              <a:buNone/>
+              <a:buSzPct val="100000"/>
+              <a:buChar char="•"/>
             </a:pPr>
             <a:r>
-              <a:rPr lang="en-US" sz="1400" dirty="0">
+              <a:rPr lang="en-US" sz="1200" dirty="0">
                 <a:solidFill>
                   <a:srgbClr val="043F52"/>
                 </a:solidFill>
@@ -2806,20 +2805,20 @@
                 <a:ea typeface="Calibri" pitchFamily="34" charset="-122"/>
                 <a:cs typeface="Calibri" pitchFamily="34" charset="-120"/>
               </a:rPr>
-              <a:t>los 8.000 de mayor valor incremental neto.</a:t>
+              <a:t>El 12 % no se adopta hasta fijar sobre qué se mide, en qué ventana y si cuenta a quien renueva solo (2,3 % lo hizo).</a:t>
             </a:r>
-            <a:endParaRPr lang="en-US" sz="1400" dirty="0"/>
+            <a:endParaRPr lang="en-US" sz="1200" dirty="0"/>
           </a:p>
           <a:p>
             <a:pPr marL="177800" indent="-177800">
               <a:spcAft>
-                <a:spcPts val="3000"/>
+                <a:spcPts val="1400"/>
               </a:spcAft>
               <a:buSzPct val="100000"/>
               <a:buChar char="•"/>
             </a:pPr>
             <a:r>
-              <a:rPr lang="en-US" sz="1400" b="1" dirty="0">
+              <a:rPr lang="en-US" sz="1200" dirty="0">
                 <a:solidFill>
                   <a:srgbClr val="043F52"/>
                 </a:solidFill>
@@ -2827,119 +2826,26 @@
                 <a:ea typeface="Calibri" pitchFamily="34" charset="-122"/>
                 <a:cs typeface="Calibri" pitchFamily="34" charset="-120"/>
               </a:rPr>
-              <a:t>Combinación: </a:t>
+              <a:t>Una pregunta antes de modelar: ¿cómo se elige hoy a quién contactar? Define si el histórico mide el efecto del contacto o solo la política vigente.</a:t>
             </a:r>
-            <a:pPr indent="0" marL="0">
-              <a:spcAft>
-                <a:spcPts val="3000"/>
-              </a:spcAft>
-              <a:buNone/>
-            </a:pPr>
-            <a:r>
-              <a:rPr lang="en-US" sz="1400" dirty="0">
-                <a:solidFill>
-                  <a:srgbClr val="043F52"/>
-                </a:solidFill>
-                <a:latin typeface="Calibri" pitchFamily="34" charset="0"/>
-                <a:ea typeface="Calibri" pitchFamily="34" charset="-122"/>
-                <a:cs typeface="Calibri" pitchFamily="34" charset="-120"/>
-              </a:rPr>
-              <a:t>propensión calibrada × riesgo × valor; uplift a mediano plazo.</a:t>
-            </a:r>
-            <a:endParaRPr lang="en-US" sz="1400" dirty="0"/>
-          </a:p>
-          <a:p>
-            <a:pPr marL="177800" indent="-177800">
-              <a:spcAft>
-                <a:spcPts val="3000"/>
-              </a:spcAft>
-              <a:buSzPct val="100000"/>
-              <a:buChar char="•"/>
-            </a:pPr>
-            <a:r>
-              <a:rPr lang="en-US" sz="1400" b="1" dirty="0">
-                <a:solidFill>
-                  <a:srgbClr val="043F52"/>
-                </a:solidFill>
-                <a:latin typeface="Calibri" pitchFamily="34" charset="0"/>
-                <a:ea typeface="Calibri" pitchFamily="34" charset="-122"/>
-                <a:cs typeface="Calibri" pitchFamily="34" charset="-120"/>
-              </a:rPr>
-              <a:t>Validar el 12 %: </a:t>
-            </a:r>
-            <a:pPr indent="0" marL="0">
-              <a:spcAft>
-                <a:spcPts val="3000"/>
-              </a:spcAft>
-              <a:buNone/>
-            </a:pPr>
-            <a:r>
-              <a:rPr lang="en-US" sz="1400" dirty="0">
-                <a:solidFill>
-                  <a:srgbClr val="043F52"/>
-                </a:solidFill>
-                <a:latin typeface="Calibri" pitchFamily="34" charset="0"/>
-                <a:ea typeface="Calibri" pitchFamily="34" charset="-122"/>
-                <a:cs typeface="Calibri" pitchFamily="34" charset="-120"/>
-              </a:rPr>
-              <a:t>denominador, ventana, orgánicas (2,3 % renovó solo).</a:t>
-            </a:r>
-            <a:endParaRPr lang="en-US" sz="1400" dirty="0"/>
-          </a:p>
-          <a:p>
-            <a:pPr marL="177800" indent="-177800">
-              <a:spcAft>
-                <a:spcPts val="3000"/>
-              </a:spcAft>
-              <a:buSzPct val="100000"/>
-              <a:buChar char="•"/>
-            </a:pPr>
-            <a:r>
-              <a:rPr lang="en-US" sz="1400" b="1" dirty="0">
-                <a:solidFill>
-                  <a:srgbClr val="043F52"/>
-                </a:solidFill>
-                <a:latin typeface="Calibri" pitchFamily="34" charset="0"/>
-                <a:ea typeface="Calibri" pitchFamily="34" charset="-122"/>
-                <a:cs typeface="Calibri" pitchFamily="34" charset="-120"/>
-              </a:rPr>
-              <a:t>Pregunta única: </a:t>
-            </a:r>
-            <a:pPr indent="0" marL="0">
-              <a:spcAft>
-                <a:spcPts val="3000"/>
-              </a:spcAft>
-              <a:buNone/>
-            </a:pPr>
-            <a:r>
-              <a:rPr lang="en-US" sz="1400" dirty="0">
-                <a:solidFill>
-                  <a:srgbClr val="043F52"/>
-                </a:solidFill>
-                <a:latin typeface="Calibri" pitchFamily="34" charset="0"/>
-                <a:ea typeface="Calibri" pitchFamily="34" charset="-122"/>
-                <a:cs typeface="Calibri" pitchFamily="34" charset="-120"/>
-              </a:rPr>
-              <a:t>¿cómo se eligió a quién contactar y qué pasó con el resto?</a:t>
-            </a:r>
-            <a:endParaRPr lang="en-US" sz="1400" dirty="0"/>
+            <a:endParaRPr lang="en-US" sz="1200" dirty="0"/>
           </a:p>
         </p:txBody>
       </p:sp>
       <p:sp>
         <p:nvSpPr>
-          <p:cNvPr id="16" name="KPI"/>
+          <p:cNvPr id="18" name="KPI"/>
           <p:cNvSpPr/>
           <p:nvPr/>
         </p:nvSpPr>
         <p:spPr>
           <a:xfrm>
-            <a:off x="6766560" y="3429000"/>
-            <a:ext cx="4965192" cy="1097280"/>
+            <a:off x="6766560" y="3200400"/>
+            <a:ext cx="4965192" cy="914400"/>
           </a:xfrm>
           <a:prstGeom prst="roundRect">
             <a:avLst>
-              <a:gd name="adj" fmla="val 8333"/>
+              <a:gd name="adj" fmla="val 10000"/>
             </a:avLst>
           </a:prstGeom>
           <a:solidFill>
@@ -2955,14 +2861,67 @@
       </p:sp>
       <p:sp>
         <p:nvSpPr>
-          <p:cNvPr id="17" name="Text 15"/>
+          <p:cNvPr id="19" name="Text 17"/>
           <p:cNvSpPr txBox="1"/>
           <p:nvPr/>
         </p:nvSpPr>
         <p:spPr>
           <a:xfrm>
-            <a:off x="6903720" y="3474720"/>
-            <a:ext cx="4709160" cy="1005840"/>
+            <a:off x="6903720" y="3246120"/>
+            <a:ext cx="4709160" cy="822960"/>
+          </a:xfrm>
+          <a:prstGeom prst="rect">
+            <a:avLst/>
+          </a:prstGeom>
+          <a:noFill/>
+          <a:ln/>
+        </p:spPr>
+        <p:txBody>
+          <a:bodyPr wrap="square" lIns="0" tIns="0" rIns="0" bIns="0" rtlCol="0" anchor="ctr"/>
+          <a:lstStyle/>
+          <a:p>
+            <a:pPr indent="0" marL="0">
+              <a:buNone/>
+            </a:pPr>
+            <a:r>
+              <a:rPr lang="en-US" sz="1150" b="1" dirty="0">
+                <a:solidFill>
+                  <a:srgbClr val="043F52"/>
+                </a:solidFill>
+                <a:latin typeface="Calibri" pitchFamily="34" charset="0"/>
+                <a:ea typeface="Calibri" pitchFamily="34" charset="-122"/>
+                <a:cs typeface="Calibri" pitchFamily="34" charset="-120"/>
+              </a:rPr>
+              <a:t>KPI: </a:t>
+            </a:r>
+            <a:pPr indent="0" marL="0">
+              <a:buNone/>
+            </a:pPr>
+            <a:r>
+              <a:rPr lang="en-US" sz="1150" dirty="0">
+                <a:solidFill>
+                  <a:srgbClr val="043F52"/>
+                </a:solidFill>
+                <a:latin typeface="Calibri" pitchFamily="34" charset="0"/>
+                <a:ea typeface="Calibri" pitchFamily="34" charset="-122"/>
+                <a:cs typeface="Calibri" pitchFamily="34" charset="-120"/>
+              </a:rPr>
+              <a:t>pesos ganados por contacto, netos de mora y medidos frente a un grupo de control. Mientras no haya control: renovaciones por cada 1.000 contactos.</a:t>
+            </a:r>
+            <a:endParaRPr lang="en-US" sz="1150" dirty="0"/>
+          </a:p>
+        </p:txBody>
+      </p:sp>
+      <p:sp>
+        <p:nvSpPr>
+          <p:cNvPr id="20" name="Text 18"/>
+          <p:cNvSpPr txBox="1"/>
+          <p:nvPr/>
+        </p:nvSpPr>
+        <p:spPr>
+          <a:xfrm>
+            <a:off x="6766560" y="4206240"/>
+            <a:ext cx="4965192" cy="292608"/>
           </a:xfrm>
           <a:prstGeom prst="rect">
             <a:avLst/>
@@ -2986,49 +2945,7 @@
                 <a:ea typeface="Calibri" pitchFamily="34" charset="-122"/>
                 <a:cs typeface="Calibri" pitchFamily="34" charset="-120"/>
               </a:rPr>
-              <a:t>KPI: </a:t>
-            </a:r>
-            <a:pPr indent="0" marL="0">
-              <a:buNone/>
-            </a:pPr>
-            <a:r>
-              <a:rPr lang="en-US" sz="1200" dirty="0">
-                <a:solidFill>
-                  <a:srgbClr val="043F52"/>
-                </a:solidFill>
-                <a:latin typeface="Calibri" pitchFamily="34" charset="0"/>
-                <a:ea typeface="Calibri" pitchFamily="34" charset="-122"/>
-                <a:cs typeface="Calibri" pitchFamily="34" charset="-120"/>
-              </a:rPr>
-              <a:t>valor incremental neto por contacto = incrementales vs. control × (420.000 − mora × 1.800.000). </a:t>
-            </a:r>
-            <a:pPr indent="0" marL="0">
-              <a:buNone/>
-            </a:pPr>
-            <a:r>
-              <a:rPr lang="en-US" sz="1200" b="1" dirty="0">
-                <a:solidFill>
-                  <a:srgbClr val="043F52"/>
-                </a:solidFill>
-                <a:latin typeface="Calibri" pitchFamily="34" charset="0"/>
-                <a:ea typeface="Calibri" pitchFamily="34" charset="-122"/>
-                <a:cs typeface="Calibri" pitchFamily="34" charset="-120"/>
-              </a:rPr>
-              <a:t>Proxy: </a:t>
-            </a:r>
-            <a:pPr indent="0" marL="0">
-              <a:buNone/>
-            </a:pPr>
-            <a:r>
-              <a:rPr lang="en-US" sz="1200" dirty="0">
-                <a:solidFill>
-                  <a:srgbClr val="043F52"/>
-                </a:solidFill>
-                <a:latin typeface="Calibri" pitchFamily="34" charset="0"/>
-                <a:ea typeface="Calibri" pitchFamily="34" charset="-122"/>
-                <a:cs typeface="Calibri" pitchFamily="34" charset="-120"/>
-              </a:rPr>
-              <a:t>incrementales por 1.000 contactos.</a:t>
+              <a:t>Guardrails: cinco límites que la lista debe respetar</a:t>
             </a:r>
             <a:endParaRPr lang="en-US" sz="1200" dirty="0"/>
           </a:p>
@@ -3036,14 +2953,14 @@
       </p:sp>
       <p:sp>
         <p:nvSpPr>
-          <p:cNvPr id="18" name="Text 16"/>
+          <p:cNvPr id="21" name="Text 19"/>
           <p:cNvSpPr txBox="1"/>
           <p:nvPr/>
         </p:nvSpPr>
         <p:spPr>
           <a:xfrm>
-            <a:off x="6766560" y="4754880"/>
-            <a:ext cx="4965192" cy="1645920"/>
+            <a:off x="6766560" y="4526280"/>
+            <a:ext cx="4965192" cy="1874520"/>
           </a:xfrm>
           <a:prstGeom prst="rect">
             <a:avLst/>
@@ -3057,13 +2974,13 @@
           <a:p>
             <a:pPr marL="177800" indent="-177800">
               <a:spcAft>
-                <a:spcPts val="900"/>
+                <a:spcPts val="300"/>
               </a:spcAft>
               <a:buSzPct val="100000"/>
               <a:buChar char="•"/>
             </a:pPr>
             <a:r>
-              <a:rPr lang="en-US" sz="1200" b="1" dirty="0">
+              <a:rPr lang="en-US" sz="1100" b="1" dirty="0">
                 <a:solidFill>
                   <a:srgbClr val="043F52"/>
                 </a:solidFill>
@@ -3075,12 +2992,12 @@
             </a:r>
             <a:pPr indent="0" marL="0">
               <a:spcAft>
-                <a:spcPts val="900"/>
+                <a:spcPts val="300"/>
               </a:spcAft>
               <a:buNone/>
             </a:pPr>
             <a:r>
-              <a:rPr lang="en-US" sz="1200" dirty="0">
+              <a:rPr lang="en-US" sz="1100" dirty="0">
                 <a:solidFill>
                   <a:srgbClr val="043F52"/>
                 </a:solidFill>
@@ -3088,20 +3005,20 @@
                 <a:ea typeface="Calibri" pitchFamily="34" charset="-122"/>
                 <a:cs typeface="Calibri" pitchFamily="34" charset="-120"/>
               </a:rPr>
-              <a:t>mora esperada de la lista ≤ umbral pactado antes (veto).</a:t>
+              <a:t>la mora esperada de la lista no supera el umbral de Riesgos; si lo supera, no se ejecuta.</a:t>
             </a:r>
-            <a:endParaRPr lang="en-US" sz="1200" dirty="0"/>
+            <a:endParaRPr lang="en-US" sz="1100" dirty="0"/>
           </a:p>
           <a:p>
             <a:pPr marL="177800" indent="-177800">
               <a:spcAft>
-                <a:spcPts val="900"/>
+                <a:spcPts val="300"/>
               </a:spcAft>
               <a:buSzPct val="100000"/>
               <a:buChar char="•"/>
             </a:pPr>
             <a:r>
-              <a:rPr lang="en-US" sz="1200" b="1" dirty="0">
+              <a:rPr lang="en-US" sz="1100" b="1" dirty="0">
                 <a:solidFill>
                   <a:srgbClr val="043F52"/>
                 </a:solidFill>
@@ -3113,12 +3030,12 @@
             </a:r>
             <a:pPr indent="0" marL="0">
               <a:spcAft>
-                <a:spcPts val="900"/>
+                <a:spcPts val="300"/>
               </a:spcAft>
               <a:buNone/>
             </a:pPr>
             <a:r>
-              <a:rPr lang="en-US" sz="1200" dirty="0">
+              <a:rPr lang="en-US" sz="1100" dirty="0">
                 <a:solidFill>
                   <a:srgbClr val="043F52"/>
                 </a:solidFill>
@@ -3126,20 +3043,20 @@
                 <a:ea typeface="Calibri" pitchFamily="34" charset="-122"/>
                 <a:cs typeface="Calibri" pitchFamily="34" charset="-120"/>
               </a:rPr>
-              <a:t>quejas y opt-out por 1.000 no peores (veto).</a:t>
+              <a:t>quejas y bajas por cada 1.000 contactos no peores que hoy; si empeoran, se detiene.</a:t>
             </a:r>
-            <a:endParaRPr lang="en-US" sz="1200" dirty="0"/>
+            <a:endParaRPr lang="en-US" sz="1100" dirty="0"/>
           </a:p>
           <a:p>
             <a:pPr marL="177800" indent="-177800">
               <a:spcAft>
-                <a:spcPts val="900"/>
+                <a:spcPts val="300"/>
               </a:spcAft>
               <a:buSzPct val="100000"/>
               <a:buChar char="•"/>
             </a:pPr>
             <a:r>
-              <a:rPr lang="en-US" sz="1200" b="1" dirty="0">
+              <a:rPr lang="en-US" sz="1100" b="1" dirty="0">
                 <a:solidFill>
                   <a:srgbClr val="043F52"/>
                 </a:solidFill>
@@ -3151,12 +3068,12 @@
             </a:r>
             <a:pPr indent="0" marL="0">
               <a:spcAft>
-                <a:spcPts val="900"/>
+                <a:spcPts val="300"/>
               </a:spcAft>
               <a:buNone/>
             </a:pPr>
             <a:r>
-              <a:rPr lang="en-US" sz="1200" dirty="0">
+              <a:rPr lang="en-US" sz="1100" dirty="0">
                 <a:solidFill>
                   <a:srgbClr val="043F52"/>
                 </a:solidFill>
@@ -3164,20 +3081,20 @@
                 <a:ea typeface="Calibri" pitchFamily="34" charset="-122"/>
                 <a:cs typeface="Calibri" pitchFamily="34" charset="-120"/>
               </a:rPr>
-              <a:t>selección por regional y grupo ≥ 0,8 (alerta).</a:t>
+              <a:t>ningún grupo ni regional queda por debajo del 80 % de la tasa de selección de los demás; si pasa, se revisa.</a:t>
             </a:r>
-            <a:endParaRPr lang="en-US" sz="1200" dirty="0"/>
+            <a:endParaRPr lang="en-US" sz="1100" dirty="0"/>
           </a:p>
           <a:p>
             <a:pPr marL="177800" indent="-177800">
               <a:spcAft>
-                <a:spcPts val="900"/>
+                <a:spcPts val="300"/>
               </a:spcAft>
               <a:buSzPct val="100000"/>
               <a:buChar char="•"/>
             </a:pPr>
             <a:r>
-              <a:rPr lang="en-US" sz="1200" b="1" dirty="0">
+              <a:rPr lang="en-US" sz="1100" b="1" dirty="0">
                 <a:solidFill>
                   <a:srgbClr val="043F52"/>
                 </a:solidFill>
@@ -3189,12 +3106,12 @@
             </a:r>
             <a:pPr indent="0" marL="0">
               <a:spcAft>
-                <a:spcPts val="900"/>
+                <a:spcPts val="300"/>
               </a:spcAft>
               <a:buNone/>
             </a:pPr>
             <a:r>
-              <a:rPr lang="en-US" sz="1200" dirty="0">
+              <a:rPr lang="en-US" sz="1100" dirty="0">
                 <a:solidFill>
                   <a:srgbClr val="043F52"/>
                 </a:solidFill>
@@ -3202,20 +3119,20 @@
                 <a:ea typeface="Calibri" pitchFamily="34" charset="-122"/>
                 <a:cs typeface="Calibri" pitchFamily="34" charset="-120"/>
               </a:rPr>
-              <a:t>≥ 90 % de lista ejecutada (alerta).</a:t>
+              <a:t>se ejecuta al menos el 90 % de la lista en cada regional; si no, se reasignan cupos.</a:t>
             </a:r>
-            <a:endParaRPr lang="en-US" sz="1200" dirty="0"/>
+            <a:endParaRPr lang="en-US" sz="1100" dirty="0"/>
           </a:p>
           <a:p>
             <a:pPr marL="177800" indent="-177800">
               <a:spcAft>
-                <a:spcPts val="900"/>
+                <a:spcPts val="300"/>
               </a:spcAft>
               <a:buSzPct val="100000"/>
               <a:buChar char="•"/>
             </a:pPr>
             <a:r>
-              <a:rPr lang="en-US" sz="1200" b="1" dirty="0">
+              <a:rPr lang="en-US" sz="1100" b="1" dirty="0">
                 <a:solidFill>
                   <a:srgbClr val="043F52"/>
                 </a:solidFill>
@@ -3227,12 +3144,12 @@
             </a:r>
             <a:pPr indent="0" marL="0">
               <a:spcAft>
-                <a:spcPts val="900"/>
+                <a:spcPts val="300"/>
               </a:spcAft>
               <a:buNone/>
             </a:pPr>
             <a:r>
-              <a:rPr lang="en-US" sz="1200" dirty="0">
+              <a:rPr lang="en-US" sz="1100" dirty="0">
                 <a:solidFill>
                   <a:srgbClr val="043F52"/>
                 </a:solidFill>
@@ -3240,9 +3157,9 @@
                 <a:ea typeface="Calibri" pitchFamily="34" charset="-122"/>
                 <a:cs typeface="Calibri" pitchFamily="34" charset="-120"/>
               </a:rPr>
-              <a:t>aleatorización y datos válidos (bloqueo).</a:t>
+              <a:t>datos y aleatorización válidos en cada corte; si fallan, no se puntúa.</a:t>
             </a:r>
-            <a:endParaRPr lang="en-US" sz="1200" dirty="0"/>
+            <a:endParaRPr lang="en-US" sz="1100" dirty="0"/>
           </a:p>
         </p:txBody>
       </p:sp>
@@ -3327,7 +3244,7 @@
         <p:spPr>
           <a:xfrm>
             <a:off x="457200" y="320040"/>
-            <a:ext cx="11274552" cy="868680"/>
+            <a:ext cx="11274552" cy="502920"/>
           </a:xfrm>
           <a:prstGeom prst="rect">
             <a:avLst/>
@@ -3348,7 +3265,7 @@
                   <a:srgbClr val="043F52"/>
                 </a:solidFill>
               </a:rPr>
-              <a:t>2 · La base no sirve para medir riesgo ni incrementalidad, y dos variables filtran el resultado</a:t>
+              <a:t>2 · Qué descubrimos en los datos y en qué no deberíamos confiar</a:t>
             </a:r>
             <a:endParaRPr lang="en-US" sz="2400" dirty="0"/>
           </a:p>
@@ -3356,14 +3273,81 @@
       </p:sp>
       <p:sp>
         <p:nvSpPr>
-          <p:cNvPr id="3" name="Text 1"/>
+          <p:cNvPr id="3" name="Respuesta"/>
+          <p:cNvSpPr/>
+          <p:nvPr/>
+        </p:nvSpPr>
+        <p:spPr>
+          <a:xfrm>
+            <a:off x="457200" y="868680"/>
+            <a:ext cx="54864" cy="658368"/>
+          </a:xfrm>
+          <a:prstGeom prst="rect">
+            <a:avLst/>
+          </a:prstGeom>
+          <a:solidFill>
+            <a:srgbClr val="009786"/>
+          </a:solidFill>
+          <a:ln w="12700">
+            <a:solidFill>
+              <a:srgbClr val="009786"/>
+            </a:solidFill>
+            <a:prstDash val="solid"/>
+          </a:ln>
+        </p:spPr>
+      </p:sp>
+      <p:sp>
+        <p:nvSpPr>
+          <p:cNvPr id="4" name="Text 2"/>
           <p:cNvSpPr txBox="1"/>
           <p:nvPr/>
         </p:nvSpPr>
         <p:spPr>
           <a:xfrm>
-            <a:off x="457200" y="1280160"/>
-            <a:ext cx="9144000" cy="274320"/>
+            <a:off x="640080" y="868680"/>
+            <a:ext cx="11091672" cy="658368"/>
+          </a:xfrm>
+          <a:prstGeom prst="rect">
+            <a:avLst/>
+          </a:prstGeom>
+          <a:noFill/>
+          <a:ln/>
+        </p:spPr>
+        <p:txBody>
+          <a:bodyPr wrap="square" lIns="0" tIns="0" rIns="0" bIns="0" rtlCol="0" anchor="ctr"/>
+          <a:lstStyle/>
+          <a:p>
+            <a:pPr indent="0" marL="0">
+              <a:lnSpc>
+                <a:spcPct val="110000"/>
+              </a:lnSpc>
+              <a:buNone/>
+            </a:pPr>
+            <a:r>
+              <a:rPr lang="en-US" sz="1250" dirty="0">
+                <a:solidFill>
+                  <a:srgbClr val="043F52"/>
+                </a:solidFill>
+                <a:latin typeface="Calibri" pitchFamily="34" charset="0"/>
+                <a:ea typeface="Calibri" pitchFamily="34" charset="-122"/>
+                <a:cs typeface="Calibri" pitchFamily="34" charset="-120"/>
+              </a:rPr>
+              <a:t>La base sirve para ordenar clientes por propensión, pero no para medir riesgo ni el efecto del contacto. No deberíamos confiar en dos variables que ya contienen el resultado, ni en las conversiones de la hoja de modelos como si salieran de esta base.</a:t>
+            </a:r>
+            <a:endParaRPr lang="en-US" sz="1250" dirty="0"/>
+          </a:p>
+        </p:txBody>
+      </p:sp>
+      <p:sp>
+        <p:nvSpPr>
+          <p:cNvPr id="5" name="Text 3"/>
+          <p:cNvSpPr txBox="1"/>
+          <p:nvPr/>
+        </p:nvSpPr>
+        <p:spPr>
+          <a:xfrm>
+            <a:off x="457200" y="1645920"/>
+            <a:ext cx="9144000" cy="292608"/>
           </a:xfrm>
           <a:prstGeom prst="rect">
             <a:avLst/>
@@ -3379,17 +3363,17 @@
               <a:buNone/>
             </a:pPr>
             <a:r>
-              <a:rPr lang="en-US" sz="1100" b="1" spc="200" kern="0" dirty="0">
+              <a:rPr lang="en-US" sz="1300" b="1" dirty="0">
                 <a:solidFill>
-                  <a:srgbClr val="4A6A72"/>
+                  <a:srgbClr val="043F52"/>
                 </a:solidFill>
                 <a:latin typeface="Calibri" pitchFamily="34" charset="0"/>
                 <a:ea typeface="Calibri" pitchFamily="34" charset="-122"/>
                 <a:cs typeface="Calibri" pitchFamily="34" charset="-120"/>
               </a:rPr>
-              <a:t>CINCO HALLAZGOS EN BASE_CLIENTES (1.800 FILAS, 8 CORTES)</a:t>
+              <a:t>Cinco hallazgos en la base de clientes (1.800 filas, 8 cortes mensuales)</a:t>
             </a:r>
-            <a:endParaRPr lang="en-US" sz="1100" dirty="0"/>
+            <a:endParaRPr lang="en-US" sz="1300" dirty="0"/>
           </a:p>
         </p:txBody>
       </p:sp>
@@ -3408,7 +3392,7 @@
           </p:nvPr>
         </p:nvGraphicFramePr>
         <p:xfrm>
-          <a:off x="457200" y="1645920"/>
+          <a:off x="457200" y="1965960"/>
           <a:ext cx="11274552" cy="914400"/>
         </p:xfrm>
         <a:graphic>
@@ -3416,12 +3400,12 @@
             <a:tbl>
               <a:tblPr/>
               <a:tblGrid>
-                <a:gridCol w="2194560"/>
+                <a:gridCol w="2011680"/>
+                <a:gridCol w="3840480"/>
                 <a:gridCol w="4206240"/>
-                <a:gridCol w="3657600"/>
                 <a:gridCol w="1216152"/>
               </a:tblGrid>
-              <a:tr h="384048">
+              <a:tr h="411480">
                 <a:tc>
                   <a:txBody>
                     <a:bodyPr/>
@@ -3695,7 +3679,7 @@
                   </a:tcPr>
                 </a:tc>
               </a:tr>
-              <a:tr h="384048">
+              <a:tr h="411480">
                 <a:tc>
                   <a:txBody>
                     <a:bodyPr/>
@@ -3843,7 +3827,7 @@
                           <a:ea typeface="Calibri" pitchFamily="34" charset="-122"/>
                           <a:cs typeface="Calibri" pitchFamily="34" charset="-120"/>
                         </a:rPr>
-                        <a:t>No existen al priorizar; inflan métricas</a:t>
+                        <a:t>Se conocen después de gestionar; cualquier modelo que las use se verá mejor de lo que será.</a:t>
                       </a:r>
                       <a:endParaRPr lang="en-US" sz="1050" dirty="0">
                         <a:latin typeface="Calibri" charset="0"/>
@@ -3960,7 +3944,7 @@
                   </a:tcPr>
                 </a:tc>
               </a:tr>
-              <a:tr h="384048">
+              <a:tr h="411480">
                 <a:tc>
                   <a:txBody>
                     <a:bodyPr/>
@@ -4043,7 +4027,7 @@
                           <a:ea typeface="Calibri" pitchFamily="34" charset="-122"/>
                           <a:cs typeface="Calibri" pitchFamily="34" charset="-120"/>
                         </a:rPr>
-                        <a:t>Renovación 20,2 % vs. 3,6 %; 1.800 filas vs. 25.000/mes</a:t>
+                        <a:t>Renovación 20,2 % vs. 3,6 %; 1.800 filas vs. 25.000 al mes</a:t>
                       </a:r>
                       <a:endParaRPr lang="en-US" sz="1050" dirty="0">
                         <a:latin typeface="Calibri" charset="0"/>
@@ -4108,7 +4092,7 @@
                           <a:ea typeface="Calibri" pitchFamily="34" charset="-122"/>
                           <a:cs typeface="Calibri" pitchFamily="34" charset="-120"/>
                         </a:rPr>
-                        <a:t>«Top 8k» no se calcula desde aquí</a:t>
+                        <a:t>Las conversiones de la hoja vienen de otra población y no se comparan con esta base.</a:t>
                       </a:r>
                       <a:endParaRPr lang="en-US" sz="1050" dirty="0">
                         <a:latin typeface="Calibri" charset="0"/>
@@ -4225,7 +4209,7 @@
                   </a:tcPr>
                 </a:tc>
               </a:tr>
-              <a:tr h="384048">
+              <a:tr h="411480">
                 <a:tc>
                   <a:txBody>
                     <a:bodyPr/>
@@ -4373,7 +4357,7 @@
                           <a:ea typeface="Calibri" pitchFamily="34" charset="-122"/>
                           <a:cs typeface="Calibri" pitchFamily="34" charset="-120"/>
                         </a:rPr>
-                        <a:t>La mora viene de Riesgos, no de esta base</a:t>
+                        <a:t>Hay 3 moras: el riesgo tiene que venir de la política de Riesgos.</a:t>
                       </a:r>
                       <a:endParaRPr lang="en-US" sz="1050" dirty="0">
                         <a:latin typeface="Calibri" charset="0"/>
@@ -4490,7 +4474,7 @@
                   </a:tcPr>
                 </a:tc>
               </a:tr>
-              <a:tr h="384048">
+              <a:tr h="411480">
                 <a:tc>
                   <a:txBody>
                     <a:bodyPr/>
@@ -4508,7 +4492,7 @@
                           <a:ea typeface="Calibri" pitchFamily="34" charset="-122"/>
                           <a:cs typeface="Calibri" pitchFamily="34" charset="-120"/>
                         </a:rPr>
-                        <a:t>Calidad y temporalidad</a:t>
+                        <a:t>Calidad y fechas</a:t>
                       </a:r>
                       <a:endParaRPr lang="en-US" sz="1050" dirty="0">
                         <a:latin typeface="Calibri" charset="0"/>
@@ -4638,7 +4622,7 @@
                           <a:ea typeface="Calibri" pitchFamily="34" charset="-122"/>
                           <a:cs typeface="Calibri" pitchFamily="34" charset="-120"/>
                         </a:rPr>
-                        <a:t>Validaciones; corte no garantizado point-in-time</a:t>
+                        <a:t>La base no garantiza que cada dato existiera en la fecha de corte; hacen falta reglas de validación.</a:t>
                       </a:r>
                       <a:endParaRPr lang="en-US" sz="1050" dirty="0">
                         <a:latin typeface="Calibri" charset="0"/>
@@ -4755,7 +4739,7 @@
                   </a:tcPr>
                 </a:tc>
               </a:tr>
-              <a:tr h="384048">
+              <a:tr h="411480">
                 <a:tc>
                   <a:txBody>
                     <a:bodyPr/>
@@ -4903,7 +4887,7 @@
                           <a:ea typeface="Calibri" pitchFamily="34" charset="-122"/>
                           <a:cs typeface="Calibri" pitchFamily="34" charset="-120"/>
                         </a:rPr>
-                        <a:t>Un modelo simple captura casi todo</a:t>
+                        <a:t>Dos variables explican casi toda la señal; un modelo simple basta.</a:t>
                       </a:r>
                       <a:endParaRPr lang="en-US" sz="1050" dirty="0">
                         <a:latin typeface="Calibri" charset="0"/>
@@ -5026,14 +5010,14 @@
       </p:graphicFrame>
       <p:sp>
         <p:nvSpPr>
-          <p:cNvPr id="5" name="Text 2"/>
+          <p:cNvPr id="7" name="Text 4"/>
           <p:cNvSpPr txBox="1"/>
           <p:nvPr/>
         </p:nvSpPr>
         <p:spPr>
           <a:xfrm>
-            <a:off x="457200" y="4206240"/>
-            <a:ext cx="7315200" cy="320040"/>
+            <a:off x="457200" y="4572000"/>
+            <a:ext cx="7315200" cy="292608"/>
           </a:xfrm>
           <a:prstGeom prst="rect">
             <a:avLst/>
@@ -5049,7 +5033,7 @@
               <a:buNone/>
             </a:pPr>
             <a:r>
-              <a:rPr lang="en-US" sz="1400" b="1" dirty="0">
+              <a:rPr lang="en-US" sz="1300" b="1" dirty="0">
                 <a:solidFill>
                   <a:srgbClr val="043F52"/>
                 </a:solidFill>
@@ -5057,22 +5041,22 @@
                 <a:ea typeface="Calibri" pitchFamily="34" charset="-122"/>
                 <a:cs typeface="Calibri" pitchFamily="34" charset="-120"/>
               </a:rPr>
-              <a:t>Decisiones de tratamiento</a:t>
+              <a:t>Qué decidimos hacer con los datos</a:t>
             </a:r>
-            <a:endParaRPr lang="en-US" sz="1400" dirty="0"/>
+            <a:endParaRPr lang="en-US" sz="1300" dirty="0"/>
           </a:p>
         </p:txBody>
       </p:sp>
       <p:sp>
         <p:nvSpPr>
-          <p:cNvPr id="6" name="Text 3"/>
+          <p:cNvPr id="8" name="Text 5"/>
           <p:cNvSpPr txBox="1"/>
           <p:nvPr/>
         </p:nvSpPr>
         <p:spPr>
           <a:xfrm>
-            <a:off x="457200" y="4572000"/>
-            <a:ext cx="11274552" cy="1737360"/>
+            <a:off x="457200" y="4892040"/>
+            <a:ext cx="11274552" cy="1508760"/>
           </a:xfrm>
           <a:prstGeom prst="rect">
             <a:avLst/>
@@ -5086,13 +5070,13 @@
           <a:p>
             <a:pPr marL="177800" indent="-177800">
               <a:spcAft>
-                <a:spcPts val="500"/>
+                <a:spcPts val="400"/>
               </a:spcAft>
               <a:buSzPct val="100000"/>
               <a:buChar char="•"/>
             </a:pPr>
             <a:r>
-              <a:rPr lang="en-US" sz="1200" b="1" dirty="0">
+              <a:rPr lang="en-US" sz="1150" b="1" dirty="0">
                 <a:solidFill>
                   <a:srgbClr val="043F52"/>
                 </a:solidFill>
@@ -5100,16 +5084,16 @@
                 <a:ea typeface="Calibri" pitchFamily="34" charset="-122"/>
                 <a:cs typeface="Calibri" pitchFamily="34" charset="-120"/>
               </a:rPr>
-              <a:t>Excluidas: </a:t>
+              <a:t>Variables: </a:t>
             </a:r>
             <a:pPr indent="0" marL="0">
               <a:spcAft>
-                <a:spcPts val="500"/>
+                <a:spcPts val="400"/>
               </a:spcAft>
               <a:buNone/>
             </a:pPr>
             <a:r>
-              <a:rPr lang="en-US" sz="1200" dirty="0">
+              <a:rPr lang="en-US" sz="1150" dirty="0">
                 <a:solidFill>
                   <a:srgbClr val="043F52"/>
                 </a:solidFill>
@@ -5117,20 +5101,20 @@
                 <a:ea typeface="Calibri" pitchFamily="34" charset="-122"/>
                 <a:cs typeface="Calibri" pitchFamily="34" charset="-120"/>
               </a:rPr>
-              <a:t>resultado_gestion_30d, dias_hasta_renovacion y mora30 (resultado); contactabilidad y remesas (sesgo); regional solo para capacidad.</a:t>
+              <a:t>quedan 15. Fuera las que contienen el resultado, las de contacto sin fecha certificada, y la contactabilidad y las remesas, que reproducirían la política pasada sin aportar señal.</a:t>
             </a:r>
-            <a:endParaRPr lang="en-US" sz="1200" dirty="0"/>
+            <a:endParaRPr lang="en-US" sz="1150" dirty="0"/>
           </a:p>
           <a:p>
             <a:pPr marL="177800" indent="-177800">
               <a:spcAft>
-                <a:spcPts val="500"/>
+                <a:spcPts val="400"/>
               </a:spcAft>
               <a:buSzPct val="100000"/>
               <a:buChar char="•"/>
             </a:pPr>
             <a:r>
-              <a:rPr lang="en-US" sz="1200" b="1" dirty="0">
+              <a:rPr lang="en-US" sz="1150" b="1" dirty="0">
                 <a:solidFill>
                   <a:srgbClr val="043F52"/>
                 </a:solidFill>
@@ -5138,16 +5122,16 @@
                 <a:ea typeface="Calibri" pitchFamily="34" charset="-122"/>
                 <a:cs typeface="Calibri" pitchFamily="34" charset="-120"/>
               </a:rPr>
-              <a:t>Partición: </a:t>
+              <a:t>Validación: </a:t>
             </a:r>
             <a:pPr indent="0" marL="0">
               <a:spcAft>
-                <a:spcPts val="500"/>
+                <a:spcPts val="400"/>
               </a:spcAft>
               <a:buNone/>
             </a:pPr>
             <a:r>
-              <a:rPr lang="en-US" sz="1200" dirty="0">
+              <a:rPr lang="en-US" sz="1150" dirty="0">
                 <a:solidFill>
                   <a:srgbClr val="043F52"/>
                 </a:solidFill>
@@ -5155,20 +5139,20 @@
                 <a:ea typeface="Calibri" pitchFamily="34" charset="-122"/>
                 <a:cs typeface="Calibri" pitchFamily="34" charset="-120"/>
               </a:rPr>
-              <a:t>rolling-origin con un corte de gap (entrenar ≤ t−2, probar en t, mayo a agosto); deduplicar por cliente.</a:t>
+              <a:t>validamos como se va a usar. Entrenamos con meses anteriores cuyo resultado ya maduró, dejamos un mes de espera y probamos en el siguiente, cuatro veces.</a:t>
             </a:r>
-            <a:endParaRPr lang="en-US" sz="1200" dirty="0"/>
+            <a:endParaRPr lang="en-US" sz="1150" dirty="0"/>
           </a:p>
           <a:p>
             <a:pPr marL="177800" indent="-177800">
               <a:spcAft>
-                <a:spcPts val="500"/>
+                <a:spcPts val="400"/>
               </a:spcAft>
               <a:buSzPct val="100000"/>
               <a:buChar char="•"/>
             </a:pPr>
             <a:r>
-              <a:rPr lang="en-US" sz="1200" b="1" dirty="0">
+              <a:rPr lang="en-US" sz="1150" b="1" dirty="0">
                 <a:solidFill>
                   <a:srgbClr val="043F52"/>
                 </a:solidFill>
@@ -5180,12 +5164,12 @@
             </a:r>
             <a:pPr indent="0" marL="0">
               <a:spcAft>
-                <a:spcPts val="500"/>
+                <a:spcPts val="400"/>
               </a:spcAft>
               <a:buNone/>
             </a:pPr>
             <a:r>
-              <a:rPr lang="en-US" sz="1200" dirty="0">
+              <a:rPr lang="en-US" sz="1150" dirty="0">
                 <a:solidFill>
                   <a:srgbClr val="043F52"/>
                 </a:solidFill>
@@ -5193,9 +5177,9 @@
                 <a:ea typeface="Calibri" pitchFamily="34" charset="-122"/>
                 <a:cs typeface="Calibri" pitchFamily="34" charset="-120"/>
               </a:rPr>
-              <a:t>sin remuestreo; evaluar en el punto de operación (top 32 %, calibración), no con accuracy.</a:t>
+              <a:t>sin remuestreo. Evaluamos en el 32 % superior, que es lo que cabe en la capacidad, con probabilidades calibradas; el accuracy engaña (79,8 % sin acertar un renovador).</a:t>
             </a:r>
-            <a:endParaRPr lang="en-US" sz="1200" dirty="0"/>
+            <a:endParaRPr lang="en-US" sz="1150" dirty="0"/>
           </a:p>
         </p:txBody>
       </p:sp>
@@ -5280,7 +5264,7 @@
         <p:spPr>
           <a:xfrm>
             <a:off x="457200" y="320040"/>
-            <a:ext cx="11274552" cy="868680"/>
+            <a:ext cx="11274552" cy="502920"/>
           </a:xfrm>
           <a:prstGeom prst="rect">
             <a:avLst/>
@@ -5301,9 +5285,76 @@
                   <a:srgbClr val="043F52"/>
                 </a:solidFill>
               </a:rPr>
-              <a:t>3 · De cuatro alternativas, C se descarta por fuga y B es la única lista para piloto</a:t>
+              <a:t>3 · Qué alternativas sobreviven: B a piloto, A condicionada, C no</a:t>
             </a:r>
             <a:endParaRPr lang="en-US" sz="2400" dirty="0"/>
+          </a:p>
+        </p:txBody>
+      </p:sp>
+      <p:sp>
+        <p:nvSpPr>
+          <p:cNvPr id="3" name="Respuesta"/>
+          <p:cNvSpPr/>
+          <p:nvPr/>
+        </p:nvSpPr>
+        <p:spPr>
+          <a:xfrm>
+            <a:off x="457200" y="868680"/>
+            <a:ext cx="54864" cy="658368"/>
+          </a:xfrm>
+          <a:prstGeom prst="rect">
+            <a:avLst/>
+          </a:prstGeom>
+          <a:solidFill>
+            <a:srgbClr val="009786"/>
+          </a:solidFill>
+          <a:ln w="12700">
+            <a:solidFill>
+              <a:srgbClr val="009786"/>
+            </a:solidFill>
+            <a:prstDash val="solid"/>
+          </a:ln>
+        </p:spPr>
+      </p:sp>
+      <p:sp>
+        <p:nvSpPr>
+          <p:cNvPr id="4" name="Text 2"/>
+          <p:cNvSpPr txBox="1"/>
+          <p:nvPr/>
+        </p:nvSpPr>
+        <p:spPr>
+          <a:xfrm>
+            <a:off x="640080" y="868680"/>
+            <a:ext cx="11091672" cy="658368"/>
+          </a:xfrm>
+          <a:prstGeom prst="rect">
+            <a:avLst/>
+          </a:prstGeom>
+          <a:noFill/>
+          <a:ln/>
+        </p:spPr>
+        <p:txBody>
+          <a:bodyPr wrap="square" lIns="0" tIns="0" rIns="0" bIns="0" rtlCol="0" anchor="ctr"/>
+          <a:lstStyle/>
+          <a:p>
+            <a:pPr indent="0" marL="0">
+              <a:lnSpc>
+                <a:spcPct val="110000"/>
+              </a:lnSpc>
+              <a:buNone/>
+            </a:pPr>
+            <a:r>
+              <a:rPr lang="en-US" sz="1250" dirty="0">
+                <a:solidFill>
+                  <a:srgbClr val="043F52"/>
+                </a:solidFill>
+                <a:latin typeface="Calibri" pitchFamily="34" charset="0"/>
+                <a:ea typeface="Calibri" pitchFamily="34" charset="-122"/>
+                <a:cs typeface="Calibri" pitchFamily="34" charset="-120"/>
+              </a:rPr>
+              <a:t>Sobreviven dos: B va a piloto, y A solo si pasa una verificación variable por variable. C no sobrevive porque su AUC viene de información que no existe al priorizar. D no se puede juzgar con lo entregado y se evalúa en el piloto.</a:t>
+            </a:r>
+            <a:endParaRPr lang="en-US" sz="1250" dirty="0"/>
           </a:p>
         </p:txBody>
       </p:sp>
@@ -5322,7 +5373,7 @@
           </p:nvPr>
         </p:nvGraphicFramePr>
         <p:xfrm>
-          <a:off x="457200" y="1280160"/>
+          <a:off x="457200" y="1645920"/>
           <a:ext cx="7040880" cy="914400"/>
         </p:xfrm>
         <a:graphic>
@@ -5330,15 +5381,15 @@
             <a:tbl>
               <a:tblPr/>
               <a:tblGrid>
+                <a:gridCol w="502920"/>
+                <a:gridCol w="731520"/>
+                <a:gridCol w="502920"/>
+                <a:gridCol w="868680"/>
                 <a:gridCol w="548640"/>
-                <a:gridCol w="777240"/>
-                <a:gridCol w="640080"/>
-                <a:gridCol w="685800"/>
-                <a:gridCol w="594360"/>
                 <a:gridCol w="2880360"/>
-                <a:gridCol w="914400"/>
+                <a:gridCol w="1005840"/>
               </a:tblGrid>
-              <a:tr h="512064">
+              <a:tr h="530352">
                 <a:tc>
                   <a:txBody>
                     <a:bodyPr/>
@@ -5560,7 +5611,7 @@
                           <a:ea typeface="Calibri" pitchFamily="34" charset="-122"/>
                           <a:cs typeface="Calibri" pitchFamily="34" charset="-120"/>
                         </a:rPr>
-                        <a:t>Conv. 8k</a:t>
+                        <a:t>Conversión reportada</a:t>
                       </a:r>
                       <a:endParaRPr lang="en-US" sz="1050" dirty="0">
                         <a:latin typeface="Calibri" charset="0"/>
@@ -5816,7 +5867,7 @@
                   </a:tcPr>
                 </a:tc>
               </a:tr>
-              <a:tr h="512064">
+              <a:tr h="530352">
                 <a:tc>
                   <a:txBody>
                     <a:bodyPr/>
@@ -6159,7 +6210,7 @@
                           <a:ea typeface="Calibri" pitchFamily="34" charset="-122"/>
                           <a:cs typeface="Calibri" pitchFamily="34" charset="-120"/>
                         </a:rPr>
-                        <a:t>Línea base; única conversión observada en producción.</a:t>
+                        <a:t>Es la referencia: la única conversión observada en producción.</a:t>
                       </a:r>
                       <a:endParaRPr lang="en-US" sz="1050" dirty="0">
                         <a:latin typeface="Calibri" charset="0"/>
@@ -6224,7 +6275,7 @@
                           <a:ea typeface="Calibri" pitchFamily="34" charset="-122"/>
                           <a:cs typeface="Calibri" pitchFamily="34" charset="-120"/>
                         </a:rPr>
-                        <a:t>Champion</a:t>
+                        <a:t>Referencia</a:t>
                       </a:r>
                       <a:endParaRPr lang="en-US" sz="1050" dirty="0">
                         <a:latin typeface="Calibri" charset="0"/>
@@ -6276,7 +6327,7 @@
                   </a:tcPr>
                 </a:tc>
               </a:tr>
-              <a:tr h="512064">
+              <a:tr h="530352">
                 <a:tc>
                   <a:txBody>
                     <a:bodyPr/>
@@ -6619,7 +6670,7 @@
                           <a:ea typeface="Calibri" pitchFamily="34" charset="-122"/>
                           <a:cs typeface="Calibri" pitchFamily="34" charset="-120"/>
                         </a:rPr>
-                        <a:t>Su 0,94 solo se replica con resultado_gestion_30d; sin fuga, 0,79–0,82. Inviable.</a:t>
+                        <a:t>Repliqué su 0,94: solo aparece al incluir el resultado de la gestión; con variables legítimas da 0,82.</a:t>
                       </a:r>
                       <a:endParaRPr lang="en-US" sz="1050" dirty="0">
                         <a:latin typeface="Calibri" charset="0"/>
@@ -6736,7 +6787,7 @@
                   </a:tcPr>
                 </a:tc>
               </a:tr>
-              <a:tr h="512064">
+              <a:tr h="530352">
                 <a:tc>
                   <a:txBody>
                     <a:bodyPr/>
@@ -7079,7 +7130,7 @@
                           <a:ea typeface="Calibri" pitchFamily="34" charset="-122"/>
                           <a:cs typeface="Calibri" pitchFamily="34" charset="-120"/>
                         </a:rPr>
-                        <a:t>Supera lo replicable (0,82) pero es otra población; mora, la peor. Auditar variable a variable.</a:t>
+                        <a:t>Su 0,86 no se confirma con esta base y su mora es la más alta; hay que verificar cada variable antes de usarlo.</a:t>
                       </a:r>
                       <a:endParaRPr lang="en-US" sz="1050" dirty="0">
                         <a:latin typeface="Calibri" charset="0"/>
@@ -7144,7 +7195,7 @@
                           <a:ea typeface="Calibri" pitchFamily="34" charset="-122"/>
                           <a:cs typeface="Calibri" pitchFamily="34" charset="-120"/>
                         </a:rPr>
-                        <a:t>Auditar</a:t>
+                        <a:t>Verificar</a:t>
                       </a:r>
                       <a:endParaRPr lang="en-US" sz="1050" dirty="0">
                         <a:latin typeface="Calibri" charset="0"/>
@@ -7196,7 +7247,7 @@
                   </a:tcPr>
                 </a:tc>
               </a:tr>
-              <a:tr h="512064">
+              <a:tr h="530352">
                 <a:tc>
                   <a:txBody>
                     <a:bodyPr/>
@@ -7539,7 +7590,7 @@
                           <a:ea typeface="Calibri" pitchFamily="34" charset="-122"/>
                           <a:cs typeface="Calibri" pitchFamily="34" charset="-120"/>
                         </a:rPr>
-                        <a:t>Coherente con la réplica limpia (0,78–0,85), calibrado, menor mora. Misma ficha de fuga que A.</a:t>
+                        <a:t>Su 0,79 coincide con lo que la base permite, está calibrado y tiene la menor mora; también se verifica antes del piloto.</a:t>
                       </a:r>
                       <a:endParaRPr lang="en-US" sz="1050" dirty="0">
                         <a:latin typeface="Calibri" charset="0"/>
@@ -7656,7 +7707,7 @@
                   </a:tcPr>
                 </a:tc>
               </a:tr>
-              <a:tr h="512064">
+              <a:tr h="530352">
                 <a:tc>
                   <a:txBody>
                     <a:bodyPr/>
@@ -7999,7 +8050,7 @@
                           <a:ea typeface="Calibri" pitchFamily="34" charset="-122"/>
                           <a:cs typeface="Calibri" pitchFamily="34" charset="-120"/>
                         </a:rPr>
-                        <a:t>Único que mide efecto del contacto; unidades mezcladas y aleatorización sin detalle.</a:t>
+                        <a:t>Único que mide el efecto del contacto, pero sus cifras no son comparables y no se sabe cómo se aleatorizó.</a:t>
                       </a:r>
                       <a:endParaRPr lang="en-US" sz="1050" dirty="0">
                         <a:latin typeface="Calibri" charset="0"/>
@@ -8064,7 +8115,7 @@
                           <a:ea typeface="Calibri" pitchFamily="34" charset="-122"/>
                           <a:cs typeface="Calibri" pitchFamily="34" charset="-120"/>
                         </a:rPr>
-                        <a:t>Aprender</a:t>
+                        <a:t>Evaluar en piloto</a:t>
                       </a:r>
                       <a:endParaRPr lang="en-US" sz="1050" dirty="0">
                         <a:latin typeface="Calibri" charset="0"/>
@@ -8122,14 +8173,14 @@
       </p:graphicFrame>
       <p:sp>
         <p:nvSpPr>
-          <p:cNvPr id="4" name="Text 1"/>
+          <p:cNvPr id="6" name="Text 3"/>
           <p:cNvSpPr txBox="1"/>
           <p:nvPr/>
         </p:nvSpPr>
         <p:spPr>
           <a:xfrm>
-            <a:off x="7772400" y="1280160"/>
-            <a:ext cx="3959352" cy="320040"/>
+            <a:off x="7772400" y="1645920"/>
+            <a:ext cx="3959352" cy="292608"/>
           </a:xfrm>
           <a:prstGeom prst="rect">
             <a:avLst/>
@@ -8145,7 +8196,7 @@
               <a:buNone/>
             </a:pPr>
             <a:r>
-              <a:rPr lang="en-US" sz="1300" b="1" dirty="0">
+              <a:rPr lang="en-US" sz="1200" b="1" dirty="0">
                 <a:solidFill>
                   <a:srgbClr val="043F52"/>
                 </a:solidFill>
@@ -8153,22 +8204,22 @@
                 <a:ea typeface="Calibri" pitchFamily="34" charset="-122"/>
                 <a:cs typeface="Calibri" pitchFamily="34" charset="-120"/>
               </a:rPr>
-              <a:t>Réplica: el AUC de C se explica por la fuga</a:t>
+              <a:t>Réplica: el 0,94 de C solo aparece con la fuga</a:t>
             </a:r>
-            <a:endParaRPr lang="en-US" sz="1300" dirty="0"/>
+            <a:endParaRPr lang="en-US" sz="1200" dirty="0"/>
           </a:p>
         </p:txBody>
       </p:sp>
       <p:sp>
         <p:nvSpPr>
-          <p:cNvPr id="5" name="Text 2"/>
+          <p:cNvPr id="7" name="Text 4"/>
           <p:cNvSpPr txBox="1"/>
           <p:nvPr/>
         </p:nvSpPr>
         <p:spPr>
           <a:xfrm>
-            <a:off x="7772400" y="1600200"/>
-            <a:ext cx="3959352" cy="274320"/>
+            <a:off x="7772400" y="1938528"/>
+            <a:ext cx="3959352" cy="384048"/>
           </a:xfrm>
           <a:prstGeom prst="rect">
             <a:avLst/>
@@ -8192,7 +8243,7 @@
                 <a:ea typeface="Calibri" pitchFamily="34" charset="-122"/>
                 <a:cs typeface="Calibri" pitchFamily="34" charset="-120"/>
               </a:rPr>
-              <a:t>AUC fuera de tiempo: entrenar ≤ t−2, probar en t, mayo a agosto.</a:t>
+              <a:t>AUC validado en el tiempo: entrenamos con meses anteriores, esperamos un mes y probamos en el siguiente, de mayo a agosto.</a:t>
             </a:r>
             <a:endParaRPr lang="en-US" sz="1100" dirty="0"/>
           </a:p>
@@ -8200,13 +8251,13 @@
       </p:sp>
       <p:graphicFrame>
         <p:nvGraphicFramePr>
-          <p:cNvPr id="6" name="Chart 0" descr=""/>
+          <p:cNvPr id="8" name="Chart 0" descr=""/>
           <p:cNvGraphicFramePr/>
           <p:nvPr/>
         </p:nvGraphicFramePr>
         <p:xfrm>
-          <a:off x="7772400" y="1874520"/>
-          <a:ext cx="3959352" cy="2148840"/>
+          <a:off x="7772400" y="2331720"/>
+          <a:ext cx="3959352" cy="1874520"/>
         </p:xfrm>
         <a:graphic xmlns:a="http://schemas.openxmlformats.org/drawingml/2006/main">
           <a:graphicData uri="http://schemas.openxmlformats.org/drawingml/2006/chart">
@@ -8216,13 +8267,13 @@
       </p:graphicFrame>
       <p:sp>
         <p:nvSpPr>
-          <p:cNvPr id="7" name="Text 3"/>
+          <p:cNvPr id="9" name="Text 5"/>
           <p:cNvSpPr txBox="1"/>
           <p:nvPr/>
         </p:nvSpPr>
         <p:spPr>
           <a:xfrm>
-            <a:off x="7772400" y="4069080"/>
+            <a:off x="7772400" y="4224528"/>
             <a:ext cx="3959352" cy="548640"/>
           </a:xfrm>
           <a:prstGeom prst="rect">
@@ -8247,7 +8298,7 @@
                 <a:ea typeface="Calibri" pitchFamily="34" charset="-122"/>
                 <a:cs typeface="Calibri" pitchFamily="34" charset="-120"/>
               </a:rPr>
-              <a:t>Reportado: C 0,94 y B 0,79. Un k-fold aleatorio da 0,82: solo la validación temporal revela la fuga.</a:t>
+              <a:t>El 0,94 de la hoja es lo que produce la fuga; una validación aleatoria (0,82) no la habría revelado, la temporal sí.</a:t>
             </a:r>
             <a:endParaRPr lang="en-US" sz="1100" dirty="0"/>
           </a:p>
@@ -8255,14 +8306,14 @@
       </p:sp>
       <p:sp>
         <p:nvSpPr>
-          <p:cNvPr id="8" name="Text 4"/>
+          <p:cNvPr id="10" name="Text 6"/>
           <p:cNvSpPr txBox="1"/>
           <p:nvPr/>
         </p:nvSpPr>
         <p:spPr>
           <a:xfrm>
-            <a:off x="457200" y="4846320"/>
-            <a:ext cx="5669280" cy="320040"/>
+            <a:off x="457200" y="4937760"/>
+            <a:ext cx="5669280" cy="292608"/>
           </a:xfrm>
           <a:prstGeom prst="rect">
             <a:avLst/>
@@ -8278,7 +8329,7 @@
               <a:buNone/>
             </a:pPr>
             <a:r>
-              <a:rPr lang="en-US" sz="1300" b="1" dirty="0">
+              <a:rPr lang="en-US" sz="1200" b="1" dirty="0">
                 <a:solidFill>
                   <a:srgbClr val="043F52"/>
                 </a:solidFill>
@@ -8288,20 +8339,20 @@
               </a:rPr>
               <a:t>Por qué más AUC puede ser peor decisión</a:t>
             </a:r>
-            <a:endParaRPr lang="en-US" sz="1300" dirty="0"/>
+            <a:endParaRPr lang="en-US" sz="1200" dirty="0"/>
           </a:p>
         </p:txBody>
       </p:sp>
       <p:sp>
         <p:nvSpPr>
-          <p:cNvPr id="9" name="Text 5"/>
+          <p:cNvPr id="11" name="Text 7"/>
           <p:cNvSpPr txBox="1"/>
           <p:nvPr/>
         </p:nvSpPr>
         <p:spPr>
           <a:xfrm>
-            <a:off x="457200" y="5166360"/>
-            <a:ext cx="5669280" cy="1188720"/>
+            <a:off x="457200" y="5257800"/>
+            <a:ext cx="5669280" cy="1143000"/>
           </a:xfrm>
           <a:prstGeom prst="rect">
             <a:avLst/>
@@ -8329,7 +8380,7 @@
                 <a:ea typeface="Calibri" pitchFamily="34" charset="-122"/>
                 <a:cs typeface="Calibri" pitchFamily="34" charset="-120"/>
               </a:rPr>
-              <a:t>Mide el orden completo; la decisión usa solo el 32 % superior y no distingue la mora.</a:t>
+              <a:t>El AUC ordena a todos los clientes, pero nosotros usamos solo el 32 % superior, y el AUC no distingue una renovación sana de una que cae en mora.</a:t>
             </a:r>
             <a:endParaRPr lang="en-US" sz="1100" dirty="0"/>
           </a:p>
@@ -8350,7 +8401,7 @@
                 <a:ea typeface="Calibri" pitchFamily="34" charset="-122"/>
                 <a:cs typeface="Calibri" pitchFamily="34" charset="-120"/>
               </a:rPr>
-              <a:t>Propensión alta no es efecto del contacto: llamar a quien renovaría igual gasta cupos.</a:t>
+              <a:t>Una propensión alta no es efecto del contacto: llamar a quien renovaría igual gasta cupos.</a:t>
             </a:r>
             <a:endParaRPr lang="en-US" sz="1100" dirty="0"/>
           </a:p>
@@ -8358,14 +8409,14 @@
       </p:sp>
       <p:sp>
         <p:nvSpPr>
-          <p:cNvPr id="10" name="Text 6"/>
+          <p:cNvPr id="12" name="Text 8"/>
           <p:cNvSpPr txBox="1"/>
           <p:nvPr/>
         </p:nvSpPr>
         <p:spPr>
           <a:xfrm>
-            <a:off x="6400800" y="4846320"/>
-            <a:ext cx="5330952" cy="320040"/>
+            <a:off x="6400800" y="4937760"/>
+            <a:ext cx="5330952" cy="292608"/>
           </a:xfrm>
           <a:prstGeom prst="rect">
             <a:avLst/>
@@ -8381,7 +8432,7 @@
               <a:buNone/>
             </a:pPr>
             <a:r>
-              <a:rPr lang="en-US" sz="1300" b="1" dirty="0">
+              <a:rPr lang="en-US" sz="1200" b="1" dirty="0">
                 <a:solidFill>
                   <a:srgbClr val="043F52"/>
                 </a:solidFill>
@@ -8389,22 +8440,22 @@
                 <a:ea typeface="Calibri" pitchFamily="34" charset="-122"/>
                 <a:cs typeface="Calibri" pitchFamily="34" charset="-120"/>
               </a:rPr>
-              <a:t>Para comparar propensión vs. uplift necesito</a:t>
+              <a:t>Para comparar D con A y B hace falta</a:t>
             </a:r>
-            <a:endParaRPr lang="en-US" sz="1300" dirty="0"/>
+            <a:endParaRPr lang="en-US" sz="1200" dirty="0"/>
           </a:p>
         </p:txBody>
       </p:sp>
       <p:sp>
         <p:nvSpPr>
-          <p:cNvPr id="11" name="Text 7"/>
+          <p:cNvPr id="13" name="Text 9"/>
           <p:cNvSpPr txBox="1"/>
           <p:nvPr/>
         </p:nvSpPr>
         <p:spPr>
           <a:xfrm>
-            <a:off x="6400800" y="5166360"/>
-            <a:ext cx="5330952" cy="1188720"/>
+            <a:off x="6400800" y="5257800"/>
+            <a:ext cx="5330952" cy="1143000"/>
           </a:xfrm>
           <a:prstGeom prst="rect">
             <a:avLst/>
@@ -8432,7 +8483,7 @@
                 <a:ea typeface="Calibri" pitchFamily="34" charset="-122"/>
                 <a:cs typeface="Calibri" pitchFamily="34" charset="-120"/>
               </a:rPr>
-              <a:t>La regla de asignación de la campaña de D: fracción aleatorizada, unidad y cumplimiento.</a:t>
+              <a:t>Saber cómo se asignó la campaña con la que se entrenó D: qué parte fue al azar y cómo se cumplió.</a:t>
             </a:r>
             <a:endParaRPr lang="en-US" sz="1100" dirty="0"/>
           </a:p>
@@ -8453,7 +8504,7 @@
                 <a:ea typeface="Calibri" pitchFamily="34" charset="-122"/>
                 <a:cs typeface="Calibri" pitchFamily="34" charset="-120"/>
               </a:rPr>
-              <a:t>Un mismo holdout donde medir uplift@8k de cada modelo en COP netos de mora, con intervalos.</a:t>
+              <a:t>Medir los tres modelos en un mismo grupo de control, en renovaciones incrementales y pesos netos de mora.</a:t>
             </a:r>
             <a:endParaRPr lang="en-US" sz="1100" dirty="0"/>
           </a:p>
@@ -8540,7 +8591,7 @@
         <p:spPr>
           <a:xfrm>
             <a:off x="457200" y="320040"/>
-            <a:ext cx="11274552" cy="868680"/>
+            <a:ext cx="11274552" cy="502920"/>
           </a:xfrm>
           <a:prstGeom prst="rect">
             <a:avLst/>
@@ -8561,7 +8612,7 @@
                   <a:srgbClr val="043F52"/>
                 </a:solidFill>
               </a:rPr>
-              <a:t>4 · B genera más valor que A pese a convertir menos, y la capacidad regional decide cómo repartirlo</a:t>
+              <a:t>4 · B genera más valor bajo riesgo y capacidad real</a:t>
             </a:r>
             <a:endParaRPr lang="en-US" sz="2400" dirty="0"/>
           </a:p>
@@ -8569,14 +8620,81 @@
       </p:sp>
       <p:sp>
         <p:nvSpPr>
-          <p:cNvPr id="3" name="Text 1"/>
+          <p:cNvPr id="3" name="Respuesta"/>
+          <p:cNvSpPr/>
+          <p:nvPr/>
+        </p:nvSpPr>
+        <p:spPr>
+          <a:xfrm>
+            <a:off x="457200" y="868680"/>
+            <a:ext cx="54864" cy="658368"/>
+          </a:xfrm>
+          <a:prstGeom prst="rect">
+            <a:avLst/>
+          </a:prstGeom>
+          <a:solidFill>
+            <a:srgbClr val="009786"/>
+          </a:solidFill>
+          <a:ln w="12700">
+            <a:solidFill>
+              <a:srgbClr val="009786"/>
+            </a:solidFill>
+            <a:prstDash val="solid"/>
+          </a:ln>
+        </p:spPr>
+      </p:sp>
+      <p:sp>
+        <p:nvSpPr>
+          <p:cNvPr id="4" name="Text 2"/>
           <p:cNvSpPr txBox="1"/>
           <p:nvPr/>
         </p:nvSpPr>
         <p:spPr>
           <a:xfrm>
-            <a:off x="457200" y="1280160"/>
-            <a:ext cx="6583680" cy="320040"/>
+            <a:off x="640080" y="868680"/>
+            <a:ext cx="11091672" cy="658368"/>
+          </a:xfrm>
+          <a:prstGeom prst="rect">
+            <a:avLst/>
+          </a:prstGeom>
+          <a:noFill/>
+          <a:ln/>
+        </p:spPr>
+        <p:txBody>
+          <a:bodyPr wrap="square" lIns="0" tIns="0" rIns="0" bIns="0" rtlCol="0" anchor="ctr"/>
+          <a:lstStyle/>
+          <a:p>
+            <a:pPr indent="0" marL="0">
+              <a:lnSpc>
+                <a:spcPct val="110000"/>
+              </a:lnSpc>
+              <a:buNone/>
+            </a:pPr>
+            <a:r>
+              <a:rPr lang="en-US" sz="1250" dirty="0">
+                <a:solidFill>
+                  <a:srgbClr val="043F52"/>
+                </a:solidFill>
+                <a:latin typeface="Calibri" pitchFamily="34" charset="0"/>
+                <a:ea typeface="Calibri" pitchFamily="34" charset="-122"/>
+                <a:cs typeface="Calibri" pitchFamily="34" charset="-120"/>
+              </a:rPr>
+              <a:t>B: 237 millones al mes netos de mora frente a 218 de A, porque cada renovación de B vale 337.200 y cada una de A 290.400. Ese valor solo se captura si la lista respeta la capacidad de cada regional, y cerca de la mitad podría no deberse al contacto.</a:t>
+            </a:r>
+            <a:endParaRPr lang="en-US" sz="1250" dirty="0"/>
+          </a:p>
+        </p:txBody>
+      </p:sp>
+      <p:sp>
+        <p:nvSpPr>
+          <p:cNvPr id="5" name="Text 3"/>
+          <p:cNvSpPr txBox="1"/>
+          <p:nvPr/>
+        </p:nvSpPr>
+        <p:spPr>
+          <a:xfrm>
+            <a:off x="457200" y="1645920"/>
+            <a:ext cx="5394960" cy="292608"/>
           </a:xfrm>
           <a:prstGeom prst="rect">
             <a:avLst/>
@@ -8592,7 +8710,7 @@
               <a:buNone/>
             </a:pPr>
             <a:r>
-              <a:rPr lang="en-US" sz="1300" b="1" dirty="0">
+              <a:rPr lang="en-US" sz="1200" b="1" dirty="0">
                 <a:solidFill>
                   <a:srgbClr val="043F52"/>
                 </a:solidFill>
@@ -8602,20 +8720,20 @@
               </a:rPr>
               <a:t>Valor esperado mensual neto de mora (COP millones)</a:t>
             </a:r>
-            <a:endParaRPr lang="en-US" sz="1300" dirty="0"/>
+            <a:endParaRPr lang="en-US" sz="1200" dirty="0"/>
           </a:p>
         </p:txBody>
       </p:sp>
       <p:sp>
         <p:nvSpPr>
-          <p:cNvPr id="4" name="Text 2"/>
+          <p:cNvPr id="6" name="Text 4"/>
           <p:cNvSpPr txBox="1"/>
           <p:nvPr/>
         </p:nvSpPr>
         <p:spPr>
           <a:xfrm>
-            <a:off x="457200" y="1600200"/>
-            <a:ext cx="6583680" cy="411480"/>
+            <a:off x="457200" y="1938528"/>
+            <a:ext cx="5394960" cy="411480"/>
           </a:xfrm>
           <a:prstGeom prst="rect">
             <a:avLst/>
@@ -8639,7 +8757,7 @@
                 <a:ea typeface="Calibri" pitchFamily="34" charset="-122"/>
                 <a:cs typeface="Calibri" pitchFamily="34" charset="-120"/>
               </a:rPr>
-              <a:t>8.000 contactos × conversión × (420.000 − mora × 1.800.000). D con mora 5,1 % supuesta; C descartada por fuga.</a:t>
+              <a:t>Para cada alternativa: 8.000 contactos por su conversión, por 420.000 menos la mora por 1.800.000. Para D se asume la mora actual (5,1 %); C queda fuera por la fuga.</a:t>
             </a:r>
             <a:endParaRPr lang="en-US" sz="1100" dirty="0"/>
           </a:p>
@@ -8647,13 +8765,13 @@
       </p:sp>
       <p:graphicFrame>
         <p:nvGraphicFramePr>
-          <p:cNvPr id="5" name="Chart 0" descr=""/>
+          <p:cNvPr id="7" name="Chart 0" descr=""/>
           <p:cNvGraphicFramePr/>
           <p:nvPr/>
         </p:nvGraphicFramePr>
         <p:xfrm>
-          <a:off x="457200" y="2011680"/>
-          <a:ext cx="6583680" cy="2103120"/>
+          <a:off x="457200" y="2377440"/>
+          <a:ext cx="5394960" cy="2148840"/>
         </p:xfrm>
         <a:graphic xmlns:a="http://schemas.openxmlformats.org/drawingml/2006/main">
           <a:graphicData uri="http://schemas.openxmlformats.org/drawingml/2006/chart">
@@ -8663,18 +8781,18 @@
       </p:graphicFrame>
       <p:sp>
         <p:nvSpPr>
-          <p:cNvPr id="6" name="B VS. ACTUAL"/>
+          <p:cNvPr id="8" name="B FRENTE A HOY"/>
           <p:cNvSpPr/>
           <p:nvPr/>
         </p:nvSpPr>
         <p:spPr>
           <a:xfrm>
-            <a:off x="7269480" y="1280160"/>
-            <a:ext cx="2148840" cy="1417320"/>
+            <a:off x="6126480" y="1645920"/>
+            <a:ext cx="2743200" cy="1143000"/>
           </a:xfrm>
           <a:prstGeom prst="roundRect">
             <a:avLst>
-              <a:gd name="adj" fmla="val 7742"/>
+              <a:gd name="adj" fmla="val 9600"/>
             </a:avLst>
           </a:prstGeom>
           <a:solidFill>
@@ -8690,14 +8808,14 @@
       </p:sp>
       <p:sp>
         <p:nvSpPr>
-          <p:cNvPr id="7" name="Text 4"/>
+          <p:cNvPr id="9" name="Text 6"/>
           <p:cNvSpPr txBox="1"/>
           <p:nvPr/>
         </p:nvSpPr>
         <p:spPr>
           <a:xfrm>
-            <a:off x="7434072" y="1408176"/>
-            <a:ext cx="1819656" cy="274320"/>
+            <a:off x="6291072" y="1755648"/>
+            <a:ext cx="2414016" cy="274320"/>
           </a:xfrm>
           <a:prstGeom prst="rect">
             <a:avLst/>
@@ -8721,7 +8839,7 @@
                 <a:ea typeface="Calibri" pitchFamily="34" charset="-122"/>
                 <a:cs typeface="Calibri" pitchFamily="34" charset="-120"/>
               </a:rPr>
-              <a:t>B VS. ACTUAL</a:t>
+              <a:t>B FRENTE A HOY</a:t>
             </a:r>
             <a:endParaRPr lang="en-US" sz="1100" dirty="0"/>
           </a:p>
@@ -8729,14 +8847,14 @@
       </p:sp>
       <p:sp>
         <p:nvSpPr>
-          <p:cNvPr id="8" name="Text 5"/>
+          <p:cNvPr id="10" name="Text 7"/>
           <p:cNvSpPr txBox="1"/>
           <p:nvPr/>
         </p:nvSpPr>
         <p:spPr>
           <a:xfrm>
-            <a:off x="7434072" y="1664208"/>
-            <a:ext cx="1819656" cy="548640"/>
+            <a:off x="6291072" y="1993392"/>
+            <a:ext cx="2414016" cy="457200"/>
           </a:xfrm>
           <a:prstGeom prst="rect">
             <a:avLst/>
@@ -8752,7 +8870,7 @@
               <a:buNone/>
             </a:pPr>
             <a:r>
-              <a:rPr lang="en-US" sz="2600" b="1" dirty="0">
+              <a:rPr lang="en-US" sz="2200" b="1" dirty="0">
                 <a:solidFill>
                   <a:srgbClr val="043F52"/>
                 </a:solidFill>
@@ -8760,22 +8878,22 @@
                 <a:ea typeface="Calibri" pitchFamily="34" charset="-122"/>
                 <a:cs typeface="Calibri" pitchFamily="34" charset="-120"/>
               </a:rPr>
-              <a:t>+143 M</a:t>
+              <a:t>+143 M al mes</a:t>
             </a:r>
-            <a:endParaRPr lang="en-US" sz="2600" dirty="0"/>
+            <a:endParaRPr lang="en-US" sz="2200" dirty="0"/>
           </a:p>
         </p:txBody>
       </p:sp>
       <p:sp>
         <p:nvSpPr>
-          <p:cNvPr id="9" name="Text 6"/>
+          <p:cNvPr id="11" name="Text 8"/>
           <p:cNvSpPr txBox="1"/>
           <p:nvPr/>
         </p:nvSpPr>
         <p:spPr>
           <a:xfrm>
-            <a:off x="7434072" y="2240280"/>
-            <a:ext cx="1819656" cy="365760"/>
+            <a:off x="6291072" y="2487168"/>
+            <a:ext cx="2414016" cy="228600"/>
           </a:xfrm>
           <a:prstGeom prst="rect">
             <a:avLst/>
@@ -8799,7 +8917,7 @@
                 <a:ea typeface="Calibri" pitchFamily="34" charset="-122"/>
                 <a:cs typeface="Calibri" pitchFamily="34" charset="-120"/>
               </a:rPr>
-              <a:t>al mes si el «top 8k» se sostiene.</a:t>
+              <a:t>frente a hoy, si las conversiones reportadas se cumplen en producción.</a:t>
             </a:r>
             <a:endParaRPr lang="en-US" sz="1100" dirty="0"/>
           </a:p>
@@ -8807,18 +8925,18 @@
       </p:sp>
       <p:sp>
         <p:nvSpPr>
-          <p:cNvPr id="10" name="POR RENOVACIÓN"/>
+          <p:cNvPr id="12" name="POR RENOVACIÓN"/>
           <p:cNvSpPr/>
           <p:nvPr/>
         </p:nvSpPr>
         <p:spPr>
           <a:xfrm>
-            <a:off x="9582912" y="1280160"/>
-            <a:ext cx="2148840" cy="1417320"/>
+            <a:off x="8988552" y="1645920"/>
+            <a:ext cx="2743200" cy="1143000"/>
           </a:xfrm>
           <a:prstGeom prst="roundRect">
             <a:avLst>
-              <a:gd name="adj" fmla="val 7742"/>
+              <a:gd name="adj" fmla="val 9600"/>
             </a:avLst>
           </a:prstGeom>
           <a:solidFill>
@@ -8834,14 +8952,14 @@
       </p:sp>
       <p:sp>
         <p:nvSpPr>
-          <p:cNvPr id="11" name="Text 8"/>
+          <p:cNvPr id="13" name="Text 10"/>
           <p:cNvSpPr txBox="1"/>
           <p:nvPr/>
         </p:nvSpPr>
         <p:spPr>
           <a:xfrm>
-            <a:off x="9747504" y="1408176"/>
-            <a:ext cx="1819656" cy="274320"/>
+            <a:off x="9153144" y="1755648"/>
+            <a:ext cx="2414016" cy="274320"/>
           </a:xfrm>
           <a:prstGeom prst="rect">
             <a:avLst/>
@@ -8873,14 +8991,14 @@
       </p:sp>
       <p:sp>
         <p:nvSpPr>
-          <p:cNvPr id="12" name="Text 9"/>
+          <p:cNvPr id="14" name="Text 11"/>
           <p:cNvSpPr txBox="1"/>
           <p:nvPr/>
         </p:nvSpPr>
         <p:spPr>
           <a:xfrm>
-            <a:off x="9747504" y="1664208"/>
-            <a:ext cx="1819656" cy="548640"/>
+            <a:off x="9153144" y="1993392"/>
+            <a:ext cx="2414016" cy="457200"/>
           </a:xfrm>
           <a:prstGeom prst="rect">
             <a:avLst/>
@@ -8896,7 +9014,7 @@
               <a:buNone/>
             </a:pPr>
             <a:r>
-              <a:rPr lang="en-US" sz="2000" b="1" dirty="0">
+              <a:rPr lang="en-US" sz="2200" b="1" dirty="0">
                 <a:solidFill>
                   <a:srgbClr val="043F52"/>
                 </a:solidFill>
@@ -8904,22 +9022,22 @@
                 <a:ea typeface="Calibri" pitchFamily="34" charset="-122"/>
                 <a:cs typeface="Calibri" pitchFamily="34" charset="-120"/>
               </a:rPr>
-              <a:t>337 k vs 290 k</a:t>
+              <a:t>B 337 k, A 290 k</a:t>
             </a:r>
-            <a:endParaRPr lang="en-US" sz="2000" dirty="0"/>
+            <a:endParaRPr lang="en-US" sz="2200" dirty="0"/>
           </a:p>
         </p:txBody>
       </p:sp>
       <p:sp>
         <p:nvSpPr>
-          <p:cNvPr id="13" name="Text 10"/>
+          <p:cNvPr id="15" name="Text 12"/>
           <p:cNvSpPr txBox="1"/>
           <p:nvPr/>
         </p:nvSpPr>
         <p:spPr>
           <a:xfrm>
-            <a:off x="9747504" y="2240280"/>
-            <a:ext cx="1819656" cy="365760"/>
+            <a:off x="9153144" y="2487168"/>
+            <a:ext cx="2414016" cy="228600"/>
           </a:xfrm>
           <a:prstGeom prst="rect">
             <a:avLst/>
@@ -8943,7 +9061,7 @@
                 <a:ea typeface="Calibri" pitchFamily="34" charset="-122"/>
                 <a:cs typeface="Calibri" pitchFamily="34" charset="-120"/>
               </a:rPr>
-              <a:t>B vs. A: la mora pesa más que 0,6 pp.</a:t>
+              <a:t>la menor mora de B vale más que la mayor conversión de A.</a:t>
             </a:r>
             <a:endParaRPr lang="en-US" sz="1100" dirty="0"/>
           </a:p>
@@ -8951,14 +9069,14 @@
       </p:sp>
       <p:sp>
         <p:nvSpPr>
-          <p:cNvPr id="14" name="Text 11"/>
+          <p:cNvPr id="16" name="Text 13"/>
           <p:cNvSpPr txBox="1"/>
           <p:nvPr/>
         </p:nvSpPr>
         <p:spPr>
           <a:xfrm>
-            <a:off x="7269480" y="2834640"/>
-            <a:ext cx="4480560" cy="320040"/>
+            <a:off x="6126480" y="2880360"/>
+            <a:ext cx="5605272" cy="292608"/>
           </a:xfrm>
           <a:prstGeom prst="rect">
             <a:avLst/>
@@ -8974,7 +9092,7 @@
               <a:buNone/>
             </a:pPr>
             <a:r>
-              <a:rPr lang="en-US" sz="1300" b="1" dirty="0">
+              <a:rPr lang="en-US" sz="1200" b="1" dirty="0">
                 <a:solidFill>
                   <a:srgbClr val="043F52"/>
                 </a:solidFill>
@@ -8984,20 +9102,20 @@
               </a:rPr>
               <a:t>Lo que el cálculo no prueba</a:t>
             </a:r>
-            <a:endParaRPr lang="en-US" sz="1300" dirty="0"/>
+            <a:endParaRPr lang="en-US" sz="1200" dirty="0"/>
           </a:p>
         </p:txBody>
       </p:sp>
       <p:sp>
         <p:nvSpPr>
-          <p:cNvPr id="15" name="Text 12"/>
+          <p:cNvPr id="17" name="Text 14"/>
           <p:cNvSpPr txBox="1"/>
           <p:nvPr/>
         </p:nvSpPr>
         <p:spPr>
           <a:xfrm>
-            <a:off x="7269480" y="3154680"/>
-            <a:ext cx="4462272" cy="1188720"/>
+            <a:off x="6126480" y="3172968"/>
+            <a:ext cx="5605272" cy="1417320"/>
           </a:xfrm>
           <a:prstGeom prst="rect">
             <a:avLst/>
@@ -9025,7 +9143,7 @@
                 <a:ea typeface="Calibri" pitchFamily="34" charset="-122"/>
                 <a:cs typeface="Calibri" pitchFamily="34" charset="-120"/>
               </a:rPr>
-              <a:t>No incremental: con orgánico ≈ 5 % (57 % de las 704 renovaciones de B), el valor incremental baja a ≈ 103 M.</a:t>
+              <a:t>No es incremental: si, como sugiere la base, el 5 % del segmento de B renueva sin contacto, el 57 % de sus renovaciones ocurriría igual y el valor creado por el contacto sería de unos 103 millones.</a:t>
             </a:r>
             <a:endParaRPr lang="en-US" sz="1100" dirty="0"/>
           </a:p>
@@ -9046,7 +9164,7 @@
                 <a:ea typeface="Calibri" pitchFamily="34" charset="-122"/>
                 <a:cs typeface="Calibri" pitchFamily="34" charset="-120"/>
               </a:rPr>
-              <a:t>B vs. A: conversión no distinguible (z ≈ 1,3), mora apenas (z ≈ 2,1); B gana por robustez.</a:t>
+              <a:t>La ventaja de B en conversión no es distinguible del azar y la de mora apenas lo es; B gana por ser más seguro y auditable.</a:t>
             </a:r>
             <a:endParaRPr lang="en-US" sz="1100" dirty="0"/>
           </a:p>
@@ -9067,7 +9185,7 @@
                 <a:ea typeface="Calibri" pitchFamily="34" charset="-122"/>
                 <a:cs typeface="Calibri" pitchFamily="34" charset="-120"/>
               </a:rPr>
-              <a:t>A supera a B solo con mora &lt; 5,8 %. Faltan costo de contacto, LGD y origen del «top 8k».</a:t>
+              <a:t>A solo superaría a B con una mora real menor que 5,8 %; faltan el costo de contacto, la pérdida real por mora y el origen de las conversiones reportadas.</a:t>
             </a:r>
             <a:endParaRPr lang="en-US" sz="1100" dirty="0"/>
           </a:p>
@@ -9075,14 +9193,14 @@
       </p:sp>
       <p:sp>
         <p:nvSpPr>
-          <p:cNvPr id="16" name="Text 13"/>
+          <p:cNvPr id="18" name="Text 15"/>
           <p:cNvSpPr txBox="1"/>
           <p:nvPr/>
         </p:nvSpPr>
         <p:spPr>
           <a:xfrm>
-            <a:off x="457200" y="4297680"/>
-            <a:ext cx="9144000" cy="320040"/>
+            <a:off x="457200" y="4645152"/>
+            <a:ext cx="11274552" cy="292608"/>
           </a:xfrm>
           <a:prstGeom prst="rect">
             <a:avLst/>
@@ -9098,7 +9216,7 @@
               <a:buNone/>
             </a:pPr>
             <a:r>
-              <a:rPr lang="en-US" sz="1300" b="1" dirty="0">
+              <a:rPr lang="en-US" sz="1200" b="1" dirty="0">
                 <a:solidFill>
                   <a:srgbClr val="043F52"/>
                 </a:solidFill>
@@ -9106,9 +9224,9 @@
                 <a:ea typeface="Calibri" pitchFamily="34" charset="-122"/>
                 <a:cs typeface="Calibri" pitchFamily="34" charset="-120"/>
               </a:rPr>
-              <a:t>Lista operativa: cuotas por regional con transferencia por valor marginal</a:t>
+              <a:t>Cómo se reparten los 8.000: cada regional llena su cuota y los cupos sobrantes van donde más valen</a:t>
             </a:r>
-            <a:endParaRPr lang="en-US" sz="1300" dirty="0"/>
+            <a:endParaRPr lang="en-US" sz="1200" dirty="0"/>
           </a:p>
         </p:txBody>
       </p:sp>
@@ -9127,7 +9245,7 @@
           </p:nvPr>
         </p:nvGraphicFramePr>
         <p:xfrm>
-          <a:off x="457200" y="4617720"/>
+          <a:off x="457200" y="4937760"/>
           <a:ext cx="11274552" cy="914400"/>
         </p:xfrm>
         <a:graphic>
@@ -9135,14 +9253,14 @@
             <a:tbl>
               <a:tblPr/>
               <a:tblGrid>
-                <a:gridCol w="1371600"/>
+                <a:gridCol w="1188720"/>
+                <a:gridCol w="914400"/>
+                <a:gridCol w="2286000"/>
+                <a:gridCol w="1737360"/>
                 <a:gridCol w="1005840"/>
-                <a:gridCol w="1371600"/>
-                <a:gridCol w="1554480"/>
-                <a:gridCol w="914400"/>
-                <a:gridCol w="5056632"/>
+                <a:gridCol w="4142232"/>
               </a:tblGrid>
-              <a:tr h="256032">
+              <a:tr h="214884">
                 <a:tc>
                   <a:txBody>
                     <a:bodyPr/>
@@ -9296,7 +9414,7 @@
                           <a:ea typeface="Calibri" pitchFamily="34" charset="-122"/>
                           <a:cs typeface="Calibri" pitchFamily="34" charset="-120"/>
                         </a:rPr>
-                        <a:t>Si ranking global</a:t>
+                        <a:t>Contactos que exigiría un ranking único</a:t>
                       </a:r>
                       <a:endParaRPr lang="en-US" sz="1050" dirty="0">
                         <a:latin typeface="Calibri" charset="0"/>
@@ -9364,7 +9482,7 @@
                           <a:ea typeface="Calibri" pitchFamily="34" charset="-122"/>
                           <a:cs typeface="Calibri" pitchFamily="34" charset="-120"/>
                         </a:rPr>
-                        <a:t>Exceso / ocio</a:t>
+                        <a:t>Frente a la capacidad</a:t>
                       </a:r>
                       <a:endParaRPr lang="en-US" sz="1050" dirty="0">
                         <a:latin typeface="Calibri" charset="0"/>
@@ -9432,7 +9550,7 @@
                           <a:ea typeface="Calibri" pitchFamily="34" charset="-122"/>
                           <a:cs typeface="Calibri" pitchFamily="34" charset="-120"/>
                         </a:rPr>
-                        <a:t>Mora hist.</a:t>
+                        <a:t>Mora histórica</a:t>
                       </a:r>
                       <a:endParaRPr lang="en-US" sz="1050" dirty="0">
                         <a:latin typeface="Calibri" charset="0"/>
@@ -9500,7 +9618,7 @@
                           <a:ea typeface="Calibri" pitchFamily="34" charset="-122"/>
                           <a:cs typeface="Calibri" pitchFamily="34" charset="-120"/>
                         </a:rPr>
-                        <a:t>Regla operativa</a:t>
+                        <a:t>Regla</a:t>
                       </a:r>
                       <a:endParaRPr lang="en-US" sz="1050" dirty="0">
                         <a:latin typeface="Calibri" charset="0"/>
@@ -9552,7 +9670,7 @@
                   </a:tcPr>
                 </a:tc>
               </a:tr>
-              <a:tr h="256032">
+              <a:tr h="214884">
                 <a:tc>
                   <a:txBody>
                     <a:bodyPr/>
@@ -9765,7 +9883,7 @@
                           <a:ea typeface="Calibri" pitchFamily="34" charset="-122"/>
                           <a:cs typeface="Calibri" pitchFamily="34" charset="-120"/>
                         </a:rPr>
-                        <a:t>≈ −200 ociosos</a:t>
+                        <a:t>≈ 200 cupos sin usar</a:t>
                       </a:r>
                       <a:endParaRPr lang="en-US" sz="1050" dirty="0">
                         <a:latin typeface="Calibri" charset="0"/>
@@ -9895,7 +10013,7 @@
                           <a:ea typeface="Calibri" pitchFamily="34" charset="-122"/>
                           <a:cs typeface="Calibri" pitchFamily="34" charset="-120"/>
                         </a:rPr>
-                        <a:t>Llena su cuota con su ranking; cede sobrantes</a:t>
+                        <a:t>Llena su cuota con su propio ranking y cede los cupos que no use.</a:t>
                       </a:r>
                       <a:endParaRPr lang="en-US" sz="1050" dirty="0">
                         <a:latin typeface="Calibri" charset="0"/>
@@ -9944,7 +10062,7 @@
                   </a:tcPr>
                 </a:tc>
               </a:tr>
-              <a:tr h="256032">
+              <a:tr h="214884">
                 <a:tc>
                   <a:txBody>
                     <a:bodyPr/>
@@ -10157,7 +10275,7 @@
                           <a:ea typeface="Calibri" pitchFamily="34" charset="-122"/>
                           <a:cs typeface="Calibri" pitchFamily="34" charset="-120"/>
                         </a:rPr>
-                        <a:t>≈ +200 sin gestor</a:t>
+                        <a:t>≈ 200 clientes sin gestor</a:t>
                       </a:r>
                       <a:endParaRPr lang="en-US" sz="1050" dirty="0">
                         <a:latin typeface="Calibri" charset="0"/>
@@ -10287,7 +10405,7 @@
                           <a:ea typeface="Calibri" pitchFamily="34" charset="-122"/>
                           <a:cs typeface="Calibri" pitchFamily="34" charset="-120"/>
                         </a:rPr>
-                        <a:t>Corte por cuota; lista semanal contra saturación de cierre</a:t>
+                        <a:t>Lista semanal para evitar la saturación de fin de mes.</a:t>
                       </a:r>
                       <a:endParaRPr lang="en-US" sz="1050" dirty="0">
                         <a:latin typeface="Calibri" charset="0"/>
@@ -10336,7 +10454,7 @@
                   </a:tcPr>
                 </a:tc>
               </a:tr>
-              <a:tr h="256032">
+              <a:tr h="214884">
                 <a:tc>
                   <a:txBody>
                     <a:bodyPr/>
@@ -10549,7 +10667,7 @@
                           <a:ea typeface="Calibri" pitchFamily="34" charset="-122"/>
                           <a:cs typeface="Calibri" pitchFamily="34" charset="-120"/>
                         </a:rPr>
-                        <a:t>≈ +100 sin gestor</a:t>
+                        <a:t>≈ 100 clientes sin gestor</a:t>
                       </a:r>
                       <a:endParaRPr lang="en-US" sz="1050" dirty="0">
                         <a:latin typeface="Calibri" charset="0"/>
@@ -10679,7 +10797,7 @@
                           <a:ea typeface="Calibri" pitchFamily="34" charset="-122"/>
                           <a:cs typeface="Calibri" pitchFamily="34" charset="-120"/>
                         </a:rPr>
-                        <a:t>Mayor valor marginal (85 k): recibe cupos transferidos</a:t>
+                        <a:t>El último contacto vale 85 k: recibe los cupos transferidos.</a:t>
                       </a:r>
                       <a:endParaRPr lang="en-US" sz="1050" dirty="0">
                         <a:latin typeface="Calibri" charset="0"/>
@@ -10728,7 +10846,7 @@
                   </a:tcPr>
                 </a:tc>
               </a:tr>
-              <a:tr h="256032">
+              <a:tr h="214884">
                 <a:tc>
                   <a:txBody>
                     <a:bodyPr/>
@@ -10941,7 +11059,7 @@
                           <a:ea typeface="Calibri" pitchFamily="34" charset="-122"/>
                           <a:cs typeface="Calibri" pitchFamily="34" charset="-120"/>
                         </a:rPr>
-                        <a:t>≈ +100 sin gestor</a:t>
+                        <a:t>≈ 100 clientes sin gestor</a:t>
                       </a:r>
                       <a:endParaRPr lang="en-US" sz="1050" dirty="0">
                         <a:latin typeface="Calibri" charset="0"/>
@@ -11071,7 +11189,7 @@
                           <a:ea typeface="Calibri" pitchFamily="34" charset="-122"/>
                           <a:cs typeface="Calibri" pitchFamily="34" charset="-120"/>
                         </a:rPr>
-                        <a:t>Corte por cuota; segundo valor marginal (82 k)</a:t>
+                        <a:t>Segundo en valor del último contacto (82 k).</a:t>
                       </a:r>
                       <a:endParaRPr lang="en-US" sz="1050" dirty="0">
                         <a:latin typeface="Calibri" charset="0"/>
@@ -11120,7 +11238,7 @@
                   </a:tcPr>
                 </a:tc>
               </a:tr>
-              <a:tr h="256032">
+              <a:tr h="214884">
                 <a:tc>
                   <a:txBody>
                     <a:bodyPr/>
@@ -11333,7 +11451,7 @@
                           <a:ea typeface="Calibri" pitchFamily="34" charset="-122"/>
                           <a:cs typeface="Calibri" pitchFamily="34" charset="-120"/>
                         </a:rPr>
-                        <a:t>≈ −200 ociosos</a:t>
+                        <a:t>≈ 200 cupos sin usar</a:t>
                       </a:r>
                       <a:endParaRPr lang="en-US" sz="1050" dirty="0">
                         <a:latin typeface="Calibri" charset="0"/>
@@ -11463,7 +11581,7 @@
                           <a:ea typeface="Calibri" pitchFamily="34" charset="-122"/>
                           <a:cs typeface="Calibri" pitchFamily="34" charset="-120"/>
                         </a:rPr>
-                        <a:t>Menor valor marginal (65 k): cede cupos, tope a pactar (10 %)</a:t>
+                        <a:t>El último contacto vale 65 k: cede cupos, con un tope a pactar.</a:t>
                       </a:r>
                       <a:endParaRPr lang="en-US" sz="1050" dirty="0">
                         <a:latin typeface="Calibri" charset="0"/>
@@ -11518,14 +11636,14 @@
       </p:graphicFrame>
       <p:sp>
         <p:nvSpPr>
-          <p:cNvPr id="18" name="Text 14"/>
+          <p:cNvPr id="20" name="Text 16"/>
           <p:cNvSpPr txBox="1"/>
           <p:nvPr/>
         </p:nvSpPr>
         <p:spPr>
           <a:xfrm>
-            <a:off x="457200" y="6172200"/>
-            <a:ext cx="11274552" cy="256032"/>
+            <a:off x="457200" y="6245352"/>
+            <a:ext cx="11274552" cy="182880"/>
           </a:xfrm>
           <a:prstGeom prst="rect">
             <a:avLst/>
@@ -11549,7 +11667,7 @@
                 <a:ea typeface="Calibri" pitchFamily="34" charset="-122"/>
                 <a:cs typeface="Calibri" pitchFamily="34" charset="-120"/>
               </a:rPr>
-              <a:t>Logística limpia, junio–agosto (n = 696); proyección a centenas con la mezcla regional de la muestra.</a:t>
+              <a:t>Modelo simple, junio a agosto (696 clientes); proyección aproximada a partir de la muestra.</a:t>
             </a:r>
             <a:endParaRPr lang="en-US" sz="1100" dirty="0"/>
           </a:p>
@@ -11636,7 +11754,7 @@
         <p:spPr>
           <a:xfrm>
             <a:off x="457200" y="320040"/>
-            <a:ext cx="11274552" cy="868680"/>
+            <a:ext cx="11274552" cy="502920"/>
           </a:xfrm>
           <a:prstGeom prst="rect">
             <a:avLst/>
@@ -11657,7 +11775,7 @@
                   <a:srgbClr val="043F52"/>
                 </a:solidFill>
               </a:rPr>
-              <a:t>5 · Un piloto de dos meses mide si la lista nueva convierte más y si el contacto crea renovaciones; el riesgo se controla por política</a:t>
+              <a:t>5 · Cómo probamos que funciona y cómo controlamos el riesgo</a:t>
             </a:r>
             <a:endParaRPr lang="en-US" sz="2400" dirty="0"/>
           </a:p>
@@ -11665,14 +11783,81 @@
       </p:sp>
       <p:sp>
         <p:nvSpPr>
-          <p:cNvPr id="3" name="Text 1"/>
+          <p:cNvPr id="3" name="Respuesta"/>
+          <p:cNvSpPr/>
+          <p:nvPr/>
+        </p:nvSpPr>
+        <p:spPr>
+          <a:xfrm>
+            <a:off x="457200" y="868680"/>
+            <a:ext cx="54864" cy="658368"/>
+          </a:xfrm>
+          <a:prstGeom prst="rect">
+            <a:avLst/>
+          </a:prstGeom>
+          <a:solidFill>
+            <a:srgbClr val="009786"/>
+          </a:solidFill>
+          <a:ln w="12700">
+            <a:solidFill>
+              <a:srgbClr val="009786"/>
+            </a:solidFill>
+            <a:prstDash val="solid"/>
+          </a:ln>
+        </p:spPr>
+      </p:sp>
+      <p:sp>
+        <p:nvSpPr>
+          <p:cNvPr id="4" name="Text 2"/>
           <p:cNvSpPr txBox="1"/>
           <p:nvPr/>
         </p:nvSpPr>
         <p:spPr>
           <a:xfrm>
-            <a:off x="457200" y="1280160"/>
-            <a:ext cx="6858000" cy="320040"/>
+            <a:off x="640080" y="868680"/>
+            <a:ext cx="11091672" cy="658368"/>
+          </a:xfrm>
+          <a:prstGeom prst="rect">
+            <a:avLst/>
+          </a:prstGeom>
+          <a:noFill/>
+          <a:ln/>
+        </p:spPr>
+        <p:txBody>
+          <a:bodyPr wrap="square" lIns="0" tIns="0" rIns="0" bIns="0" rtlCol="0" anchor="ctr"/>
+          <a:lstStyle/>
+          <a:p>
+            <a:pPr indent="0" marL="0">
+              <a:lnSpc>
+                <a:spcPct val="110000"/>
+              </a:lnSpc>
+              <a:buNone/>
+            </a:pPr>
+            <a:r>
+              <a:rPr lang="en-US" sz="1250" dirty="0">
+                <a:solidFill>
+                  <a:srgbClr val="043F52"/>
+                </a:solidFill>
+                <a:latin typeface="Calibri" pitchFamily="34" charset="0"/>
+                <a:ea typeface="Calibri" pitchFamily="34" charset="-122"/>
+                <a:cs typeface="Calibri" pitchFamily="34" charset="-120"/>
+              </a:rPr>
+              <a:t>Con un piloto de dos meses: partimos el universo en dos mitades al azar, la herramienta actual elige en una y B en la otra, y dejamos 800 clientes del top de B sin contactar para medir si la llamada crea renovaciones. El riesgo no se prueba en el piloto: ambos brazos usan el mismo corte de Riesgos y la mora se vigila por cosecha mensual.</a:t>
+            </a:r>
+            <a:endParaRPr lang="en-US" sz="1250" dirty="0"/>
+          </a:p>
+        </p:txBody>
+      </p:sp>
+      <p:sp>
+        <p:nvSpPr>
+          <p:cNvPr id="5" name="Text 3"/>
+          <p:cNvSpPr txBox="1"/>
+          <p:nvPr/>
+        </p:nvSpPr>
+        <p:spPr>
+          <a:xfrm>
+            <a:off x="457200" y="1645920"/>
+            <a:ext cx="6858000" cy="292608"/>
           </a:xfrm>
           <a:prstGeom prst="rect">
             <a:avLst/>
@@ -11688,7 +11873,7 @@
               <a:buNone/>
             </a:pPr>
             <a:r>
-              <a:rPr lang="en-US" sz="1300" b="1" dirty="0">
+              <a:rPr lang="en-US" sz="1200" b="1" dirty="0">
                 <a:solidFill>
                   <a:srgbClr val="043F52"/>
                 </a:solidFill>
@@ -11696,26 +11881,26 @@
                 <a:ea typeface="Calibri" pitchFamily="34" charset="-122"/>
                 <a:cs typeface="Calibri" pitchFamily="34" charset="-120"/>
               </a:rPr>
-              <a:t>Diseño: dos pools al azar, mismo piso</a:t>
+              <a:t>Diseño: el universo se parte en dos mitades al azar, con el mismo corte de Riesgos</a:t>
             </a:r>
-            <a:endParaRPr lang="en-US" sz="1300" dirty="0"/>
+            <a:endParaRPr lang="en-US" sz="1200" dirty="0"/>
           </a:p>
         </p:txBody>
       </p:sp>
       <p:sp>
         <p:nvSpPr>
-          <p:cNvPr id="4" name="CHAMPION"/>
+          <p:cNvPr id="6" name="Lista actual (champion)"/>
           <p:cNvSpPr/>
           <p:nvPr/>
         </p:nvSpPr>
         <p:spPr>
           <a:xfrm>
-            <a:off x="457200" y="1645920"/>
-            <a:ext cx="2194560" cy="1371600"/>
+            <a:off x="457200" y="1965960"/>
+            <a:ext cx="2194560" cy="1051560"/>
           </a:xfrm>
           <a:prstGeom prst="roundRect">
             <a:avLst>
-              <a:gd name="adj" fmla="val 8000"/>
+              <a:gd name="adj" fmla="val 10435"/>
             </a:avLst>
           </a:prstGeom>
           <a:solidFill>
@@ -11731,13 +11916,13 @@
       </p:sp>
       <p:sp>
         <p:nvSpPr>
-          <p:cNvPr id="5" name="Text 3"/>
+          <p:cNvPr id="7" name="Text 5"/>
           <p:cNvSpPr txBox="1"/>
           <p:nvPr/>
         </p:nvSpPr>
         <p:spPr>
           <a:xfrm>
-            <a:off x="594360" y="1737360"/>
+            <a:off x="594360" y="2057400"/>
             <a:ext cx="1920240" cy="256032"/>
           </a:xfrm>
           <a:prstGeom prst="rect">
@@ -11754,7 +11939,7 @@
               <a:buNone/>
             </a:pPr>
             <a:r>
-              <a:rPr lang="en-US" sz="1100" b="1" spc="150" kern="0" dirty="0">
+              <a:rPr lang="en-US" sz="1100" b="1" dirty="0">
                 <a:solidFill>
                   <a:srgbClr val="043F52"/>
                 </a:solidFill>
@@ -11762,7 +11947,7 @@
                 <a:ea typeface="Calibri" pitchFamily="34" charset="-122"/>
                 <a:cs typeface="Calibri" pitchFamily="34" charset="-120"/>
               </a:rPr>
-              <a:t>CHAMPION</a:t>
+              <a:t>Lista actual (champion)</a:t>
             </a:r>
             <a:endParaRPr lang="en-US" sz="1100" dirty="0"/>
           </a:p>
@@ -11770,14 +11955,14 @@
       </p:sp>
       <p:sp>
         <p:nvSpPr>
-          <p:cNvPr id="6" name="Text 4"/>
+          <p:cNvPr id="8" name="Text 6"/>
           <p:cNvSpPr txBox="1"/>
           <p:nvPr/>
         </p:nvSpPr>
         <p:spPr>
           <a:xfrm>
-            <a:off x="594360" y="2011680"/>
-            <a:ext cx="1920240" cy="685800"/>
+            <a:off x="594360" y="2331720"/>
+            <a:ext cx="1920240" cy="594360"/>
           </a:xfrm>
           <a:prstGeom prst="rect">
             <a:avLst/>
@@ -11793,7 +11978,7 @@
               <a:buNone/>
             </a:pPr>
             <a:r>
-              <a:rPr lang="en-US" sz="1200" b="1" dirty="0">
+              <a:rPr lang="en-US" sz="1150" dirty="0">
                 <a:solidFill>
                   <a:srgbClr val="043F52"/>
                 </a:solidFill>
@@ -11801,65 +11986,26 @@
                 <a:ea typeface="Calibri" pitchFamily="34" charset="-122"/>
                 <a:cs typeface="Calibri" pitchFamily="34" charset="-120"/>
               </a:rPr>
-              <a:t>Herramienta actual elige 4.000 en su pool</a:t>
+              <a:t>La herramienta actual elige sus 4.000 en una mitad del universo.</a:t>
             </a:r>
-            <a:endParaRPr lang="en-US" sz="1200" dirty="0"/>
+            <a:endParaRPr lang="en-US" sz="1150" dirty="0"/>
           </a:p>
         </p:txBody>
       </p:sp>
       <p:sp>
         <p:nvSpPr>
-          <p:cNvPr id="7" name="Text 5"/>
-          <p:cNvSpPr txBox="1"/>
-          <p:nvPr/>
-        </p:nvSpPr>
-        <p:spPr>
-          <a:xfrm>
-            <a:off x="594360" y="2651760"/>
-            <a:ext cx="1920240" cy="274320"/>
-          </a:xfrm>
-          <a:prstGeom prst="rect">
-            <a:avLst/>
-          </a:prstGeom>
-          <a:noFill/>
-          <a:ln/>
-        </p:spPr>
-        <p:txBody>
-          <a:bodyPr wrap="square" lIns="0" tIns="0" rIns="0" bIns="0" rtlCol="0" anchor="ctr"/>
-          <a:lstStyle/>
-          <a:p>
-            <a:pPr indent="0" marL="0">
-              <a:buNone/>
-            </a:pPr>
-            <a:r>
-              <a:rPr lang="en-US" sz="1100" dirty="0">
-                <a:solidFill>
-                  <a:srgbClr val="043F52"/>
-                </a:solidFill>
-                <a:latin typeface="Calibri" pitchFamily="34" charset="0"/>
-                <a:ea typeface="Calibri" pitchFamily="34" charset="-122"/>
-                <a:cs typeface="Calibri" pitchFamily="34" charset="-120"/>
-              </a:rPr>
-              <a:t>4.000 contactos/mes</a:t>
-            </a:r>
-            <a:endParaRPr lang="en-US" sz="1100" dirty="0"/>
-          </a:p>
-        </p:txBody>
-      </p:sp>
-      <p:sp>
-        <p:nvSpPr>
-          <p:cNvPr id="8" name="CHALLENGER"/>
+          <p:cNvPr id="9" name="Lista nueva"/>
           <p:cNvSpPr/>
           <p:nvPr/>
         </p:nvSpPr>
         <p:spPr>
           <a:xfrm>
-            <a:off x="2788920" y="1645920"/>
-            <a:ext cx="2194560" cy="1371600"/>
+            <a:off x="2788920" y="1965960"/>
+            <a:ext cx="2194560" cy="1051560"/>
           </a:xfrm>
           <a:prstGeom prst="roundRect">
             <a:avLst>
-              <a:gd name="adj" fmla="val 8000"/>
+              <a:gd name="adj" fmla="val 10435"/>
             </a:avLst>
           </a:prstGeom>
           <a:solidFill>
@@ -11875,13 +12021,13 @@
       </p:sp>
       <p:sp>
         <p:nvSpPr>
-          <p:cNvPr id="9" name="Text 7"/>
+          <p:cNvPr id="10" name="Text 8"/>
           <p:cNvSpPr txBox="1"/>
           <p:nvPr/>
         </p:nvSpPr>
         <p:spPr>
           <a:xfrm>
-            <a:off x="2926080" y="1737360"/>
+            <a:off x="2926080" y="2057400"/>
             <a:ext cx="1920240" cy="256032"/>
           </a:xfrm>
           <a:prstGeom prst="rect">
@@ -11898,7 +12044,7 @@
               <a:buNone/>
             </a:pPr>
             <a:r>
-              <a:rPr lang="en-US" sz="1100" b="1" spc="150" kern="0" dirty="0">
+              <a:rPr lang="en-US" sz="1100" b="1" dirty="0">
                 <a:solidFill>
                   <a:srgbClr val="043F52"/>
                 </a:solidFill>
@@ -11906,7 +12052,7 @@
                 <a:ea typeface="Calibri" pitchFamily="34" charset="-122"/>
                 <a:cs typeface="Calibri" pitchFamily="34" charset="-120"/>
               </a:rPr>
-              <a:t>CHALLENGER</a:t>
+              <a:t>Lista nueva</a:t>
             </a:r>
             <a:endParaRPr lang="en-US" sz="1100" dirty="0"/>
           </a:p>
@@ -11914,14 +12060,14 @@
       </p:sp>
       <p:sp>
         <p:nvSpPr>
-          <p:cNvPr id="10" name="Text 8"/>
+          <p:cNvPr id="11" name="Text 9"/>
           <p:cNvSpPr txBox="1"/>
           <p:nvPr/>
         </p:nvSpPr>
         <p:spPr>
           <a:xfrm>
-            <a:off x="2926080" y="2011680"/>
-            <a:ext cx="1920240" cy="685800"/>
+            <a:off x="2926080" y="2331720"/>
+            <a:ext cx="1920240" cy="594360"/>
           </a:xfrm>
           <a:prstGeom prst="rect">
             <a:avLst/>
@@ -11937,7 +12083,7 @@
               <a:buNone/>
             </a:pPr>
             <a:r>
-              <a:rPr lang="en-US" sz="1200" b="1" dirty="0">
+              <a:rPr lang="en-US" sz="1150" dirty="0">
                 <a:solidFill>
                   <a:srgbClr val="043F52"/>
                 </a:solidFill>
@@ -11945,65 +12091,26 @@
                 <a:ea typeface="Calibri" pitchFamily="34" charset="-122"/>
                 <a:cs typeface="Calibri" pitchFamily="34" charset="-120"/>
               </a:rPr>
-              <a:t>B rankea su pool con cuotas; top 4.800</a:t>
+              <a:t>B ordena la otra mitad con cuotas por regional y toma sus 4.800 mejores.</a:t>
             </a:r>
-            <a:endParaRPr lang="en-US" sz="1200" dirty="0"/>
+            <a:endParaRPr lang="en-US" sz="1150" dirty="0"/>
           </a:p>
         </p:txBody>
       </p:sp>
       <p:sp>
         <p:nvSpPr>
-          <p:cNvPr id="11" name="Text 9"/>
-          <p:cNvSpPr txBox="1"/>
-          <p:nvPr/>
-        </p:nvSpPr>
-        <p:spPr>
-          <a:xfrm>
-            <a:off x="2926080" y="2651760"/>
-            <a:ext cx="1920240" cy="274320"/>
-          </a:xfrm>
-          <a:prstGeom prst="rect">
-            <a:avLst/>
-          </a:prstGeom>
-          <a:noFill/>
-          <a:ln/>
-        </p:spPr>
-        <p:txBody>
-          <a:bodyPr wrap="square" lIns="0" tIns="0" rIns="0" bIns="0" rtlCol="0" anchor="ctr"/>
-          <a:lstStyle/>
-          <a:p>
-            <a:pPr indent="0" marL="0">
-              <a:buNone/>
-            </a:pPr>
-            <a:r>
-              <a:rPr lang="en-US" sz="1100" dirty="0">
-                <a:solidFill>
-                  <a:srgbClr val="043F52"/>
-                </a:solidFill>
-                <a:latin typeface="Calibri" pitchFamily="34" charset="0"/>
-                <a:ea typeface="Calibri" pitchFamily="34" charset="-122"/>
-                <a:cs typeface="Calibri" pitchFamily="34" charset="-120"/>
-              </a:rPr>
-              <a:t>4.000 contactados/mes</a:t>
-            </a:r>
-            <a:endParaRPr lang="en-US" sz="1100" dirty="0"/>
-          </a:p>
-        </p:txBody>
-      </p:sp>
-      <p:sp>
-        <p:nvSpPr>
-          <p:cNvPr id="12" name="HOLDOUT"/>
+          <p:cNvPr id="12" name="Grupo de control"/>
           <p:cNvSpPr/>
           <p:nvPr/>
         </p:nvSpPr>
         <p:spPr>
           <a:xfrm>
-            <a:off x="5120640" y="1645920"/>
-            <a:ext cx="2194560" cy="1371600"/>
+            <a:off x="5120640" y="1965960"/>
+            <a:ext cx="2194560" cy="1051560"/>
           </a:xfrm>
           <a:prstGeom prst="roundRect">
             <a:avLst>
-              <a:gd name="adj" fmla="val 8000"/>
+              <a:gd name="adj" fmla="val 10435"/>
             </a:avLst>
           </a:prstGeom>
           <a:solidFill>
@@ -12025,7 +12132,7 @@
         </p:nvSpPr>
         <p:spPr>
           <a:xfrm>
-            <a:off x="5257800" y="1737360"/>
+            <a:off x="5257800" y="2057400"/>
             <a:ext cx="1920240" cy="256032"/>
           </a:xfrm>
           <a:prstGeom prst="rect">
@@ -12042,7 +12149,7 @@
               <a:buNone/>
             </a:pPr>
             <a:r>
-              <a:rPr lang="en-US" sz="1100" b="1" spc="150" kern="0" dirty="0">
+              <a:rPr lang="en-US" sz="1100" b="1" dirty="0">
                 <a:solidFill>
                   <a:srgbClr val="043F52"/>
                 </a:solidFill>
@@ -12050,7 +12157,7 @@
                 <a:ea typeface="Calibri" pitchFamily="34" charset="-122"/>
                 <a:cs typeface="Calibri" pitchFamily="34" charset="-120"/>
               </a:rPr>
-              <a:t>HOLDOUT</a:t>
+              <a:t>Grupo de control</a:t>
             </a:r>
             <a:endParaRPr lang="en-US" sz="1100" dirty="0"/>
           </a:p>
@@ -12064,8 +12171,8 @@
         </p:nvSpPr>
         <p:spPr>
           <a:xfrm>
-            <a:off x="5257800" y="2011680"/>
-            <a:ext cx="1920240" cy="685800"/>
+            <a:off x="5257800" y="2331720"/>
+            <a:ext cx="1920240" cy="594360"/>
           </a:xfrm>
           <a:prstGeom prst="rect">
             <a:avLst/>
@@ -12081,7 +12188,7 @@
               <a:buNone/>
             </a:pPr>
             <a:r>
-              <a:rPr lang="en-US" sz="1200" b="1" dirty="0">
+              <a:rPr lang="en-US" sz="1150" dirty="0">
                 <a:solidFill>
                   <a:srgbClr val="043F52"/>
                 </a:solidFill>
@@ -12089,9 +12196,9 @@
                 <a:ea typeface="Calibri" pitchFamily="34" charset="-122"/>
                 <a:cs typeface="Calibri" pitchFamily="34" charset="-120"/>
               </a:rPr>
-              <a:t>800 al azar del top de B, sin contacto</a:t>
+              <a:t>800 de esos 4.800, elegidos al azar, no se contactan: son el grupo de control.</a:t>
             </a:r>
-            <a:endParaRPr lang="en-US" sz="1200" dirty="0"/>
+            <a:endParaRPr lang="en-US" sz="1150" dirty="0"/>
           </a:p>
         </p:txBody>
       </p:sp>
@@ -12103,46 +12210,7 @@
         </p:nvSpPr>
         <p:spPr>
           <a:xfrm>
-            <a:off x="5257800" y="2651760"/>
-            <a:ext cx="1920240" cy="274320"/>
-          </a:xfrm>
-          <a:prstGeom prst="rect">
-            <a:avLst/>
-          </a:prstGeom>
-          <a:noFill/>
-          <a:ln/>
-        </p:spPr>
-        <p:txBody>
-          <a:bodyPr wrap="square" lIns="0" tIns="0" rIns="0" bIns="0" rtlCol="0" anchor="ctr"/>
-          <a:lstStyle/>
-          <a:p>
-            <a:pPr indent="0" marL="0">
-              <a:buNone/>
-            </a:pPr>
-            <a:r>
-              <a:rPr lang="en-US" sz="1100" dirty="0">
-                <a:solidFill>
-                  <a:srgbClr val="043F52"/>
-                </a:solidFill>
-                <a:latin typeface="Calibri" pitchFamily="34" charset="0"/>
-                <a:ea typeface="Calibri" pitchFamily="34" charset="-122"/>
-                <a:cs typeface="Calibri" pitchFamily="34" charset="-120"/>
-              </a:rPr>
-              <a:t>≈ 800 clientes/mes</a:t>
-            </a:r>
-            <a:endParaRPr lang="en-US" sz="1100" dirty="0"/>
-          </a:p>
-        </p:txBody>
-      </p:sp>
-      <p:sp>
-        <p:nvSpPr>
-          <p:cNvPr id="16" name="Text 14"/>
-          <p:cNvSpPr txBox="1"/>
-          <p:nvPr/>
-        </p:nvSpPr>
-        <p:spPr>
-          <a:xfrm>
-            <a:off x="457200" y="3154680"/>
+            <a:off x="457200" y="3127248"/>
             <a:ext cx="6858000" cy="1463040"/>
           </a:xfrm>
           <a:prstGeom prst="rect">
@@ -12171,7 +12239,7 @@
                 <a:ea typeface="Calibri" pitchFamily="34" charset="-122"/>
                 <a:cs typeface="Calibri" pitchFamily="34" charset="-120"/>
               </a:rPr>
-              <a:t>Calidad: </a:t>
+              <a:t>Calidad de la lista: </a:t>
             </a:r>
             <a:pPr indent="0" marL="0">
               <a:spcAft>
@@ -12188,7 +12256,7 @@
                 <a:ea typeface="Calibri" pitchFamily="34" charset="-122"/>
                 <a:cs typeface="Calibri" pitchFamily="34" charset="-120"/>
               </a:rPr>
-              <a:t>3,6 → 5,4 % se detecta con 2.081 por brazo en un mes.</a:t>
+              <a:t>una mejora de 3,6 % a 5,4 % se detecta en un mes con 4.000 contactos por brazo.</a:t>
             </a:r>
             <a:endParaRPr lang="en-US" sz="1100" dirty="0"/>
           </a:p>
@@ -12226,7 +12294,7 @@
                 <a:ea typeface="Calibri" pitchFamily="34" charset="-122"/>
                 <a:cs typeface="Calibri" pitchFamily="34" charset="-120"/>
               </a:rPr>
-              <a:t>baseline 5 % (tercil alto); +3,8 pp en 0,6 meses, +1,7 pp en 2,3.</a:t>
+              <a:t>si el contacto añade 3,8 puntos sobre el 5 % que renueva solo, el grupo de control lo muestra en menos de un mes; si añade 1,7, en poco más de dos.</a:t>
             </a:r>
             <a:endParaRPr lang="en-US" sz="1100" dirty="0"/>
           </a:p>
@@ -12264,7 +12332,7 @@
                 <a:ea typeface="Calibri" pitchFamily="34" charset="-122"/>
                 <a:cs typeface="Calibri" pitchFamily="34" charset="-120"/>
               </a:rPr>
-              <a:t>mismo piso en ambos brazos; vigilado por vintage.</a:t>
+              <a:t>no se prueba aquí. Mismo corte de Riesgos en ambos brazos y seguimiento de la mora de cada cosecha.</a:t>
             </a:r>
             <a:endParaRPr lang="en-US" sz="1100" dirty="0"/>
           </a:p>
@@ -12302,7 +12370,7 @@
                 <a:ea typeface="Calibri" pitchFamily="34" charset="-122"/>
                 <a:cs typeface="Calibri" pitchFamily="34" charset="-120"/>
               </a:rPr>
-              <a:t>el champion sin holdout no mide su incrementalidad; opción, 400 allí (≈ 2,3 M/mes).</a:t>
+              <a:t>no mediremos si la herramienta actual crea renovaciones; añadir 400 de control allí costaría unos 2,3 millones al mes.</a:t>
             </a:r>
             <a:endParaRPr lang="en-US" sz="1100" dirty="0"/>
           </a:p>
@@ -12310,14 +12378,14 @@
       </p:sp>
       <p:sp>
         <p:nvSpPr>
-          <p:cNvPr id="17" name="Text 15"/>
+          <p:cNvPr id="16" name="Text 14"/>
           <p:cNvSpPr txBox="1"/>
           <p:nvPr/>
         </p:nvSpPr>
         <p:spPr>
           <a:xfrm>
-            <a:off x="7589520" y="1280160"/>
-            <a:ext cx="4142232" cy="320040"/>
+            <a:off x="7589520" y="1645920"/>
+            <a:ext cx="4142232" cy="292608"/>
           </a:xfrm>
           <a:prstGeom prst="rect">
             <a:avLst/>
@@ -12333,7 +12401,7 @@
               <a:buNone/>
             </a:pPr>
             <a:r>
-              <a:rPr lang="en-US" sz="1300" b="1" dirty="0">
+              <a:rPr lang="en-US" sz="1200" b="1" dirty="0">
                 <a:solidFill>
                   <a:srgbClr val="043F52"/>
                 </a:solidFill>
@@ -12341,9 +12409,9 @@
                 <a:ea typeface="Calibri" pitchFamily="34" charset="-122"/>
                 <a:cs typeface="Calibri" pitchFamily="34" charset="-120"/>
               </a:rPr>
-              <a:t>Reglas de salida (pre-registradas)</a:t>
+              <a:t>Reglas de decisión, escritas antes del piloto</a:t>
             </a:r>
-            <a:endParaRPr lang="en-US" sz="1300" dirty="0"/>
+            <a:endParaRPr lang="en-US" sz="1200" dirty="0"/>
           </a:p>
         </p:txBody>
       </p:sp>
@@ -12362,7 +12430,7 @@
           </p:nvPr>
         </p:nvGraphicFramePr>
         <p:xfrm>
-          <a:off x="7589520" y="1645920"/>
+          <a:off x="7589520" y="1965960"/>
           <a:ext cx="4142232" cy="914400"/>
         </p:xfrm>
         <a:graphic>
@@ -12373,7 +12441,7 @@
                 <a:gridCol w="2057400"/>
                 <a:gridCol w="2084832"/>
               </a:tblGrid>
-              <a:tr h="274320">
+              <a:tr h="329184">
                 <a:tc>
                   <a:txBody>
                     <a:bodyPr/>
@@ -12459,7 +12527,7 @@
                           <a:ea typeface="Calibri" pitchFamily="34" charset="-122"/>
                           <a:cs typeface="Calibri" pitchFamily="34" charset="-120"/>
                         </a:rPr>
-                        <a:t>Ship si</a:t>
+                        <a:t>Se adopta si</a:t>
                       </a:r>
                       <a:endParaRPr lang="en-US" sz="1050" dirty="0">
                         <a:latin typeface="Calibri" charset="0"/>
@@ -12511,7 +12579,7 @@
                   </a:tcPr>
                 </a:tc>
               </a:tr>
-              <a:tr h="274320">
+              <a:tr h="329184">
                 <a:tc>
                   <a:txBody>
                     <a:bodyPr/>
@@ -12529,7 +12597,7 @@
                           <a:ea typeface="Calibri" pitchFamily="34" charset="-122"/>
                           <a:cs typeface="Calibri" pitchFamily="34" charset="-120"/>
                         </a:rPr>
-                        <a:t>Calidad: challenger − champion</a:t>
+                        <a:t>La lista nueva convierte más que la actual</a:t>
                       </a:r>
                       <a:endParaRPr lang="en-US" sz="1050" dirty="0">
                         <a:latin typeface="Calibri" charset="0"/>
@@ -12594,7 +12662,7 @@
                           <a:ea typeface="Calibri" pitchFamily="34" charset="-122"/>
                           <a:cs typeface="Calibri" pitchFamily="34" charset="-120"/>
                         </a:rPr>
-                        <a:t>≥ +1,5 pp, IC 95 % excluye 0</a:t>
+                        <a:t>al menos 1,5 puntos más, con diferencia estadísticamente clara</a:t>
                       </a:r>
                       <a:endParaRPr lang="en-US" sz="1050" dirty="0">
                         <a:latin typeface="Calibri" charset="0"/>
@@ -12643,7 +12711,7 @@
                   </a:tcPr>
                 </a:tc>
               </a:tr>
-              <a:tr h="274320">
+              <a:tr h="329184">
                 <a:tc>
                   <a:txBody>
                     <a:bodyPr/>
@@ -12661,7 +12729,7 @@
                           <a:ea typeface="Calibri" pitchFamily="34" charset="-122"/>
                           <a:cs typeface="Calibri" pitchFamily="34" charset="-120"/>
                         </a:rPr>
-                        <a:t>Efecto: contactado − holdout</a:t>
+                        <a:t>Contactar crea renovaciones frente al grupo de control</a:t>
                       </a:r>
                       <a:endParaRPr lang="en-US" sz="1050" dirty="0">
                         <a:latin typeface="Calibri" charset="0"/>
@@ -12726,7 +12794,7 @@
                           <a:ea typeface="Calibri" pitchFamily="34" charset="-122"/>
                           <a:cs typeface="Calibri" pitchFamily="34" charset="-120"/>
                         </a:rPr>
-                        <a:t>&gt; 0, IC 95 % excluye 0</a:t>
+                        <a:t>diferencia estadísticamente clara</a:t>
                       </a:r>
                       <a:endParaRPr lang="en-US" sz="1050" dirty="0">
                         <a:latin typeface="Calibri" charset="0"/>
@@ -12775,7 +12843,7 @@
                   </a:tcPr>
                 </a:tc>
               </a:tr>
-              <a:tr h="274320">
+              <a:tr h="329184">
                 <a:tc>
                   <a:txBody>
                     <a:bodyPr/>
@@ -12858,7 +12926,7 @@
                           <a:ea typeface="Calibri" pitchFamily="34" charset="-122"/>
                           <a:cs typeface="Calibri" pitchFamily="34" charset="-120"/>
                         </a:rPr>
-                        <a:t>≤ champion + 1 pp</a:t>
+                        <a:t>no supera la actual en más de 1 punto</a:t>
                       </a:r>
                       <a:endParaRPr lang="en-US" sz="1050" dirty="0">
                         <a:latin typeface="Calibri" charset="0"/>
@@ -12907,7 +12975,7 @@
                   </a:tcPr>
                 </a:tc>
               </a:tr>
-              <a:tr h="274320">
+              <a:tr h="329184">
                 <a:tc>
                   <a:txBody>
                     <a:bodyPr/>
@@ -12925,7 +12993,7 @@
                           <a:ea typeface="Calibri" pitchFamily="34" charset="-122"/>
                           <a:cs typeface="Calibri" pitchFamily="34" charset="-120"/>
                         </a:rPr>
-                        <a:t>Quejas y opt-out por 1.000</a:t>
+                        <a:t>Quejas y bajas por 1.000</a:t>
                       </a:r>
                       <a:endParaRPr lang="en-US" sz="1050" dirty="0">
                         <a:latin typeface="Calibri" charset="0"/>
@@ -12990,7 +13058,7 @@
                           <a:ea typeface="Calibri" pitchFamily="34" charset="-122"/>
                           <a:cs typeface="Calibri" pitchFamily="34" charset="-120"/>
                         </a:rPr>
-                        <a:t>No peores que el champion</a:t>
+                        <a:t>no peores que hoy</a:t>
                       </a:r>
                       <a:endParaRPr lang="en-US" sz="1050" dirty="0">
                         <a:latin typeface="Calibri" charset="0"/>
@@ -13039,7 +13107,7 @@
                   </a:tcPr>
                 </a:tc>
               </a:tr>
-              <a:tr h="274320">
+              <a:tr h="329184">
                 <a:tc>
                   <a:txBody>
                     <a:bodyPr/>
@@ -13057,7 +13125,7 @@
                           <a:ea typeface="Calibri" pitchFamily="34" charset="-122"/>
                           <a:cs typeface="Calibri" pitchFamily="34" charset="-120"/>
                         </a:rPr>
-                        <a:t>Ejecución y aleatorización</a:t>
+                        <a:t>La lista se ejecutó y la asignación al azar se cumplió</a:t>
                       </a:r>
                       <a:endParaRPr lang="en-US" sz="1050" dirty="0">
                         <a:latin typeface="Calibri" charset="0"/>
@@ -13122,7 +13190,7 @@
                           <a:ea typeface="Calibri" pitchFamily="34" charset="-122"/>
                           <a:cs typeface="Calibri" pitchFamily="34" charset="-120"/>
                         </a:rPr>
-                        <a:t>≥ 90 % por regional; sin sesgo de asignación</a:t>
+                        <a:t>al menos 90 % por regional; sin sesgo de asignación</a:t>
                       </a:r>
                       <a:endParaRPr lang="en-US" sz="1050" dirty="0">
                         <a:latin typeface="Calibri" charset="0"/>
@@ -13177,14 +13245,14 @@
       </p:graphicFrame>
       <p:sp>
         <p:nvSpPr>
-          <p:cNvPr id="19" name="Text 16"/>
+          <p:cNvPr id="18" name="Text 15"/>
           <p:cNvSpPr txBox="1"/>
           <p:nvPr/>
         </p:nvSpPr>
         <p:spPr>
           <a:xfrm>
-            <a:off x="457200" y="4617720"/>
-            <a:ext cx="6858000" cy="320040"/>
+            <a:off x="457200" y="4343400"/>
+            <a:ext cx="6858000" cy="292608"/>
           </a:xfrm>
           <a:prstGeom prst="rect">
             <a:avLst/>
@@ -13200,7 +13268,7 @@
               <a:buNone/>
             </a:pPr>
             <a:r>
-              <a:rPr lang="en-US" sz="1300" b="1" dirty="0">
+              <a:rPr lang="en-US" sz="1200" b="1" dirty="0">
                 <a:solidFill>
                   <a:srgbClr val="043F52"/>
                 </a:solidFill>
@@ -13208,9 +13276,9 @@
                 <a:ea typeface="Calibri" pitchFamily="34" charset="-122"/>
                 <a:cs typeface="Calibri" pitchFamily="34" charset="-120"/>
               </a:rPr>
-              <a:t>Monitoreo (tres meses)</a:t>
+              <a:t>Monitoreo durante los tres meses</a:t>
             </a:r>
-            <a:endParaRPr lang="en-US" sz="1300" dirty="0"/>
+            <a:endParaRPr lang="en-US" sz="1200" dirty="0"/>
           </a:p>
         </p:txBody>
       </p:sp>
@@ -13229,7 +13297,7 @@
           </p:nvPr>
         </p:nvGraphicFramePr>
         <p:xfrm>
-          <a:off x="457200" y="4937760"/>
+          <a:off x="457200" y="4636008"/>
           <a:ext cx="6858000" cy="914400"/>
         </p:xfrm>
         <a:graphic>
@@ -13237,11 +13305,11 @@
             <a:tbl>
               <a:tblPr/>
               <a:tblGrid>
-                <a:gridCol w="1188720"/>
-                <a:gridCol w="3749040"/>
-                <a:gridCol w="1920240"/>
+                <a:gridCol w="960120"/>
+                <a:gridCol w="3337560"/>
+                <a:gridCol w="2560320"/>
               </a:tblGrid>
-              <a:tr h="192024">
+              <a:tr h="196596">
                 <a:tc>
                   <a:txBody>
                     <a:bodyPr/>
@@ -13327,7 +13395,7 @@
                           <a:ea typeface="Calibri" pitchFamily="34" charset="-122"/>
                           <a:cs typeface="Calibri" pitchFamily="34" charset="-120"/>
                         </a:rPr>
-                        <a:t>Métrica</a:t>
+                        <a:t>Qué se vigila</a:t>
                       </a:r>
                       <a:endParaRPr lang="en-US" sz="1050" dirty="0">
                         <a:latin typeface="Calibri" charset="0"/>
@@ -13447,7 +13515,7 @@
                   </a:tcPr>
                 </a:tc>
               </a:tr>
-              <a:tr h="192024">
+              <a:tr h="196596">
                 <a:tc>
                   <a:txBody>
                     <a:bodyPr/>
@@ -13530,7 +13598,7 @@
                           <a:ea typeface="Calibri" pitchFamily="34" charset="-122"/>
                           <a:cs typeface="Calibri" pitchFamily="34" charset="-120"/>
                         </a:rPr>
-                        <a:t>Esquema, rangos y fechas posteriores al corte; cada corte</a:t>
+                        <a:t>Validación de cada corte: formatos, rangos y fechas</a:t>
                       </a:r>
                       <a:endParaRPr lang="en-US" sz="1050" dirty="0">
                         <a:latin typeface="Calibri" charset="0"/>
@@ -13595,7 +13663,7 @@
                           <a:ea typeface="Calibri" pitchFamily="34" charset="-122"/>
                           <a:cs typeface="Calibri" pitchFamily="34" charset="-120"/>
                         </a:rPr>
-                        <a:t>Bloqueo: no se puntúa</a:t>
+                        <a:t>Si falla, no se puntúa</a:t>
                       </a:r>
                       <a:endParaRPr lang="en-US" sz="1050" dirty="0">
                         <a:latin typeface="Calibri" charset="0"/>
@@ -13644,7 +13712,7 @@
                   </a:tcPr>
                 </a:tc>
               </a:tr>
-              <a:tr h="192024">
+              <a:tr h="196596">
                 <a:tc>
                   <a:txBody>
                     <a:bodyPr/>
@@ -13662,7 +13730,7 @@
                           <a:ea typeface="Calibri" pitchFamily="34" charset="-122"/>
                           <a:cs typeface="Calibri" pitchFamily="34" charset="-120"/>
                         </a:rPr>
-                        <a:t>Drift</a:t>
+                        <a:t>Población</a:t>
                       </a:r>
                       <a:endParaRPr lang="en-US" sz="1050" dirty="0">
                         <a:latin typeface="Calibri" charset="0"/>
@@ -13727,7 +13795,7 @@
                           <a:ea typeface="Calibri" pitchFamily="34" charset="-122"/>
                           <a:cs typeface="Calibri" pitchFamily="34" charset="-120"/>
                         </a:rPr>
-                        <a:t>PSI del score sobre el universo (25.000); drift por variable</a:t>
+                        <a:t>Cambios en la población (PSI del score y de cada variable)</a:t>
                       </a:r>
                       <a:endParaRPr lang="en-US" sz="1050" dirty="0">
                         <a:latin typeface="Calibri" charset="0"/>
@@ -13792,7 +13860,7 @@
                           <a:ea typeface="Calibri" pitchFamily="34" charset="-122"/>
                           <a:cs typeface="Calibri" pitchFamily="34" charset="-120"/>
                         </a:rPr>
-                        <a:t>0,10 investigar; 0,25 revalidar</a:t>
+                        <a:t>Investigar desde 0,10; revalidar desde 0,25</a:t>
                       </a:r>
                       <a:endParaRPr lang="en-US" sz="1050" dirty="0">
                         <a:latin typeface="Calibri" charset="0"/>
@@ -13841,7 +13909,7 @@
                   </a:tcPr>
                 </a:tc>
               </a:tr>
-              <a:tr h="192024">
+              <a:tr h="196596">
                 <a:tc>
                   <a:txBody>
                     <a:bodyPr/>
@@ -13859,7 +13927,7 @@
                           <a:ea typeface="Calibri" pitchFamily="34" charset="-122"/>
                           <a:cs typeface="Calibri" pitchFamily="34" charset="-120"/>
                         </a:rPr>
-                        <a:t>Performance</a:t>
+                        <a:t>Desempeño</a:t>
                       </a:r>
                       <a:endParaRPr lang="en-US" sz="1050" dirty="0">
                         <a:latin typeface="Calibri" charset="0"/>
@@ -13924,7 +13992,7 @@
                           <a:ea typeface="Calibri" pitchFamily="34" charset="-122"/>
                           <a:cs typeface="Calibri" pitchFamily="34" charset="-120"/>
                         </a:rPr>
-                        <a:t>AUC, calibración y conversión top-k con labels a 30–60 días</a:t>
+                        <a:t>Resultado real del modelo cuando el dato madura (30 a 60 días)</a:t>
                       </a:r>
                       <a:endParaRPr lang="en-US" sz="1050" dirty="0">
                         <a:latin typeface="Calibri" charset="0"/>
@@ -13989,7 +14057,7 @@
                           <a:ea typeface="Calibri" pitchFamily="34" charset="-122"/>
                           <a:cs typeface="Calibri" pitchFamily="34" charset="-120"/>
                         </a:rPr>
-                        <a:t>Recalibrar o rollback</a:t>
+                        <a:t>Recalibrar o volver a la herramienta actual</a:t>
                       </a:r>
                       <a:endParaRPr lang="en-US" sz="1050" dirty="0">
                         <a:latin typeface="Calibri" charset="0"/>
@@ -14038,7 +14106,7 @@
                   </a:tcPr>
                 </a:tc>
               </a:tr>
-              <a:tr h="192024">
+              <a:tr h="196596">
                 <a:tc>
                   <a:txBody>
                     <a:bodyPr/>
@@ -14121,7 +14189,7 @@
                           <a:ea typeface="Calibri" pitchFamily="34" charset="-122"/>
                           <a:cs typeface="Calibri" pitchFamily="34" charset="-120"/>
                         </a:rPr>
-                        <a:t>Vintage de mora 30+ por cohorte, brazo y regional</a:t>
+                        <a:t>Mora 30+ de cada cosecha mensual, por brazo y regional</a:t>
                       </a:r>
                       <a:endParaRPr lang="en-US" sz="1050" dirty="0">
                         <a:latin typeface="Calibri" charset="0"/>
@@ -14186,7 +14254,7 @@
                           <a:ea typeface="Calibri" pitchFamily="34" charset="-122"/>
                           <a:cs typeface="Calibri" pitchFamily="34" charset="-120"/>
                         </a:rPr>
-                        <a:t>Subir corte; pausa</a:t>
+                        <a:t>Endurecer el corte o pausar</a:t>
                       </a:r>
                       <a:endParaRPr lang="en-US" sz="1050" dirty="0">
                         <a:latin typeface="Calibri" charset="0"/>
@@ -14235,7 +14303,7 @@
                   </a:tcPr>
                 </a:tc>
               </a:tr>
-              <a:tr h="192024">
+              <a:tr h="196596">
                 <a:tc>
                   <a:txBody>
                     <a:bodyPr/>
@@ -14318,7 +14386,7 @@
                           <a:ea typeface="Calibri" pitchFamily="34" charset="-122"/>
                           <a:cs typeface="Calibri" pitchFamily="34" charset="-120"/>
                         </a:rPr>
-                        <a:t>% de lista contactada por regional y semana</a:t>
+                        <a:t>Lista contactada por regional y semana</a:t>
                       </a:r>
                       <a:endParaRPr lang="en-US" sz="1050" dirty="0">
                         <a:latin typeface="Calibri" charset="0"/>
@@ -14432,7 +14500,7 @@
                   </a:tcPr>
                 </a:tc>
               </a:tr>
-              <a:tr h="192024">
+              <a:tr h="196596">
                 <a:tc>
                   <a:txBody>
                     <a:bodyPr/>
@@ -14515,7 +14583,7 @@
                           <a:ea typeface="Calibri" pitchFamily="34" charset="-122"/>
                           <a:cs typeface="Calibri" pitchFamily="34" charset="-120"/>
                         </a:rPr>
-                        <a:t>Quejas y opt-out por 1.000 contactos</a:t>
+                        <a:t>Quejas y bajas por 1.000 contactos</a:t>
                       </a:r>
                       <a:endParaRPr lang="en-US" sz="1050" dirty="0">
                         <a:latin typeface="Calibri" charset="0"/>
@@ -14580,7 +14648,7 @@
                           <a:ea typeface="Calibri" pitchFamily="34" charset="-122"/>
                           <a:cs typeface="Calibri" pitchFamily="34" charset="-120"/>
                         </a:rPr>
-                        <a:t>Pausa</a:t>
+                        <a:t>Pausar</a:t>
                       </a:r>
                       <a:endParaRPr lang="en-US" sz="1050" dirty="0">
                         <a:latin typeface="Calibri" charset="0"/>
@@ -14635,14 +14703,14 @@
       </p:graphicFrame>
       <p:sp>
         <p:nvSpPr>
-          <p:cNvPr id="21" name="Text 17"/>
+          <p:cNvPr id="20" name="Text 16"/>
           <p:cNvSpPr txBox="1"/>
           <p:nvPr/>
         </p:nvSpPr>
         <p:spPr>
           <a:xfrm>
-            <a:off x="7589520" y="4617720"/>
-            <a:ext cx="4142232" cy="320040"/>
+            <a:off x="7589520" y="4114800"/>
+            <a:ext cx="4142232" cy="292608"/>
           </a:xfrm>
           <a:prstGeom prst="rect">
             <a:avLst/>
@@ -14658,7 +14726,7 @@
               <a:buNone/>
             </a:pPr>
             <a:r>
-              <a:rPr lang="en-US" sz="1300" b="1" dirty="0">
+              <a:rPr lang="en-US" sz="1200" b="1" dirty="0">
                 <a:solidFill>
                   <a:srgbClr val="043F52"/>
                 </a:solidFill>
@@ -14666,22 +14734,22 @@
                 <a:ea typeface="Calibri" pitchFamily="34" charset="-122"/>
                 <a:cs typeface="Calibri" pitchFamily="34" charset="-120"/>
               </a:rPr>
-              <a:t>No libero si</a:t>
+              <a:t>No se libera si</a:t>
             </a:r>
-            <a:endParaRPr lang="en-US" sz="1300" dirty="0"/>
+            <a:endParaRPr lang="en-US" sz="1200" dirty="0"/>
           </a:p>
         </p:txBody>
       </p:sp>
       <p:sp>
         <p:nvSpPr>
-          <p:cNvPr id="22" name="Text 18"/>
+          <p:cNvPr id="21" name="Text 17"/>
           <p:cNvSpPr txBox="1"/>
           <p:nvPr/>
         </p:nvSpPr>
         <p:spPr>
           <a:xfrm>
-            <a:off x="7589520" y="4937760"/>
-            <a:ext cx="4142232" cy="1417320"/>
+            <a:off x="7589520" y="4407408"/>
+            <a:ext cx="4142232" cy="2011680"/>
           </a:xfrm>
           <a:prstGeom prst="rect">
             <a:avLst/>
@@ -14709,7 +14777,7 @@
                 <a:ea typeface="Calibri" pitchFamily="34" charset="-122"/>
                 <a:cs typeface="Calibri" pitchFamily="34" charset="-120"/>
               </a:rPr>
-              <a:t>Variable no point-in-time o split no temporal.</a:t>
+              <a:t>Alguna variable no existe en producción al momento de puntuar, o el modelo se validó sin respetar el tiempo.</a:t>
             </a:r>
             <a:endParaRPr lang="en-US" sz="1100" dirty="0"/>
           </a:p>
@@ -14730,7 +14798,7 @@
                 <a:ea typeface="Calibri" pitchFamily="34" charset="-122"/>
                 <a:cs typeface="Calibri" pitchFamily="34" charset="-120"/>
               </a:rPr>
-              <a:t>Sin calibración verificada, holdout, rollback o dueño.</a:t>
+              <a:t>No hay calibración verificada, grupo de control, plan de vuelta atrás ni dueño de cada alerta.</a:t>
             </a:r>
             <a:endParaRPr lang="en-US" sz="1100" dirty="0"/>
           </a:p>
@@ -14751,7 +14819,7 @@
                 <a:ea typeface="Calibri" pitchFamily="34" charset="-122"/>
                 <a:cs typeface="Calibri" pitchFamily="34" charset="-120"/>
               </a:rPr>
-              <a:t>Capacidad que no ejecuta ≥ 90 % de la lista: el modelo no se prueba.</a:t>
+              <a:t>La operación no ejecuta al menos el 90 % de la lista: el modelo no se está probando.</a:t>
             </a:r>
             <a:endParaRPr lang="en-US" sz="1100" dirty="0"/>
           </a:p>
@@ -14772,7 +14840,7 @@
                 <a:ea typeface="Calibri" pitchFamily="34" charset="-122"/>
                 <a:cs typeface="Calibri" pitchFamily="34" charset="-120"/>
               </a:rPr>
-              <a:t>Selección que excluye un grupo o regional sin explicación de negocio.</a:t>
+              <a:t>La selección excluye a un grupo o regional sin una explicación de negocio.</a:t>
             </a:r>
             <a:endParaRPr lang="en-US" sz="1100" dirty="0"/>
           </a:p>
@@ -14859,7 +14927,7 @@
         <p:spPr>
           <a:xfrm>
             <a:off x="457200" y="320040"/>
-            <a:ext cx="11274552" cy="868680"/>
+            <a:ext cx="11274552" cy="502920"/>
           </a:xfrm>
           <a:prstGeom prst="rect">
             <a:avLst/>
@@ -14880,7 +14948,7 @@
                   <a:srgbClr val="043F52"/>
                 </a:solidFill>
               </a:rPr>
-              <a:t>6 · Recomendación: pilotear B con holdout desde el próximo corte, no liberar C y auditar A y D</a:t>
+              <a:t>6 · Qué recomendamos hacer ahora</a:t>
             </a:r>
             <a:endParaRPr lang="en-US" sz="2400" dirty="0"/>
           </a:p>
@@ -14888,18 +14956,85 @@
       </p:sp>
       <p:sp>
         <p:nvSpPr>
-          <p:cNvPr id="3" name="Decisión 1"/>
+          <p:cNvPr id="3" name="Respuesta"/>
           <p:cNvSpPr/>
           <p:nvPr/>
         </p:nvSpPr>
         <p:spPr>
           <a:xfrm>
-            <a:off x="457200" y="1325880"/>
-            <a:ext cx="3657600" cy="1554480"/>
+            <a:off x="457200" y="868680"/>
+            <a:ext cx="54864" cy="658368"/>
+          </a:xfrm>
+          <a:prstGeom prst="rect">
+            <a:avLst/>
+          </a:prstGeom>
+          <a:solidFill>
+            <a:srgbClr val="009786"/>
+          </a:solidFill>
+          <a:ln w="12700">
+            <a:solidFill>
+              <a:srgbClr val="009786"/>
+            </a:solidFill>
+            <a:prstDash val="solid"/>
+          </a:ln>
+        </p:spPr>
+      </p:sp>
+      <p:sp>
+        <p:nvSpPr>
+          <p:cNvPr id="4" name="Text 2"/>
+          <p:cNvSpPr txBox="1"/>
+          <p:nvPr/>
+        </p:nvSpPr>
+        <p:spPr>
+          <a:xfrm>
+            <a:off x="640080" y="868680"/>
+            <a:ext cx="11091672" cy="658368"/>
+          </a:xfrm>
+          <a:prstGeom prst="rect">
+            <a:avLst/>
+          </a:prstGeom>
+          <a:noFill/>
+          <a:ln/>
+        </p:spPr>
+        <p:txBody>
+          <a:bodyPr wrap="square" lIns="0" tIns="0" rIns="0" bIns="0" rtlCol="0" anchor="ctr"/>
+          <a:lstStyle/>
+          <a:p>
+            <a:pPr indent="0" marL="0">
+              <a:lnSpc>
+                <a:spcPct val="110000"/>
+              </a:lnSpc>
+              <a:buNone/>
+            </a:pPr>
+            <a:r>
+              <a:rPr lang="en-US" sz="1250" dirty="0">
+                <a:solidFill>
+                  <a:srgbClr val="043F52"/>
+                </a:solidFill>
+                <a:latin typeface="Calibri" pitchFamily="34" charset="0"/>
+                <a:ea typeface="Calibri" pitchFamily="34" charset="-122"/>
+                <a:cs typeface="Calibri" pitchFamily="34" charset="-120"/>
+              </a:rPr>
+              <a:t>Aprobar desde el próximo corte un piloto de dos meses con B y grupo de control; no liberar C; condicionar A a la verificación de sus variables y D a los datos del piloto; y fijar hoy el KPI y los cinco guardrails con un responsable cada uno.</a:t>
+            </a:r>
+            <a:endParaRPr lang="en-US" sz="1250" dirty="0"/>
+          </a:p>
+        </p:txBody>
+      </p:sp>
+      <p:sp>
+        <p:nvSpPr>
+          <p:cNvPr id="5" name="Decisión 1"/>
+          <p:cNvSpPr/>
+          <p:nvPr/>
+        </p:nvSpPr>
+        <p:spPr>
+          <a:xfrm>
+            <a:off x="457200" y="1645920"/>
+            <a:ext cx="3657600" cy="1417320"/>
           </a:xfrm>
           <a:prstGeom prst="roundRect">
             <a:avLst>
-              <a:gd name="adj" fmla="val 7059"/>
+              <a:gd name="adj" fmla="val 7742"/>
             </a:avLst>
           </a:prstGeom>
           <a:solidFill>
@@ -14915,14 +15050,14 @@
       </p:sp>
       <p:sp>
         <p:nvSpPr>
-          <p:cNvPr id="4" name="Text 2"/>
+          <p:cNvPr id="6" name="Text 4"/>
           <p:cNvSpPr txBox="1"/>
           <p:nvPr/>
         </p:nvSpPr>
         <p:spPr>
           <a:xfrm>
-            <a:off x="640080" y="1417320"/>
-            <a:ext cx="548640" cy="502920"/>
+            <a:off x="640080" y="1719072"/>
+            <a:ext cx="548640" cy="457200"/>
           </a:xfrm>
           <a:prstGeom prst="rect">
             <a:avLst/>
@@ -14938,7 +15073,7 @@
               <a:buNone/>
             </a:pPr>
             <a:r>
-              <a:rPr lang="en-US" sz="3000" b="1" dirty="0">
+              <a:rPr lang="en-US" sz="2800" b="1" dirty="0">
                 <a:solidFill>
                   <a:srgbClr val="043F52"/>
                 </a:solidFill>
@@ -14948,386 +15083,20 @@
               </a:rPr>
               <a:t>1</a:t>
             </a:r>
-            <a:endParaRPr lang="en-US" sz="3000" dirty="0"/>
+            <a:endParaRPr lang="en-US" sz="2800" dirty="0"/>
           </a:p>
         </p:txBody>
       </p:sp>
       <p:sp>
         <p:nvSpPr>
-          <p:cNvPr id="5" name="Text 3"/>
+          <p:cNvPr id="7" name="Text 5"/>
           <p:cNvSpPr txBox="1"/>
           <p:nvPr/>
         </p:nvSpPr>
         <p:spPr>
           <a:xfrm>
-            <a:off x="1188720" y="1463040"/>
-            <a:ext cx="2788920" cy="457200"/>
-          </a:xfrm>
-          <a:prstGeom prst="rect">
-            <a:avLst/>
-          </a:prstGeom>
-          <a:noFill/>
-          <a:ln/>
-        </p:spPr>
-        <p:txBody>
-          <a:bodyPr wrap="square" lIns="0" tIns="0" rIns="0" bIns="0" rtlCol="0" anchor="ctr"/>
-          <a:lstStyle/>
-          <a:p>
-            <a:pPr indent="0" marL="0">
-              <a:buNone/>
-            </a:pPr>
-            <a:r>
-              <a:rPr lang="en-US" sz="1400" b="1" dirty="0">
-                <a:solidFill>
-                  <a:srgbClr val="043F52"/>
-                </a:solidFill>
-                <a:latin typeface="Calibri" pitchFamily="34" charset="0"/>
-                <a:ea typeface="Calibri" pitchFamily="34" charset="-122"/>
-                <a:cs typeface="Calibri" pitchFamily="34" charset="-120"/>
-              </a:rPr>
-              <a:t>Aprobar el piloto</a:t>
-            </a:r>
-            <a:endParaRPr lang="en-US" sz="1400" dirty="0"/>
-          </a:p>
-        </p:txBody>
-      </p:sp>
-      <p:sp>
-        <p:nvSpPr>
-          <p:cNvPr id="6" name="Text 4"/>
-          <p:cNvSpPr txBox="1"/>
-          <p:nvPr/>
-        </p:nvSpPr>
-        <p:spPr>
-          <a:xfrm>
-            <a:off x="640080" y="1965960"/>
-            <a:ext cx="3291840" cy="822960"/>
-          </a:xfrm>
-          <a:prstGeom prst="rect">
-            <a:avLst/>
-          </a:prstGeom>
-          <a:noFill/>
-          <a:ln/>
-        </p:spPr>
-        <p:txBody>
-          <a:bodyPr wrap="square" lIns="0" tIns="0" rIns="0" bIns="0" rtlCol="0" anchor="t"/>
-          <a:lstStyle/>
-          <a:p>
-            <a:pPr indent="0" marL="0">
-              <a:buNone/>
-            </a:pPr>
-            <a:r>
-              <a:rPr lang="en-US" sz="1150" dirty="0">
-                <a:solidFill>
-                  <a:srgbClr val="043F52"/>
-                </a:solidFill>
-                <a:latin typeface="Calibri" pitchFamily="34" charset="0"/>
-                <a:ea typeface="Calibri" pitchFamily="34" charset="-122"/>
-                <a:cs typeface="Calibri" pitchFamily="34" charset="-120"/>
-              </a:rPr>
-              <a:t>Dos meses, tres brazos, 8.000 contactos al mes.</a:t>
-            </a:r>
-            <a:endParaRPr lang="en-US" sz="1150" dirty="0"/>
-          </a:p>
-        </p:txBody>
-      </p:sp>
-      <p:sp>
-        <p:nvSpPr>
-          <p:cNvPr id="7" name="Decisión 2"/>
-          <p:cNvSpPr/>
-          <p:nvPr/>
-        </p:nvSpPr>
-        <p:spPr>
-          <a:xfrm>
-            <a:off x="4251960" y="1325880"/>
-            <a:ext cx="3657600" cy="1554480"/>
-          </a:xfrm>
-          <a:prstGeom prst="roundRect">
-            <a:avLst>
-              <a:gd name="adj" fmla="val 7059"/>
-            </a:avLst>
-          </a:prstGeom>
-          <a:solidFill>
-            <a:srgbClr val="A1DAFC"/>
-          </a:solidFill>
-          <a:ln w="12700">
-            <a:solidFill>
-              <a:srgbClr val="A1DAFC"/>
-            </a:solidFill>
-            <a:prstDash val="solid"/>
-          </a:ln>
-        </p:spPr>
-      </p:sp>
-      <p:sp>
-        <p:nvSpPr>
-          <p:cNvPr id="8" name="Text 6"/>
-          <p:cNvSpPr txBox="1"/>
-          <p:nvPr/>
-        </p:nvSpPr>
-        <p:spPr>
-          <a:xfrm>
-            <a:off x="4434840" y="1417320"/>
-            <a:ext cx="548640" cy="502920"/>
-          </a:xfrm>
-          <a:prstGeom prst="rect">
-            <a:avLst/>
-          </a:prstGeom>
-          <a:noFill/>
-          <a:ln/>
-        </p:spPr>
-        <p:txBody>
-          <a:bodyPr wrap="square" lIns="0" tIns="0" rIns="0" bIns="0" rtlCol="0" anchor="ctr"/>
-          <a:lstStyle/>
-          <a:p>
-            <a:pPr indent="0" marL="0">
-              <a:buNone/>
-            </a:pPr>
-            <a:r>
-              <a:rPr lang="en-US" sz="3000" b="1" dirty="0">
-                <a:solidFill>
-                  <a:srgbClr val="043F52"/>
-                </a:solidFill>
-                <a:latin typeface="Calibri" pitchFamily="34" charset="0"/>
-                <a:ea typeface="Calibri" pitchFamily="34" charset="-122"/>
-                <a:cs typeface="Calibri" pitchFamily="34" charset="-120"/>
-              </a:rPr>
-              <a:t>2</a:t>
-            </a:r>
-            <a:endParaRPr lang="en-US" sz="3000" dirty="0"/>
-          </a:p>
-        </p:txBody>
-      </p:sp>
-      <p:sp>
-        <p:nvSpPr>
-          <p:cNvPr id="9" name="Text 7"/>
-          <p:cNvSpPr txBox="1"/>
-          <p:nvPr/>
-        </p:nvSpPr>
-        <p:spPr>
-          <a:xfrm>
-            <a:off x="4983480" y="1463040"/>
-            <a:ext cx="2788920" cy="457200"/>
-          </a:xfrm>
-          <a:prstGeom prst="rect">
-            <a:avLst/>
-          </a:prstGeom>
-          <a:noFill/>
-          <a:ln/>
-        </p:spPr>
-        <p:txBody>
-          <a:bodyPr wrap="square" lIns="0" tIns="0" rIns="0" bIns="0" rtlCol="0" anchor="ctr"/>
-          <a:lstStyle/>
-          <a:p>
-            <a:pPr indent="0" marL="0">
-              <a:buNone/>
-            </a:pPr>
-            <a:r>
-              <a:rPr lang="en-US" sz="1400" b="1" dirty="0">
-                <a:solidFill>
-                  <a:srgbClr val="043F52"/>
-                </a:solidFill>
-                <a:latin typeface="Calibri" pitchFamily="34" charset="0"/>
-                <a:ea typeface="Calibri" pitchFamily="34" charset="-122"/>
-                <a:cs typeface="Calibri" pitchFamily="34" charset="-120"/>
-              </a:rPr>
-              <a:t>No liberar C; condicionar A y D</a:t>
-            </a:r>
-            <a:endParaRPr lang="en-US" sz="1400" dirty="0"/>
-          </a:p>
-        </p:txBody>
-      </p:sp>
-      <p:sp>
-        <p:nvSpPr>
-          <p:cNvPr id="10" name="Text 8"/>
-          <p:cNvSpPr txBox="1"/>
-          <p:nvPr/>
-        </p:nvSpPr>
-        <p:spPr>
-          <a:xfrm>
-            <a:off x="4434840" y="1965960"/>
-            <a:ext cx="3291840" cy="822960"/>
-          </a:xfrm>
-          <a:prstGeom prst="rect">
-            <a:avLst/>
-          </a:prstGeom>
-          <a:noFill/>
-          <a:ln/>
-        </p:spPr>
-        <p:txBody>
-          <a:bodyPr wrap="square" lIns="0" tIns="0" rIns="0" bIns="0" rtlCol="0" anchor="t"/>
-          <a:lstStyle/>
-          <a:p>
-            <a:pPr indent="0" marL="0">
-              <a:buNone/>
-            </a:pPr>
-            <a:r>
-              <a:rPr lang="en-US" sz="1150" dirty="0">
-                <a:solidFill>
-                  <a:srgbClr val="043F52"/>
-                </a:solidFill>
-                <a:latin typeface="Calibri" pitchFamily="34" charset="0"/>
-                <a:ea typeface="Calibri" pitchFamily="34" charset="-122"/>
-                <a:cs typeface="Calibri" pitchFamily="34" charset="-120"/>
-              </a:rPr>
-              <a:t>C usa el resultado; A tras ficha de fuga; D al holdout.</a:t>
-            </a:r>
-            <a:endParaRPr lang="en-US" sz="1150" dirty="0"/>
-          </a:p>
-        </p:txBody>
-      </p:sp>
-      <p:sp>
-        <p:nvSpPr>
-          <p:cNvPr id="11" name="Decisión 3"/>
-          <p:cNvSpPr/>
-          <p:nvPr/>
-        </p:nvSpPr>
-        <p:spPr>
-          <a:xfrm>
-            <a:off x="8046720" y="1325880"/>
-            <a:ext cx="3657600" cy="1554480"/>
-          </a:xfrm>
-          <a:prstGeom prst="roundRect">
-            <a:avLst>
-              <a:gd name="adj" fmla="val 7059"/>
-            </a:avLst>
-          </a:prstGeom>
-          <a:solidFill>
-            <a:srgbClr val="D4C8FE"/>
-          </a:solidFill>
-          <a:ln w="12700">
-            <a:solidFill>
-              <a:srgbClr val="D4C8FE"/>
-            </a:solidFill>
-            <a:prstDash val="solid"/>
-          </a:ln>
-        </p:spPr>
-      </p:sp>
-      <p:sp>
-        <p:nvSpPr>
-          <p:cNvPr id="12" name="Text 10"/>
-          <p:cNvSpPr txBox="1"/>
-          <p:nvPr/>
-        </p:nvSpPr>
-        <p:spPr>
-          <a:xfrm>
-            <a:off x="8229600" y="1417320"/>
-            <a:ext cx="548640" cy="502920"/>
-          </a:xfrm>
-          <a:prstGeom prst="rect">
-            <a:avLst/>
-          </a:prstGeom>
-          <a:noFill/>
-          <a:ln/>
-        </p:spPr>
-        <p:txBody>
-          <a:bodyPr wrap="square" lIns="0" tIns="0" rIns="0" bIns="0" rtlCol="0" anchor="ctr"/>
-          <a:lstStyle/>
-          <a:p>
-            <a:pPr indent="0" marL="0">
-              <a:buNone/>
-            </a:pPr>
-            <a:r>
-              <a:rPr lang="en-US" sz="3000" b="1" dirty="0">
-                <a:solidFill>
-                  <a:srgbClr val="043F52"/>
-                </a:solidFill>
-                <a:latin typeface="Calibri" pitchFamily="34" charset="0"/>
-                <a:ea typeface="Calibri" pitchFamily="34" charset="-122"/>
-                <a:cs typeface="Calibri" pitchFamily="34" charset="-120"/>
-              </a:rPr>
-              <a:t>3</a:t>
-            </a:r>
-            <a:endParaRPr lang="en-US" sz="3000" dirty="0"/>
-          </a:p>
-        </p:txBody>
-      </p:sp>
-      <p:sp>
-        <p:nvSpPr>
-          <p:cNvPr id="13" name="Text 11"/>
-          <p:cNvSpPr txBox="1"/>
-          <p:nvPr/>
-        </p:nvSpPr>
-        <p:spPr>
-          <a:xfrm>
-            <a:off x="8778240" y="1463040"/>
-            <a:ext cx="2788920" cy="457200"/>
-          </a:xfrm>
-          <a:prstGeom prst="rect">
-            <a:avLst/>
-          </a:prstGeom>
-          <a:noFill/>
-          <a:ln/>
-        </p:spPr>
-        <p:txBody>
-          <a:bodyPr wrap="square" lIns="0" tIns="0" rIns="0" bIns="0" rtlCol="0" anchor="ctr"/>
-          <a:lstStyle/>
-          <a:p>
-            <a:pPr indent="0" marL="0">
-              <a:buNone/>
-            </a:pPr>
-            <a:r>
-              <a:rPr lang="en-US" sz="1400" b="1" dirty="0">
-                <a:solidFill>
-                  <a:srgbClr val="043F52"/>
-                </a:solidFill>
-                <a:latin typeface="Calibri" pitchFamily="34" charset="0"/>
-                <a:ea typeface="Calibri" pitchFamily="34" charset="-122"/>
-                <a:cs typeface="Calibri" pitchFamily="34" charset="-120"/>
-              </a:rPr>
-              <a:t>Fijar KPI y guardrails</a:t>
-            </a:r>
-            <a:endParaRPr lang="en-US" sz="1400" dirty="0"/>
-          </a:p>
-        </p:txBody>
-      </p:sp>
-      <p:sp>
-        <p:nvSpPr>
-          <p:cNvPr id="14" name="Text 12"/>
-          <p:cNvSpPr txBox="1"/>
-          <p:nvPr/>
-        </p:nvSpPr>
-        <p:spPr>
-          <a:xfrm>
-            <a:off x="8229600" y="1965960"/>
-            <a:ext cx="3291840" cy="822960"/>
-          </a:xfrm>
-          <a:prstGeom prst="rect">
-            <a:avLst/>
-          </a:prstGeom>
-          <a:noFill/>
-          <a:ln/>
-        </p:spPr>
-        <p:txBody>
-          <a:bodyPr wrap="square" lIns="0" tIns="0" rIns="0" bIns="0" rtlCol="0" anchor="t"/>
-          <a:lstStyle/>
-          <a:p>
-            <a:pPr indent="0" marL="0">
-              <a:buNone/>
-            </a:pPr>
-            <a:r>
-              <a:rPr lang="en-US" sz="1150" dirty="0">
-                <a:solidFill>
-                  <a:srgbClr val="043F52"/>
-                </a:solidFill>
-                <a:latin typeface="Calibri" pitchFamily="34" charset="0"/>
-                <a:ea typeface="Calibri" pitchFamily="34" charset="-122"/>
-                <a:cs typeface="Calibri" pitchFamily="34" charset="-120"/>
-              </a:rPr>
-              <a:t>KPI incremental neto por contacto; guardrails con dueño.</a:t>
-            </a:r>
-            <a:endParaRPr lang="en-US" sz="1150" dirty="0"/>
-          </a:p>
-        </p:txBody>
-      </p:sp>
-      <p:sp>
-        <p:nvSpPr>
-          <p:cNvPr id="15" name="Text 13"/>
-          <p:cNvSpPr txBox="1"/>
-          <p:nvPr/>
-        </p:nvSpPr>
-        <p:spPr>
-          <a:xfrm>
-            <a:off x="457200" y="3154680"/>
-            <a:ext cx="5486400" cy="320040"/>
+            <a:off x="1188720" y="1737360"/>
+            <a:ext cx="2788920" cy="420624"/>
           </a:xfrm>
           <a:prstGeom prst="rect">
             <a:avLst/>
@@ -15351,7 +15120,7 @@
                 <a:ea typeface="Calibri" pitchFamily="34" charset="-122"/>
                 <a:cs typeface="Calibri" pitchFamily="34" charset="-120"/>
               </a:rPr>
-              <a:t>Ruta 90 días</a:t>
+              <a:t>Aprobar el piloto</a:t>
             </a:r>
             <a:endParaRPr lang="en-US" sz="1300" dirty="0"/>
           </a:p>
@@ -15359,13 +15128,379 @@
       </p:sp>
       <p:sp>
         <p:nvSpPr>
-          <p:cNvPr id="16" name="Paso 1"/>
+          <p:cNvPr id="8" name="Text 6"/>
+          <p:cNvSpPr txBox="1"/>
+          <p:nvPr/>
+        </p:nvSpPr>
+        <p:spPr>
+          <a:xfrm>
+            <a:off x="640080" y="2212848"/>
+            <a:ext cx="3291840" cy="804672"/>
+          </a:xfrm>
+          <a:prstGeom prst="rect">
+            <a:avLst/>
+          </a:prstGeom>
+          <a:noFill/>
+          <a:ln/>
+        </p:spPr>
+        <p:txBody>
+          <a:bodyPr wrap="square" lIns="0" tIns="0" rIns="0" bIns="0" rtlCol="0" anchor="t"/>
+          <a:lstStyle/>
+          <a:p>
+            <a:pPr indent="0" marL="0">
+              <a:buNone/>
+            </a:pPr>
+            <a:r>
+              <a:rPr lang="en-US" sz="1100" dirty="0">
+                <a:solidFill>
+                  <a:srgbClr val="043F52"/>
+                </a:solidFill>
+                <a:latin typeface="Calibri" pitchFamily="34" charset="0"/>
+                <a:ea typeface="Calibri" pitchFamily="34" charset="-122"/>
+                <a:cs typeface="Calibri" pitchFamily="34" charset="-120"/>
+              </a:rPr>
+              <a:t>Dos meses, tres brazos, 8.000 contactos al mes.</a:t>
+            </a:r>
+            <a:endParaRPr lang="en-US" sz="1100" dirty="0"/>
+          </a:p>
+        </p:txBody>
+      </p:sp>
+      <p:sp>
+        <p:nvSpPr>
+          <p:cNvPr id="9" name="Decisión 2"/>
           <p:cNvSpPr/>
           <p:nvPr/>
         </p:nvSpPr>
         <p:spPr>
           <a:xfrm>
-            <a:off x="457200" y="3657600"/>
+            <a:off x="4251960" y="1645920"/>
+            <a:ext cx="3657600" cy="1417320"/>
+          </a:xfrm>
+          <a:prstGeom prst="roundRect">
+            <a:avLst>
+              <a:gd name="adj" fmla="val 7742"/>
+            </a:avLst>
+          </a:prstGeom>
+          <a:solidFill>
+            <a:srgbClr val="A1DAFC"/>
+          </a:solidFill>
+          <a:ln w="12700">
+            <a:solidFill>
+              <a:srgbClr val="A1DAFC"/>
+            </a:solidFill>
+            <a:prstDash val="solid"/>
+          </a:ln>
+        </p:spPr>
+      </p:sp>
+      <p:sp>
+        <p:nvSpPr>
+          <p:cNvPr id="10" name="Text 8"/>
+          <p:cNvSpPr txBox="1"/>
+          <p:nvPr/>
+        </p:nvSpPr>
+        <p:spPr>
+          <a:xfrm>
+            <a:off x="4434840" y="1719072"/>
+            <a:ext cx="548640" cy="457200"/>
+          </a:xfrm>
+          <a:prstGeom prst="rect">
+            <a:avLst/>
+          </a:prstGeom>
+          <a:noFill/>
+          <a:ln/>
+        </p:spPr>
+        <p:txBody>
+          <a:bodyPr wrap="square" lIns="0" tIns="0" rIns="0" bIns="0" rtlCol="0" anchor="ctr"/>
+          <a:lstStyle/>
+          <a:p>
+            <a:pPr indent="0" marL="0">
+              <a:buNone/>
+            </a:pPr>
+            <a:r>
+              <a:rPr lang="en-US" sz="2800" b="1" dirty="0">
+                <a:solidFill>
+                  <a:srgbClr val="043F52"/>
+                </a:solidFill>
+                <a:latin typeface="Calibri" pitchFamily="34" charset="0"/>
+                <a:ea typeface="Calibri" pitchFamily="34" charset="-122"/>
+                <a:cs typeface="Calibri" pitchFamily="34" charset="-120"/>
+              </a:rPr>
+              <a:t>2</a:t>
+            </a:r>
+            <a:endParaRPr lang="en-US" sz="2800" dirty="0"/>
+          </a:p>
+        </p:txBody>
+      </p:sp>
+      <p:sp>
+        <p:nvSpPr>
+          <p:cNvPr id="11" name="Text 9"/>
+          <p:cNvSpPr txBox="1"/>
+          <p:nvPr/>
+        </p:nvSpPr>
+        <p:spPr>
+          <a:xfrm>
+            <a:off x="4983480" y="1737360"/>
+            <a:ext cx="2788920" cy="420624"/>
+          </a:xfrm>
+          <a:prstGeom prst="rect">
+            <a:avLst/>
+          </a:prstGeom>
+          <a:noFill/>
+          <a:ln/>
+        </p:spPr>
+        <p:txBody>
+          <a:bodyPr wrap="square" lIns="0" tIns="0" rIns="0" bIns="0" rtlCol="0" anchor="ctr"/>
+          <a:lstStyle/>
+          <a:p>
+            <a:pPr indent="0" marL="0">
+              <a:buNone/>
+            </a:pPr>
+            <a:r>
+              <a:rPr lang="en-US" sz="1300" b="1" dirty="0">
+                <a:solidFill>
+                  <a:srgbClr val="043F52"/>
+                </a:solidFill>
+                <a:latin typeface="Calibri" pitchFamily="34" charset="0"/>
+                <a:ea typeface="Calibri" pitchFamily="34" charset="-122"/>
+                <a:cs typeface="Calibri" pitchFamily="34" charset="-120"/>
+              </a:rPr>
+              <a:t>No liberar C; condicionar A y D</a:t>
+            </a:r>
+            <a:endParaRPr lang="en-US" sz="1300" dirty="0"/>
+          </a:p>
+        </p:txBody>
+      </p:sp>
+      <p:sp>
+        <p:nvSpPr>
+          <p:cNvPr id="12" name="Text 10"/>
+          <p:cNvSpPr txBox="1"/>
+          <p:nvPr/>
+        </p:nvSpPr>
+        <p:spPr>
+          <a:xfrm>
+            <a:off x="4434840" y="2212848"/>
+            <a:ext cx="3291840" cy="804672"/>
+          </a:xfrm>
+          <a:prstGeom prst="rect">
+            <a:avLst/>
+          </a:prstGeom>
+          <a:noFill/>
+          <a:ln/>
+        </p:spPr>
+        <p:txBody>
+          <a:bodyPr wrap="square" lIns="0" tIns="0" rIns="0" bIns="0" rtlCol="0" anchor="t"/>
+          <a:lstStyle/>
+          <a:p>
+            <a:pPr indent="0" marL="0">
+              <a:buNone/>
+            </a:pPr>
+            <a:r>
+              <a:rPr lang="en-US" sz="1100" dirty="0">
+                <a:solidFill>
+                  <a:srgbClr val="043F52"/>
+                </a:solidFill>
+                <a:latin typeface="Calibri" pitchFamily="34" charset="0"/>
+                <a:ea typeface="Calibri" pitchFamily="34" charset="-122"/>
+                <a:cs typeface="Calibri" pitchFamily="34" charset="-120"/>
+              </a:rPr>
+              <a:t>C usa información que no existe al priorizar; A solo tras verificar cada variable; D se evalúa con los datos del grupo de control.</a:t>
+            </a:r>
+            <a:endParaRPr lang="en-US" sz="1100" dirty="0"/>
+          </a:p>
+        </p:txBody>
+      </p:sp>
+      <p:sp>
+        <p:nvSpPr>
+          <p:cNvPr id="13" name="Decisión 3"/>
+          <p:cNvSpPr/>
+          <p:nvPr/>
+        </p:nvSpPr>
+        <p:spPr>
+          <a:xfrm>
+            <a:off x="8046720" y="1645920"/>
+            <a:ext cx="3657600" cy="1417320"/>
+          </a:xfrm>
+          <a:prstGeom prst="roundRect">
+            <a:avLst>
+              <a:gd name="adj" fmla="val 7742"/>
+            </a:avLst>
+          </a:prstGeom>
+          <a:solidFill>
+            <a:srgbClr val="D4C8FE"/>
+          </a:solidFill>
+          <a:ln w="12700">
+            <a:solidFill>
+              <a:srgbClr val="D4C8FE"/>
+            </a:solidFill>
+            <a:prstDash val="solid"/>
+          </a:ln>
+        </p:spPr>
+      </p:sp>
+      <p:sp>
+        <p:nvSpPr>
+          <p:cNvPr id="14" name="Text 12"/>
+          <p:cNvSpPr txBox="1"/>
+          <p:nvPr/>
+        </p:nvSpPr>
+        <p:spPr>
+          <a:xfrm>
+            <a:off x="8229600" y="1719072"/>
+            <a:ext cx="548640" cy="457200"/>
+          </a:xfrm>
+          <a:prstGeom prst="rect">
+            <a:avLst/>
+          </a:prstGeom>
+          <a:noFill/>
+          <a:ln/>
+        </p:spPr>
+        <p:txBody>
+          <a:bodyPr wrap="square" lIns="0" tIns="0" rIns="0" bIns="0" rtlCol="0" anchor="ctr"/>
+          <a:lstStyle/>
+          <a:p>
+            <a:pPr indent="0" marL="0">
+              <a:buNone/>
+            </a:pPr>
+            <a:r>
+              <a:rPr lang="en-US" sz="2800" b="1" dirty="0">
+                <a:solidFill>
+                  <a:srgbClr val="043F52"/>
+                </a:solidFill>
+                <a:latin typeface="Calibri" pitchFamily="34" charset="0"/>
+                <a:ea typeface="Calibri" pitchFamily="34" charset="-122"/>
+                <a:cs typeface="Calibri" pitchFamily="34" charset="-120"/>
+              </a:rPr>
+              <a:t>3</a:t>
+            </a:r>
+            <a:endParaRPr lang="en-US" sz="2800" dirty="0"/>
+          </a:p>
+        </p:txBody>
+      </p:sp>
+      <p:sp>
+        <p:nvSpPr>
+          <p:cNvPr id="15" name="Text 13"/>
+          <p:cNvSpPr txBox="1"/>
+          <p:nvPr/>
+        </p:nvSpPr>
+        <p:spPr>
+          <a:xfrm>
+            <a:off x="8778240" y="1737360"/>
+            <a:ext cx="2788920" cy="420624"/>
+          </a:xfrm>
+          <a:prstGeom prst="rect">
+            <a:avLst/>
+          </a:prstGeom>
+          <a:noFill/>
+          <a:ln/>
+        </p:spPr>
+        <p:txBody>
+          <a:bodyPr wrap="square" lIns="0" tIns="0" rIns="0" bIns="0" rtlCol="0" anchor="ctr"/>
+          <a:lstStyle/>
+          <a:p>
+            <a:pPr indent="0" marL="0">
+              <a:buNone/>
+            </a:pPr>
+            <a:r>
+              <a:rPr lang="en-US" sz="1300" b="1" dirty="0">
+                <a:solidFill>
+                  <a:srgbClr val="043F52"/>
+                </a:solidFill>
+                <a:latin typeface="Calibri" pitchFamily="34" charset="0"/>
+                <a:ea typeface="Calibri" pitchFamily="34" charset="-122"/>
+                <a:cs typeface="Calibri" pitchFamily="34" charset="-120"/>
+              </a:rPr>
+              <a:t>Fijar KPI y guardrails</a:t>
+            </a:r>
+            <a:endParaRPr lang="en-US" sz="1300" dirty="0"/>
+          </a:p>
+        </p:txBody>
+      </p:sp>
+      <p:sp>
+        <p:nvSpPr>
+          <p:cNvPr id="16" name="Text 14"/>
+          <p:cNvSpPr txBox="1"/>
+          <p:nvPr/>
+        </p:nvSpPr>
+        <p:spPr>
+          <a:xfrm>
+            <a:off x="8229600" y="2212848"/>
+            <a:ext cx="3291840" cy="804672"/>
+          </a:xfrm>
+          <a:prstGeom prst="rect">
+            <a:avLst/>
+          </a:prstGeom>
+          <a:noFill/>
+          <a:ln/>
+        </p:spPr>
+        <p:txBody>
+          <a:bodyPr wrap="square" lIns="0" tIns="0" rIns="0" bIns="0" rtlCol="0" anchor="t"/>
+          <a:lstStyle/>
+          <a:p>
+            <a:pPr indent="0" marL="0">
+              <a:buNone/>
+            </a:pPr>
+            <a:r>
+              <a:rPr lang="en-US" sz="1100" dirty="0">
+                <a:solidFill>
+                  <a:srgbClr val="043F52"/>
+                </a:solidFill>
+                <a:latin typeface="Calibri" pitchFamily="34" charset="0"/>
+                <a:ea typeface="Calibri" pitchFamily="34" charset="-122"/>
+                <a:cs typeface="Calibri" pitchFamily="34" charset="-120"/>
+              </a:rPr>
+              <a:t>Pesos ganados por contacto, netos de mora y frente a control; cinco guardrails con umbral y responsable.</a:t>
+            </a:r>
+            <a:endParaRPr lang="en-US" sz="1100" dirty="0"/>
+          </a:p>
+        </p:txBody>
+      </p:sp>
+      <p:sp>
+        <p:nvSpPr>
+          <p:cNvPr id="17" name="Text 15"/>
+          <p:cNvSpPr txBox="1"/>
+          <p:nvPr/>
+        </p:nvSpPr>
+        <p:spPr>
+          <a:xfrm>
+            <a:off x="457200" y="3246120"/>
+            <a:ext cx="5486400" cy="292608"/>
+          </a:xfrm>
+          <a:prstGeom prst="rect">
+            <a:avLst/>
+          </a:prstGeom>
+          <a:noFill/>
+          <a:ln/>
+        </p:spPr>
+        <p:txBody>
+          <a:bodyPr wrap="square" lIns="0" tIns="0" rIns="0" bIns="0" rtlCol="0" anchor="ctr"/>
+          <a:lstStyle/>
+          <a:p>
+            <a:pPr indent="0" marL="0">
+              <a:buNone/>
+            </a:pPr>
+            <a:r>
+              <a:rPr lang="en-US" sz="1200" b="1" dirty="0">
+                <a:solidFill>
+                  <a:srgbClr val="043F52"/>
+                </a:solidFill>
+                <a:latin typeface="Calibri" pitchFamily="34" charset="0"/>
+                <a:ea typeface="Calibri" pitchFamily="34" charset="-122"/>
+                <a:cs typeface="Calibri" pitchFamily="34" charset="-120"/>
+              </a:rPr>
+              <a:t>Ruta de 90 días</a:t>
+            </a:r>
+            <a:endParaRPr lang="en-US" sz="1200" dirty="0"/>
+          </a:p>
+        </p:txBody>
+      </p:sp>
+      <p:sp>
+        <p:nvSpPr>
+          <p:cNvPr id="18" name="Paso 1"/>
+          <p:cNvSpPr/>
+          <p:nvPr/>
+        </p:nvSpPr>
+        <p:spPr>
+          <a:xfrm>
+            <a:off x="457200" y="3721608"/>
             <a:ext cx="310896" cy="310896"/>
           </a:xfrm>
           <a:prstGeom prst="ellipse">
@@ -15384,13 +15519,13 @@
       </p:sp>
       <p:sp>
         <p:nvSpPr>
-          <p:cNvPr id="17" name="Text 15"/>
+          <p:cNvPr id="19" name="Text 17"/>
           <p:cNvSpPr txBox="1"/>
           <p:nvPr/>
         </p:nvSpPr>
         <p:spPr>
           <a:xfrm>
-            <a:off x="457200" y="3657600"/>
+            <a:off x="457200" y="3721608"/>
             <a:ext cx="310896" cy="310896"/>
           </a:xfrm>
           <a:prstGeom prst="rect">
@@ -15423,14 +15558,14 @@
       </p:sp>
       <p:sp>
         <p:nvSpPr>
-          <p:cNvPr id="18" name="Text 16"/>
+          <p:cNvPr id="20" name="Text 18"/>
           <p:cNvSpPr txBox="1"/>
           <p:nvPr/>
         </p:nvSpPr>
         <p:spPr>
           <a:xfrm>
-            <a:off x="896112" y="3566160"/>
-            <a:ext cx="6309360" cy="530352"/>
+            <a:off x="896112" y="3611880"/>
+            <a:ext cx="6309360" cy="548640"/>
           </a:xfrm>
           <a:prstGeom prst="rect">
             <a:avLst/>
@@ -15454,7 +15589,7 @@
                 <a:ea typeface="Calibri" pitchFamily="34" charset="-122"/>
                 <a:cs typeface="Calibri" pitchFamily="34" charset="-120"/>
               </a:rPr>
-              <a:t>Semanas 1 a 2  </a:t>
+              <a:t>Semanas 1 a 2. </a:t>
             </a:r>
             <a:pPr indent="0" marL="0">
               <a:buNone/>
@@ -15468,7 +15603,7 @@
                 <a:ea typeface="Calibri" pitchFamily="34" charset="-122"/>
                 <a:cs typeface="Calibri" pitchFamily="34" charset="-120"/>
               </a:rPr>
-              <a:t>Denominador del 12 %, regla de contacto, permisos del buró.</a:t>
+              <a:t>Definir sobre qué se mide el 12 %, cómo se contacta hoy y qué permite el uso del buró.</a:t>
             </a:r>
             <a:endParaRPr lang="en-US" sz="1150" dirty="0"/>
           </a:p>
@@ -15476,13 +15611,13 @@
       </p:sp>
       <p:sp>
         <p:nvSpPr>
-          <p:cNvPr id="19" name="Paso 2"/>
+          <p:cNvPr id="21" name="Paso 2"/>
           <p:cNvSpPr/>
           <p:nvPr/>
         </p:nvSpPr>
         <p:spPr>
           <a:xfrm>
-            <a:off x="457200" y="4315968"/>
+            <a:off x="457200" y="4398264"/>
             <a:ext cx="310896" cy="310896"/>
           </a:xfrm>
           <a:prstGeom prst="ellipse">
@@ -15501,13 +15636,13 @@
       </p:sp>
       <p:sp>
         <p:nvSpPr>
-          <p:cNvPr id="20" name="Text 18"/>
+          <p:cNvPr id="22" name="Text 20"/>
           <p:cNvSpPr txBox="1"/>
           <p:nvPr/>
         </p:nvSpPr>
         <p:spPr>
           <a:xfrm>
-            <a:off x="457200" y="4315968"/>
+            <a:off x="457200" y="4398264"/>
             <a:ext cx="310896" cy="310896"/>
           </a:xfrm>
           <a:prstGeom prst="rect">
@@ -15540,14 +15675,14 @@
       </p:sp>
       <p:sp>
         <p:nvSpPr>
-          <p:cNvPr id="21" name="Text 19"/>
+          <p:cNvPr id="23" name="Text 21"/>
           <p:cNvSpPr txBox="1"/>
           <p:nvPr/>
         </p:nvSpPr>
         <p:spPr>
           <a:xfrm>
-            <a:off x="896112" y="4224528"/>
-            <a:ext cx="6309360" cy="530352"/>
+            <a:off x="896112" y="4288536"/>
+            <a:ext cx="6309360" cy="548640"/>
           </a:xfrm>
           <a:prstGeom prst="rect">
             <a:avLst/>
@@ -15571,7 +15706,7 @@
                 <a:ea typeface="Calibri" pitchFamily="34" charset="-122"/>
                 <a:cs typeface="Calibri" pitchFamily="34" charset="-120"/>
               </a:rPr>
-              <a:t>Semanas 3 a 4  </a:t>
+              <a:t>Semanas 3 a 4. </a:t>
             </a:r>
             <a:pPr indent="0" marL="0">
               <a:buNone/>
@@ -15585,7 +15720,7 @@
                 <a:ea typeface="Calibri" pitchFamily="34" charset="-122"/>
                 <a:cs typeface="Calibri" pitchFamily="34" charset="-120"/>
               </a:rPr>
-              <a:t>Ficha de fuga de A y B; pipeline point-in-time; cuotas.</a:t>
+              <a:t>Verificar variable por variable A y B; montar el flujo de datos con fechas garantizadas; fijar cuotas.</a:t>
             </a:r>
             <a:endParaRPr lang="en-US" sz="1150" dirty="0"/>
           </a:p>
@@ -15593,13 +15728,13 @@
       </p:sp>
       <p:sp>
         <p:nvSpPr>
-          <p:cNvPr id="22" name="Paso 3"/>
+          <p:cNvPr id="24" name="Paso 3"/>
           <p:cNvSpPr/>
           <p:nvPr/>
         </p:nvSpPr>
         <p:spPr>
           <a:xfrm>
-            <a:off x="457200" y="4974336"/>
+            <a:off x="457200" y="5074920"/>
             <a:ext cx="310896" cy="310896"/>
           </a:xfrm>
           <a:prstGeom prst="ellipse">
@@ -15618,13 +15753,13 @@
       </p:sp>
       <p:sp>
         <p:nvSpPr>
-          <p:cNvPr id="23" name="Text 21"/>
+          <p:cNvPr id="25" name="Text 23"/>
           <p:cNvSpPr txBox="1"/>
           <p:nvPr/>
         </p:nvSpPr>
         <p:spPr>
           <a:xfrm>
-            <a:off x="457200" y="4974336"/>
+            <a:off x="457200" y="5074920"/>
             <a:ext cx="310896" cy="310896"/>
           </a:xfrm>
           <a:prstGeom prst="rect">
@@ -15657,14 +15792,14 @@
       </p:sp>
       <p:sp>
         <p:nvSpPr>
-          <p:cNvPr id="24" name="Text 22"/>
+          <p:cNvPr id="26" name="Text 24"/>
           <p:cNvSpPr txBox="1"/>
           <p:nvPr/>
         </p:nvSpPr>
         <p:spPr>
           <a:xfrm>
-            <a:off x="896112" y="4882896"/>
-            <a:ext cx="6309360" cy="530352"/>
+            <a:off x="896112" y="4965192"/>
+            <a:ext cx="6309360" cy="548640"/>
           </a:xfrm>
           <a:prstGeom prst="rect">
             <a:avLst/>
@@ -15688,7 +15823,7 @@
                 <a:ea typeface="Calibri" pitchFamily="34" charset="-122"/>
                 <a:cs typeface="Calibri" pitchFamily="34" charset="-120"/>
               </a:rPr>
-              <a:t>Meses 2 a 3  </a:t>
+              <a:t>Meses 2 a 3. </a:t>
             </a:r>
             <a:pPr indent="0" marL="0">
               <a:buNone/>
@@ -15702,7 +15837,7 @@
                 <a:ea typeface="Calibri" pitchFamily="34" charset="-122"/>
                 <a:cs typeface="Calibri" pitchFamily="34" charset="-120"/>
               </a:rPr>
-              <a:t>Piloto con holdout; monitoreo semanal; decisión pre-registrada.</a:t>
+              <a:t>Piloto con grupo de control; monitoreo semanal; decisión con reglas escritas de antemano.</a:t>
             </a:r>
             <a:endParaRPr lang="en-US" sz="1150" dirty="0"/>
           </a:p>
@@ -15710,13 +15845,13 @@
       </p:sp>
       <p:sp>
         <p:nvSpPr>
-          <p:cNvPr id="25" name="Paso 4"/>
+          <p:cNvPr id="27" name="Paso 4"/>
           <p:cNvSpPr/>
           <p:nvPr/>
         </p:nvSpPr>
         <p:spPr>
           <a:xfrm>
-            <a:off x="457200" y="5632704"/>
+            <a:off x="457200" y="5751576"/>
             <a:ext cx="310896" cy="310896"/>
           </a:xfrm>
           <a:prstGeom prst="ellipse">
@@ -15735,13 +15870,13 @@
       </p:sp>
       <p:sp>
         <p:nvSpPr>
-          <p:cNvPr id="26" name="Text 24"/>
+          <p:cNvPr id="28" name="Text 26"/>
           <p:cNvSpPr txBox="1"/>
           <p:nvPr/>
         </p:nvSpPr>
         <p:spPr>
           <a:xfrm>
-            <a:off x="457200" y="5632704"/>
+            <a:off x="457200" y="5751576"/>
             <a:ext cx="310896" cy="310896"/>
           </a:xfrm>
           <a:prstGeom prst="rect">
@@ -15774,14 +15909,14 @@
       </p:sp>
       <p:sp>
         <p:nvSpPr>
-          <p:cNvPr id="27" name="Text 25"/>
+          <p:cNvPr id="29" name="Text 27"/>
           <p:cNvSpPr txBox="1"/>
           <p:nvPr/>
         </p:nvSpPr>
         <p:spPr>
           <a:xfrm>
-            <a:off x="896112" y="5541264"/>
-            <a:ext cx="6309360" cy="530352"/>
+            <a:off x="896112" y="5641848"/>
+            <a:ext cx="6309360" cy="548640"/>
           </a:xfrm>
           <a:prstGeom prst="rect">
             <a:avLst/>
@@ -15805,7 +15940,7 @@
                 <a:ea typeface="Calibri" pitchFamily="34" charset="-122"/>
                 <a:cs typeface="Calibri" pitchFamily="34" charset="-120"/>
               </a:rPr>
-              <a:t>Mes 4+  </a:t>
+              <a:t>Mes 4 en adelante. </a:t>
             </a:r>
             <a:pPr indent="0" marL="0">
               <a:buNone/>
@@ -15819,7 +15954,7 @@
                 <a:ea typeface="Calibri" pitchFamily="34" charset="-122"/>
                 <a:cs typeface="Calibri" pitchFamily="34" charset="-120"/>
               </a:rPr>
-              <a:t>Con uplift, escalar; si no, champion.</a:t>
+              <a:t>Si el contacto crea renovaciones, escalar; si no, mantener la herramienta actual.</a:t>
             </a:r>
             <a:endParaRPr lang="en-US" sz="1150" dirty="0"/>
           </a:p>
@@ -15827,14 +15962,14 @@
       </p:sp>
       <p:sp>
         <p:nvSpPr>
-          <p:cNvPr id="28" name="Text 26"/>
+          <p:cNvPr id="30" name="Text 28"/>
           <p:cNvSpPr txBox="1"/>
           <p:nvPr/>
         </p:nvSpPr>
         <p:spPr>
           <a:xfrm>
-            <a:off x="7406640" y="3154680"/>
-            <a:ext cx="4325112" cy="320040"/>
+            <a:off x="7406640" y="3246120"/>
+            <a:ext cx="4325112" cy="292608"/>
           </a:xfrm>
           <a:prstGeom prst="rect">
             <a:avLst/>
@@ -15850,7 +15985,7 @@
               <a:buNone/>
             </a:pPr>
             <a:r>
-              <a:rPr lang="en-US" sz="1300" b="1" dirty="0">
+              <a:rPr lang="en-US" sz="1200" b="1" dirty="0">
                 <a:solidFill>
                   <a:srgbClr val="043F52"/>
                 </a:solidFill>
@@ -15860,19 +15995,19 @@
               </a:rPr>
               <a:t>Gobierno</a:t>
             </a:r>
-            <a:endParaRPr lang="en-US" sz="1300" dirty="0"/>
+            <a:endParaRPr lang="en-US" sz="1200" dirty="0"/>
           </a:p>
         </p:txBody>
       </p:sp>
       <p:sp>
         <p:nvSpPr>
-          <p:cNvPr id="29" name="Text 27"/>
+          <p:cNvPr id="31" name="Text 29"/>
           <p:cNvSpPr txBox="1"/>
           <p:nvPr/>
         </p:nvSpPr>
         <p:spPr>
           <a:xfrm>
-            <a:off x="7406640" y="3520440"/>
+            <a:off x="7406640" y="3611880"/>
             <a:ext cx="4325112" cy="2743200"/>
           </a:xfrm>
           <a:prstGeom prst="rect">
@@ -15918,7 +16053,7 @@
                 <a:ea typeface="Calibri" pitchFamily="34" charset="-122"/>
                 <a:cs typeface="Calibri" pitchFamily="34" charset="-120"/>
               </a:rPr>
-              <a:t>selección y conversión por grupo; con cuotas, dentro de cada regional.</a:t>
+              <a:t>tasas de selección y conversión por regional, remesas y buró en cada corte.</a:t>
             </a:r>
             <a:endParaRPr lang="en-US" sz="1100" dirty="0"/>
           </a:p>
@@ -15956,7 +16091,7 @@
                 <a:ea typeface="Calibri" pitchFamily="34" charset="-122"/>
                 <a:cs typeface="Calibri" pitchFamily="34" charset="-120"/>
               </a:rPr>
-              <a:t>model card, datasheet, ficha de fuga, monitoreo, RACI.</a:t>
+              <a:t>ficha del modelo, ficha de la base, verificación de variables, plan de monitoreo y responsables por área.</a:t>
             </a:r>
             <a:endParaRPr lang="en-US" sz="1100" dirty="0"/>
           </a:p>
@@ -15969,23 +16104,6 @@
               <a:buChar char="•"/>
             </a:pPr>
             <a:r>
-              <a:rPr lang="en-US" sz="1100" b="1" dirty="0">
-                <a:solidFill>
-                  <a:srgbClr val="043F52"/>
-                </a:solidFill>
-                <a:latin typeface="Calibri" pitchFamily="34" charset="0"/>
-                <a:ea typeface="Calibri" pitchFamily="34" charset="-122"/>
-                <a:cs typeface="Calibri" pitchFamily="34" charset="-120"/>
-              </a:rPr>
-              <a:t>SHAP no es causa: </a:t>
-            </a:r>
-            <a:pPr indent="0" marL="0">
-              <a:spcAft>
-                <a:spcPts val="400"/>
-              </a:spcAft>
-              <a:buNone/>
-            </a:pPr>
-            <a:r>
               <a:rPr lang="en-US" sz="1100" dirty="0">
                 <a:solidFill>
                   <a:srgbClr val="043F52"/>
@@ -15994,7 +16112,7 @@
                 <a:ea typeface="Calibri" pitchFamily="34" charset="-122"/>
                 <a:cs typeface="Calibri" pitchFamily="34" charset="-120"/>
               </a:rPr>
-              <a:t>al buró alto se le busca más (37 % vs. 22 %); solo el holdout lo prueba.</a:t>
+              <a:t>La importancia de una variable no es su causa: al buró alto se le contactó más (37 % frente a 22 % sin contactar); solo el grupo de control prueba si llamar cambia el resultado.</a:t>
             </a:r>
             <a:endParaRPr lang="en-US" sz="1100" dirty="0"/>
           </a:p>
@@ -16081,7 +16199,7 @@
         <p:spPr>
           <a:xfrm>
             <a:off x="457200" y="320040"/>
-            <a:ext cx="11274552" cy="868680"/>
+            <a:ext cx="11274552" cy="502920"/>
           </a:xfrm>
           <a:prstGeom prst="rect">
             <a:avLst/>
@@ -16117,7 +16235,7 @@
         <p:spPr>
           <a:xfrm>
             <a:off x="457200" y="1188720"/>
-            <a:ext cx="6675120" cy="320040"/>
+            <a:ext cx="6675120" cy="292608"/>
           </a:xfrm>
           <a:prstGeom prst="rect">
             <a:avLst/>
@@ -18993,7 +19111,7 @@
         <p:spPr>
           <a:xfrm>
             <a:off x="7406640" y="1188720"/>
-            <a:ext cx="4297680" cy="320040"/>
+            <a:ext cx="4297680" cy="292608"/>
           </a:xfrm>
           <a:prstGeom prst="rect">
             <a:avLst/>
@@ -21475,7 +21593,7 @@
         <p:spPr>
           <a:xfrm>
             <a:off x="457200" y="3840480"/>
-            <a:ext cx="5486400" cy="320040"/>
+            <a:ext cx="5486400" cy="292608"/>
           </a:xfrm>
           <a:prstGeom prst="rect">
             <a:avLst/>
@@ -22933,7 +23051,7 @@
         <p:spPr>
           <a:xfrm>
             <a:off x="5943600" y="3840480"/>
-            <a:ext cx="5760720" cy="320040"/>
+            <a:ext cx="5760720" cy="292608"/>
           </a:xfrm>
           <a:prstGeom prst="rect">
             <a:avLst/>

--- a/entregables/BancoW_Priorizacion_Renovaciones_DavinsonArteaga.pptx
+++ b/entregables/BancoW_Priorizacion_Renovaciones_DavinsonArteaga.pptx
@@ -5,7 +5,7 @@
     <p:sldMasterId id="2147483648" r:id="rId1"/>
   </p:sldMasterIdLst>
   <p:notesMasterIdLst>
-    <p:notesMasterId r:id="rId9"/>
+    <p:notesMasterId r:id="rId11"/>
   </p:notesMasterIdLst>
   <p:sldIdLst>
     <p:sldId id="256" r:id="rId2"/>
@@ -15,21 +15,23 @@
     <p:sldId id="260" r:id="rId6"/>
     <p:sldId id="261" r:id="rId7"/>
     <p:sldId id="262" r:id="rId8"/>
+    <p:sldId id="263" r:id="rId9"/>
+    <p:sldId id="264" r:id="rId10"/>
   </p:sldIdLst>
   <p:sldSz cx="12192000" cy="6858000"/>
   <p:notesSz cx="6858000" cy="12192000"/>
   <p:embeddedFontLst>
-    <p:embeddedFont>
-      <p:font typeface="Bahnschrift" panose="020B0502040204020203" pitchFamily="34" charset="0"/>
-      <p:regular r:id="rId10"/>
-      <p:bold r:id="rId11"/>
-    </p:embeddedFont>
     <p:embeddedFont>
       <p:font typeface="Segoe UI" panose="020B0502040204020203" pitchFamily="34" charset="0"/>
       <p:regular r:id="rId12"/>
       <p:bold r:id="rId13"/>
       <p:italic r:id="rId14"/>
       <p:boldItalic r:id="rId15"/>
+    </p:embeddedFont>
+    <p:embeddedFont>
+      <p:font typeface="Segoe UI Semibold" panose="020B0702040204020203" pitchFamily="34" charset="0"/>
+      <p:bold r:id="rId16"/>
+      <p:boldItalic r:id="rId17"/>
     </p:embeddedFont>
   </p:embeddedFontLst>
   <p:defaultTextStyle>
@@ -127,39 +129,49 @@
   <p:extLst>
     <p:ext uri="{521415D9-36F7-43E2-AB2F-B90AF26B5E84}">
       <p14:sectionLst xmlns:p14="http://schemas.microsoft.com/office/powerpoint/2010/main">
-        <p14:section name="Decisión" id="{68ACA854-E014-F8CF-6349-7B29E939711A}">
+        <p14:section name="Portada" id="{03A7516D-D7EF-A486-DE1D-A763170EF15B}">
           <p14:sldIdLst>
             <p14:sldId id="256"/>
           </p14:sldIdLst>
         </p14:section>
-        <p14:section name="Datos" id="{C9569D9A-E534-6037-E33A-C2DDE950FB2F}">
+        <p14:section name="Decisión" id="{FD402425-FF1B-860C-E20A-53B4E86C2FEA}">
           <p14:sldIdLst>
             <p14:sldId id="257"/>
           </p14:sldIdLst>
         </p14:section>
-        <p14:section name="Alternativas" id="{BCC98D3B-E568-BAF2-C71C-D59E5723041F}">
+        <p14:section name="Datos" id="{52A61670-1782-F338-0910-413EEC9F6DBE}">
           <p14:sldIdLst>
             <p14:sldId id="258"/>
           </p14:sldIdLst>
         </p14:section>
-        <p14:section name="Valor" id="{6A769390-7F4D-3EBA-6F4B-6E8C4A8EAA05}">
+        <p14:section name="Alternativas" id="{3A90A2A1-63A3-02E4-55D1-953A26FB89C2}">
           <p14:sldIdLst>
             <p14:sldId id="259"/>
           </p14:sldIdLst>
         </p14:section>
-        <p14:section name="Piloto" id="{C78D31A6-E73E-E3D1-A4D0-271971CEF880}">
+        <p14:section name="Valor" id="{DE4069AF-DC53-2500-E154-FE25F4A12A08}">
           <p14:sldIdLst>
             <p14:sldId id="260"/>
           </p14:sldIdLst>
         </p14:section>
-        <p14:section name="Recomendación" id="{16E00BCB-0D05-629C-C999-64B8B030D7A9}">
+        <p14:section name="Piloto" id="{1C53400F-5B07-7C41-894E-93B37568E684}">
           <p14:sldIdLst>
             <p14:sldId id="261"/>
           </p14:sldIdLst>
         </p14:section>
-        <p14:section name="Anexo" id="{D39B5254-7828-6C25-F04D-22407AEA539C}">
+        <p14:section name="Recomendación" id="{52569D96-77BB-9D4B-B0E4-79B7914BD0BB}">
           <p14:sldIdLst>
             <p14:sldId id="262"/>
+          </p14:sldIdLst>
+        </p14:section>
+        <p14:section name="Cierre" id="{52926122-3698-1256-BDA6-C43DA8028394}">
+          <p14:sldIdLst>
+            <p14:sldId id="263"/>
+          </p14:sldIdLst>
+        </p14:section>
+        <p14:section name="Anexo" id="{3D24ECE4-10FE-D7E7-B2EB-F602D2F48C6B}">
+          <p14:sldIdLst>
+            <p14:sldId id="264"/>
           </p14:sldIdLst>
         </p14:section>
       </p14:sectionLst>
@@ -212,7 +224,7 @@
             <c:bubble3D val="0"/>
             <c:extLst>
               <c:ext xmlns:c16="http://schemas.microsoft.com/office/drawing/2014/chart" uri="{C3380CC4-5D6E-409C-BE32-E72D297353CC}">
-                <c16:uniqueId val="{00000001-C14E-45CD-B3AE-5AB2D8CAD3EE}"/>
+                <c16:uniqueId val="{00000001-7BD4-4FAF-AA64-2E81D849B6D5}"/>
               </c:ext>
             </c:extLst>
           </c:dPt>
@@ -228,7 +240,7 @@
             </c:spPr>
             <c:extLst>
               <c:ext xmlns:c16="http://schemas.microsoft.com/office/drawing/2014/chart" uri="{C3380CC4-5D6E-409C-BE32-E72D297353CC}">
-                <c16:uniqueId val="{00000003-C14E-45CD-B3AE-5AB2D8CAD3EE}"/>
+                <c16:uniqueId val="{00000003-7BD4-4FAF-AA64-2E81D849B6D5}"/>
               </c:ext>
             </c:extLst>
           </c:dPt>
@@ -244,7 +256,7 @@
             </c:spPr>
             <c:extLst>
               <c:ext xmlns:c16="http://schemas.microsoft.com/office/drawing/2014/chart" uri="{C3380CC4-5D6E-409C-BE32-E72D297353CC}">
-                <c16:uniqueId val="{00000005-C14E-45CD-B3AE-5AB2D8CAD3EE}"/>
+                <c16:uniqueId val="{00000005-7BD4-4FAF-AA64-2E81D849B6D5}"/>
               </c:ext>
             </c:extLst>
           </c:dPt>
@@ -322,7 +334,7 @@
           </c:val>
           <c:extLst>
             <c:ext xmlns:c16="http://schemas.microsoft.com/office/drawing/2014/chart" uri="{C3380CC4-5D6E-409C-BE32-E72D297353CC}">
-              <c16:uniqueId val="{00000006-C14E-45CD-B3AE-5AB2D8CAD3EE}"/>
+              <c16:uniqueId val="{00000006-7BD4-4FAF-AA64-2E81D849B6D5}"/>
             </c:ext>
           </c:extLst>
         </c:ser>
@@ -463,7 +475,7 @@
             <c:bubble3D val="0"/>
             <c:extLst>
               <c:ext xmlns:c16="http://schemas.microsoft.com/office/drawing/2014/chart" uri="{C3380CC4-5D6E-409C-BE32-E72D297353CC}">
-                <c16:uniqueId val="{00000001-9582-4D68-8F7B-AB142B56DE3D}"/>
+                <c16:uniqueId val="{00000001-43A8-49AD-90FF-B110BA1E3923}"/>
               </c:ext>
             </c:extLst>
           </c:dPt>
@@ -473,7 +485,7 @@
             <c:bubble3D val="0"/>
             <c:extLst>
               <c:ext xmlns:c16="http://schemas.microsoft.com/office/drawing/2014/chart" uri="{C3380CC4-5D6E-409C-BE32-E72D297353CC}">
-                <c16:uniqueId val="{00000003-9582-4D68-8F7B-AB142B56DE3D}"/>
+                <c16:uniqueId val="{00000003-43A8-49AD-90FF-B110BA1E3923}"/>
               </c:ext>
             </c:extLst>
           </c:dPt>
@@ -489,7 +501,7 @@
             </c:spPr>
             <c:extLst>
               <c:ext xmlns:c16="http://schemas.microsoft.com/office/drawing/2014/chart" uri="{C3380CC4-5D6E-409C-BE32-E72D297353CC}">
-                <c16:uniqueId val="{00000005-9582-4D68-8F7B-AB142B56DE3D}"/>
+                <c16:uniqueId val="{00000005-43A8-49AD-90FF-B110BA1E3923}"/>
               </c:ext>
             </c:extLst>
           </c:dPt>
@@ -499,7 +511,7 @@
             <c:bubble3D val="0"/>
             <c:extLst>
               <c:ext xmlns:c16="http://schemas.microsoft.com/office/drawing/2014/chart" uri="{C3380CC4-5D6E-409C-BE32-E72D297353CC}">
-                <c16:uniqueId val="{00000007-9582-4D68-8F7B-AB142B56DE3D}"/>
+                <c16:uniqueId val="{00000007-43A8-49AD-90FF-B110BA1E3923}"/>
               </c:ext>
             </c:extLst>
           </c:dPt>
@@ -583,7 +595,7 @@
           </c:val>
           <c:extLst>
             <c:ext xmlns:c16="http://schemas.microsoft.com/office/drawing/2014/chart" uri="{C3380CC4-5D6E-409C-BE32-E72D297353CC}">
-              <c16:uniqueId val="{00000008-9582-4D68-8F7B-AB142B56DE3D}"/>
+              <c16:uniqueId val="{00000008-43A8-49AD-90FF-B110BA1E3923}"/>
             </c:ext>
           </c:extLst>
         </c:ser>
@@ -731,7 +743,7 @@
     </p:spTree>
     <p:extLst>
       <p:ext uri="{BB962C8B-B14F-4D97-AF65-F5344CB8AC3E}">
-        <p14:creationId xmlns:p14="http://schemas.microsoft.com/office/powerpoint/2010/main" val="2130559029"/>
+        <p14:creationId xmlns:p14="http://schemas.microsoft.com/office/powerpoint/2010/main" val="1412986682"/>
       </p:ext>
     </p:extLst>
   </p:cSld>
@@ -877,7 +889,7 @@
           <a:p>
             <a:r>
               <a:rPr lang="en-US" dirty="0"/>
-              <a:t>Pregunta del enunciado: ¿Qué decisión debemos tomar y por qué importa? Mensaje: la restricción es la capacidad, así que el problema es decidir a quién contactar, no predecir. KPI incremental neto de riesgo; el proxy mensual (incrementales por 1.000 contactos) sirve mientras madura la mora. 12 % sin denominador no es una meta: 960 si es sobre 8.000, 3.000 si es sobre 25.000 (37,5 % por contacto). Punto de equilibrio: una renovación deja de aportar si la mora supera 23,3 % (420.000 / 1.800.000). Guardrail de riesgo: la mora esperada de la lista (score y política de Riesgos) se verifica antes de ejecutar; el vintage de mora 30+ a 60 días por cohorte confirma (alarma y pausa). La pregunta única define si el histórico permite medir causalidad o solo describe la política vigente; hoy podemos ordenar por propensión, filtrar riesgo con la política de Riesgos y valorar cada renovación.</a:t>
+              <a:t>Portada. La presentación responde, en orden, las seis preguntas del enunciado: qué decisión tomar, qué dicen los datos, qué alternativas sobreviven, cuál genera más valor, cómo probarlo y qué hacer ahora. Duración objetivo: 15 minutos más 15 de preguntas.</a:t>
             </a:r>
           </a:p>
         </p:txBody>
@@ -964,7 +976,7 @@
           <a:p>
             <a:r>
               <a:rPr lang="en-US" dirty="0"/>
-              <a:t>Pregunta del enunciado: ¿Qué descubrimos en los datos y qué no deberíamos confiar? Detalle de cada hallazgo en la guía P5 y P6. Fuga: 78 % de «Acepta» renueva; dias_hasta_renovacion es nulo exactamente en los 1.436 no renovados. Calidad: max_mora_6m = −4, ahorro −350.000, contacto fechado 2026-09-15 con corte agosto; score de buró 352–912 está dentro de la escala DataCrédito 150–950 (confirmar central, versión y vigencia). contactabilidad_score no predice el contacto (entre 29 % y 32 % de no contactados en los cuatro cuartiles). cuotas_pagadas_pct, monto_preaprobado y dias_ultimo_contacto quedan fuera del set limpio hasta certificar su timestamp (51 contactos fechados dentro del mes de corte y 1 después): no cuesta señal (AUC univariado 0,50–0,53); en producción se recalcula a la fecha de corte. Partición rolling-origin con un corte de gap (entrenar ≤ t−2, probar en t, mayo a agosto); deduplicar por cliente. Evaluación con probabilidades calibradas. Accuracy trivial: 79,8 % en la base, 96,4 % en producción sin acertar un renovador.</a:t>
+              <a:t>Pregunta del enunciado: ¿Qué decisión debemos tomar y por qué importa? Mensaje: la restricción es la capacidad, así que el problema es decidir a quién contactar, no predecir. KPI incremental neto de riesgo; el proxy mensual (incrementales por 1.000 contactos) sirve mientras madura la mora. 12 % sin denominador no es una meta: 960 si es sobre 8.000, 3.000 si es sobre 25.000 (37,5 % por contacto). Punto de equilibrio: una renovación deja de aportar si la mora supera 23,3 % (420.000 / 1.800.000). Guardrail de riesgo: la mora esperada de la lista (score y política de Riesgos) se verifica antes de ejecutar; el vintage de mora 30+ a 60 días por cohorte confirma (alarma y pausa). La pregunta única define si el histórico permite medir causalidad o solo describe la política vigente; hoy podemos ordenar por propensión, filtrar riesgo con la política de Riesgos y valorar cada renovación.</a:t>
             </a:r>
           </a:p>
         </p:txBody>
@@ -1051,7 +1063,7 @@
           <a:p>
             <a:r>
               <a:rPr lang="en-US" dirty="0"/>
-              <a:t>Pregunta del enunciado: ¿Qué alternativas de modelo tenemos y cuáles sobreviven al análisis? Repliqué con la base: el AUC de C (0,94) solo se obtiene incluyendo el resultado de gestión; con dias_hasta_renovacion llega a 1,00. Validación temporal: entrenar ≤ t−2, probar en t, mayo a agosto; k-fold aleatorio da 0,82 y no revela la fuga. A: 0,86 supera lo que esta base permite replicar (0,82), pero la hoja viene de otra población, así que no es concluyente; su mora 7,2 % es la peor y, de ser real, lo convierte en la alternativa de menor valor; ambas cosas exigen auditoría variable por variable. B: coherente con la réplica, calibrado (pendiente 0,91), estable; pasa a piloto tras la misma ficha de fuga. D: la hoja reporta «+3,1 pp incremental» en la columna de mora y Qini en la de PR-AUC; no es comparable con A, B y C sin aclarar unidades. Las conversiones «top 8k» de la hoja y la conversión top 32 % de la réplica (≈ 45 %) no son comparables: otra población y otra regla de contacto. Para comparar propensión vs. uplift: la regla de asignación de la campaña de D (fracción aleatorizada, unidad, cumplimiento) y un mismo holdout donde medir uplift@8k de cada modelo en COP netos de mora, con intervalos.</a:t>
+              <a:t>Pregunta del enunciado: ¿Qué descubrimos en los datos y qué no deberíamos confiar? Detalle de cada hallazgo en la guía P5 y P6. Fuga: 78 % de «Acepta» renueva; dias_hasta_renovacion es nulo exactamente en los 1.436 no renovados. Calidad: max_mora_6m = −4, ahorro −350.000, contacto fechado 2026-09-15 con corte agosto; score de buró 352–912 está dentro de la escala DataCrédito 150–950 (confirmar central, versión y vigencia). contactabilidad_score no predice el contacto (entre 29 % y 32 % de no contactados en los cuatro cuartiles). cuotas_pagadas_pct, monto_preaprobado y dias_ultimo_contacto quedan fuera del set limpio hasta certificar su timestamp (51 contactos fechados dentro del mes de corte y 1 después): no cuesta señal (AUC univariado 0,50–0,53); en producción se recalcula a la fecha de corte. Partición rolling-origin con un corte de gap (entrenar ≤ t−2, probar en t, mayo a agosto); deduplicar por cliente. Evaluación con probabilidades calibradas. Accuracy trivial: 79,8 % en la base, 96,4 % en producción sin acertar un renovador.</a:t>
             </a:r>
           </a:p>
         </p:txBody>
@@ -1138,7 +1150,7 @@
           <a:p>
             <a:r>
               <a:rPr lang="en-US" dirty="0"/>
-              <a:t>Pregunta del enunciado: ¿Cuál genera mayor valor bajo riesgo y capacidad real? B gana por riesgo, no por conversión: 237 M netos al mes frente a 218 M de A; cada renovación de B vale 337.200 frente a 290.400 de A. Incertidumbre (supuesto 8.000 contactos por alternativa, 752 y 704 renovados): conversión z = 1,32 (p 0,19), mora z = 2,11 (p 0,03); en valor B es al menos equivalente dentro de la incertidumbre. El valor no es incremental: el orgánico del tercil alto de buró (de donde sale el top de B) es ≈ 5 % (7 de 129 no contactados renovaron solos; IC 2,7–10,8 %), así que ≈ 57 % de las renovaciones de B serían orgánicas y el valor incremental ≈ 103 M (129 M con orgánico 4 %, 76 M con 6 %). Por eso el piloto. Faltan el costo de contacto, la LGD real y el origen del «top 8k». Capacidad: un ranking global sobrecarga Centro, Norte y Eje y deja ≈ 400 cupos ociosos en Suroccidente y Oriente; cuotas por regional con transferencia por valor marginal (tope a pactar con Comercial, 10 % como referencia). Proyección a centenas con la mezcla regional de la muestra de test. La conversión en muestra con y sin cuotas es equivalente (41,9 % vs. 43,5 %, cuatro renovaciones de diferencia, dentro del ruido). Sensibilidad a la pérdida por mora de 1,0 / 1,8 / 2,5 / 3,5 M: B 263 / 237 / 215 / 182 vs. A 262 / 218 / 181 / 126.</a:t>
+              <a:t>Pregunta del enunciado: ¿Qué alternativas de modelo tenemos y cuáles sobreviven al análisis? Repliqué con la base: el AUC de C (0,94) solo se obtiene incluyendo el resultado de gestión; con dias_hasta_renovacion llega a 0,997 con la misma logística (1,00 redondeado). Validación temporal: entrenar ≤ t−2, probar en t, mayo a agosto; k-fold aleatorio da 0,82 y no revela la fuga. A: 0,86 supera lo que esta base permite replicar (0,82), pero la hoja viene de otra población, así que no es concluyente; su mora 7,2 % es la peor y, de ser real, lo convierte en la alternativa de menor valor; ambas cosas exigen auditoría variable por variable. B: coherente con la réplica, calibrado (pendiente 0,91), estable; pasa a piloto tras la misma ficha de fuga. D: la hoja reporta «+3,1 pp incremental» en la columna de mora y Qini en la de PR-AUC; no es comparable con A, B y C sin aclarar unidades. Las conversiones «top 8k» de la hoja y la conversión top 32 % de la réplica (≈ 45 %) no son comparables: otra población y otra regla de contacto. Para comparar propensión vs. uplift: la regla de asignación de la campaña de D (fracción aleatorizada, unidad, cumplimiento) y un mismo holdout donde medir uplift@8k de cada modelo en COP netos de mora, con intervalos.</a:t>
             </a:r>
           </a:p>
         </p:txBody>
@@ -1225,7 +1237,7 @@
           <a:p>
             <a:r>
               <a:rPr lang="en-US" dirty="0"/>
-              <a:t>Pregunta del enunciado: ¿Cómo probaríamos que funciona y cómo controlamos el riesgo? Mecánica: el universo elegible del mes (filtrado por el mismo piso de riesgo: corte de buró y max_mora pactados con Riesgos) se parte al azar en dos pools por cliente, estratificando por regional y tercil de score. El champion elige sus 4.000 en su pool; el challenger rankea el suyo con cuotas por regional, toma su top 4.800, retiene 800 al azar como holdout sin contacto y contacta 4.000. Capacidad intacta: 8.000. Dos reglas separadas: calidad de lista (challenger vs. champion) y efecto del contacto (challenger contactado vs. holdout). Calidad: 3,6 % a 5,4 % se detecta con 2.081 por brazo, es decir en un mes con 4.000. Baseline del holdout: no el 2,3 % global, sino el orgánico del tercil alto de buró (≈ 5 %, 7 de 129, IC 2,7–10,8 %), porque el holdout sale del top de B. Potencia (800 vs. 4.000, baseline 5 %): conservador +1,7 pp exige 1.856 en holdout, 2,3 meses, 4,6 M/mes de costo; plausible +3,8 pp (el uplift implícito si B convierte 8,8 % sobre un orgánico de 5 %) exige 444, 0,6 meses, 10,3 M/mes. Dos meses detectan el escenario plausible con margen; el conservador necesita un tercer mes. El costo es cerca del 4 % del VE de B (10,3 de 237 M). Limitación: sin holdout en el champion no comparamos la incrementalidad de las dos políticas; la opción de 400 de holdout en el champion cuesta ≈ 2,3 M/mes y deja ese brazo en 3.600. Probar mora 5,1 % vs. 7,2 % exigiría 2.053 renovados por brazo: el riesgo entra por política y se vigila por vintage. Reglas de salida pre-registradas: calidad ≥ +1,5 pp con IC 95 % que excluye 0; efecto &gt; 0 con IC 95 % que excluye 0; mora ≤ champion + 1 pp. Duración: dos meses de asignación + 30 días de ventana + 30 a 60 de maduración; decisión a los 90 días. Jerga (SRM, CSI, Brier, CUPED) en el anexo y la guía. Condiciones completas de no liberación en la guía P16.</a:t>
+              <a:t>Pregunta del enunciado: ¿Cuál genera mayor valor bajo riesgo y capacidad real? B gana por riesgo, no por conversión: 237 M netos al mes frente a 218 M de A; cada renovación de B vale 337.200 frente a 290.400 de A. Incertidumbre (supuesto 8.000 contactos por alternativa, 752 y 704 renovados): conversión z = 1,32 (p 0,19), mora z = 2,11 (p 0,03); en valor B es al menos equivalente dentro de la incertidumbre. El valor no es incremental: el orgánico del tercil alto de buró (de donde sale el top de B) es ≈ 5 % (7 de 129 no contactados renovaron solos; IC 2,7–10,8 %), así que ≈ 57 % de las renovaciones de B serían orgánicas y el valor incremental ≈ 103 M (129 M con orgánico 4 %, 76 M con 6 %). Por eso el piloto. Faltan el costo de contacto, la LGD real y el origen del «top 8k». Capacidad: un ranking global sobrecarga Centro, Norte y Eje y deja ≈ 400 cupos ociosos en Suroccidente y Oriente; cuotas por regional con transferencia por valor marginal (tope a pactar con Comercial, 10 % como referencia). Proyección a centenas con la mezcla regional de la muestra de test. La conversión en muestra con y sin cuotas es equivalente (41,9 % vs. 43,5 %, cuatro renovaciones de diferencia, dentro del ruido). Sensibilidad a la pérdida por mora de 1,0 / 1,8 / 2,5 / 3,5 M: B 263 / 237 / 215 / 182 vs. A 262 / 218 / 181 / 126.</a:t>
             </a:r>
           </a:p>
         </p:txBody>
@@ -1312,7 +1324,7 @@
           <a:p>
             <a:r>
               <a:rPr lang="en-US" dirty="0"/>
-              <a:t>Pregunta del enunciado: ¿Qué recomienda hacer ahora? Pedimos tres decisiones; A queda condicionada a la verificación de sus variables y D a los datos del piloto. Ruta de 90 días con la ficha de fuga variable por variable para A y B en las semanas 3 a 4 (fuente, timestamp, disponibilidad al puntuar); pipeline point-in-time. Gobierno: sin cuotas, el modelo limpio selecciona 28 % en Oriente frente a 35 % en Centro (AIR ≈ 0,80 puntual, pero con 100 a 200 clientes por regional el intervalo bootstrap es 0,49–0,88: el 0,80 no informa; la regla está pensada para el universo mensual de 25.000, donde el intervalo se estrecha unas seis veces); con cuotas, la selección por regional la fija la capacidad, así que la equidad se vigila en conversión y calibración por grupo dentro de cada regional. El 79 % de la lista cae en el tercil alto de buró: ese piso lo fija la política de riesgo, no el algoritmo. Auditable: model card, datasheet, ficha de fuga, plan de monitoreo, RACI. SHAP es correlación: en la base, 37 % del tercil bajo de buró quedó sin contactar frente a 22 % del alto; solo el holdout prueba causalidad.</a:t>
+              <a:t>Pregunta del enunciado: ¿Cómo probaríamos que funciona y cómo controlamos el riesgo? Mecánica: el universo elegible del mes (filtrado por el mismo piso de riesgo: corte de buró y max_mora pactados con Riesgos) se parte al azar en dos pools por cliente, estratificando por regional y tercil de score. El champion elige sus 4.000 en su pool; el challenger rankea el suyo con cuotas por regional, toma su top 4.800, retiene 800 al azar como holdout sin contacto y contacta 4.000. Capacidad intacta: 8.000. Dos reglas separadas: calidad de lista (challenger vs. champion) y efecto del contacto (challenger contactado vs. holdout). Calidad: 3,6 % a 5,4 % se detecta con 2.081 por brazo, es decir en un mes con 4.000. Baseline del holdout: no el 2,3 % global, sino el orgánico del tercil alto de buró (≈ 5 %, 7 de 129, IC 2,7–10,8 %), porque el holdout sale del top de B. Potencia (800 vs. 4.000, baseline 5 %): conservador +1,7 pp exige 1.856 en holdout, 2,3 meses, 4,6 M/mes de costo; plausible +3,8 pp (el uplift implícito si B convierte 8,8 % sobre un orgánico de 5 %) exige 444, 0,6 meses, 10,3 M/mes. Dos meses detectan el escenario plausible con margen; el conservador necesita un tercer mes. El costo es cerca del 4 % del VE de B (10,3 de 237 M). Limitación: sin holdout en el champion no comparamos la incrementalidad de las dos políticas; la opción de 400 de holdout en el champion cuesta ≈ 2,3 M/mes y deja ese brazo en 3.600. Probar mora 5,1 % vs. 7,2 % exigiría 2.053 renovados por brazo: el riesgo entra por política y se vigila por vintage. Reglas de salida pre-registradas: calidad ≥ +1,5 pp con IC 95 % que excluye 0; efecto &gt; 0 con IC 95 % que excluye 0; mora ≤ champion + 1 pp. Duración: dos meses de asignación + 30 días de ventana + 30 a 60 de maduración; decisión a los 90 días. Jerga (SRM, CSI, Brier, CUPED) en el anexo y la guía. Condiciones completas de no liberación en la guía P16.</a:t>
             </a:r>
           </a:p>
         </p:txBody>
@@ -1399,6 +1411,180 @@
           <a:p>
             <a:r>
               <a:rPr lang="en-US" dirty="0"/>
+              <a:t>Pregunta del enunciado: ¿Qué recomienda hacer ahora? Pedimos tres decisiones; A queda condicionada a la verificación de sus variables y D a los datos del piloto. Ruta de 90 días con la ficha de fuga variable por variable para A y B en las semanas 3 a 4 (fuente, timestamp, disponibilidad al puntuar); pipeline point-in-time. Gobierno: sin cuotas, el modelo limpio selecciona 28 % en Oriente frente a 35 % en Centro (AIR ≈ 0,80 puntual, pero con 100 a 200 clientes por regional el intervalo bootstrap es 0,49–0,88: el 0,80 no informa; la regla está pensada para el universo mensual de 25.000, donde el intervalo se estrecha unas seis veces); con cuotas, la selección por regional la fija la capacidad, así que la equidad se vigila en conversión y calibración por grupo dentro de cada regional. El 79 % de la lista cae en el tercil alto de buró: ese piso lo fija la política de riesgo, no el algoritmo. Auditable: model card, datasheet, ficha de fuga, plan de monitoreo, RACI. SHAP es correlación: en la base, 37 % del tercil bajo de buró quedó sin contactar frente a 22 % del alto; solo el holdout prueba causalidad.</a:t>
+            </a:r>
+          </a:p>
+        </p:txBody>
+      </p:sp>
+      <p:sp>
+        <p:nvSpPr>
+          <p:cNvPr id="4" name="Slide Number Placeholder 3"/>
+          <p:cNvSpPr>
+            <a:spLocks noGrp="1"/>
+          </p:cNvSpPr>
+          <p:nvPr>
+            <p:ph type="sldNum" sz="quarter" idx="10"/>
+          </p:nvPr>
+        </p:nvSpPr>
+        <p:spPr/>
+        <p:txBody>
+          <a:bodyPr/>
+          <a:lstStyle/>
+          <a:p>
+            <a:fld id="{F7021451-1387-4CA6-816F-3879F97B5CBC}" type="slidenum">
+              <a:rPr lang="en-US"/>
+              <a:t>7</a:t>
+            </a:fld>
+            <a:endParaRPr lang="en-US"/>
+          </a:p>
+        </p:txBody>
+      </p:sp>
+    </p:spTree>
+    <p:extLst>
+      <p:ext uri="{BB962C8B-B14F-4D97-AF65-F5344CB8AC3E}">
+        <p14:creationId xmlns:p14="http://schemas.microsoft.com/office/powerpoint/2010/main" val="1024086991"/>
+      </p:ext>
+    </p:extLst>
+  </p:cSld>
+  <p:clrMapOvr>
+    <a:masterClrMapping/>
+  </p:clrMapOvr>
+</p:notes>
+</file>
+
+<file path=ppt/notesSlides/notesSlide8.xml><?xml version="1.0" encoding="utf-8"?>
+<p:notes xmlns:a="http://schemas.openxmlformats.org/drawingml/2006/main" xmlns:r="http://schemas.openxmlformats.org/officeDocument/2006/relationships" xmlns:p="http://schemas.openxmlformats.org/presentationml/2006/main">
+  <p:cSld>
+    <p:spTree>
+      <p:nvGrpSpPr>
+        <p:cNvPr id="1" name=""/>
+        <p:cNvGrpSpPr/>
+        <p:nvPr/>
+      </p:nvGrpSpPr>
+      <p:grpSpPr>
+        <a:xfrm>
+          <a:off x="0" y="0"/>
+          <a:ext cx="0" cy="0"/>
+          <a:chOff x="0" y="0"/>
+          <a:chExt cx="0" cy="0"/>
+        </a:xfrm>
+      </p:grpSpPr>
+      <p:sp>
+        <p:nvSpPr>
+          <p:cNvPr id="2" name="Slide Image Placeholder 1"/>
+          <p:cNvSpPr>
+            <a:spLocks noGrp="1" noRot="1" noChangeAspect="1"/>
+          </p:cNvSpPr>
+          <p:nvPr>
+            <p:ph type="sldImg"/>
+          </p:nvPr>
+        </p:nvSpPr>
+        <p:spPr/>
+      </p:sp>
+      <p:sp>
+        <p:nvSpPr>
+          <p:cNvPr id="3" name="Notes Placeholder 2"/>
+          <p:cNvSpPr>
+            <a:spLocks noGrp="1"/>
+          </p:cNvSpPr>
+          <p:nvPr>
+            <p:ph type="body" idx="1"/>
+          </p:nvPr>
+        </p:nvSpPr>
+        <p:spPr/>
+        <p:txBody>
+          <a:bodyPr/>
+          <a:lstStyle/>
+          <a:p>
+            <a:r>
+              <a:rPr lang="en-US" dirty="0"/>
+              <a:t>Cierre: repetir las tres decisiones y abrir preguntas. Si preguntan por detalle técnico, ir al anexo (réplica fuera de tiempo, valor esperado, tamaños de muestra, variables excluidas) o a la guía de 19 preguntas.</a:t>
+            </a:r>
+          </a:p>
+        </p:txBody>
+      </p:sp>
+      <p:sp>
+        <p:nvSpPr>
+          <p:cNvPr id="4" name="Slide Number Placeholder 3"/>
+          <p:cNvSpPr>
+            <a:spLocks noGrp="1"/>
+          </p:cNvSpPr>
+          <p:nvPr>
+            <p:ph type="sldNum" sz="quarter" idx="10"/>
+          </p:nvPr>
+        </p:nvSpPr>
+        <p:spPr/>
+        <p:txBody>
+          <a:bodyPr/>
+          <a:lstStyle/>
+          <a:p>
+            <a:fld id="{F7021451-1387-4CA6-816F-3879F97B5CBC}" type="slidenum">
+              <a:rPr lang="en-US"/>
+              <a:t>8</a:t>
+            </a:fld>
+            <a:endParaRPr lang="en-US"/>
+          </a:p>
+        </p:txBody>
+      </p:sp>
+    </p:spTree>
+    <p:extLst>
+      <p:ext uri="{BB962C8B-B14F-4D97-AF65-F5344CB8AC3E}">
+        <p14:creationId xmlns:p14="http://schemas.microsoft.com/office/powerpoint/2010/main" val="1024086991"/>
+      </p:ext>
+    </p:extLst>
+  </p:cSld>
+  <p:clrMapOvr>
+    <a:masterClrMapping/>
+  </p:clrMapOvr>
+</p:notes>
+</file>
+
+<file path=ppt/notesSlides/notesSlide9.xml><?xml version="1.0" encoding="utf-8"?>
+<p:notes xmlns:a="http://schemas.openxmlformats.org/drawingml/2006/main" xmlns:r="http://schemas.openxmlformats.org/officeDocument/2006/relationships" xmlns:p="http://schemas.openxmlformats.org/presentationml/2006/main">
+  <p:cSld>
+    <p:spTree>
+      <p:nvGrpSpPr>
+        <p:cNvPr id="1" name=""/>
+        <p:cNvGrpSpPr/>
+        <p:nvPr/>
+      </p:nvGrpSpPr>
+      <p:grpSpPr>
+        <a:xfrm>
+          <a:off x="0" y="0"/>
+          <a:ext cx="0" cy="0"/>
+          <a:chOff x="0" y="0"/>
+          <a:chExt cx="0" cy="0"/>
+        </a:xfrm>
+      </p:grpSpPr>
+      <p:sp>
+        <p:nvSpPr>
+          <p:cNvPr id="2" name="Slide Image Placeholder 1"/>
+          <p:cNvSpPr>
+            <a:spLocks noGrp="1" noRot="1" noChangeAspect="1"/>
+          </p:cNvSpPr>
+          <p:nvPr>
+            <p:ph type="sldImg"/>
+          </p:nvPr>
+        </p:nvSpPr>
+        <p:spPr/>
+      </p:sp>
+      <p:sp>
+        <p:nvSpPr>
+          <p:cNvPr id="3" name="Notes Placeholder 2"/>
+          <p:cNvSpPr>
+            <a:spLocks noGrp="1"/>
+          </p:cNvSpPr>
+          <p:nvPr>
+            <p:ph type="body" idx="1"/>
+          </p:nvPr>
+        </p:nvSpPr>
+        <p:spPr/>
+        <p:txBody>
+          <a:bodyPr/>
+          <a:lstStyle/>
+          <a:p>
+            <a:r>
+              <a:rPr lang="en-US" dirty="0"/>
               <a:t>Anexo de soporte para preguntas técnicas. Detalle completo en la guía de sustentación (19 preguntas).</a:t>
             </a:r>
           </a:p>
@@ -1421,7 +1607,7 @@
           <a:p>
             <a:fld id="{F7021451-1387-4CA6-816F-3879F97B5CBC}" type="slidenum">
               <a:rPr lang="en-US"/>
-              <a:t>7</a:t>
+              <a:t>9</a:t>
             </a:fld>
             <a:endParaRPr lang="en-US"/>
           </a:p>
@@ -1495,39 +1681,15 @@
           <a:chExt cx="0" cy="0"/>
         </a:xfrm>
       </p:grpSpPr>
-      <p:pic>
-        <p:nvPicPr>
-          <p:cNvPr id="2" name="Image 0" descr="Banco W"/>
-          <p:cNvPicPr>
-            <a:picLocks noChangeAspect="1"/>
-          </p:cNvPicPr>
-          <p:nvPr/>
-        </p:nvPicPr>
-        <p:blipFill>
-          <a:blip r:embed="rId2"/>
-          <a:stretch>
-            <a:fillRect/>
-          </a:stretch>
-        </p:blipFill>
-        <p:spPr>
-          <a:xfrm>
-            <a:off x="457200" y="6437376"/>
-            <a:ext cx="266456" cy="283464"/>
-          </a:xfrm>
-          <a:prstGeom prst="rect">
-            <a:avLst/>
-          </a:prstGeom>
-        </p:spPr>
-      </p:pic>
       <p:sp>
         <p:nvSpPr>
-          <p:cNvPr id="3" name="Text 0"/>
+          <p:cNvPr id="2" name="Text 0"/>
           <p:cNvSpPr/>
           <p:nvPr/>
         </p:nvSpPr>
         <p:spPr>
           <a:xfrm>
-            <a:off x="841248" y="6473952"/>
+            <a:off x="457200" y="6473952"/>
             <a:ext cx="7315200" cy="228600"/>
           </a:xfrm>
           <a:prstGeom prst="rect">
@@ -1552,7 +1714,7 @@
                 <a:ea typeface="Segoe UI" pitchFamily="34" charset="-122"/>
                 <a:cs typeface="Segoe UI" pitchFamily="34" charset="-120"/>
               </a:rPr>
-              <a:t>Prueba técnica Científico de Datos · Davinson Arteaga</a:t>
+              <a:t>Preparado para Banco W · Prueba técnica Científico de Datos · Davinson Arteaga</a:t>
             </a:r>
             <a:endParaRPr lang="en-US" sz="900" dirty="0"/>
           </a:p>
@@ -1560,18 +1722,18 @@
       </p:sp>
       <p:sp>
         <p:nvSpPr>
-          <p:cNvPr id="4" name="Text 1"/>
+          <p:cNvPr id="3" name="Text 1"/>
           <p:cNvSpPr>
             <a:spLocks noGrp="1"/>
           </p:cNvSpPr>
           <p:nvPr>
-            <p:ph type="title" idx="102" hasCustomPrompt="1"/>
+            <p:ph type="title" idx="101" hasCustomPrompt="1"/>
           </p:nvPr>
         </p:nvSpPr>
         <p:spPr>
           <a:xfrm>
-            <a:off x="457200" y="347472"/>
-            <a:ext cx="11277295" cy="438912"/>
+            <a:off x="457200" y="310896"/>
+            <a:ext cx="11277295" cy="512064"/>
           </a:xfrm>
           <a:prstGeom prst="rect">
             <a:avLst/>
@@ -1588,9 +1750,9 @@
                 <a:solidFill>
                   <a:srgbClr val="2E2E2E"/>
                 </a:solidFill>
-                <a:latin typeface="Bahnschrift" pitchFamily="34" charset="0"/>
-                <a:ea typeface="Bahnschrift" pitchFamily="34" charset="-122"/>
-                <a:cs typeface="Bahnschrift" pitchFamily="34" charset="-120"/>
+                <a:latin typeface="Segoe UI Semibold" pitchFamily="34" charset="0"/>
+                <a:ea typeface="Segoe UI Semibold" pitchFamily="34" charset="-122"/>
+                <a:cs typeface="Segoe UI Semibold" pitchFamily="34" charset="-120"/>
               </a:defRPr>
             </a:lvl1pPr>
           </a:lstStyle>
@@ -1614,8 +1776,8 @@
         </p:nvSpPr>
         <p:spPr>
           <a:xfrm>
-            <a:off x="11274552" y="6473952"/>
-            <a:ext cx="457200" cy="228600"/>
+            <a:off x="11274552" y="6419088"/>
+            <a:ext cx="457200" cy="347472"/>
           </a:xfrm>
           <a:prstGeom prst="rect">
             <a:avLst/>
@@ -1658,6 +1820,39 @@
 </p:sldLayout>
 </file>
 
+<file path=ppt/slideLayouts/slideLayout3.xml><?xml version="1.0" encoding="utf-8"?>
+<p:sldLayout xmlns:a="http://schemas.openxmlformats.org/drawingml/2006/main" xmlns:r="http://schemas.openxmlformats.org/officeDocument/2006/relationships" xmlns:p="http://schemas.openxmlformats.org/presentationml/2006/main" preserve="1">
+  <p:cSld name="HERO">
+    <p:bg>
+      <p:bgPr>
+        <a:solidFill>
+          <a:srgbClr val="005C63"/>
+        </a:solidFill>
+        <a:effectLst/>
+      </p:bgPr>
+    </p:bg>
+    <p:spTree>
+      <p:nvGrpSpPr>
+        <p:cNvPr id="1" name=""/>
+        <p:cNvGrpSpPr/>
+        <p:nvPr/>
+      </p:nvGrpSpPr>
+      <p:grpSpPr>
+        <a:xfrm>
+          <a:off x="0" y="0"/>
+          <a:ext cx="0" cy="0"/>
+          <a:chOff x="0" y="0"/>
+          <a:chExt cx="0" cy="0"/>
+        </a:xfrm>
+      </p:grpSpPr>
+    </p:spTree>
+  </p:cSld>
+  <p:clrMapOvr>
+    <a:masterClrMapping/>
+  </p:clrMapOvr>
+</p:sldLayout>
+</file>
+
 <file path=ppt/slideMasters/slideMaster1.xml><?xml version="1.0" encoding="utf-8"?>
 <p:sldMaster xmlns:a="http://schemas.openxmlformats.org/drawingml/2006/main" xmlns:r="http://schemas.openxmlformats.org/officeDocument/2006/relationships" xmlns:p="http://schemas.openxmlformats.org/presentationml/2006/main">
   <p:cSld>
@@ -1692,8 +1887,8 @@
         </p:nvSpPr>
         <p:spPr>
           <a:xfrm>
-            <a:off x="11274552" y="6473952"/>
-            <a:ext cx="457200" cy="228600"/>
+            <a:off x="11274552" y="6419088"/>
+            <a:ext cx="457200" cy="347472"/>
           </a:xfrm>
           <a:prstGeom prst="rect">
             <a:avLst/>
@@ -1734,6 +1929,7 @@
   <p:sldLayoutIdLst>
     <p:sldLayoutId id="2147483649" r:id="rId1"/>
     <p:sldLayoutId id="2147483650" r:id="rId2"/>
+    <p:sldLayoutId id="2147483651" r:id="rId3"/>
   </p:sldLayoutIdLst>
   <p:hf sldNum="0" hdr="0" ftr="0" dt="0"/>
   <p:txStyles>
@@ -2008,18 +2204,229 @@
       </p:grpSpPr>
       <p:sp>
         <p:nvSpPr>
+          <p:cNvPr id="2" name="Shape 0"/>
+          <p:cNvSpPr/>
+          <p:nvPr/>
+        </p:nvSpPr>
+        <p:spPr>
+          <a:xfrm>
+            <a:off x="1412199" y="1600200"/>
+            <a:ext cx="914400" cy="73152"/>
+          </a:xfrm>
+          <a:prstGeom prst="rect">
+            <a:avLst/>
+          </a:prstGeom>
+          <a:solidFill>
+            <a:srgbClr val="FE6A00"/>
+          </a:solidFill>
+          <a:ln/>
+        </p:spPr>
+      </p:sp>
+      <p:sp>
+        <p:nvSpPr>
+          <p:cNvPr id="3" name="Text 1"/>
+          <p:cNvSpPr txBox="1"/>
+          <p:nvPr/>
+        </p:nvSpPr>
+        <p:spPr>
+          <a:xfrm>
+            <a:off x="1412199" y="1828800"/>
+            <a:ext cx="8412114" cy="1417320"/>
+          </a:xfrm>
+          <a:prstGeom prst="rect">
+            <a:avLst/>
+          </a:prstGeom>
+          <a:noFill/>
+          <a:ln/>
+        </p:spPr>
+        <p:txBody>
+          <a:bodyPr wrap="square" lIns="0" tIns="0" rIns="0" bIns="0" rtlCol="0" anchor="t"/>
+          <a:lstStyle/>
+          <a:p>
+            <a:pPr marL="0" indent="0">
+              <a:lnSpc>
+                <a:spcPct val="100000"/>
+              </a:lnSpc>
+              <a:buNone/>
+            </a:pPr>
+            <a:r>
+              <a:rPr lang="en-US" sz="4000" dirty="0">
+                <a:solidFill>
+                  <a:srgbClr val="FFFFFF"/>
+                </a:solidFill>
+                <a:latin typeface="Segoe UI Semibold" pitchFamily="34" charset="0"/>
+                <a:ea typeface="Segoe UI Semibold" pitchFamily="34" charset="-122"/>
+                <a:cs typeface="Segoe UI Semibold" pitchFamily="34" charset="-120"/>
+              </a:rPr>
+              <a:t>Priorizar renovaciones con capacidad limitada</a:t>
+            </a:r>
+            <a:endParaRPr lang="en-US" sz="4000" dirty="0"/>
+          </a:p>
+        </p:txBody>
+      </p:sp>
+      <p:sp>
+        <p:nvSpPr>
+          <p:cNvPr id="4" name="Text 2"/>
+          <p:cNvSpPr txBox="1"/>
+          <p:nvPr/>
+        </p:nvSpPr>
+        <p:spPr>
+          <a:xfrm>
+            <a:off x="1412199" y="3383280"/>
+            <a:ext cx="9367114" cy="457200"/>
+          </a:xfrm>
+          <a:prstGeom prst="rect">
+            <a:avLst/>
+          </a:prstGeom>
+          <a:noFill/>
+          <a:ln/>
+        </p:spPr>
+        <p:txBody>
+          <a:bodyPr wrap="square" lIns="0" tIns="0" rIns="0" bIns="0" rtlCol="0" anchor="t"/>
+          <a:lstStyle/>
+          <a:p>
+            <a:pPr marL="0" indent="0">
+              <a:lnSpc>
+                <a:spcPct val="115000"/>
+              </a:lnSpc>
+              <a:buNone/>
+            </a:pPr>
+            <a:r>
+              <a:rPr lang="en-US" sz="2000" dirty="0">
+                <a:solidFill>
+                  <a:srgbClr val="FFFFFF"/>
+                </a:solidFill>
+                <a:latin typeface="Segoe UI" pitchFamily="34" charset="0"/>
+                <a:ea typeface="Segoe UI" pitchFamily="34" charset="-122"/>
+                <a:cs typeface="Segoe UI" pitchFamily="34" charset="-120"/>
+              </a:rPr>
+              <a:t>A quién contactar cada mes con 8.000 cupos, netos de riesgo</a:t>
+            </a:r>
+            <a:endParaRPr lang="en-US" sz="2000" dirty="0"/>
+          </a:p>
+        </p:txBody>
+      </p:sp>
+      <p:sp>
+        <p:nvSpPr>
+          <p:cNvPr id="5" name="Text 3"/>
+          <p:cNvSpPr txBox="1"/>
+          <p:nvPr/>
+        </p:nvSpPr>
+        <p:spPr>
+          <a:xfrm>
+            <a:off x="1412199" y="4572000"/>
+            <a:ext cx="9367114" cy="1097280"/>
+          </a:xfrm>
+          <a:prstGeom prst="rect">
+            <a:avLst/>
+          </a:prstGeom>
+          <a:noFill/>
+          <a:ln/>
+        </p:spPr>
+        <p:txBody>
+          <a:bodyPr wrap="square" lIns="0" tIns="0" rIns="0" bIns="0" rtlCol="0" anchor="t"/>
+          <a:lstStyle/>
+          <a:p>
+            <a:pPr marL="0" indent="0">
+              <a:lnSpc>
+                <a:spcPct val="115000"/>
+              </a:lnSpc>
+              <a:buNone/>
+            </a:pPr>
+            <a:r>
+              <a:rPr lang="en-US" sz="1400" b="1" dirty="0">
+                <a:solidFill>
+                  <a:srgbClr val="FFFFFF"/>
+                </a:solidFill>
+                <a:latin typeface="Segoe UI" pitchFamily="34" charset="0"/>
+                <a:ea typeface="Segoe UI" pitchFamily="34" charset="-122"/>
+                <a:cs typeface="Segoe UI" pitchFamily="34" charset="-120"/>
+              </a:rPr>
+              <a:t>Davinson Arteaga</a:t>
+            </a:r>
+            <a:endParaRPr lang="en-US" sz="1400" dirty="0"/>
+          </a:p>
+          <a:p>
+            <a:pPr marL="0" indent="0">
+              <a:lnSpc>
+                <a:spcPct val="115000"/>
+              </a:lnSpc>
+              <a:buNone/>
+            </a:pPr>
+            <a:r>
+              <a:rPr lang="en-US" sz="1400" dirty="0">
+                <a:solidFill>
+                  <a:srgbClr val="FFFFFF"/>
+                </a:solidFill>
+                <a:latin typeface="Segoe UI" pitchFamily="34" charset="0"/>
+                <a:ea typeface="Segoe UI" pitchFamily="34" charset="-122"/>
+                <a:cs typeface="Segoe UI" pitchFamily="34" charset="-120"/>
+              </a:rPr>
+              <a:t>Prueba técnica · Científico de Datos</a:t>
+            </a:r>
+            <a:endParaRPr lang="en-US" sz="1400" dirty="0"/>
+          </a:p>
+          <a:p>
+            <a:pPr marL="0" indent="0">
+              <a:lnSpc>
+                <a:spcPct val="115000"/>
+              </a:lnSpc>
+              <a:buNone/>
+            </a:pPr>
+            <a:r>
+              <a:rPr lang="en-US" sz="1400" dirty="0">
+                <a:solidFill>
+                  <a:srgbClr val="FFFFFF"/>
+                </a:solidFill>
+                <a:latin typeface="Segoe UI" pitchFamily="34" charset="0"/>
+                <a:ea typeface="Segoe UI" pitchFamily="34" charset="-122"/>
+                <a:cs typeface="Segoe UI" pitchFamily="34" charset="-120"/>
+              </a:rPr>
+              <a:t>Preparado para Banco W · Octubre de 2026</a:t>
+            </a:r>
+            <a:endParaRPr lang="en-US" sz="1400" dirty="0"/>
+          </a:p>
+        </p:txBody>
+      </p:sp>
+    </p:spTree>
+  </p:cSld>
+  <p:clrMapOvr>
+    <a:masterClrMapping/>
+  </p:clrMapOvr>
+</p:sld>
+</file>
+
+<file path=ppt/slides/slide2.xml><?xml version="1.0" encoding="utf-8"?>
+<p:sld xmlns:a="http://schemas.openxmlformats.org/drawingml/2006/main" xmlns:r="http://schemas.openxmlformats.org/officeDocument/2006/relationships" xmlns:p="http://schemas.openxmlformats.org/presentationml/2006/main">
+  <p:cSld name="Slide 2">
+    <p:spTree>
+      <p:nvGrpSpPr>
+        <p:cNvPr id="1" name=""/>
+        <p:cNvGrpSpPr/>
+        <p:nvPr/>
+      </p:nvGrpSpPr>
+      <p:grpSpPr>
+        <a:xfrm>
+          <a:off x="0" y="0"/>
+          <a:ext cx="0" cy="0"/>
+          <a:chOff x="0" y="0"/>
+          <a:chExt cx="0" cy="0"/>
+        </a:xfrm>
+      </p:grpSpPr>
+      <p:sp>
+        <p:nvSpPr>
           <p:cNvPr id="2" name="Text 1"/>
           <p:cNvSpPr>
             <a:spLocks noGrp="1"/>
           </p:cNvSpPr>
           <p:nvPr>
-            <p:ph type="title" idx="102" hasCustomPrompt="1"/>
+            <p:ph type="title" idx="101" hasCustomPrompt="1"/>
           </p:nvPr>
         </p:nvSpPr>
         <p:spPr>
           <a:xfrm>
-            <a:off x="457200" y="347472"/>
-            <a:ext cx="11277295" cy="438912"/>
+            <a:off x="457200" y="310896"/>
+            <a:ext cx="11277295" cy="512064"/>
           </a:xfrm>
           <a:prstGeom prst="rect">
             <a:avLst/>
@@ -2039,9 +2446,9 @@
                 <a:solidFill>
                   <a:srgbClr val="2E2E2E"/>
                 </a:solidFill>
-                <a:latin typeface="Bahnschrift" pitchFamily="34" charset="0"/>
-                <a:ea typeface="Bahnschrift" pitchFamily="34" charset="-122"/>
-                <a:cs typeface="Bahnschrift" pitchFamily="34" charset="-120"/>
+                <a:latin typeface="Segoe UI Semibold" pitchFamily="34" charset="0"/>
+                <a:ea typeface="Segoe UI Semibold" pitchFamily="34" charset="-122"/>
+                <a:cs typeface="Segoe UI Semibold" pitchFamily="34" charset="-120"/>
               </a:rPr>
               <a:t>Contactar a los 8.000 que más valor dejan, netos de riesgo</a:t>
             </a:r>
@@ -2139,17 +2546,17 @@
               <a:buNone/>
             </a:pPr>
             <a:r>
-              <a:rPr lang="en-US" sz="3200" dirty="0">
+              <a:rPr lang="en-US" sz="2800" dirty="0">
                 <a:solidFill>
                   <a:srgbClr val="E35A00"/>
                 </a:solidFill>
-                <a:latin typeface="Bahnschrift" pitchFamily="34" charset="0"/>
-                <a:ea typeface="Bahnschrift" pitchFamily="34" charset="-122"/>
-                <a:cs typeface="Bahnschrift" pitchFamily="34" charset="-120"/>
+                <a:latin typeface="Segoe UI Semibold" pitchFamily="34" charset="0"/>
+                <a:ea typeface="Segoe UI Semibold" pitchFamily="34" charset="-122"/>
+                <a:cs typeface="Segoe UI Semibold" pitchFamily="34" charset="-120"/>
               </a:rPr>
               <a:t>8.000 de 25.000</a:t>
             </a:r>
-            <a:endParaRPr lang="en-US" sz="3200" dirty="0"/>
+            <a:endParaRPr lang="en-US" sz="2800" dirty="0"/>
           </a:p>
         </p:txBody>
       </p:sp>
@@ -2162,7 +2569,7 @@
         <p:spPr>
           <a:xfrm>
             <a:off x="457200" y="2377440"/>
-            <a:ext cx="3637117" cy="548640"/>
+            <a:ext cx="3637117" cy="603504"/>
           </a:xfrm>
           <a:prstGeom prst="rect">
             <a:avLst/>
@@ -2223,17 +2630,17 @@
               <a:buNone/>
             </a:pPr>
             <a:r>
-              <a:rPr lang="en-US" sz="3200" dirty="0">
+              <a:rPr lang="en-US" sz="2800" dirty="0">
                 <a:solidFill>
                   <a:srgbClr val="E35A00"/>
                 </a:solidFill>
-                <a:latin typeface="Bahnschrift" pitchFamily="34" charset="0"/>
-                <a:ea typeface="Bahnschrift" pitchFamily="34" charset="-122"/>
-                <a:cs typeface="Bahnschrift" pitchFamily="34" charset="-120"/>
+                <a:latin typeface="Segoe UI Semibold" pitchFamily="34" charset="0"/>
+                <a:ea typeface="Segoe UI Semibold" pitchFamily="34" charset="-122"/>
+                <a:cs typeface="Segoe UI Semibold" pitchFamily="34" charset="-120"/>
               </a:rPr>
               <a:t>3,6 % = 288</a:t>
             </a:r>
-            <a:endParaRPr lang="en-US" sz="3200" dirty="0"/>
+            <a:endParaRPr lang="en-US" sz="2800" dirty="0"/>
           </a:p>
         </p:txBody>
       </p:sp>
@@ -2246,7 +2653,7 @@
         <p:spPr>
           <a:xfrm>
             <a:off x="4277197" y="2377440"/>
-            <a:ext cx="3637117" cy="548640"/>
+            <a:ext cx="3637117" cy="603504"/>
           </a:xfrm>
           <a:prstGeom prst="rect">
             <a:avLst/>
@@ -2307,17 +2714,17 @@
               <a:buNone/>
             </a:pPr>
             <a:r>
-              <a:rPr lang="en-US" sz="3200" dirty="0">
+              <a:rPr lang="en-US" sz="2800" dirty="0">
                 <a:solidFill>
                   <a:srgbClr val="E35A00"/>
                 </a:solidFill>
-                <a:latin typeface="Bahnschrift" pitchFamily="34" charset="0"/>
-                <a:ea typeface="Bahnschrift" pitchFamily="34" charset="-122"/>
-                <a:cs typeface="Bahnschrift" pitchFamily="34" charset="-120"/>
+                <a:latin typeface="Segoe UI Semibold" pitchFamily="34" charset="0"/>
+                <a:ea typeface="Segoe UI Semibold" pitchFamily="34" charset="-122"/>
+                <a:cs typeface="Segoe UI Semibold" pitchFamily="34" charset="-120"/>
               </a:rPr>
               <a:t>1 mora = 4,3 sanas</a:t>
             </a:r>
-            <a:endParaRPr lang="en-US" sz="3200" dirty="0"/>
+            <a:endParaRPr lang="en-US" sz="2800" dirty="0"/>
           </a:p>
         </p:txBody>
       </p:sp>
@@ -2330,7 +2737,7 @@
         <p:spPr>
           <a:xfrm>
             <a:off x="8097195" y="2377440"/>
-            <a:ext cx="3637117" cy="548640"/>
+            <a:ext cx="3637117" cy="603504"/>
           </a:xfrm>
           <a:prstGeom prst="rect">
             <a:avLst/>
@@ -2395,7 +2802,7 @@
         <p:spPr>
           <a:xfrm>
             <a:off x="457200" y="3246120"/>
-            <a:ext cx="4592117" cy="256032"/>
+            <a:ext cx="4592117" cy="292608"/>
           </a:xfrm>
           <a:prstGeom prst="rect">
             <a:avLst/>
@@ -2531,7 +2938,7 @@
         <p:spPr>
           <a:xfrm>
             <a:off x="457200" y="5138928"/>
-            <a:ext cx="4592117" cy="256032"/>
+            <a:ext cx="4592117" cy="292608"/>
           </a:xfrm>
           <a:prstGeom prst="rect">
             <a:avLst/>
@@ -2615,7 +3022,7 @@
         <p:spPr>
           <a:xfrm>
             <a:off x="5232197" y="3246120"/>
-            <a:ext cx="6502116" cy="256032"/>
+            <a:ext cx="6502116" cy="292608"/>
           </a:xfrm>
           <a:prstGeom prst="rect">
             <a:avLst/>
@@ -3687,8 +4094,8 @@
         </p:nvSpPr>
         <p:spPr>
           <a:xfrm>
-            <a:off x="11274552" y="6473952"/>
-            <a:ext cx="457200" cy="228600"/>
+            <a:off x="11274552" y="6419088"/>
+            <a:ext cx="457200" cy="347472"/>
           </a:xfrm>
           <a:prstGeom prst="rect">
             <a:avLst/>
@@ -3717,7 +4124,7 @@
             <a:pPr algn="r"/>
             <a:fld id="{F7021451-1387-4CA6-816F-3879F97B5CBC}" type="slidenum">
               <a:rPr lang="en-US" b="0"/>
-              <a:t>1</a:t>
+              <a:t>2</a:t>
             </a:fld>
             <a:endParaRPr lang="en-US"/>
           </a:p>
@@ -3731,9 +4138,9 @@
 </p:sld>
 </file>
 
-<file path=ppt/slides/slide2.xml><?xml version="1.0" encoding="utf-8"?>
+<file path=ppt/slides/slide3.xml><?xml version="1.0" encoding="utf-8"?>
 <p:sld xmlns:a="http://schemas.openxmlformats.org/drawingml/2006/main" xmlns:r="http://schemas.openxmlformats.org/officeDocument/2006/relationships" xmlns:p="http://schemas.openxmlformats.org/presentationml/2006/main">
-  <p:cSld name="Slide 2">
+  <p:cSld name="Slide 3">
     <p:spTree>
       <p:nvGrpSpPr>
         <p:cNvPr id="1" name=""/>
@@ -3755,13 +4162,13 @@
             <a:spLocks noGrp="1"/>
           </p:cNvSpPr>
           <p:nvPr>
-            <p:ph type="title" idx="102" hasCustomPrompt="1"/>
+            <p:ph type="title" idx="101" hasCustomPrompt="1"/>
           </p:nvPr>
         </p:nvSpPr>
         <p:spPr>
           <a:xfrm>
-            <a:off x="457200" y="347472"/>
-            <a:ext cx="11277295" cy="438912"/>
+            <a:off x="457200" y="310896"/>
+            <a:ext cx="11277295" cy="512064"/>
           </a:xfrm>
           <a:prstGeom prst="rect">
             <a:avLst/>
@@ -3781,9 +4188,9 @@
                 <a:solidFill>
                   <a:srgbClr val="2E2E2E"/>
                 </a:solidFill>
-                <a:latin typeface="Bahnschrift" pitchFamily="34" charset="0"/>
-                <a:ea typeface="Bahnschrift" pitchFamily="34" charset="-122"/>
-                <a:cs typeface="Bahnschrift" pitchFamily="34" charset="-120"/>
+                <a:latin typeface="Segoe UI Semibold" pitchFamily="34" charset="0"/>
+                <a:ea typeface="Segoe UI Semibold" pitchFamily="34" charset="-122"/>
+                <a:cs typeface="Segoe UI Semibold" pitchFamily="34" charset="-120"/>
               </a:rPr>
               <a:t>Los datos sirven para ordenar clientes, no para medir riesgo ni efecto</a:t>
             </a:r>
@@ -3862,7 +4269,7 @@
         <p:spPr>
           <a:xfrm>
             <a:off x="457200" y="1828800"/>
-            <a:ext cx="11277295" cy="256032"/>
+            <a:ext cx="11277295" cy="292608"/>
           </a:xfrm>
           <a:prstGeom prst="rect">
             <a:avLst/>
@@ -5305,7 +5712,7 @@
         <p:spPr>
           <a:xfrm>
             <a:off x="457200" y="4617720"/>
-            <a:ext cx="11277295" cy="256032"/>
+            <a:ext cx="11277295" cy="292608"/>
           </a:xfrm>
           <a:prstGeom prst="rect">
             <a:avLst/>
@@ -5477,8 +5884,8 @@
         </p:nvSpPr>
         <p:spPr>
           <a:xfrm>
-            <a:off x="11274552" y="6473952"/>
-            <a:ext cx="457200" cy="228600"/>
+            <a:off x="11274552" y="6419088"/>
+            <a:ext cx="457200" cy="347472"/>
           </a:xfrm>
           <a:prstGeom prst="rect">
             <a:avLst/>
@@ -5507,7 +5914,7 @@
             <a:pPr algn="r"/>
             <a:fld id="{F7021451-1387-4CA6-816F-3879F97B5CBC}" type="slidenum">
               <a:rPr lang="en-US" b="0"/>
-              <a:t>2</a:t>
+              <a:t>3</a:t>
             </a:fld>
             <a:endParaRPr lang="en-US"/>
           </a:p>
@@ -5521,9 +5928,9 @@
 </p:sld>
 </file>
 
-<file path=ppt/slides/slide3.xml><?xml version="1.0" encoding="utf-8"?>
+<file path=ppt/slides/slide4.xml><?xml version="1.0" encoding="utf-8"?>
 <p:sld xmlns:a="http://schemas.openxmlformats.org/drawingml/2006/main" xmlns:r="http://schemas.openxmlformats.org/officeDocument/2006/relationships" xmlns:p="http://schemas.openxmlformats.org/presentationml/2006/main">
-  <p:cSld name="Slide 3">
+  <p:cSld name="Slide 4">
     <p:spTree>
       <p:nvGrpSpPr>
         <p:cNvPr id="1" name=""/>
@@ -5545,13 +5952,13 @@
             <a:spLocks noGrp="1"/>
           </p:cNvSpPr>
           <p:nvPr>
-            <p:ph type="title" idx="102" hasCustomPrompt="1"/>
+            <p:ph type="title" idx="101" hasCustomPrompt="1"/>
           </p:nvPr>
         </p:nvSpPr>
         <p:spPr>
           <a:xfrm>
-            <a:off x="457200" y="347472"/>
-            <a:ext cx="11277295" cy="438912"/>
+            <a:off x="457200" y="310896"/>
+            <a:ext cx="11277295" cy="512064"/>
           </a:xfrm>
           <a:prstGeom prst="rect">
             <a:avLst/>
@@ -5571,9 +5978,9 @@
                 <a:solidFill>
                   <a:srgbClr val="2E2E2E"/>
                 </a:solidFill>
-                <a:latin typeface="Bahnschrift" pitchFamily="34" charset="0"/>
-                <a:ea typeface="Bahnschrift" pitchFamily="34" charset="-122"/>
-                <a:cs typeface="Bahnschrift" pitchFamily="34" charset="-120"/>
+                <a:latin typeface="Segoe UI Semibold" pitchFamily="34" charset="0"/>
+                <a:ea typeface="Segoe UI Semibold" pitchFamily="34" charset="-122"/>
+                <a:cs typeface="Segoe UI Semibold" pitchFamily="34" charset="-120"/>
               </a:rPr>
               <a:t>B pasa a piloto, A se verifica antes y C se descarta</a:t>
             </a:r>
@@ -5716,7 +6123,7 @@
                   </a:extLst>
                 </a:gridCol>
               </a:tblGrid>
-              <a:tr h="384048">
+              <a:tr h="274320">
                 <a:tc>
                   <a:txBody>
                     <a:bodyPr/>
@@ -5875,7 +6282,7 @@
                           <a:ea typeface="Segoe UI" pitchFamily="34" charset="-122"/>
                           <a:cs typeface="Segoe UI" pitchFamily="34" charset="-120"/>
                         </a:rPr>
-                        <a:t>Conversión reportada</a:t>
+                        <a:t>Conversión</a:t>
                       </a:r>
                       <a:endParaRPr lang="en-US" sz="1050" dirty="0">
                         <a:latin typeface="Segoe UI" charset="0"/>
@@ -8010,7 +8417,7 @@
         <p:spPr>
           <a:xfrm>
             <a:off x="8097195" y="1828800"/>
-            <a:ext cx="3637117" cy="256032"/>
+            <a:ext cx="3637117" cy="292608"/>
           </a:xfrm>
           <a:prstGeom prst="rect">
             <a:avLst/>
@@ -8052,7 +8459,7 @@
         <p:spPr>
           <a:xfrm>
             <a:off x="8097195" y="2121408"/>
-            <a:ext cx="3637117" cy="411480"/>
+            <a:ext cx="3637117" cy="502920"/>
           </a:xfrm>
           <a:prstGeom prst="rect">
             <a:avLst/>
@@ -8109,8 +8516,8 @@
         </p:nvSpPr>
         <p:spPr>
           <a:xfrm>
-            <a:off x="8097195" y="4279392"/>
-            <a:ext cx="3637117" cy="411480"/>
+            <a:off x="8097195" y="4261104"/>
+            <a:ext cx="3637117" cy="530352"/>
           </a:xfrm>
           <a:prstGeom prst="rect">
             <a:avLst/>
@@ -8175,7 +8582,7 @@
         <p:spPr>
           <a:xfrm>
             <a:off x="457200" y="5074920"/>
-            <a:ext cx="5547116" cy="256032"/>
+            <a:ext cx="5547116" cy="292608"/>
           </a:xfrm>
           <a:prstGeom prst="rect">
             <a:avLst/>
@@ -8287,7 +8694,7 @@
         <p:spPr>
           <a:xfrm>
             <a:off x="6187196" y="5074920"/>
-            <a:ext cx="5547116" cy="256032"/>
+            <a:ext cx="5547116" cy="292608"/>
           </a:xfrm>
           <a:prstGeom prst="rect">
             <a:avLst/>
@@ -8402,8 +8809,8 @@
         </p:nvSpPr>
         <p:spPr>
           <a:xfrm>
-            <a:off x="11274552" y="6473952"/>
-            <a:ext cx="457200" cy="228600"/>
+            <a:off x="11274552" y="6419088"/>
+            <a:ext cx="457200" cy="347472"/>
           </a:xfrm>
           <a:prstGeom prst="rect">
             <a:avLst/>
@@ -8432,7 +8839,7 @@
             <a:pPr algn="r"/>
             <a:fld id="{F7021451-1387-4CA6-816F-3879F97B5CBC}" type="slidenum">
               <a:rPr lang="en-US" b="0"/>
-              <a:t>3</a:t>
+              <a:t>4</a:t>
             </a:fld>
             <a:endParaRPr lang="en-US"/>
           </a:p>
@@ -8446,9 +8853,9 @@
 </p:sld>
 </file>
 
-<file path=ppt/slides/slide4.xml><?xml version="1.0" encoding="utf-8"?>
+<file path=ppt/slides/slide5.xml><?xml version="1.0" encoding="utf-8"?>
 <p:sld xmlns:a="http://schemas.openxmlformats.org/drawingml/2006/main" xmlns:r="http://schemas.openxmlformats.org/officeDocument/2006/relationships" xmlns:p="http://schemas.openxmlformats.org/presentationml/2006/main">
-  <p:cSld name="Slide 4">
+  <p:cSld name="Slide 5">
     <p:spTree>
       <p:nvGrpSpPr>
         <p:cNvPr id="1" name=""/>
@@ -8470,13 +8877,13 @@
             <a:spLocks noGrp="1"/>
           </p:cNvSpPr>
           <p:nvPr>
-            <p:ph type="title" idx="102" hasCustomPrompt="1"/>
+            <p:ph type="title" idx="101" hasCustomPrompt="1"/>
           </p:nvPr>
         </p:nvSpPr>
         <p:spPr>
           <a:xfrm>
-            <a:off x="457200" y="347472"/>
-            <a:ext cx="11277295" cy="438912"/>
+            <a:off x="457200" y="310896"/>
+            <a:ext cx="11277295" cy="512064"/>
           </a:xfrm>
           <a:prstGeom prst="rect">
             <a:avLst/>
@@ -8496,9 +8903,9 @@
                 <a:solidFill>
                   <a:srgbClr val="2E2E2E"/>
                 </a:solidFill>
-                <a:latin typeface="Bahnschrift" pitchFamily="34" charset="0"/>
-                <a:ea typeface="Bahnschrift" pitchFamily="34" charset="-122"/>
-                <a:cs typeface="Bahnschrift" pitchFamily="34" charset="-120"/>
+                <a:latin typeface="Segoe UI Semibold" pitchFamily="34" charset="0"/>
+                <a:ea typeface="Segoe UI Semibold" pitchFamily="34" charset="-122"/>
+                <a:cs typeface="Segoe UI Semibold" pitchFamily="34" charset="-120"/>
               </a:rPr>
               <a:t>B deja más valor que A: 237 frente a 218 millones al mes</a:t>
             </a:r>
@@ -8577,7 +8984,7 @@
         <p:spPr>
           <a:xfrm>
             <a:off x="457200" y="1828800"/>
-            <a:ext cx="4592117" cy="256032"/>
+            <a:ext cx="4592117" cy="292608"/>
           </a:xfrm>
           <a:prstGeom prst="rect">
             <a:avLst/>
@@ -8604,7 +9011,7 @@
                 <a:ea typeface="Segoe UI" pitchFamily="34" charset="-122"/>
                 <a:cs typeface="Segoe UI" pitchFamily="34" charset="-120"/>
               </a:rPr>
-              <a:t>Valor esperado mensual neto de mora (COP millones)</a:t>
+              <a:t>Valor esperado neto de mora, COP millones al mes</a:t>
             </a:r>
             <a:endParaRPr lang="en-US" sz="1200" dirty="0"/>
           </a:p>
@@ -8618,8 +9025,8 @@
         </p:nvSpPr>
         <p:spPr>
           <a:xfrm>
-            <a:off x="457200" y="2103120"/>
-            <a:ext cx="4592117" cy="411480"/>
+            <a:off x="457200" y="2139696"/>
+            <a:ext cx="4592117" cy="502920"/>
           </a:xfrm>
           <a:prstGeom prst="rect">
             <a:avLst/>
@@ -8659,8 +9066,8 @@
           <p:nvPr/>
         </p:nvGraphicFramePr>
         <p:xfrm>
-          <a:off x="384048" y="2606040"/>
-          <a:ext cx="4665269" cy="1737360"/>
+          <a:off x="384048" y="2670048"/>
+          <a:ext cx="4665269" cy="1673352"/>
         </p:xfrm>
         <a:graphic>
           <a:graphicData uri="http://schemas.openxmlformats.org/drawingml/2006/chart">
@@ -8696,17 +9103,17 @@
               <a:buNone/>
             </a:pPr>
             <a:r>
-              <a:rPr lang="en-US" sz="3200" dirty="0">
+              <a:rPr lang="en-US" sz="2800" dirty="0">
                 <a:solidFill>
                   <a:srgbClr val="E35A00"/>
                 </a:solidFill>
-                <a:latin typeface="Bahnschrift" pitchFamily="34" charset="0"/>
-                <a:ea typeface="Bahnschrift" pitchFamily="34" charset="-122"/>
-                <a:cs typeface="Bahnschrift" pitchFamily="34" charset="-120"/>
+                <a:latin typeface="Segoe UI Semibold" pitchFamily="34" charset="0"/>
+                <a:ea typeface="Segoe UI Semibold" pitchFamily="34" charset="-122"/>
+                <a:cs typeface="Segoe UI Semibold" pitchFamily="34" charset="-120"/>
               </a:rPr>
               <a:t>+143 M</a:t>
             </a:r>
-            <a:endParaRPr lang="en-US" sz="3200" dirty="0"/>
+            <a:endParaRPr lang="en-US" sz="2800" dirty="0"/>
           </a:p>
         </p:txBody>
       </p:sp>
@@ -8719,7 +9126,7 @@
         <p:spPr>
           <a:xfrm>
             <a:off x="5232197" y="2377440"/>
-            <a:ext cx="2682118" cy="548640"/>
+            <a:ext cx="2682118" cy="603504"/>
           </a:xfrm>
           <a:prstGeom prst="rect">
             <a:avLst/>
@@ -8780,17 +9187,17 @@
               <a:buNone/>
             </a:pPr>
             <a:r>
-              <a:rPr lang="en-US" sz="3200" dirty="0">
+              <a:rPr lang="en-US" sz="2800" dirty="0">
                 <a:solidFill>
                   <a:srgbClr val="E35A00"/>
                 </a:solidFill>
-                <a:latin typeface="Bahnschrift" pitchFamily="34" charset="0"/>
-                <a:ea typeface="Bahnschrift" pitchFamily="34" charset="-122"/>
-                <a:cs typeface="Bahnschrift" pitchFamily="34" charset="-120"/>
+                <a:latin typeface="Segoe UI Semibold" pitchFamily="34" charset="0"/>
+                <a:ea typeface="Segoe UI Semibold" pitchFamily="34" charset="-122"/>
+                <a:cs typeface="Segoe UI Semibold" pitchFamily="34" charset="-120"/>
               </a:rPr>
               <a:t>≈ 103 M</a:t>
             </a:r>
-            <a:endParaRPr lang="en-US" sz="3200" dirty="0"/>
+            <a:endParaRPr lang="en-US" sz="2800" dirty="0"/>
           </a:p>
         </p:txBody>
       </p:sp>
@@ -8803,7 +9210,7 @@
         <p:spPr>
           <a:xfrm>
             <a:off x="8097195" y="2377440"/>
-            <a:ext cx="3637117" cy="548640"/>
+            <a:ext cx="3637117" cy="603504"/>
           </a:xfrm>
           <a:prstGeom prst="rect">
             <a:avLst/>
@@ -8844,8 +9251,8 @@
         </p:nvSpPr>
         <p:spPr>
           <a:xfrm>
-            <a:off x="5232197" y="3017520"/>
-            <a:ext cx="6502116" cy="256032"/>
+            <a:off x="5232197" y="3072384"/>
+            <a:ext cx="6502116" cy="292608"/>
           </a:xfrm>
           <a:prstGeom prst="rect">
             <a:avLst/>
@@ -8886,8 +9293,8 @@
         </p:nvSpPr>
         <p:spPr>
           <a:xfrm>
-            <a:off x="5232197" y="3310128"/>
-            <a:ext cx="6502116" cy="1005840"/>
+            <a:off x="5232197" y="3383280"/>
+            <a:ext cx="6502116" cy="987552"/>
           </a:xfrm>
           <a:prstGeom prst="rect">
             <a:avLst/>
@@ -8956,8 +9363,8 @@
         </p:nvSpPr>
         <p:spPr>
           <a:xfrm>
-            <a:off x="457200" y="4480560"/>
-            <a:ext cx="11277295" cy="256032"/>
+            <a:off x="457200" y="4443984"/>
+            <a:ext cx="11277295" cy="292608"/>
           </a:xfrm>
           <a:prstGeom prst="rect">
             <a:avLst/>
@@ -9005,7 +9412,7 @@
           </p:nvPr>
         </p:nvGraphicFramePr>
         <p:xfrm>
-          <a:off x="457200" y="4773168"/>
+          <a:off x="457200" y="4754880"/>
           <a:ext cx="11277295" cy="914400"/>
         </p:xfrm>
         <a:graphic>
@@ -9056,7 +9463,7 @@
                   </a:extLst>
                 </a:gridCol>
               </a:tblGrid>
-              <a:tr h="196596">
+              <a:tr h="237744">
                 <a:tc>
                   <a:txBody>
                     <a:bodyPr/>
@@ -11015,8 +11422,8 @@
         </p:nvSpPr>
         <p:spPr>
           <a:xfrm>
-            <a:off x="457200" y="6089904"/>
-            <a:ext cx="11277295" cy="228600"/>
+            <a:off x="457200" y="6108192"/>
+            <a:ext cx="11277295" cy="274320"/>
           </a:xfrm>
           <a:prstGeom prst="rect">
             <a:avLst/>
@@ -11061,8 +11468,8 @@
         </p:nvSpPr>
         <p:spPr>
           <a:xfrm>
-            <a:off x="11274552" y="6473952"/>
-            <a:ext cx="457200" cy="228600"/>
+            <a:off x="11274552" y="6419088"/>
+            <a:ext cx="457200" cy="347472"/>
           </a:xfrm>
           <a:prstGeom prst="rect">
             <a:avLst/>
@@ -11091,7 +11498,7 @@
             <a:pPr algn="r"/>
             <a:fld id="{F7021451-1387-4CA6-816F-3879F97B5CBC}" type="slidenum">
               <a:rPr lang="en-US" b="0"/>
-              <a:t>4</a:t>
+              <a:t>5</a:t>
             </a:fld>
             <a:endParaRPr lang="en-US"/>
           </a:p>
@@ -11105,9 +11512,9 @@
 </p:sld>
 </file>
 
-<file path=ppt/slides/slide5.xml><?xml version="1.0" encoding="utf-8"?>
+<file path=ppt/slides/slide6.xml><?xml version="1.0" encoding="utf-8"?>
 <p:sld xmlns:a="http://schemas.openxmlformats.org/drawingml/2006/main" xmlns:r="http://schemas.openxmlformats.org/officeDocument/2006/relationships" xmlns:p="http://schemas.openxmlformats.org/presentationml/2006/main">
-  <p:cSld name="Slide 5">
+  <p:cSld name="Slide 6">
     <p:spTree>
       <p:nvGrpSpPr>
         <p:cNvPr id="1" name=""/>
@@ -11129,13 +11536,13 @@
             <a:spLocks noGrp="1"/>
           </p:cNvSpPr>
           <p:nvPr>
-            <p:ph type="title" idx="102" hasCustomPrompt="1"/>
+            <p:ph type="title" idx="101" hasCustomPrompt="1"/>
           </p:nvPr>
         </p:nvSpPr>
         <p:spPr>
           <a:xfrm>
-            <a:off x="457200" y="347472"/>
-            <a:ext cx="11277295" cy="438912"/>
+            <a:off x="457200" y="310896"/>
+            <a:ext cx="11277295" cy="512064"/>
           </a:xfrm>
           <a:prstGeom prst="rect">
             <a:avLst/>
@@ -11155,9 +11562,9 @@
                 <a:solidFill>
                   <a:srgbClr val="2E2E2E"/>
                 </a:solidFill>
-                <a:latin typeface="Bahnschrift" pitchFamily="34" charset="0"/>
-                <a:ea typeface="Bahnschrift" pitchFamily="34" charset="-122"/>
-                <a:cs typeface="Bahnschrift" pitchFamily="34" charset="-120"/>
+                <a:latin typeface="Segoe UI Semibold" pitchFamily="34" charset="0"/>
+                <a:ea typeface="Segoe UI Semibold" pitchFamily="34" charset="-122"/>
+                <a:cs typeface="Segoe UI Semibold" pitchFamily="34" charset="-120"/>
               </a:rPr>
               <a:t>Un piloto de dos meses mide si llamar crea renovaciones</a:t>
             </a:r>
@@ -11236,7 +11643,7 @@
         <p:spPr>
           <a:xfrm>
             <a:off x="457200" y="1828800"/>
-            <a:ext cx="6502116" cy="256032"/>
+            <a:ext cx="6502116" cy="292608"/>
           </a:xfrm>
           <a:prstGeom prst="rect">
             <a:avLst/>
@@ -11596,7 +12003,7 @@
         <p:spPr>
           <a:xfrm>
             <a:off x="457200" y="3931920"/>
-            <a:ext cx="6502116" cy="256032"/>
+            <a:ext cx="6502116" cy="292608"/>
           </a:xfrm>
           <a:prstGeom prst="rect">
             <a:avLst/>
@@ -12831,7 +13238,7 @@
         <p:spPr>
           <a:xfrm>
             <a:off x="7325076" y="1828800"/>
-            <a:ext cx="4409420" cy="256032"/>
+            <a:ext cx="4409420" cy="292608"/>
           </a:xfrm>
           <a:prstGeom prst="rect">
             <a:avLst/>
@@ -13581,7 +13988,7 @@
         <p:spPr>
           <a:xfrm>
             <a:off x="7325076" y="4480560"/>
-            <a:ext cx="4409420" cy="256032"/>
+            <a:ext cx="4409420" cy="292608"/>
           </a:xfrm>
           <a:prstGeom prst="rect">
             <a:avLst/>
@@ -13744,8 +14151,8 @@
         </p:nvSpPr>
         <p:spPr>
           <a:xfrm>
-            <a:off x="11274552" y="6473952"/>
-            <a:ext cx="457200" cy="228600"/>
+            <a:off x="11274552" y="6419088"/>
+            <a:ext cx="457200" cy="347472"/>
           </a:xfrm>
           <a:prstGeom prst="rect">
             <a:avLst/>
@@ -13774,7 +14181,7 @@
             <a:pPr algn="r"/>
             <a:fld id="{F7021451-1387-4CA6-816F-3879F97B5CBC}" type="slidenum">
               <a:rPr lang="en-US" b="0"/>
-              <a:t>5</a:t>
+              <a:t>6</a:t>
             </a:fld>
             <a:endParaRPr lang="en-US"/>
           </a:p>
@@ -13788,9 +14195,9 @@
 </p:sld>
 </file>
 
-<file path=ppt/slides/slide6.xml><?xml version="1.0" encoding="utf-8"?>
+<file path=ppt/slides/slide7.xml><?xml version="1.0" encoding="utf-8"?>
 <p:sld xmlns:a="http://schemas.openxmlformats.org/drawingml/2006/main" xmlns:r="http://schemas.openxmlformats.org/officeDocument/2006/relationships" xmlns:p="http://schemas.openxmlformats.org/presentationml/2006/main">
-  <p:cSld name="Slide 6">
+  <p:cSld name="Slide 7">
     <p:spTree>
       <p:nvGrpSpPr>
         <p:cNvPr id="1" name=""/>
@@ -13812,13 +14219,13 @@
             <a:spLocks noGrp="1"/>
           </p:cNvSpPr>
           <p:nvPr>
-            <p:ph type="title" idx="102" hasCustomPrompt="1"/>
+            <p:ph type="title" idx="101" hasCustomPrompt="1"/>
           </p:nvPr>
         </p:nvSpPr>
         <p:spPr>
           <a:xfrm>
-            <a:off x="457200" y="347472"/>
-            <a:ext cx="11277295" cy="438912"/>
+            <a:off x="457200" y="310896"/>
+            <a:ext cx="11277295" cy="512064"/>
           </a:xfrm>
           <a:prstGeom prst="rect">
             <a:avLst/>
@@ -13838,9 +14245,9 @@
                 <a:solidFill>
                   <a:srgbClr val="2E2E2E"/>
                 </a:solidFill>
-                <a:latin typeface="Bahnschrift" pitchFamily="34" charset="0"/>
-                <a:ea typeface="Bahnschrift" pitchFamily="34" charset="-122"/>
-                <a:cs typeface="Bahnschrift" pitchFamily="34" charset="-120"/>
+                <a:latin typeface="Segoe UI Semibold" pitchFamily="34" charset="0"/>
+                <a:ea typeface="Segoe UI Semibold" pitchFamily="34" charset="-122"/>
+                <a:cs typeface="Segoe UI Semibold" pitchFamily="34" charset="-120"/>
               </a:rPr>
               <a:t>Aprobar hoy el piloto de B y no liberar C</a:t>
             </a:r>
@@ -13904,7 +14311,7 @@
                 <a:ea typeface="Segoe UI" pitchFamily="34" charset="-122"/>
                 <a:cs typeface="Segoe UI" pitchFamily="34" charset="-120"/>
               </a:rPr>
-              <a:t>Pedimos tres decisiones hoy: aprobar desde el próximo corte el piloto de B con grupo de control, no liberar C y fijar el KPI y los guardrails con su responsable.</a:t>
+              <a:t>Tres decisiones: aprobar el piloto de B desde el próximo corte, no liberar C y fijar KPI y guardrails.</a:t>
             </a:r>
             <a:endParaRPr lang="en-US" sz="1250" dirty="0"/>
           </a:p>
@@ -13919,7 +14326,7 @@
         <p:spPr>
           <a:xfrm>
             <a:off x="457200" y="1828800"/>
-            <a:ext cx="6502116" cy="256032"/>
+            <a:ext cx="6502116" cy="292608"/>
           </a:xfrm>
           <a:prstGeom prst="rect">
             <a:avLst/>
@@ -13946,7 +14353,7 @@
                 <a:ea typeface="Segoe UI" pitchFamily="34" charset="-122"/>
                 <a:cs typeface="Segoe UI" pitchFamily="34" charset="-120"/>
               </a:rPr>
-              <a:t>Tres decisiones para hoy</a:t>
+              <a:t>Tres decisiones</a:t>
             </a:r>
             <a:endParaRPr lang="en-US" sz="1200" dirty="0"/>
           </a:p>
@@ -13960,7 +14367,7 @@
         </p:nvSpPr>
         <p:spPr>
           <a:xfrm>
-            <a:off x="457200" y="2157984"/>
+            <a:off x="457200" y="2121408"/>
             <a:ext cx="457200" cy="548640"/>
           </a:xfrm>
           <a:prstGeom prst="rect">
@@ -13980,17 +14387,17 @@
               <a:buNone/>
             </a:pPr>
             <a:r>
-              <a:rPr lang="en-US" sz="3200" dirty="0">
+              <a:rPr lang="en-US" sz="2800" dirty="0">
                 <a:solidFill>
                   <a:srgbClr val="E35A00"/>
                 </a:solidFill>
-                <a:latin typeface="Bahnschrift" pitchFamily="34" charset="0"/>
-                <a:ea typeface="Bahnschrift" pitchFamily="34" charset="-122"/>
-                <a:cs typeface="Bahnschrift" pitchFamily="34" charset="-120"/>
+                <a:latin typeface="Segoe UI Semibold" pitchFamily="34" charset="0"/>
+                <a:ea typeface="Segoe UI Semibold" pitchFamily="34" charset="-122"/>
+                <a:cs typeface="Segoe UI Semibold" pitchFamily="34" charset="-120"/>
               </a:rPr>
               <a:t>1</a:t>
             </a:r>
-            <a:endParaRPr lang="en-US" sz="3200" dirty="0"/>
+            <a:endParaRPr lang="en-US" sz="2800" dirty="0"/>
           </a:p>
         </p:txBody>
       </p:sp>
@@ -14002,8 +14409,8 @@
         </p:nvSpPr>
         <p:spPr>
           <a:xfrm>
-            <a:off x="1005840" y="2212848"/>
-            <a:ext cx="5953476" cy="603504"/>
+            <a:off x="1005840" y="2176272"/>
+            <a:ext cx="5953476" cy="530352"/>
           </a:xfrm>
           <a:prstGeom prst="rect">
             <a:avLst/>
@@ -14064,7 +14471,7 @@
         </p:nvSpPr>
         <p:spPr>
           <a:xfrm>
-            <a:off x="457200" y="2852928"/>
+            <a:off x="457200" y="2743200"/>
             <a:ext cx="6502116" cy="0"/>
           </a:xfrm>
           <a:prstGeom prst="line">
@@ -14087,7 +14494,7 @@
         </p:nvSpPr>
         <p:spPr>
           <a:xfrm>
-            <a:off x="457200" y="2871216"/>
+            <a:off x="457200" y="2743200"/>
             <a:ext cx="457200" cy="548640"/>
           </a:xfrm>
           <a:prstGeom prst="rect">
@@ -14107,17 +14514,17 @@
               <a:buNone/>
             </a:pPr>
             <a:r>
-              <a:rPr lang="en-US" sz="3200" dirty="0">
+              <a:rPr lang="en-US" sz="2800" dirty="0">
                 <a:solidFill>
                   <a:srgbClr val="E35A00"/>
                 </a:solidFill>
-                <a:latin typeface="Bahnschrift" pitchFamily="34" charset="0"/>
-                <a:ea typeface="Bahnschrift" pitchFamily="34" charset="-122"/>
-                <a:cs typeface="Bahnschrift" pitchFamily="34" charset="-120"/>
+                <a:latin typeface="Segoe UI Semibold" pitchFamily="34" charset="0"/>
+                <a:ea typeface="Segoe UI Semibold" pitchFamily="34" charset="-122"/>
+                <a:cs typeface="Segoe UI Semibold" pitchFamily="34" charset="-120"/>
               </a:rPr>
               <a:t>2</a:t>
             </a:r>
-            <a:endParaRPr lang="en-US" sz="3200" dirty="0"/>
+            <a:endParaRPr lang="en-US" sz="2800" dirty="0"/>
           </a:p>
         </p:txBody>
       </p:sp>
@@ -14129,8 +14536,8 @@
         </p:nvSpPr>
         <p:spPr>
           <a:xfrm>
-            <a:off x="1005840" y="2926080"/>
-            <a:ext cx="5953476" cy="603504"/>
+            <a:off x="1005840" y="2798064"/>
+            <a:ext cx="5953476" cy="530352"/>
           </a:xfrm>
           <a:prstGeom prst="rect">
             <a:avLst/>
@@ -14177,7 +14584,7 @@
                 <a:ea typeface="Segoe UI" pitchFamily="34" charset="-122"/>
                 <a:cs typeface="Segoe UI" pitchFamily="34" charset="-120"/>
               </a:rPr>
-              <a:t>A, tras verificar sus variables; D, con datos del grupo de control.</a:t>
+              <a:t>A, tras verificar variables; D, con datos del piloto.</a:t>
             </a:r>
             <a:endParaRPr lang="en-US" sz="1100" dirty="0"/>
           </a:p>
@@ -14191,7 +14598,7 @@
         </p:nvSpPr>
         <p:spPr>
           <a:xfrm>
-            <a:off x="457200" y="3566160"/>
+            <a:off x="457200" y="3364992"/>
             <a:ext cx="6502116" cy="0"/>
           </a:xfrm>
           <a:prstGeom prst="line">
@@ -14214,7 +14621,7 @@
         </p:nvSpPr>
         <p:spPr>
           <a:xfrm>
-            <a:off x="457200" y="3584448"/>
+            <a:off x="457200" y="3364992"/>
             <a:ext cx="457200" cy="548640"/>
           </a:xfrm>
           <a:prstGeom prst="rect">
@@ -14234,17 +14641,17 @@
               <a:buNone/>
             </a:pPr>
             <a:r>
-              <a:rPr lang="en-US" sz="3200" dirty="0">
+              <a:rPr lang="en-US" sz="2800" dirty="0">
                 <a:solidFill>
                   <a:srgbClr val="E35A00"/>
                 </a:solidFill>
-                <a:latin typeface="Bahnschrift" pitchFamily="34" charset="0"/>
-                <a:ea typeface="Bahnschrift" pitchFamily="34" charset="-122"/>
-                <a:cs typeface="Bahnschrift" pitchFamily="34" charset="-120"/>
+                <a:latin typeface="Segoe UI Semibold" pitchFamily="34" charset="0"/>
+                <a:ea typeface="Segoe UI Semibold" pitchFamily="34" charset="-122"/>
+                <a:cs typeface="Segoe UI Semibold" pitchFamily="34" charset="-120"/>
               </a:rPr>
               <a:t>3</a:t>
             </a:r>
-            <a:endParaRPr lang="en-US" sz="3200" dirty="0"/>
+            <a:endParaRPr lang="en-US" sz="2800" dirty="0"/>
           </a:p>
         </p:txBody>
       </p:sp>
@@ -14256,8 +14663,8 @@
         </p:nvSpPr>
         <p:spPr>
           <a:xfrm>
-            <a:off x="1005840" y="3639312"/>
-            <a:ext cx="5953476" cy="603504"/>
+            <a:off x="1005840" y="3419856"/>
+            <a:ext cx="5953476" cy="530352"/>
           </a:xfrm>
           <a:prstGeom prst="rect">
             <a:avLst/>
@@ -14304,7 +14711,7 @@
                 <a:ea typeface="Segoe UI" pitchFamily="34" charset="-122"/>
                 <a:cs typeface="Segoe UI" pitchFamily="34" charset="-120"/>
               </a:rPr>
-              <a:t>Pesos netos de mora por contacto; cinco límites con umbral y responsable.</a:t>
+              <a:t>KPI neto de mora; cinco límites con responsable.</a:t>
             </a:r>
             <a:endParaRPr lang="en-US" sz="1100" dirty="0"/>
           </a:p>
@@ -14318,8 +14725,8 @@
         </p:nvSpPr>
         <p:spPr>
           <a:xfrm>
-            <a:off x="457200" y="4526280"/>
-            <a:ext cx="6502116" cy="256032"/>
+            <a:off x="457200" y="4078224"/>
+            <a:ext cx="6502116" cy="292608"/>
           </a:xfrm>
           <a:prstGeom prst="rect">
             <a:avLst/>
@@ -14360,8 +14767,8 @@
         </p:nvSpPr>
         <p:spPr>
           <a:xfrm>
-            <a:off x="457200" y="4818888"/>
-            <a:ext cx="6502116" cy="1280160"/>
+            <a:off x="457200" y="4407408"/>
+            <a:ext cx="6502116" cy="1920240"/>
           </a:xfrm>
           <a:prstGeom prst="rect">
             <a:avLst/>
@@ -14419,6 +14826,17 @@
               <a:buChar char="▪"/>
             </a:pPr>
             <a:r>
+              <a:rPr lang="en-US" sz="1100" b="1" dirty="0">
+                <a:solidFill>
+                  <a:srgbClr val="2E2E2E"/>
+                </a:solidFill>
+                <a:latin typeface="Segoe UI" pitchFamily="34" charset="0"/>
+                <a:ea typeface="Segoe UI" pitchFamily="34" charset="-122"/>
+                <a:cs typeface="Segoe UI" pitchFamily="34" charset="-120"/>
+              </a:rPr>
+              <a:t>Auditable: </a:t>
+            </a:r>
+            <a:r>
               <a:rPr lang="en-US" sz="1100" dirty="0">
                 <a:solidFill>
                   <a:srgbClr val="2E2E2E"/>
@@ -14427,7 +14845,42 @@
                 <a:ea typeface="Segoe UI" pitchFamily="34" charset="-122"/>
                 <a:cs typeface="Segoe UI" pitchFamily="34" charset="-120"/>
               </a:rPr>
-              <a:t>Importancia no es causa: solo el grupo de control prueba si llamar cambia el resultado.</a:t>
+              <a:t>ficha del modelo, ficha de la base, verificación de variables, plan de monitoreo y responsables por área.</a:t>
+            </a:r>
+            <a:endParaRPr lang="en-US" sz="1100" dirty="0"/>
+          </a:p>
+          <a:p>
+            <a:pPr marL="152400" indent="-152400">
+              <a:lnSpc>
+                <a:spcPct val="115000"/>
+              </a:lnSpc>
+              <a:spcAft>
+                <a:spcPts val="400"/>
+              </a:spcAft>
+              <a:buSzPct val="100000"/>
+              <a:buChar char="▪"/>
+            </a:pPr>
+            <a:r>
+              <a:rPr lang="en-US" sz="1100" b="1" dirty="0">
+                <a:solidFill>
+                  <a:srgbClr val="2E2E2E"/>
+                </a:solidFill>
+                <a:latin typeface="Segoe UI" pitchFamily="34" charset="0"/>
+                <a:ea typeface="Segoe UI" pitchFamily="34" charset="-122"/>
+                <a:cs typeface="Segoe UI" pitchFamily="34" charset="-120"/>
+              </a:rPr>
+              <a:t>Importancia no es causa: </a:t>
+            </a:r>
+            <a:r>
+              <a:rPr lang="en-US" sz="1100" dirty="0">
+                <a:solidFill>
+                  <a:srgbClr val="2E2E2E"/>
+                </a:solidFill>
+                <a:latin typeface="Segoe UI" pitchFamily="34" charset="0"/>
+                <a:ea typeface="Segoe UI" pitchFamily="34" charset="-122"/>
+                <a:cs typeface="Segoe UI" pitchFamily="34" charset="-120"/>
+              </a:rPr>
+              <a:t>al buró alto se le contactó más (37 % frente a 22 % sin contactar); solo el grupo de control prueba si llamar cambia el resultado.</a:t>
             </a:r>
             <a:endParaRPr lang="en-US" sz="1100" dirty="0"/>
           </a:p>
@@ -14462,7 +14915,7 @@
         <p:spPr>
           <a:xfrm>
             <a:off x="8261787" y="2048256"/>
-            <a:ext cx="3216676" cy="256032"/>
+            <a:ext cx="3216676" cy="292608"/>
           </a:xfrm>
           <a:prstGeom prst="rect">
             <a:avLst/>
@@ -14571,7 +15024,7 @@
                 <a:ea typeface="Segoe UI" pitchFamily="34" charset="-122"/>
                 <a:cs typeface="Segoe UI" pitchFamily="34" charset="-120"/>
               </a:rPr>
-              <a:t>Definir el 12 %, la regla de contacto y el uso del buró.</a:t>
+              <a:t>Definir el 12 %, la regla de contacto y el buró.</a:t>
             </a:r>
             <a:endParaRPr lang="en-US" sz="1100" dirty="0"/>
           </a:p>
@@ -14653,7 +15106,7 @@
                 <a:ea typeface="Segoe UI" pitchFamily="34" charset="-122"/>
                 <a:cs typeface="Segoe UI" pitchFamily="34" charset="-120"/>
               </a:rPr>
-              <a:t>Verificar A y B variable por variable; datos fechados al corte; cuotas.</a:t>
+              <a:t>Verificar A y B; datos fechados al corte; cuotas.</a:t>
             </a:r>
             <a:endParaRPr lang="en-US" sz="1100" dirty="0"/>
           </a:p>
@@ -14735,7 +15188,7 @@
                 <a:ea typeface="Segoe UI" pitchFamily="34" charset="-122"/>
                 <a:cs typeface="Segoe UI" pitchFamily="34" charset="-120"/>
               </a:rPr>
-              <a:t>Piloto con grupo de control y monitoreo semanal.</a:t>
+              <a:t>Piloto y monitoreo semanal.</a:t>
             </a:r>
             <a:endParaRPr lang="en-US" sz="1100" dirty="0"/>
           </a:p>
@@ -14817,7 +15270,7 @@
                 <a:ea typeface="Segoe UI" pitchFamily="34" charset="-122"/>
                 <a:cs typeface="Segoe UI" pitchFamily="34" charset="-120"/>
               </a:rPr>
-              <a:t>Si llamar crea renovaciones, escalar; si no, mantener la herramienta actual.</a:t>
+              <a:t>Escalar si llamar crea renovaciones; si no, mantener la actual.</a:t>
             </a:r>
             <a:endParaRPr lang="en-US" sz="1100" dirty="0"/>
           </a:p>
@@ -14835,8 +15288,8 @@
         </p:nvSpPr>
         <p:spPr>
           <a:xfrm>
-            <a:off x="11274552" y="6473952"/>
-            <a:ext cx="457200" cy="228600"/>
+            <a:off x="11274552" y="6419088"/>
+            <a:ext cx="457200" cy="347472"/>
           </a:xfrm>
           <a:prstGeom prst="rect">
             <a:avLst/>
@@ -14865,7 +15318,7 @@
             <a:pPr algn="r"/>
             <a:fld id="{F7021451-1387-4CA6-816F-3879F97B5CBC}" type="slidenum">
               <a:rPr lang="en-US" b="0"/>
-              <a:t>6</a:t>
+              <a:t>7</a:t>
             </a:fld>
             <a:endParaRPr lang="en-US"/>
           </a:p>
@@ -14879,9 +15332,180 @@
 </p:sld>
 </file>
 
-<file path=ppt/slides/slide7.xml><?xml version="1.0" encoding="utf-8"?>
+<file path=ppt/slides/slide8.xml><?xml version="1.0" encoding="utf-8"?>
 <p:sld xmlns:a="http://schemas.openxmlformats.org/drawingml/2006/main" xmlns:r="http://schemas.openxmlformats.org/officeDocument/2006/relationships" xmlns:p="http://schemas.openxmlformats.org/presentationml/2006/main">
-  <p:cSld name="Slide 7">
+  <p:cSld name="Slide 8">
+    <p:spTree>
+      <p:nvGrpSpPr>
+        <p:cNvPr id="1" name=""/>
+        <p:cNvGrpSpPr/>
+        <p:nvPr/>
+      </p:nvGrpSpPr>
+      <p:grpSpPr>
+        <a:xfrm>
+          <a:off x="0" y="0"/>
+          <a:ext cx="0" cy="0"/>
+          <a:chOff x="0" y="0"/>
+          <a:chExt cx="0" cy="0"/>
+        </a:xfrm>
+      </p:grpSpPr>
+      <p:sp>
+        <p:nvSpPr>
+          <p:cNvPr id="2" name="Shape 0"/>
+          <p:cNvSpPr/>
+          <p:nvPr/>
+        </p:nvSpPr>
+        <p:spPr>
+          <a:xfrm>
+            <a:off x="1412199" y="2011680"/>
+            <a:ext cx="914400" cy="73152"/>
+          </a:xfrm>
+          <a:prstGeom prst="rect">
+            <a:avLst/>
+          </a:prstGeom>
+          <a:solidFill>
+            <a:srgbClr val="FE6A00"/>
+          </a:solidFill>
+          <a:ln/>
+        </p:spPr>
+      </p:sp>
+      <p:sp>
+        <p:nvSpPr>
+          <p:cNvPr id="3" name="Text 1"/>
+          <p:cNvSpPr txBox="1"/>
+          <p:nvPr/>
+        </p:nvSpPr>
+        <p:spPr>
+          <a:xfrm>
+            <a:off x="1412199" y="2240280"/>
+            <a:ext cx="9367114" cy="868680"/>
+          </a:xfrm>
+          <a:prstGeom prst="rect">
+            <a:avLst/>
+          </a:prstGeom>
+          <a:noFill/>
+          <a:ln/>
+        </p:spPr>
+        <p:txBody>
+          <a:bodyPr wrap="square" lIns="0" tIns="0" rIns="0" bIns="0" rtlCol="0" anchor="t"/>
+          <a:lstStyle/>
+          <a:p>
+            <a:pPr marL="0" indent="0">
+              <a:lnSpc>
+                <a:spcPct val="100000"/>
+              </a:lnSpc>
+              <a:buNone/>
+            </a:pPr>
+            <a:r>
+              <a:rPr lang="en-US" sz="4800" dirty="0">
+                <a:solidFill>
+                  <a:srgbClr val="FFFFFF"/>
+                </a:solidFill>
+                <a:latin typeface="Segoe UI Semibold" pitchFamily="34" charset="0"/>
+                <a:ea typeface="Segoe UI Semibold" pitchFamily="34" charset="-122"/>
+                <a:cs typeface="Segoe UI Semibold" pitchFamily="34" charset="-120"/>
+              </a:rPr>
+              <a:t>Gracias</a:t>
+            </a:r>
+            <a:endParaRPr lang="en-US" sz="4800" dirty="0"/>
+          </a:p>
+        </p:txBody>
+      </p:sp>
+      <p:sp>
+        <p:nvSpPr>
+          <p:cNvPr id="4" name="Text 2"/>
+          <p:cNvSpPr txBox="1"/>
+          <p:nvPr/>
+        </p:nvSpPr>
+        <p:spPr>
+          <a:xfrm>
+            <a:off x="1412199" y="3291840"/>
+            <a:ext cx="8412114" cy="868680"/>
+          </a:xfrm>
+          <a:prstGeom prst="rect">
+            <a:avLst/>
+          </a:prstGeom>
+          <a:noFill/>
+          <a:ln/>
+        </p:spPr>
+        <p:txBody>
+          <a:bodyPr wrap="square" lIns="0" tIns="0" rIns="0" bIns="0" rtlCol="0" anchor="t"/>
+          <a:lstStyle/>
+          <a:p>
+            <a:pPr marL="0" indent="0">
+              <a:lnSpc>
+                <a:spcPct val="115000"/>
+              </a:lnSpc>
+              <a:buNone/>
+            </a:pPr>
+            <a:r>
+              <a:rPr lang="en-US" sz="1800" dirty="0">
+                <a:solidFill>
+                  <a:srgbClr val="FFFFFF"/>
+                </a:solidFill>
+                <a:latin typeface="Segoe UI" pitchFamily="34" charset="0"/>
+                <a:ea typeface="Segoe UI" pitchFamily="34" charset="-122"/>
+                <a:cs typeface="Segoe UI" pitchFamily="34" charset="-120"/>
+              </a:rPr>
+              <a:t>Pedimos hoy tres decisiones: aprobar el piloto de B con grupo de control, no liberar C y fijar el KPI y los guardrails con su responsable.</a:t>
+            </a:r>
+            <a:endParaRPr lang="en-US" sz="1800" dirty="0"/>
+          </a:p>
+        </p:txBody>
+      </p:sp>
+      <p:sp>
+        <p:nvSpPr>
+          <p:cNvPr id="5" name="Text 3"/>
+          <p:cNvSpPr txBox="1"/>
+          <p:nvPr/>
+        </p:nvSpPr>
+        <p:spPr>
+          <a:xfrm>
+            <a:off x="1412199" y="4663440"/>
+            <a:ext cx="9367114" cy="365760"/>
+          </a:xfrm>
+          <a:prstGeom prst="rect">
+            <a:avLst/>
+          </a:prstGeom>
+          <a:noFill/>
+          <a:ln/>
+        </p:spPr>
+        <p:txBody>
+          <a:bodyPr wrap="square" lIns="0" tIns="0" rIns="0" bIns="0" rtlCol="0" anchor="t"/>
+          <a:lstStyle/>
+          <a:p>
+            <a:pPr marL="0" indent="0">
+              <a:lnSpc>
+                <a:spcPct val="115000"/>
+              </a:lnSpc>
+              <a:buNone/>
+            </a:pPr>
+            <a:r>
+              <a:rPr lang="en-US" sz="1400" dirty="0">
+                <a:solidFill>
+                  <a:srgbClr val="FFFFFF"/>
+                </a:solidFill>
+                <a:latin typeface="Segoe UI" pitchFamily="34" charset="0"/>
+                <a:ea typeface="Segoe UI" pitchFamily="34" charset="-122"/>
+                <a:cs typeface="Segoe UI" pitchFamily="34" charset="-120"/>
+              </a:rPr>
+              <a:t>Preguntas y discusión. El anexo técnico queda de respaldo.</a:t>
+            </a:r>
+            <a:endParaRPr lang="en-US" sz="1400" dirty="0"/>
+          </a:p>
+        </p:txBody>
+      </p:sp>
+    </p:spTree>
+  </p:cSld>
+  <p:clrMapOvr>
+    <a:masterClrMapping/>
+  </p:clrMapOvr>
+</p:sld>
+</file>
+
+<file path=ppt/slides/slide9.xml><?xml version="1.0" encoding="utf-8"?>
+<p:sld xmlns:a="http://schemas.openxmlformats.org/drawingml/2006/main" xmlns:r="http://schemas.openxmlformats.org/officeDocument/2006/relationships" xmlns:p="http://schemas.openxmlformats.org/presentationml/2006/main">
+  <p:cSld name="Slide 9">
     <p:spTree>
       <p:nvGrpSpPr>
         <p:cNvPr id="1" name=""/>
@@ -14903,13 +15527,13 @@
             <a:spLocks noGrp="1"/>
           </p:cNvSpPr>
           <p:nvPr>
-            <p:ph type="title" idx="102" hasCustomPrompt="1"/>
+            <p:ph type="title" idx="101" hasCustomPrompt="1"/>
           </p:nvPr>
         </p:nvSpPr>
         <p:spPr>
           <a:xfrm>
-            <a:off x="457200" y="347472"/>
-            <a:ext cx="11277295" cy="438912"/>
+            <a:off x="457200" y="310896"/>
+            <a:ext cx="11277295" cy="512064"/>
           </a:xfrm>
           <a:prstGeom prst="rect">
             <a:avLst/>
@@ -14929,11 +15553,11 @@
                 <a:solidFill>
                   <a:srgbClr val="2E2E2E"/>
                 </a:solidFill>
-                <a:latin typeface="Bahnschrift" pitchFamily="34" charset="0"/>
-                <a:ea typeface="Bahnschrift" pitchFamily="34" charset="-122"/>
-                <a:cs typeface="Bahnschrift" pitchFamily="34" charset="-120"/>
+                <a:latin typeface="Segoe UI Semibold" pitchFamily="34" charset="0"/>
+                <a:ea typeface="Segoe UI Semibold" pitchFamily="34" charset="-122"/>
+                <a:cs typeface="Segoe UI Semibold" pitchFamily="34" charset="-120"/>
               </a:rPr>
-              <a:t>Anexo · Soporte técnico: réplica, economía, tamaños de muestra y variables</a:t>
+              <a:t>Anexo · Réplica, economía, tamaños de muestra y variables</a:t>
             </a:r>
             <a:endParaRPr lang="en-US" sz="2400" dirty="0"/>
           </a:p>
@@ -14948,7 +15572,7 @@
         <p:spPr>
           <a:xfrm>
             <a:off x="457200" y="1051560"/>
-            <a:ext cx="6502116" cy="256032"/>
+            <a:ext cx="6502116" cy="292608"/>
           </a:xfrm>
           <a:prstGeom prst="rect">
             <a:avLst/>
@@ -14983,7 +15607,7 @@
       </p:sp>
       <p:graphicFrame>
         <p:nvGraphicFramePr>
-          <p:cNvPr id="8" name="Table 0"/>
+          <p:cNvPr id="10" name="Table 0"/>
           <p:cNvGraphicFramePr>
             <a:graphicFrameLocks noGrp="1"/>
           </p:cNvGraphicFramePr>
@@ -16973,7 +17597,7 @@
                           <a:ea typeface="Segoe UI" pitchFamily="34" charset="-122"/>
                           <a:cs typeface="Segoe UI" pitchFamily="34" charset="-120"/>
                         </a:rPr>
-                        <a:t>LightGBM</a:t>
+                        <a:t>Logística</a:t>
                       </a:r>
                       <a:endParaRPr lang="en-US" sz="950" dirty="0">
                         <a:latin typeface="Segoe UI" charset="0"/>
@@ -17026,7 +17650,7 @@
                           <a:ea typeface="Segoe UI" pitchFamily="34" charset="-122"/>
                           <a:cs typeface="Segoe UI" pitchFamily="34" charset="-120"/>
                         </a:rPr>
-                        <a:t>1,000</a:t>
+                        <a:t>0,997</a:t>
                       </a:r>
                       <a:endParaRPr lang="en-US" sz="950" dirty="0">
                         <a:latin typeface="Segoe UI" charset="0"/>
@@ -17079,7 +17703,7 @@
                           <a:ea typeface="Segoe UI" pitchFamily="34" charset="-122"/>
                           <a:cs typeface="Segoe UI" pitchFamily="34" charset="-120"/>
                         </a:rPr>
-                        <a:t>1,00–1,00</a:t>
+                        <a:t>0,99–1,00</a:t>
                       </a:r>
                       <a:endParaRPr lang="en-US" sz="950" dirty="0">
                         <a:latin typeface="Segoe UI" charset="0"/>
@@ -17132,7 +17756,7 @@
                           <a:ea typeface="Segoe UI" pitchFamily="34" charset="-122"/>
                           <a:cs typeface="Segoe UI" pitchFamily="34" charset="-120"/>
                         </a:rPr>
-                        <a:t>1,00</a:t>
+                        <a:t>0,99</a:t>
                       </a:r>
                       <a:endParaRPr lang="en-US" sz="950" dirty="0">
                         <a:latin typeface="Segoe UI" charset="0"/>
@@ -17185,7 +17809,7 @@
                           <a:ea typeface="Segoe UI" pitchFamily="34" charset="-122"/>
                           <a:cs typeface="Segoe UI" pitchFamily="34" charset="-120"/>
                         </a:rPr>
-                        <a:t>1,00</a:t>
+                        <a:t>1,03</a:t>
                       </a:r>
                       <a:endParaRPr lang="en-US" sz="950" dirty="0">
                         <a:latin typeface="Segoe UI" charset="0"/>
@@ -17238,7 +17862,7 @@
                           <a:ea typeface="Segoe UI" pitchFamily="34" charset="-122"/>
                           <a:cs typeface="Segoe UI" pitchFamily="34" charset="-120"/>
                         </a:rPr>
-                        <a:t>0,000</a:t>
+                        <a:t>0,015</a:t>
                       </a:r>
                       <a:endParaRPr lang="en-US" sz="950" dirty="0">
                         <a:latin typeface="Segoe UI" charset="0"/>
@@ -17335,7 +17959,7 @@
         <p:spPr>
           <a:xfrm>
             <a:off x="7325076" y="1051560"/>
-            <a:ext cx="4409420" cy="256032"/>
+            <a:ext cx="4409420" cy="292608"/>
           </a:xfrm>
           <a:prstGeom prst="rect">
             <a:avLst/>
@@ -17370,7 +17994,7 @@
       </p:sp>
       <p:graphicFrame>
         <p:nvGraphicFramePr>
-          <p:cNvPr id="15" name="Table 1"/>
+          <p:cNvPr id="19" name="Table 1"/>
           <p:cNvGraphicFramePr>
             <a:graphicFrameLocks noGrp="1"/>
           </p:cNvGraphicFramePr>
@@ -19354,7 +19978,7 @@
       </p:graphicFrame>
       <p:sp>
         <p:nvSpPr>
-          <p:cNvPr id="4" name="Text 4"/>
+          <p:cNvPr id="8" name="Text 4"/>
           <p:cNvSpPr txBox="1"/>
           <p:nvPr/>
         </p:nvSpPr>
@@ -19419,14 +20043,14 @@
       </p:sp>
       <p:sp>
         <p:nvSpPr>
-          <p:cNvPr id="10" name="Text 6"/>
+          <p:cNvPr id="4" name="Text 6"/>
           <p:cNvSpPr txBox="1"/>
           <p:nvPr/>
         </p:nvSpPr>
         <p:spPr>
           <a:xfrm>
             <a:off x="457200" y="3858768"/>
-            <a:ext cx="5547116" cy="256032"/>
+            <a:ext cx="5547116" cy="292608"/>
           </a:xfrm>
           <a:prstGeom prst="rect">
             <a:avLst/>
@@ -19461,7 +20085,7 @@
       </p:sp>
       <p:graphicFrame>
         <p:nvGraphicFramePr>
-          <p:cNvPr id="22" name="Table 2"/>
+          <p:cNvPr id="28" name="Table 2"/>
           <p:cNvGraphicFramePr>
             <a:graphicFrameLocks noGrp="1"/>
           </p:cNvGraphicFramePr>
@@ -20703,7 +21327,7 @@
         <p:spPr>
           <a:xfrm>
             <a:off x="6187196" y="3858768"/>
-            <a:ext cx="5547116" cy="256032"/>
+            <a:ext cx="5547116" cy="292608"/>
           </a:xfrm>
           <a:prstGeom prst="rect">
             <a:avLst/>
@@ -20738,7 +21362,7 @@
       </p:sp>
       <p:graphicFrame>
         <p:nvGraphicFramePr>
-          <p:cNvPr id="29" name="Table 3"/>
+          <p:cNvPr id="37" name="Table 3"/>
           <p:cNvGraphicFramePr>
             <a:graphicFrameLocks noGrp="1"/>
           </p:cNvGraphicFramePr>
@@ -21609,8 +22233,8 @@
         </p:nvSpPr>
         <p:spPr>
           <a:xfrm>
-            <a:off x="11274552" y="6473952"/>
-            <a:ext cx="457200" cy="228600"/>
+            <a:off x="11274552" y="6419088"/>
+            <a:ext cx="457200" cy="347472"/>
           </a:xfrm>
           <a:prstGeom prst="rect">
             <a:avLst/>
@@ -21639,7 +22263,7 @@
             <a:pPr algn="r"/>
             <a:fld id="{F7021451-1387-4CA6-816F-3879F97B5CBC}" type="slidenum">
               <a:rPr lang="en-US" b="0"/>
-              <a:t>7</a:t>
+              <a:t>9</a:t>
             </a:fld>
             <a:endParaRPr lang="en-US"/>
           </a:p>
@@ -21696,7 +22320,7 @@
     </a:clrScheme>
     <a:fontScheme name="Banco W documento">
       <a:majorFont>
-        <a:latin typeface="Bahnschrift"/>
+        <a:latin typeface="Segoe UI Semibold"/>
         <a:ea typeface=""/>
         <a:cs typeface=""/>
         <a:font script="Jpan" typeface="游ゴシック Light"/>
